--- a/_presentations/Y9_Python/L2_Selection.pptx
+++ b/_presentations/Y9_Python/L2_Selection.pptx
@@ -129,19 +129,19 @@
   <p:extLst>
     <p:ext uri="{521415D9-36F7-43E2-AB2F-B90AF26B5E84}">
       <p14:sectionLst xmlns:p14="http://schemas.microsoft.com/office/powerpoint/2010/main">
-        <p14:section name="Recap &amp; Recall" id="{470f44fb-7690-27ef-bd02-b5a611f6702f}">
+        <p14:section name="Recap &amp; Recall" id="{6b73a9b8-8c8d-34b3-fdd9-f0bef6f4b340}">
           <p14:sldIdLst>
             <p14:sldId id="256"/>
             <p14:sldId id="257"/>
           </p14:sldIdLst>
         </p14:section>
-        <p14:section name="Title" id="{d7c35103-685a-ea54-fbea-b628eb4c937e}">
+        <p14:section name="Title" id="{db7f0676-109a-7d75-48f6-1384a114cfed}">
           <p14:sldIdLst>
             <p14:sldId id="258"/>
             <p14:sldId id="259"/>
           </p14:sldIdLst>
         </p14:section>
-        <p14:section name="Conditions" id="{3881e176-4ba2-9c90-17a5-ea77f219ff96}">
+        <p14:section name="Conditions" id="{82623005-8d9a-db44-8d67-4d538bdbc542}">
           <p14:sldIdLst>
             <p14:sldId id="260"/>
             <p14:sldId id="261"/>
@@ -150,7 +150,7 @@
             <p14:sldId id="264"/>
           </p14:sldIdLst>
         </p14:section>
-        <p14:section name="Round 1 — numbers" id="{99ac1b39-9823-d392-d133-670a028516b1}">
+        <p14:section name="Round 1 — numbers" id="{0e91583e-7158-72ea-0cea-1e99c6ab6b2e}">
           <p14:sldIdLst>
             <p14:sldId id="265"/>
             <p14:sldId id="266"/>
@@ -158,7 +158,7 @@
             <p14:sldId id="268"/>
           </p14:sldIdLst>
         </p14:section>
-        <p14:section name="Round 2 — a variable" id="{4ca17572-89ee-0bd6-0fff-1d8aea18efda}">
+        <p14:section name="Round 2 — a variable" id="{26454c6e-fe77-5b92-46f3-1cdcc26e51ba}">
           <p14:sldIdLst>
             <p14:sldId id="269"/>
             <p14:sldId id="270"/>
@@ -167,19 +167,19 @@
             <p14:sldId id="273"/>
           </p14:sldIdLst>
         </p14:section>
-        <p14:section name="elif" id="{6826ad9b-ac87-60d8-c521-e01298055002}">
+        <p14:section name="elif" id="{333cf8bc-68b3-28a8-b0ba-0b657768ffc9}">
           <p14:sldIdLst>
             <p14:sldId id="274"/>
             <p14:sldId id="275"/>
           </p14:sldIdLst>
         </p14:section>
-        <p14:section name="Proximity" id="{6fdeae83-9ab0-ed9c-81c8-af5f25378c49}">
+        <p14:section name="Proximity" id="{a003df36-eabf-e0f7-36ae-f4c906b3c851}">
           <p14:sldIdLst>
             <p14:sldId id="276"/>
             <p14:sldId id="277"/>
           </p14:sldIdLst>
         </p14:section>
-        <p14:section name="Plenary" id="{0c8cd85a-3d35-88b8-f9cf-2c64b1a53e29}">
+        <p14:section name="Plenary" id="{7b3ff6fa-a23e-6b29-1456-52605dfa0ab8}">
           <p14:sldIdLst>
             <p14:sldId id="278"/>
           </p14:sldIdLst>
@@ -681,8 +681,8 @@
               <a:rPr lang="en-US" dirty="0"/>
               <a:t>I DO — model it out loud, students just watch. Same three questions every time (the strip at the bottom).
 Click 1 — True or False? "Is 30 more than or equal to 50? No. False."
-Click 2 — Which lines run? "False, so skip the if block and run the else block. Line 5 isn't indented, so it isn't in either block: it runs every time."
-Click 3 — What is printed? Too close, then Scan complete.
+Click 2 — Which lines run? "False, so skip the if block and run the else block."
+Click 3 — What is printed? Too close — and only Too close.
 Say the steps every time: "condition, block, print".</a:t>
             </a:r>
             <a:endParaRPr lang="en-US" dirty="0"/>
@@ -773,8 +773,8 @@
               <a:rPr lang="en-US" dirty="0"/>
               <a:t>WE DO — students answer each step on boards BEFORE you click.
 Step 1: "True or False?" Boards up → click. (== asks "are they equal?" 7 equals 7: True.)
-Step 2: "Which lines run?" Cold-call someone to say the line numbers → click. Line 5 runs every time.
-Step 3: "What is printed?" Boards up → click. Door open, then Done.
+Step 2: "Which lines run?" Cold-call someone to say the line numbers → click.
+Step 3: "What is printed?" Boards up → click. Door open.
 Look for anyone writing Door open AND Door locked: exactly one block runs.</a:t>
             </a:r>
             <a:endParaRPr lang="en-US" dirty="0"/>
@@ -954,8 +954,9 @@
             <a:r>
               <a:rPr lang="en-US" dirty="0"/>
               <a:t>Check boards. Most common mistakes:
-2: "Alarm" — 20 is not MORE than 20, so it's False. And forgetting "Scan done", which runs every time.
-3: "Wait" — &gt;= lets 4 equal 4, so it's True. And forgetting "End".
+2: "Alarm" — 20 is not MORE than 20, so it's False.
+3: "Wait" — &gt;= lets 4 equal 4, so it's True.
+Anyone who wrote both messages for a program: exactly one block runs.
 If most of the class got 2 or 3 wrong, do one more together before Round 2.</a:t>
             </a:r>
             <a:endParaRPr lang="en-US" dirty="0"/>
@@ -1135,12 +1136,12 @@
           <a:p>
             <a:r>
               <a:rPr lang="en-US" dirty="0"/>
-              <a:t>I DO — the same program as Round 1's I do, but the number is now in a variable. One new step: look in the box.
+              <a:t>I DO — Round 1's I do program with two changes: the number is now in a variable (one new step: look in the box), and a last line that isn't indented.
 Click 1 — Look in the box: line 1 stores 30 in distance.
 Click 2 — True or False? "Swap distance for what's in the box: 30 &gt;= 50. False."
-Click 3 — Which lines run? The else block, and line 6 every time.
-Click 4 — What is printed? Same as before: Too close, Scan complete.
-Point out: the output didn't change — a variable is just a name for the value in the box.</a:t>
+Click 3 — Which lines run? "The else block. Line 6 isn't indented, so it isn't inside the if or the else: it runs every time, after them."
+Click 4 — What is printed? Too close, then Scan complete.
+Point out: Too close is the same as Round 1 — a variable is just a name for the value in the box. Scan complete is new, and it would print whatever distance was.</a:t>
             </a:r>
             <a:endParaRPr lang="en-US" dirty="0"/>
           </a:p>
@@ -5725,7 +5726,7 @@
       </p:pic>
       <p:sp>
         <p:nvSpPr>
-          <p:cNvPr id="25" name="Slide Number Placeholder 0"/>
+          <p:cNvPr id="54" name="Slide Number Placeholder 0"/>
           <p:cNvSpPr>
             <a:spLocks noGrp="1"/>
           </p:cNvSpPr>
@@ -5923,11 +5924,11 @@
         <p:spPr>
           <a:xfrm>
             <a:off x="548640" y="1554480"/>
-            <a:ext cx="4846320" cy="3236976"/>
+            <a:ext cx="4846320" cy="3328416"/>
           </a:xfrm>
           <a:prstGeom prst="roundRect">
             <a:avLst>
-              <a:gd name="adj" fmla="val 2260"/>
+              <a:gd name="adj" fmla="val 2198"/>
             </a:avLst>
           </a:prstGeom>
           <a:solidFill>
@@ -5950,7 +5951,7 @@
         <p:spPr>
           <a:xfrm>
             <a:off x="658368" y="1755648"/>
-            <a:ext cx="274320" cy="566928"/>
+            <a:ext cx="274320" cy="731520"/>
           </a:xfrm>
           <a:prstGeom prst="rect">
             <a:avLst/>
@@ -5989,7 +5990,7 @@
         <p:spPr>
           <a:xfrm>
             <a:off x="1188720" y="1755648"/>
-            <a:ext cx="4114800" cy="566928"/>
+            <a:ext cx="4114800" cy="731520"/>
           </a:xfrm>
           <a:prstGeom prst="rect">
             <a:avLst/>
@@ -6125,8 +6126,8 @@
         </p:nvSpPr>
         <p:spPr>
           <a:xfrm>
-            <a:off x="658368" y="2322576"/>
-            <a:ext cx="274320" cy="566928"/>
+            <a:off x="658368" y="2487168"/>
+            <a:ext cx="274320" cy="731520"/>
           </a:xfrm>
           <a:prstGeom prst="rect">
             <a:avLst/>
@@ -6164,8 +6165,8 @@
         </p:nvSpPr>
         <p:spPr>
           <a:xfrm>
-            <a:off x="1188720" y="2322576"/>
-            <a:ext cx="4114800" cy="566928"/>
+            <a:off x="1188720" y="2487168"/>
+            <a:ext cx="4114800" cy="731520"/>
           </a:xfrm>
           <a:prstGeom prst="rect">
             <a:avLst/>
@@ -6259,8 +6260,8 @@
         </p:nvSpPr>
         <p:spPr>
           <a:xfrm>
-            <a:off x="658368" y="2889504"/>
-            <a:ext cx="274320" cy="566928"/>
+            <a:off x="658368" y="3218688"/>
+            <a:ext cx="274320" cy="731520"/>
           </a:xfrm>
           <a:prstGeom prst="rect">
             <a:avLst/>
@@ -6298,8 +6299,8 @@
         </p:nvSpPr>
         <p:spPr>
           <a:xfrm>
-            <a:off x="1188720" y="2889504"/>
-            <a:ext cx="4114800" cy="566928"/>
+            <a:off x="1188720" y="3218688"/>
+            <a:ext cx="4114800" cy="731520"/>
           </a:xfrm>
           <a:prstGeom prst="rect">
             <a:avLst/>
@@ -6351,8 +6352,8 @@
         </p:nvSpPr>
         <p:spPr>
           <a:xfrm>
-            <a:off x="658368" y="3456432"/>
-            <a:ext cx="274320" cy="566928"/>
+            <a:off x="658368" y="3950208"/>
+            <a:ext cx="274320" cy="731520"/>
           </a:xfrm>
           <a:prstGeom prst="rect">
             <a:avLst/>
@@ -6390,8 +6391,8 @@
         </p:nvSpPr>
         <p:spPr>
           <a:xfrm>
-            <a:off x="1188720" y="3456432"/>
-            <a:ext cx="4114800" cy="566928"/>
+            <a:off x="1188720" y="3950208"/>
+            <a:ext cx="4114800" cy="731520"/>
           </a:xfrm>
           <a:prstGeom prst="rect">
             <a:avLst/>
@@ -6479,133 +6480,13 @@
       </p:sp>
       <p:sp>
         <p:nvSpPr>
-          <p:cNvPr id="14" name="Text 11"/>
-          <p:cNvSpPr txBox="1"/>
-          <p:nvPr/>
-        </p:nvSpPr>
-        <p:spPr>
-          <a:xfrm>
-            <a:off x="658368" y="4023360"/>
-            <a:ext cx="274320" cy="566928"/>
-          </a:xfrm>
-          <a:prstGeom prst="rect">
-            <a:avLst/>
-          </a:prstGeom>
-          <a:noFill/>
-          <a:ln/>
-        </p:spPr>
-        <p:txBody>
-          <a:bodyPr wrap="square" lIns="0" tIns="0" rIns="0" bIns="0" rtlCol="0" anchor="ctr"/>
-          <a:lstStyle/>
-          <a:p>
-            <a:pPr algn="r" indent="0" marL="0">
-              <a:buNone/>
-            </a:pPr>
-            <a:r>
-              <a:rPr lang="en-US" sz="2000" dirty="0">
-                <a:solidFill>
-                  <a:srgbClr val="6E6E7A"/>
-                </a:solidFill>
-                <a:latin typeface="Consolas" pitchFamily="34" charset="0"/>
-                <a:ea typeface="Consolas" pitchFamily="34" charset="-122"/>
-                <a:cs typeface="Consolas" pitchFamily="34" charset="-120"/>
-              </a:rPr>
-              <a:t>5</a:t>
-            </a:r>
-            <a:endParaRPr lang="en-US" sz="2000" dirty="0"/>
-          </a:p>
-        </p:txBody>
-      </p:sp>
-      <p:sp>
-        <p:nvSpPr>
-          <p:cNvPr id="15" name="Text 12"/>
-          <p:cNvSpPr txBox="1"/>
-          <p:nvPr/>
-        </p:nvSpPr>
-        <p:spPr>
-          <a:xfrm>
-            <a:off x="1188720" y="4023360"/>
-            <a:ext cx="4114800" cy="566928"/>
-          </a:xfrm>
-          <a:prstGeom prst="rect">
-            <a:avLst/>
-          </a:prstGeom>
-          <a:noFill/>
-          <a:ln/>
-        </p:spPr>
-        <p:txBody>
-          <a:bodyPr wrap="square" lIns="0" tIns="0" rIns="0" bIns="0" rtlCol="0" anchor="ctr"/>
-          <a:lstStyle/>
-          <a:p>
-            <a:pPr indent="0" marL="0">
-              <a:buNone/>
-            </a:pPr>
-            <a:r>
-              <a:rPr lang="en-US" sz="2400" dirty="0">
-                <a:solidFill>
-                  <a:srgbClr val="E8C878"/>
-                </a:solidFill>
-                <a:latin typeface="Consolas" pitchFamily="34" charset="0"/>
-                <a:ea typeface="Consolas" pitchFamily="34" charset="-122"/>
-                <a:cs typeface="Consolas" pitchFamily="34" charset="-120"/>
-              </a:rPr>
-              <a:t>print</a:t>
-            </a:r>
-            <a:pPr indent="0" marL="0">
-              <a:buNone/>
-            </a:pPr>
-            <a:r>
-              <a:rPr lang="en-US" sz="2400" dirty="0">
-                <a:solidFill>
-                  <a:srgbClr val="A9A9B4"/>
-                </a:solidFill>
-                <a:latin typeface="Consolas" pitchFamily="34" charset="0"/>
-                <a:ea typeface="Consolas" pitchFamily="34" charset="-122"/>
-                <a:cs typeface="Consolas" pitchFamily="34" charset="-120"/>
-              </a:rPr>
-              <a:t>(</a:t>
-            </a:r>
-            <a:pPr indent="0" marL="0">
-              <a:buNone/>
-            </a:pPr>
-            <a:r>
-              <a:rPr lang="en-US" sz="2400" dirty="0">
-                <a:solidFill>
-                  <a:srgbClr val="E69F00"/>
-                </a:solidFill>
-                <a:latin typeface="Consolas" pitchFamily="34" charset="0"/>
-                <a:ea typeface="Consolas" pitchFamily="34" charset="-122"/>
-                <a:cs typeface="Consolas" pitchFamily="34" charset="-120"/>
-              </a:rPr>
-              <a:t>"Scan complete"</a:t>
-            </a:r>
-            <a:pPr indent="0" marL="0">
-              <a:buNone/>
-            </a:pPr>
-            <a:r>
-              <a:rPr lang="en-US" sz="2400" dirty="0">
-                <a:solidFill>
-                  <a:srgbClr val="A9A9B4"/>
-                </a:solidFill>
-                <a:latin typeface="Consolas" pitchFamily="34" charset="0"/>
-                <a:ea typeface="Consolas" pitchFamily="34" charset="-122"/>
-                <a:cs typeface="Consolas" pitchFamily="34" charset="-120"/>
-              </a:rPr>
-              <a:t>)</a:t>
-            </a:r>
-            <a:endParaRPr lang="en-US" sz="2400" dirty="0"/>
-          </a:p>
-        </p:txBody>
-      </p:sp>
-      <p:sp>
-        <p:nvSpPr>
-          <p:cNvPr id="16" name="click1"/>
+          <p:cNvPr id="14" name="click1"/>
           <p:cNvSpPr/>
           <p:nvPr/>
         </p:nvSpPr>
         <p:spPr>
           <a:xfrm>
-            <a:off x="5623560" y="1874520"/>
+            <a:off x="5623560" y="1956816"/>
             <a:ext cx="329184" cy="329184"/>
           </a:xfrm>
           <a:prstGeom prst="ellipse">
@@ -6619,13 +6500,13 @@
       </p:sp>
       <p:sp>
         <p:nvSpPr>
-          <p:cNvPr id="17" name="click1"/>
-          <p:cNvSpPr txBox="1"/>
-          <p:nvPr/>
-        </p:nvSpPr>
-        <p:spPr>
-          <a:xfrm>
-            <a:off x="5623560" y="1874520"/>
+          <p:cNvPr id="15" name="click1"/>
+          <p:cNvSpPr txBox="1"/>
+          <p:nvPr/>
+        </p:nvSpPr>
+        <p:spPr>
+          <a:xfrm>
+            <a:off x="5623560" y="1956816"/>
             <a:ext cx="329184" cy="329184"/>
           </a:xfrm>
           <a:prstGeom prst="rect">
@@ -6658,14 +6539,14 @@
       </p:sp>
       <p:sp>
         <p:nvSpPr>
-          <p:cNvPr id="18" name="click1"/>
+          <p:cNvPr id="16" name="click1"/>
           <p:cNvSpPr txBox="1"/>
           <p:nvPr/>
         </p:nvSpPr>
         <p:spPr>
           <a:xfrm>
             <a:off x="6053328" y="1755648"/>
-            <a:ext cx="1417320" cy="566928"/>
+            <a:ext cx="1417320" cy="731520"/>
           </a:xfrm>
           <a:prstGeom prst="rect">
             <a:avLst/>
@@ -6753,13 +6634,13 @@
       </p:sp>
       <p:sp>
         <p:nvSpPr>
-          <p:cNvPr id="19" name="click1"/>
+          <p:cNvPr id="17" name="click1"/>
           <p:cNvSpPr/>
           <p:nvPr/>
         </p:nvSpPr>
         <p:spPr>
           <a:xfrm>
-            <a:off x="7516368" y="2039112"/>
+            <a:off x="7516368" y="2121408"/>
             <a:ext cx="365760" cy="0"/>
           </a:xfrm>
           <a:prstGeom prst="line">
@@ -6777,18 +6658,18 @@
       </p:sp>
       <p:sp>
         <p:nvSpPr>
-          <p:cNvPr id="20" name="click1"/>
+          <p:cNvPr id="18" name="click1"/>
           <p:cNvSpPr/>
           <p:nvPr/>
         </p:nvSpPr>
         <p:spPr>
           <a:xfrm>
             <a:off x="7973568" y="1819656"/>
-            <a:ext cx="868680" cy="438912"/>
+            <a:ext cx="868680" cy="603504"/>
           </a:xfrm>
           <a:prstGeom prst="roundRect">
             <a:avLst>
-              <a:gd name="adj" fmla="val 16667"/>
+              <a:gd name="adj" fmla="val 12121"/>
             </a:avLst>
           </a:prstGeom>
           <a:solidFill>
@@ -6804,14 +6685,14 @@
       </p:sp>
       <p:sp>
         <p:nvSpPr>
-          <p:cNvPr id="21" name="click1"/>
+          <p:cNvPr id="19" name="click1"/>
           <p:cNvSpPr txBox="1"/>
           <p:nvPr/>
         </p:nvSpPr>
         <p:spPr>
           <a:xfrm>
             <a:off x="7973568" y="1819656"/>
-            <a:ext cx="868680" cy="438912"/>
+            <a:ext cx="868680" cy="603504"/>
           </a:xfrm>
           <a:prstGeom prst="rect">
             <a:avLst/>
@@ -6843,13 +6724,13 @@
       </p:sp>
       <p:sp>
         <p:nvSpPr>
-          <p:cNvPr id="22" name="click2"/>
+          <p:cNvPr id="20" name="click2"/>
           <p:cNvSpPr/>
           <p:nvPr/>
         </p:nvSpPr>
         <p:spPr>
           <a:xfrm>
-            <a:off x="5623560" y="2441448"/>
+            <a:off x="5623560" y="2688336"/>
             <a:ext cx="329184" cy="329184"/>
           </a:xfrm>
           <a:prstGeom prst="ellipse">
@@ -6863,13 +6744,13 @@
       </p:sp>
       <p:sp>
         <p:nvSpPr>
-          <p:cNvPr id="23" name="click2"/>
-          <p:cNvSpPr txBox="1"/>
-          <p:nvPr/>
-        </p:nvSpPr>
-        <p:spPr>
-          <a:xfrm>
-            <a:off x="5623560" y="2441448"/>
+          <p:cNvPr id="21" name="click2"/>
+          <p:cNvSpPr txBox="1"/>
+          <p:nvPr/>
+        </p:nvSpPr>
+        <p:spPr>
+          <a:xfrm>
+            <a:off x="5623560" y="2688336"/>
             <a:ext cx="329184" cy="329184"/>
           </a:xfrm>
           <a:prstGeom prst="rect">
@@ -6902,14 +6783,14 @@
       </p:sp>
       <p:sp>
         <p:nvSpPr>
-          <p:cNvPr id="24" name="click2"/>
-          <p:cNvSpPr txBox="1"/>
-          <p:nvPr/>
-        </p:nvSpPr>
-        <p:spPr>
-          <a:xfrm>
-            <a:off x="6053328" y="3456432"/>
-            <a:ext cx="2651760" cy="566928"/>
+          <p:cNvPr id="22" name="click2"/>
+          <p:cNvSpPr txBox="1"/>
+          <p:nvPr/>
+        </p:nvSpPr>
+        <p:spPr>
+          <a:xfrm>
+            <a:off x="6053328" y="3950208"/>
+            <a:ext cx="2651760" cy="731520"/>
           </a:xfrm>
           <a:prstGeom prst="rect">
             <a:avLst/>
@@ -6941,14 +6822,14 @@
       </p:sp>
       <p:sp>
         <p:nvSpPr>
-          <p:cNvPr id="25" name="click2"/>
-          <p:cNvSpPr txBox="1"/>
-          <p:nvPr/>
-        </p:nvSpPr>
-        <p:spPr>
-          <a:xfrm>
-            <a:off x="6053328" y="2322576"/>
-            <a:ext cx="2651760" cy="566928"/>
+          <p:cNvPr id="23" name="click2"/>
+          <p:cNvSpPr txBox="1"/>
+          <p:nvPr/>
+        </p:nvSpPr>
+        <p:spPr>
+          <a:xfrm>
+            <a:off x="6053328" y="2487168"/>
+            <a:ext cx="2651760" cy="731520"/>
           </a:xfrm>
           <a:prstGeom prst="rect">
             <a:avLst/>
@@ -6980,155 +6861,116 @@
       </p:sp>
       <p:sp>
         <p:nvSpPr>
-          <p:cNvPr id="26" name="click2"/>
-          <p:cNvSpPr txBox="1"/>
-          <p:nvPr/>
-        </p:nvSpPr>
-        <p:spPr>
-          <a:xfrm>
-            <a:off x="6053328" y="4023360"/>
-            <a:ext cx="2651760" cy="566928"/>
-          </a:xfrm>
-          <a:prstGeom prst="rect">
-            <a:avLst/>
-          </a:prstGeom>
-          <a:noFill/>
-          <a:ln/>
-        </p:spPr>
-        <p:txBody>
-          <a:bodyPr wrap="square" lIns="0" tIns="0" rIns="0" bIns="0" rtlCol="0" anchor="ctr"/>
-          <a:lstStyle/>
-          <a:p>
-            <a:pPr indent="0" marL="0">
-              <a:buNone/>
-            </a:pPr>
-            <a:r>
-              <a:rPr lang="en-US" sz="2000" b="1" dirty="0">
-                <a:solidFill>
-                  <a:srgbClr val="D8A73D"/>
+          <p:cNvPr id="24" name="click3"/>
+          <p:cNvSpPr/>
+          <p:nvPr/>
+        </p:nvSpPr>
+        <p:spPr>
+          <a:xfrm>
+            <a:off x="9098280" y="1554480"/>
+            <a:ext cx="329184" cy="329184"/>
+          </a:xfrm>
+          <a:prstGeom prst="ellipse">
+            <a:avLst/>
+          </a:prstGeom>
+          <a:solidFill>
+            <a:srgbClr val="D8A73D"/>
+          </a:solidFill>
+          <a:ln/>
+        </p:spPr>
+      </p:sp>
+      <p:sp>
+        <p:nvSpPr>
+          <p:cNvPr id="25" name="click3"/>
+          <p:cNvSpPr txBox="1"/>
+          <p:nvPr/>
+        </p:nvSpPr>
+        <p:spPr>
+          <a:xfrm>
+            <a:off x="9098280" y="1554480"/>
+            <a:ext cx="329184" cy="329184"/>
+          </a:xfrm>
+          <a:prstGeom prst="rect">
+            <a:avLst/>
+          </a:prstGeom>
+          <a:noFill/>
+          <a:ln/>
+        </p:spPr>
+        <p:txBody>
+          <a:bodyPr wrap="square" lIns="0" tIns="0" rIns="0" bIns="0" rtlCol="0" anchor="ctr"/>
+          <a:lstStyle/>
+          <a:p>
+            <a:pPr algn="ctr" indent="0" marL="0">
+              <a:buNone/>
+            </a:pPr>
+            <a:r>
+              <a:rPr lang="en-US" sz="1600" b="1" dirty="0">
+                <a:solidFill>
+                  <a:srgbClr val="1E1E24"/>
+                </a:solidFill>
+                <a:latin typeface="Cambria" pitchFamily="34" charset="0"/>
+                <a:ea typeface="Cambria" pitchFamily="34" charset="-122"/>
+                <a:cs typeface="Cambria" pitchFamily="34" charset="-120"/>
+              </a:rPr>
+              <a:t>3</a:t>
+            </a:r>
+            <a:endParaRPr lang="en-US" sz="1600" dirty="0"/>
+          </a:p>
+        </p:txBody>
+      </p:sp>
+      <p:sp>
+        <p:nvSpPr>
+          <p:cNvPr id="26" name="click3"/>
+          <p:cNvSpPr txBox="1"/>
+          <p:nvPr/>
+        </p:nvSpPr>
+        <p:spPr>
+          <a:xfrm>
+            <a:off x="9555480" y="1554480"/>
+            <a:ext cx="2084832" cy="329184"/>
+          </a:xfrm>
+          <a:prstGeom prst="rect">
+            <a:avLst/>
+          </a:prstGeom>
+          <a:noFill/>
+          <a:ln/>
+        </p:spPr>
+        <p:txBody>
+          <a:bodyPr wrap="square" lIns="0" tIns="0" rIns="0" bIns="0" rtlCol="0" anchor="ctr"/>
+          <a:lstStyle/>
+          <a:p>
+            <a:pPr indent="0" marL="0">
+              <a:buNone/>
+            </a:pPr>
+            <a:r>
+              <a:rPr lang="en-US" sz="1300" b="1" spc="200" kern="0" dirty="0">
+                <a:solidFill>
+                  <a:srgbClr val="6E6E7A"/>
                 </a:solidFill>
                 <a:latin typeface="Calibri" pitchFamily="34" charset="0"/>
                 <a:ea typeface="Calibri" pitchFamily="34" charset="-122"/>
                 <a:cs typeface="Calibri" pitchFamily="34" charset="-120"/>
               </a:rPr>
-              <a:t>✓ runs every time</a:t>
-            </a:r>
-            <a:endParaRPr lang="en-US" sz="2000" dirty="0"/>
-          </a:p>
-        </p:txBody>
-      </p:sp>
-      <p:sp>
-        <p:nvSpPr>
-          <p:cNvPr id="27" name="click3"/>
+              <a:t>WHAT IS PRINTED</a:t>
+            </a:r>
+            <a:endParaRPr lang="en-US" sz="1300" dirty="0"/>
+          </a:p>
+        </p:txBody>
+      </p:sp>
+      <p:sp>
+        <p:nvSpPr>
+          <p:cNvPr id="27" name="click3 · terminal"/>
           <p:cNvSpPr/>
           <p:nvPr/>
         </p:nvSpPr>
         <p:spPr>
           <a:xfrm>
-            <a:off x="9098280" y="1554480"/>
-            <a:ext cx="329184" cy="329184"/>
-          </a:xfrm>
-          <a:prstGeom prst="ellipse">
-            <a:avLst/>
-          </a:prstGeom>
-          <a:solidFill>
-            <a:srgbClr val="D8A73D"/>
-          </a:solidFill>
-          <a:ln/>
-        </p:spPr>
-      </p:sp>
-      <p:sp>
-        <p:nvSpPr>
-          <p:cNvPr id="28" name="click3"/>
-          <p:cNvSpPr txBox="1"/>
-          <p:nvPr/>
-        </p:nvSpPr>
-        <p:spPr>
-          <a:xfrm>
-            <a:off x="9098280" y="1554480"/>
-            <a:ext cx="329184" cy="329184"/>
-          </a:xfrm>
-          <a:prstGeom prst="rect">
-            <a:avLst/>
-          </a:prstGeom>
-          <a:noFill/>
-          <a:ln/>
-        </p:spPr>
-        <p:txBody>
-          <a:bodyPr wrap="square" lIns="0" tIns="0" rIns="0" bIns="0" rtlCol="0" anchor="ctr"/>
-          <a:lstStyle/>
-          <a:p>
-            <a:pPr algn="ctr" indent="0" marL="0">
-              <a:buNone/>
-            </a:pPr>
-            <a:r>
-              <a:rPr lang="en-US" sz="1600" b="1" dirty="0">
-                <a:solidFill>
-                  <a:srgbClr val="1E1E24"/>
-                </a:solidFill>
-                <a:latin typeface="Cambria" pitchFamily="34" charset="0"/>
-                <a:ea typeface="Cambria" pitchFamily="34" charset="-122"/>
-                <a:cs typeface="Cambria" pitchFamily="34" charset="-120"/>
-              </a:rPr>
-              <a:t>3</a:t>
-            </a:r>
-            <a:endParaRPr lang="en-US" sz="1600" dirty="0"/>
-          </a:p>
-        </p:txBody>
-      </p:sp>
-      <p:sp>
-        <p:nvSpPr>
-          <p:cNvPr id="29" name="click3"/>
-          <p:cNvSpPr txBox="1"/>
-          <p:nvPr/>
-        </p:nvSpPr>
-        <p:spPr>
-          <a:xfrm>
-            <a:off x="9555480" y="1554480"/>
-            <a:ext cx="2084832" cy="329184"/>
-          </a:xfrm>
-          <a:prstGeom prst="rect">
-            <a:avLst/>
-          </a:prstGeom>
-          <a:noFill/>
-          <a:ln/>
-        </p:spPr>
-        <p:txBody>
-          <a:bodyPr wrap="square" lIns="0" tIns="0" rIns="0" bIns="0" rtlCol="0" anchor="ctr"/>
-          <a:lstStyle/>
-          <a:p>
-            <a:pPr indent="0" marL="0">
-              <a:buNone/>
-            </a:pPr>
-            <a:r>
-              <a:rPr lang="en-US" sz="1300" b="1" spc="200" kern="0" dirty="0">
-                <a:solidFill>
-                  <a:srgbClr val="6E6E7A"/>
-                </a:solidFill>
-                <a:latin typeface="Calibri" pitchFamily="34" charset="0"/>
-                <a:ea typeface="Calibri" pitchFamily="34" charset="-122"/>
-                <a:cs typeface="Calibri" pitchFamily="34" charset="-120"/>
-              </a:rPr>
-              <a:t>WHAT IS PRINTED</a:t>
-            </a:r>
-            <a:endParaRPr lang="en-US" sz="1300" dirty="0"/>
-          </a:p>
-        </p:txBody>
-      </p:sp>
-      <p:sp>
-        <p:nvSpPr>
-          <p:cNvPr id="30" name="click3 · terminal"/>
-          <p:cNvSpPr/>
-          <p:nvPr/>
-        </p:nvSpPr>
-        <p:spPr>
-          <a:xfrm>
             <a:off x="9098280" y="2011680"/>
-            <a:ext cx="2542032" cy="1270000"/>
+            <a:ext cx="2542032" cy="863600"/>
           </a:xfrm>
           <a:prstGeom prst="roundRect">
             <a:avLst>
-              <a:gd name="adj" fmla="val 5760"/>
+              <a:gd name="adj" fmla="val 8471"/>
             </a:avLst>
           </a:prstGeom>
           <a:solidFill>
@@ -7144,7 +6986,7 @@
       </p:sp>
       <p:sp>
         <p:nvSpPr>
-          <p:cNvPr id="31" name="click3"/>
+          <p:cNvPr id="28" name="click3"/>
           <p:cNvSpPr txBox="1"/>
           <p:nvPr/>
         </p:nvSpPr>
@@ -7183,46 +7025,7 @@
       </p:sp>
       <p:sp>
         <p:nvSpPr>
-          <p:cNvPr id="32" name="click3"/>
-          <p:cNvSpPr txBox="1"/>
-          <p:nvPr/>
-        </p:nvSpPr>
-        <p:spPr>
-          <a:xfrm>
-            <a:off x="9326880" y="2646680"/>
-            <a:ext cx="2084832" cy="406400"/>
-          </a:xfrm>
-          <a:prstGeom prst="rect">
-            <a:avLst/>
-          </a:prstGeom>
-          <a:noFill/>
-          <a:ln/>
-        </p:spPr>
-        <p:txBody>
-          <a:bodyPr wrap="square" lIns="0" tIns="0" rIns="0" bIns="0" rtlCol="0" anchor="ctr"/>
-          <a:lstStyle/>
-          <a:p>
-            <a:pPr indent="0" marL="0">
-              <a:buNone/>
-            </a:pPr>
-            <a:r>
-              <a:rPr lang="en-US" sz="2000" dirty="0">
-                <a:solidFill>
-                  <a:srgbClr val="F5F5F3"/>
-                </a:solidFill>
-                <a:latin typeface="Consolas" pitchFamily="34" charset="0"/>
-                <a:ea typeface="Consolas" pitchFamily="34" charset="-122"/>
-                <a:cs typeface="Consolas" pitchFamily="34" charset="-120"/>
-              </a:rPr>
-              <a:t>Scan complete</a:t>
-            </a:r>
-            <a:endParaRPr lang="en-US" sz="2000" dirty="0"/>
-          </a:p>
-        </p:txBody>
-      </p:sp>
-      <p:sp>
-        <p:nvSpPr>
-          <p:cNvPr id="33" name="Shape 30"/>
+          <p:cNvPr id="29" name="Shape 26"/>
           <p:cNvSpPr/>
           <p:nvPr/>
         </p:nvSpPr>
@@ -7244,7 +7047,7 @@
       </p:sp>
       <p:sp>
         <p:nvSpPr>
-          <p:cNvPr id="34" name="Shape 31"/>
+          <p:cNvPr id="30" name="Shape 27"/>
           <p:cNvSpPr/>
           <p:nvPr/>
         </p:nvSpPr>
@@ -7264,7 +7067,7 @@
       </p:sp>
       <p:sp>
         <p:nvSpPr>
-          <p:cNvPr id="35" name="Text 32"/>
+          <p:cNvPr id="31" name="Text 28"/>
           <p:cNvSpPr txBox="1"/>
           <p:nvPr/>
         </p:nvSpPr>
@@ -7303,7 +7106,7 @@
       </p:sp>
       <p:sp>
         <p:nvSpPr>
-          <p:cNvPr id="36" name="Text 33"/>
+          <p:cNvPr id="32" name="Text 29"/>
           <p:cNvSpPr txBox="1"/>
           <p:nvPr/>
         </p:nvSpPr>
@@ -7342,7 +7145,7 @@
       </p:sp>
       <p:sp>
         <p:nvSpPr>
-          <p:cNvPr id="37" name="Shape 34"/>
+          <p:cNvPr id="33" name="Shape 30"/>
           <p:cNvSpPr/>
           <p:nvPr/>
         </p:nvSpPr>
@@ -7362,7 +7165,7 @@
       </p:sp>
       <p:sp>
         <p:nvSpPr>
-          <p:cNvPr id="38" name="Text 35"/>
+          <p:cNvPr id="34" name="Text 31"/>
           <p:cNvSpPr txBox="1"/>
           <p:nvPr/>
         </p:nvSpPr>
@@ -7401,7 +7204,7 @@
       </p:sp>
       <p:sp>
         <p:nvSpPr>
-          <p:cNvPr id="39" name="Text 36"/>
+          <p:cNvPr id="35" name="Text 32"/>
           <p:cNvSpPr txBox="1"/>
           <p:nvPr/>
         </p:nvSpPr>
@@ -7440,7 +7243,7 @@
       </p:sp>
       <p:sp>
         <p:nvSpPr>
-          <p:cNvPr id="40" name="Shape 37"/>
+          <p:cNvPr id="36" name="Shape 33"/>
           <p:cNvSpPr/>
           <p:nvPr/>
         </p:nvSpPr>
@@ -7460,7 +7263,7 @@
       </p:sp>
       <p:sp>
         <p:nvSpPr>
-          <p:cNvPr id="41" name="Text 38"/>
+          <p:cNvPr id="37" name="Text 34"/>
           <p:cNvSpPr txBox="1"/>
           <p:nvPr/>
         </p:nvSpPr>
@@ -7499,7 +7302,7 @@
       </p:sp>
       <p:sp>
         <p:nvSpPr>
-          <p:cNvPr id="42" name="Text 39"/>
+          <p:cNvPr id="38" name="Text 35"/>
           <p:cNvSpPr txBox="1"/>
           <p:nvPr/>
         </p:nvSpPr>
@@ -7538,7 +7341,7 @@
       </p:sp>
       <p:sp>
         <p:nvSpPr>
-          <p:cNvPr id="43" name="Shape 40"/>
+          <p:cNvPr id="39" name="Shape 36"/>
           <p:cNvSpPr/>
           <p:nvPr/>
         </p:nvSpPr>
@@ -7560,7 +7363,7 @@
       </p:sp>
       <p:sp>
         <p:nvSpPr>
-          <p:cNvPr id="44" name="Text 41"/>
+          <p:cNvPr id="40" name="Text 37"/>
           <p:cNvSpPr txBox="1"/>
           <p:nvPr/>
         </p:nvSpPr>
@@ -7599,7 +7402,7 @@
       </p:sp>
       <p:pic>
         <p:nvPicPr>
-          <p:cNvPr id="45" name="Image 1" descr="New information">    </p:cNvPr>
+          <p:cNvPr id="41" name="Image 1" descr="New information">    </p:cNvPr>
           <p:cNvPicPr>
             <a:picLocks noChangeAspect="1"/>
           </p:cNvPicPr>
@@ -7623,7 +7426,7 @@
       </p:pic>
       <p:sp>
         <p:nvSpPr>
-          <p:cNvPr id="25" name="Slide Number Placeholder 0"/>
+          <p:cNvPr id="42" name="Slide Number Placeholder 0"/>
           <p:cNvSpPr>
             <a:spLocks noGrp="1"/>
           </p:cNvSpPr>
@@ -7708,7 +7511,7 @@
                                           </p:stCondLst>
                                         </p:cTn>
                                         <p:tgtEl>
-                                          <p:spTgt spid="16"/>
+                                          <p:spTgt spid="14"/>
                                         </p:tgtEl>
                                         <p:attrNameLst>
                                           <p:attrName>style.visibility</p:attrName>
@@ -7722,7 +7525,7 @@
                                       <p:cBhvr>
                                         <p:cTn id="7" dur="500"/>
                                         <p:tgtEl>
-                                          <p:spTgt spid="16"/>
+                                          <p:spTgt spid="14"/>
                                         </p:tgtEl>
                                       </p:cBhvr>
                                     </p:animEffect>
@@ -7743,7 +7546,7 @@
                                           </p:stCondLst>
                                         </p:cTn>
                                         <p:tgtEl>
-                                          <p:spTgt spid="17"/>
+                                          <p:spTgt spid="15"/>
                                         </p:tgtEl>
                                         <p:attrNameLst>
                                           <p:attrName>style.visibility</p:attrName>
@@ -7757,7 +7560,7 @@
                                       <p:cBhvr>
                                         <p:cTn id="10" dur="500"/>
                                         <p:tgtEl>
-                                          <p:spTgt spid="17"/>
+                                          <p:spTgt spid="15"/>
                                         </p:tgtEl>
                                       </p:cBhvr>
                                     </p:animEffect>
@@ -7778,7 +7581,7 @@
                                           </p:stCondLst>
                                         </p:cTn>
                                         <p:tgtEl>
-                                          <p:spTgt spid="18"/>
+                                          <p:spTgt spid="16"/>
                                         </p:tgtEl>
                                         <p:attrNameLst>
                                           <p:attrName>style.visibility</p:attrName>
@@ -7792,7 +7595,7 @@
                                       <p:cBhvr>
                                         <p:cTn id="13" dur="500"/>
                                         <p:tgtEl>
-                                          <p:spTgt spid="18"/>
+                                          <p:spTgt spid="16"/>
                                         </p:tgtEl>
                                       </p:cBhvr>
                                     </p:animEffect>
@@ -7813,7 +7616,7 @@
                                           </p:stCondLst>
                                         </p:cTn>
                                         <p:tgtEl>
-                                          <p:spTgt spid="19"/>
+                                          <p:spTgt spid="17"/>
                                         </p:tgtEl>
                                         <p:attrNameLst>
                                           <p:attrName>style.visibility</p:attrName>
@@ -7827,7 +7630,7 @@
                                       <p:cBhvr>
                                         <p:cTn id="16" dur="500"/>
                                         <p:tgtEl>
-                                          <p:spTgt spid="19"/>
+                                          <p:spTgt spid="17"/>
                                         </p:tgtEl>
                                       </p:cBhvr>
                                     </p:animEffect>
@@ -7848,7 +7651,7 @@
                                           </p:stCondLst>
                                         </p:cTn>
                                         <p:tgtEl>
-                                          <p:spTgt spid="20"/>
+                                          <p:spTgt spid="18"/>
                                         </p:tgtEl>
                                         <p:attrNameLst>
                                           <p:attrName>style.visibility</p:attrName>
@@ -7862,7 +7665,7 @@
                                       <p:cBhvr>
                                         <p:cTn id="19" dur="500"/>
                                         <p:tgtEl>
-                                          <p:spTgt spid="20"/>
+                                          <p:spTgt spid="18"/>
                                         </p:tgtEl>
                                       </p:cBhvr>
                                     </p:animEffect>
@@ -7883,7 +7686,7 @@
                                           </p:stCondLst>
                                         </p:cTn>
                                         <p:tgtEl>
-                                          <p:spTgt spid="21"/>
+                                          <p:spTgt spid="19"/>
                                         </p:tgtEl>
                                         <p:attrNameLst>
                                           <p:attrName>style.visibility</p:attrName>
@@ -7897,7 +7700,7 @@
                                       <p:cBhvr>
                                         <p:cTn id="22" dur="500"/>
                                         <p:tgtEl>
-                                          <p:spTgt spid="21"/>
+                                          <p:spTgt spid="19"/>
                                         </p:tgtEl>
                                       </p:cBhvr>
                                     </p:animEffect>
@@ -7936,7 +7739,7 @@
                                           </p:stCondLst>
                                         </p:cTn>
                                         <p:tgtEl>
-                                          <p:spTgt spid="22"/>
+                                          <p:spTgt spid="20"/>
                                         </p:tgtEl>
                                         <p:attrNameLst>
                                           <p:attrName>style.visibility</p:attrName>
@@ -7950,7 +7753,7 @@
                                       <p:cBhvr>
                                         <p:cTn id="27" dur="500"/>
                                         <p:tgtEl>
-                                          <p:spTgt spid="22"/>
+                                          <p:spTgt spid="20"/>
                                         </p:tgtEl>
                                       </p:cBhvr>
                                     </p:animEffect>
@@ -7971,7 +7774,7 @@
                                           </p:stCondLst>
                                         </p:cTn>
                                         <p:tgtEl>
-                                          <p:spTgt spid="23"/>
+                                          <p:spTgt spid="21"/>
                                         </p:tgtEl>
                                         <p:attrNameLst>
                                           <p:attrName>style.visibility</p:attrName>
@@ -7985,7 +7788,7 @@
                                       <p:cBhvr>
                                         <p:cTn id="30" dur="500"/>
                                         <p:tgtEl>
-                                          <p:spTgt spid="23"/>
+                                          <p:spTgt spid="21"/>
                                         </p:tgtEl>
                                       </p:cBhvr>
                                     </p:animEffect>
@@ -8006,7 +7809,7 @@
                                           </p:stCondLst>
                                         </p:cTn>
                                         <p:tgtEl>
-                                          <p:spTgt spid="24"/>
+                                          <p:spTgt spid="22"/>
                                         </p:tgtEl>
                                         <p:attrNameLst>
                                           <p:attrName>style.visibility</p:attrName>
@@ -8020,7 +7823,7 @@
                                       <p:cBhvr>
                                         <p:cTn id="33" dur="500"/>
                                         <p:tgtEl>
-                                          <p:spTgt spid="24"/>
+                                          <p:spTgt spid="22"/>
                                         </p:tgtEl>
                                       </p:cBhvr>
                                     </p:animEffect>
@@ -8041,7 +7844,7 @@
                                           </p:stCondLst>
                                         </p:cTn>
                                         <p:tgtEl>
-                                          <p:spTgt spid="25"/>
+                                          <p:spTgt spid="23"/>
                                         </p:tgtEl>
                                         <p:attrNameLst>
                                           <p:attrName>style.visibility</p:attrName>
@@ -8055,42 +7858,7 @@
                                       <p:cBhvr>
                                         <p:cTn id="36" dur="500"/>
                                         <p:tgtEl>
-                                          <p:spTgt spid="25"/>
-                                        </p:tgtEl>
-                                      </p:cBhvr>
-                                    </p:animEffect>
-                                  </p:childTnLst>
-                                </p:cTn>
-                              </p:par>
-                              <p:par>
-                                <p:cTn id="37" presetID="10" presetClass="entr" presetSubtype="0" fill="hold" grpId="0" nodeType="withEffect">
-                                  <p:stCondLst>
-                                    <p:cond delay="0"/>
-                                  </p:stCondLst>
-                                  <p:childTnLst>
-                                    <p:set>
-                                      <p:cBhvr>
-                                        <p:cTn id="38" dur="1" fill="hold">
-                                          <p:stCondLst>
-                                            <p:cond delay="0"/>
-                                          </p:stCondLst>
-                                        </p:cTn>
-                                        <p:tgtEl>
-                                          <p:spTgt spid="26"/>
-                                        </p:tgtEl>
-                                        <p:attrNameLst>
-                                          <p:attrName>style.visibility</p:attrName>
-                                        </p:attrNameLst>
-                                      </p:cBhvr>
-                                      <p:to>
-                                        <p:strVal val="visible"/>
-                                      </p:to>
-                                    </p:set>
-                                    <p:animEffect transition="in" filter="fade">
-                                      <p:cBhvr>
-                                        <p:cTn id="39" dur="500"/>
-                                        <p:tgtEl>
-                                          <p:spTgt spid="26"/>
+                                          <p:spTgt spid="23"/>
                                         </p:tgtEl>
                                       </p:cBhvr>
                                     </p:animEffect>
@@ -8104,19 +7872,54 @@
                     </p:cTn>
                   </p:par>
                   <p:par>
-                    <p:cTn id="40" fill="hold">
+                    <p:cTn id="37" fill="hold">
                       <p:stCondLst>
                         <p:cond delay="indefinite"/>
                       </p:stCondLst>
                       <p:childTnLst>
                         <p:par>
-                          <p:cTn id="41" fill="hold">
+                          <p:cTn id="38" fill="hold">
                             <p:stCondLst>
                               <p:cond delay="0"/>
                             </p:stCondLst>
                             <p:childTnLst>
                               <p:par>
-                                <p:cTn id="42" presetID="10" presetClass="entr" presetSubtype="0" fill="hold" nodeType="clickEffect">
+                                <p:cTn id="39" presetID="10" presetClass="entr" presetSubtype="0" fill="hold" nodeType="clickEffect">
+                                  <p:stCondLst>
+                                    <p:cond delay="0"/>
+                                  </p:stCondLst>
+                                  <p:childTnLst>
+                                    <p:set>
+                                      <p:cBhvr>
+                                        <p:cTn id="40" dur="1" fill="hold">
+                                          <p:stCondLst>
+                                            <p:cond delay="0"/>
+                                          </p:stCondLst>
+                                        </p:cTn>
+                                        <p:tgtEl>
+                                          <p:spTgt spid="24"/>
+                                        </p:tgtEl>
+                                        <p:attrNameLst>
+                                          <p:attrName>style.visibility</p:attrName>
+                                        </p:attrNameLst>
+                                      </p:cBhvr>
+                                      <p:to>
+                                        <p:strVal val="visible"/>
+                                      </p:to>
+                                    </p:set>
+                                    <p:animEffect transition="in" filter="fade">
+                                      <p:cBhvr>
+                                        <p:cTn id="41" dur="500"/>
+                                        <p:tgtEl>
+                                          <p:spTgt spid="24"/>
+                                        </p:tgtEl>
+                                      </p:cBhvr>
+                                    </p:animEffect>
+                                  </p:childTnLst>
+                                </p:cTn>
+                              </p:par>
+                              <p:par>
+                                <p:cTn id="42" presetID="10" presetClass="entr" presetSubtype="0" fill="hold" grpId="0" nodeType="withEffect">
                                   <p:stCondLst>
                                     <p:cond delay="0"/>
                                   </p:stCondLst>
@@ -8129,7 +7932,7 @@
                                           </p:stCondLst>
                                         </p:cTn>
                                         <p:tgtEl>
-                                          <p:spTgt spid="27"/>
+                                          <p:spTgt spid="25"/>
                                         </p:tgtEl>
                                         <p:attrNameLst>
                                           <p:attrName>style.visibility</p:attrName>
@@ -8143,7 +7946,7 @@
                                       <p:cBhvr>
                                         <p:cTn id="44" dur="500"/>
                                         <p:tgtEl>
-                                          <p:spTgt spid="27"/>
+                                          <p:spTgt spid="25"/>
                                         </p:tgtEl>
                                       </p:cBhvr>
                                     </p:animEffect>
@@ -8164,7 +7967,7 @@
                                           </p:stCondLst>
                                         </p:cTn>
                                         <p:tgtEl>
-                                          <p:spTgt spid="28"/>
+                                          <p:spTgt spid="26"/>
                                         </p:tgtEl>
                                         <p:attrNameLst>
                                           <p:attrName>style.visibility</p:attrName>
@@ -8178,7 +7981,7 @@
                                       <p:cBhvr>
                                         <p:cTn id="47" dur="500"/>
                                         <p:tgtEl>
-                                          <p:spTgt spid="28"/>
+                                          <p:spTgt spid="26"/>
                                         </p:tgtEl>
                                       </p:cBhvr>
                                     </p:animEffect>
@@ -8186,7 +7989,7 @@
                                 </p:cTn>
                               </p:par>
                               <p:par>
-                                <p:cTn id="48" presetID="10" presetClass="entr" presetSubtype="0" fill="hold" grpId="0" nodeType="withEffect">
+                                <p:cTn id="48" presetID="10" presetClass="entr" presetSubtype="0" fill="hold" nodeType="withEffect">
                                   <p:stCondLst>
                                     <p:cond delay="0"/>
                                   </p:stCondLst>
@@ -8199,7 +8002,7 @@
                                           </p:stCondLst>
                                         </p:cTn>
                                         <p:tgtEl>
-                                          <p:spTgt spid="29"/>
+                                          <p:spTgt spid="27"/>
                                         </p:tgtEl>
                                         <p:attrNameLst>
                                           <p:attrName>style.visibility</p:attrName>
@@ -8213,7 +8016,7 @@
                                       <p:cBhvr>
                                         <p:cTn id="50" dur="500"/>
                                         <p:tgtEl>
-                                          <p:spTgt spid="29"/>
+                                          <p:spTgt spid="27"/>
                                         </p:tgtEl>
                                       </p:cBhvr>
                                     </p:animEffect>
@@ -8221,7 +8024,7 @@
                                 </p:cTn>
                               </p:par>
                               <p:par>
-                                <p:cTn id="51" presetID="10" presetClass="entr" presetSubtype="0" fill="hold" nodeType="withEffect">
+                                <p:cTn id="51" presetID="10" presetClass="entr" presetSubtype="0" fill="hold" grpId="0" nodeType="withEffect">
                                   <p:stCondLst>
                                     <p:cond delay="0"/>
                                   </p:stCondLst>
@@ -8234,7 +8037,7 @@
                                           </p:stCondLst>
                                         </p:cTn>
                                         <p:tgtEl>
-                                          <p:spTgt spid="30"/>
+                                          <p:spTgt spid="28"/>
                                         </p:tgtEl>
                                         <p:attrNameLst>
                                           <p:attrName>style.visibility</p:attrName>
@@ -8248,77 +8051,7 @@
                                       <p:cBhvr>
                                         <p:cTn id="53" dur="500"/>
                                         <p:tgtEl>
-                                          <p:spTgt spid="30"/>
-                                        </p:tgtEl>
-                                      </p:cBhvr>
-                                    </p:animEffect>
-                                  </p:childTnLst>
-                                </p:cTn>
-                              </p:par>
-                              <p:par>
-                                <p:cTn id="54" presetID="10" presetClass="entr" presetSubtype="0" fill="hold" grpId="0" nodeType="withEffect">
-                                  <p:stCondLst>
-                                    <p:cond delay="0"/>
-                                  </p:stCondLst>
-                                  <p:childTnLst>
-                                    <p:set>
-                                      <p:cBhvr>
-                                        <p:cTn id="55" dur="1" fill="hold">
-                                          <p:stCondLst>
-                                            <p:cond delay="0"/>
-                                          </p:stCondLst>
-                                        </p:cTn>
-                                        <p:tgtEl>
-                                          <p:spTgt spid="31"/>
-                                        </p:tgtEl>
-                                        <p:attrNameLst>
-                                          <p:attrName>style.visibility</p:attrName>
-                                        </p:attrNameLst>
-                                      </p:cBhvr>
-                                      <p:to>
-                                        <p:strVal val="visible"/>
-                                      </p:to>
-                                    </p:set>
-                                    <p:animEffect transition="in" filter="fade">
-                                      <p:cBhvr>
-                                        <p:cTn id="56" dur="500"/>
-                                        <p:tgtEl>
-                                          <p:spTgt spid="31"/>
-                                        </p:tgtEl>
-                                      </p:cBhvr>
-                                    </p:animEffect>
-                                  </p:childTnLst>
-                                </p:cTn>
-                              </p:par>
-                              <p:par>
-                                <p:cTn id="57" presetID="10" presetClass="entr" presetSubtype="0" fill="hold" grpId="0" nodeType="withEffect">
-                                  <p:stCondLst>
-                                    <p:cond delay="0"/>
-                                  </p:stCondLst>
-                                  <p:childTnLst>
-                                    <p:set>
-                                      <p:cBhvr>
-                                        <p:cTn id="58" dur="1" fill="hold">
-                                          <p:stCondLst>
-                                            <p:cond delay="0"/>
-                                          </p:stCondLst>
-                                        </p:cTn>
-                                        <p:tgtEl>
-                                          <p:spTgt spid="32"/>
-                                        </p:tgtEl>
-                                        <p:attrNameLst>
-                                          <p:attrName>style.visibility</p:attrName>
-                                        </p:attrNameLst>
-                                      </p:cBhvr>
-                                      <p:to>
-                                        <p:strVal val="visible"/>
-                                      </p:to>
-                                    </p:set>
-                                    <p:animEffect transition="in" filter="fade">
-                                      <p:cBhvr>
-                                        <p:cTn id="59" dur="500"/>
-                                        <p:tgtEl>
-                                          <p:spTgt spid="32"/>
+                                          <p:spTgt spid="28"/>
                                         </p:tgtEl>
                                       </p:cBhvr>
                                     </p:animEffect>
@@ -8353,17 +8086,15 @@
       </p:par>
     </p:tnLst>
     <p:bldLst>
-      <p:bldP spid="17" grpId="0" animBg="1"/>
-      <p:bldP spid="18" grpId="0" animBg="1"/>
+      <p:bldP spid="15" grpId="0" animBg="1"/>
+      <p:bldP spid="16" grpId="0" animBg="1"/>
+      <p:bldP spid="19" grpId="0" animBg="1"/>
       <p:bldP spid="21" grpId="0" animBg="1"/>
+      <p:bldP spid="22" grpId="0" animBg="1"/>
       <p:bldP spid="23" grpId="0" animBg="1"/>
-      <p:bldP spid="24" grpId="0" animBg="1"/>
       <p:bldP spid="25" grpId="0" animBg="1"/>
       <p:bldP spid="26" grpId="0" animBg="1"/>
       <p:bldP spid="28" grpId="0" animBg="1"/>
-      <p:bldP spid="29" grpId="0" animBg="1"/>
-      <p:bldP spid="31" grpId="0" animBg="1"/>
-      <p:bldP spid="32" grpId="0" animBg="1"/>
     </p:bldLst>
   </p:timing>
 </p:sld>
@@ -8513,11 +8244,11 @@
         <p:spPr>
           <a:xfrm>
             <a:off x="548640" y="1554480"/>
-            <a:ext cx="4846320" cy="3236976"/>
+            <a:ext cx="4846320" cy="3328416"/>
           </a:xfrm>
           <a:prstGeom prst="roundRect">
             <a:avLst>
-              <a:gd name="adj" fmla="val 2260"/>
+              <a:gd name="adj" fmla="val 2198"/>
             </a:avLst>
           </a:prstGeom>
           <a:solidFill>
@@ -8540,7 +8271,7 @@
         <p:spPr>
           <a:xfrm>
             <a:off x="658368" y="1755648"/>
-            <a:ext cx="274320" cy="566928"/>
+            <a:ext cx="274320" cy="731520"/>
           </a:xfrm>
           <a:prstGeom prst="rect">
             <a:avLst/>
@@ -8579,7 +8310,7 @@
         <p:spPr>
           <a:xfrm>
             <a:off x="1188720" y="1755648"/>
-            <a:ext cx="4114800" cy="566928"/>
+            <a:ext cx="4114800" cy="731520"/>
           </a:xfrm>
           <a:prstGeom prst="rect">
             <a:avLst/>
@@ -8715,8 +8446,8 @@
         </p:nvSpPr>
         <p:spPr>
           <a:xfrm>
-            <a:off x="658368" y="2322576"/>
-            <a:ext cx="274320" cy="566928"/>
+            <a:off x="658368" y="2487168"/>
+            <a:ext cx="274320" cy="731520"/>
           </a:xfrm>
           <a:prstGeom prst="rect">
             <a:avLst/>
@@ -8754,8 +8485,8 @@
         </p:nvSpPr>
         <p:spPr>
           <a:xfrm>
-            <a:off x="1188720" y="2322576"/>
-            <a:ext cx="4114800" cy="566928"/>
+            <a:off x="1188720" y="2487168"/>
+            <a:ext cx="4114800" cy="731520"/>
           </a:xfrm>
           <a:prstGeom prst="rect">
             <a:avLst/>
@@ -8849,8 +8580,8 @@
         </p:nvSpPr>
         <p:spPr>
           <a:xfrm>
-            <a:off x="658368" y="2889504"/>
-            <a:ext cx="274320" cy="566928"/>
+            <a:off x="658368" y="3218688"/>
+            <a:ext cx="274320" cy="731520"/>
           </a:xfrm>
           <a:prstGeom prst="rect">
             <a:avLst/>
@@ -8888,8 +8619,8 @@
         </p:nvSpPr>
         <p:spPr>
           <a:xfrm>
-            <a:off x="1188720" y="2889504"/>
-            <a:ext cx="4114800" cy="566928"/>
+            <a:off x="1188720" y="3218688"/>
+            <a:ext cx="4114800" cy="731520"/>
           </a:xfrm>
           <a:prstGeom prst="rect">
             <a:avLst/>
@@ -8941,8 +8672,8 @@
         </p:nvSpPr>
         <p:spPr>
           <a:xfrm>
-            <a:off x="658368" y="3456432"/>
-            <a:ext cx="274320" cy="566928"/>
+            <a:off x="658368" y="3950208"/>
+            <a:ext cx="274320" cy="731520"/>
           </a:xfrm>
           <a:prstGeom prst="rect">
             <a:avLst/>
@@ -8980,8 +8711,8 @@
         </p:nvSpPr>
         <p:spPr>
           <a:xfrm>
-            <a:off x="1188720" y="3456432"/>
-            <a:ext cx="4114800" cy="566928"/>
+            <a:off x="1188720" y="3950208"/>
+            <a:ext cx="4114800" cy="731520"/>
           </a:xfrm>
           <a:prstGeom prst="rect">
             <a:avLst/>
@@ -9069,133 +8800,13 @@
       </p:sp>
       <p:sp>
         <p:nvSpPr>
-          <p:cNvPr id="14" name="Text 11"/>
-          <p:cNvSpPr txBox="1"/>
-          <p:nvPr/>
-        </p:nvSpPr>
-        <p:spPr>
-          <a:xfrm>
-            <a:off x="658368" y="4023360"/>
-            <a:ext cx="274320" cy="566928"/>
-          </a:xfrm>
-          <a:prstGeom prst="rect">
-            <a:avLst/>
-          </a:prstGeom>
-          <a:noFill/>
-          <a:ln/>
-        </p:spPr>
-        <p:txBody>
-          <a:bodyPr wrap="square" lIns="0" tIns="0" rIns="0" bIns="0" rtlCol="0" anchor="ctr"/>
-          <a:lstStyle/>
-          <a:p>
-            <a:pPr algn="r" indent="0" marL="0">
-              <a:buNone/>
-            </a:pPr>
-            <a:r>
-              <a:rPr lang="en-US" sz="2000" dirty="0">
-                <a:solidFill>
-                  <a:srgbClr val="6E6E7A"/>
-                </a:solidFill>
-                <a:latin typeface="Consolas" pitchFamily="34" charset="0"/>
-                <a:ea typeface="Consolas" pitchFamily="34" charset="-122"/>
-                <a:cs typeface="Consolas" pitchFamily="34" charset="-120"/>
-              </a:rPr>
-              <a:t>5</a:t>
-            </a:r>
-            <a:endParaRPr lang="en-US" sz="2000" dirty="0"/>
-          </a:p>
-        </p:txBody>
-      </p:sp>
-      <p:sp>
-        <p:nvSpPr>
-          <p:cNvPr id="15" name="Text 12"/>
-          <p:cNvSpPr txBox="1"/>
-          <p:nvPr/>
-        </p:nvSpPr>
-        <p:spPr>
-          <a:xfrm>
-            <a:off x="1188720" y="4023360"/>
-            <a:ext cx="4114800" cy="566928"/>
-          </a:xfrm>
-          <a:prstGeom prst="rect">
-            <a:avLst/>
-          </a:prstGeom>
-          <a:noFill/>
-          <a:ln/>
-        </p:spPr>
-        <p:txBody>
-          <a:bodyPr wrap="square" lIns="0" tIns="0" rIns="0" bIns="0" rtlCol="0" anchor="ctr"/>
-          <a:lstStyle/>
-          <a:p>
-            <a:pPr indent="0" marL="0">
-              <a:buNone/>
-            </a:pPr>
-            <a:r>
-              <a:rPr lang="en-US" sz="2400" dirty="0">
-                <a:solidFill>
-                  <a:srgbClr val="E8C878"/>
-                </a:solidFill>
-                <a:latin typeface="Consolas" pitchFamily="34" charset="0"/>
-                <a:ea typeface="Consolas" pitchFamily="34" charset="-122"/>
-                <a:cs typeface="Consolas" pitchFamily="34" charset="-120"/>
-              </a:rPr>
-              <a:t>print</a:t>
-            </a:r>
-            <a:pPr indent="0" marL="0">
-              <a:buNone/>
-            </a:pPr>
-            <a:r>
-              <a:rPr lang="en-US" sz="2400" dirty="0">
-                <a:solidFill>
-                  <a:srgbClr val="A9A9B4"/>
-                </a:solidFill>
-                <a:latin typeface="Consolas" pitchFamily="34" charset="0"/>
-                <a:ea typeface="Consolas" pitchFamily="34" charset="-122"/>
-                <a:cs typeface="Consolas" pitchFamily="34" charset="-120"/>
-              </a:rPr>
-              <a:t>(</a:t>
-            </a:r>
-            <a:pPr indent="0" marL="0">
-              <a:buNone/>
-            </a:pPr>
-            <a:r>
-              <a:rPr lang="en-US" sz="2400" dirty="0">
-                <a:solidFill>
-                  <a:srgbClr val="E69F00"/>
-                </a:solidFill>
-                <a:latin typeface="Consolas" pitchFamily="34" charset="0"/>
-                <a:ea typeface="Consolas" pitchFamily="34" charset="-122"/>
-                <a:cs typeface="Consolas" pitchFamily="34" charset="-120"/>
-              </a:rPr>
-              <a:t>"Done"</a:t>
-            </a:r>
-            <a:pPr indent="0" marL="0">
-              <a:buNone/>
-            </a:pPr>
-            <a:r>
-              <a:rPr lang="en-US" sz="2400" dirty="0">
-                <a:solidFill>
-                  <a:srgbClr val="A9A9B4"/>
-                </a:solidFill>
-                <a:latin typeface="Consolas" pitchFamily="34" charset="0"/>
-                <a:ea typeface="Consolas" pitchFamily="34" charset="-122"/>
-                <a:cs typeface="Consolas" pitchFamily="34" charset="-120"/>
-              </a:rPr>
-              <a:t>)</a:t>
-            </a:r>
-            <a:endParaRPr lang="en-US" sz="2400" dirty="0"/>
-          </a:p>
-        </p:txBody>
-      </p:sp>
-      <p:sp>
-        <p:nvSpPr>
-          <p:cNvPr id="16" name="click1"/>
+          <p:cNvPr id="14" name="click1"/>
           <p:cNvSpPr/>
           <p:nvPr/>
         </p:nvSpPr>
         <p:spPr>
           <a:xfrm>
-            <a:off x="5623560" y="1874520"/>
+            <a:off x="5623560" y="1956816"/>
             <a:ext cx="329184" cy="329184"/>
           </a:xfrm>
           <a:prstGeom prst="ellipse">
@@ -9209,13 +8820,13 @@
       </p:sp>
       <p:sp>
         <p:nvSpPr>
-          <p:cNvPr id="17" name="click1"/>
-          <p:cNvSpPr txBox="1"/>
-          <p:nvPr/>
-        </p:nvSpPr>
-        <p:spPr>
-          <a:xfrm>
-            <a:off x="5623560" y="1874520"/>
+          <p:cNvPr id="15" name="click1"/>
+          <p:cNvSpPr txBox="1"/>
+          <p:nvPr/>
+        </p:nvSpPr>
+        <p:spPr>
+          <a:xfrm>
+            <a:off x="5623560" y="1956816"/>
             <a:ext cx="329184" cy="329184"/>
           </a:xfrm>
           <a:prstGeom prst="rect">
@@ -9248,14 +8859,14 @@
       </p:sp>
       <p:sp>
         <p:nvSpPr>
-          <p:cNvPr id="18" name="click1"/>
+          <p:cNvPr id="16" name="click1"/>
           <p:cNvSpPr txBox="1"/>
           <p:nvPr/>
         </p:nvSpPr>
         <p:spPr>
           <a:xfrm>
             <a:off x="6053328" y="1755648"/>
-            <a:ext cx="1417320" cy="566928"/>
+            <a:ext cx="1417320" cy="731520"/>
           </a:xfrm>
           <a:prstGeom prst="rect">
             <a:avLst/>
@@ -9343,13 +8954,13 @@
       </p:sp>
       <p:sp>
         <p:nvSpPr>
-          <p:cNvPr id="19" name="click1"/>
+          <p:cNvPr id="17" name="click1"/>
           <p:cNvSpPr/>
           <p:nvPr/>
         </p:nvSpPr>
         <p:spPr>
           <a:xfrm>
-            <a:off x="7516368" y="2039112"/>
+            <a:off x="7516368" y="2121408"/>
             <a:ext cx="365760" cy="0"/>
           </a:xfrm>
           <a:prstGeom prst="line">
@@ -9367,18 +8978,18 @@
       </p:sp>
       <p:sp>
         <p:nvSpPr>
-          <p:cNvPr id="20" name="click1"/>
+          <p:cNvPr id="18" name="click1"/>
           <p:cNvSpPr/>
           <p:nvPr/>
         </p:nvSpPr>
         <p:spPr>
           <a:xfrm>
             <a:off x="7973568" y="1819656"/>
-            <a:ext cx="868680" cy="438912"/>
+            <a:ext cx="868680" cy="603504"/>
           </a:xfrm>
           <a:prstGeom prst="roundRect">
             <a:avLst>
-              <a:gd name="adj" fmla="val 16667"/>
+              <a:gd name="adj" fmla="val 12121"/>
             </a:avLst>
           </a:prstGeom>
           <a:solidFill>
@@ -9389,14 +9000,14 @@
       </p:sp>
       <p:sp>
         <p:nvSpPr>
-          <p:cNvPr id="21" name="click1"/>
+          <p:cNvPr id="19" name="click1"/>
           <p:cNvSpPr txBox="1"/>
           <p:nvPr/>
         </p:nvSpPr>
         <p:spPr>
           <a:xfrm>
             <a:off x="7973568" y="1819656"/>
-            <a:ext cx="868680" cy="438912"/>
+            <a:ext cx="868680" cy="603504"/>
           </a:xfrm>
           <a:prstGeom prst="rect">
             <a:avLst/>
@@ -9428,13 +9039,13 @@
       </p:sp>
       <p:sp>
         <p:nvSpPr>
-          <p:cNvPr id="22" name="click2"/>
+          <p:cNvPr id="20" name="click2"/>
           <p:cNvSpPr/>
           <p:nvPr/>
         </p:nvSpPr>
         <p:spPr>
           <a:xfrm>
-            <a:off x="5623560" y="2441448"/>
+            <a:off x="5623560" y="2688336"/>
             <a:ext cx="329184" cy="329184"/>
           </a:xfrm>
           <a:prstGeom prst="ellipse">
@@ -9448,13 +9059,13 @@
       </p:sp>
       <p:sp>
         <p:nvSpPr>
-          <p:cNvPr id="23" name="click2"/>
-          <p:cNvSpPr txBox="1"/>
-          <p:nvPr/>
-        </p:nvSpPr>
-        <p:spPr>
-          <a:xfrm>
-            <a:off x="5623560" y="2441448"/>
+          <p:cNvPr id="21" name="click2"/>
+          <p:cNvSpPr txBox="1"/>
+          <p:nvPr/>
+        </p:nvSpPr>
+        <p:spPr>
+          <a:xfrm>
+            <a:off x="5623560" y="2688336"/>
             <a:ext cx="329184" cy="329184"/>
           </a:xfrm>
           <a:prstGeom prst="rect">
@@ -9487,14 +9098,14 @@
       </p:sp>
       <p:sp>
         <p:nvSpPr>
-          <p:cNvPr id="24" name="click2"/>
-          <p:cNvSpPr txBox="1"/>
-          <p:nvPr/>
-        </p:nvSpPr>
-        <p:spPr>
-          <a:xfrm>
-            <a:off x="6053328" y="2322576"/>
-            <a:ext cx="2651760" cy="566928"/>
+          <p:cNvPr id="22" name="click2"/>
+          <p:cNvSpPr txBox="1"/>
+          <p:nvPr/>
+        </p:nvSpPr>
+        <p:spPr>
+          <a:xfrm>
+            <a:off x="6053328" y="2487168"/>
+            <a:ext cx="2651760" cy="731520"/>
           </a:xfrm>
           <a:prstGeom prst="rect">
             <a:avLst/>
@@ -9526,14 +9137,14 @@
       </p:sp>
       <p:sp>
         <p:nvSpPr>
-          <p:cNvPr id="25" name="click2"/>
-          <p:cNvSpPr txBox="1"/>
-          <p:nvPr/>
-        </p:nvSpPr>
-        <p:spPr>
-          <a:xfrm>
-            <a:off x="6053328" y="3456432"/>
-            <a:ext cx="2651760" cy="566928"/>
+          <p:cNvPr id="23" name="click2"/>
+          <p:cNvSpPr txBox="1"/>
+          <p:nvPr/>
+        </p:nvSpPr>
+        <p:spPr>
+          <a:xfrm>
+            <a:off x="6053328" y="3950208"/>
+            <a:ext cx="2651760" cy="731520"/>
           </a:xfrm>
           <a:prstGeom prst="rect">
             <a:avLst/>
@@ -9565,155 +9176,116 @@
       </p:sp>
       <p:sp>
         <p:nvSpPr>
-          <p:cNvPr id="26" name="click2"/>
-          <p:cNvSpPr txBox="1"/>
-          <p:nvPr/>
-        </p:nvSpPr>
-        <p:spPr>
-          <a:xfrm>
-            <a:off x="6053328" y="4023360"/>
-            <a:ext cx="2651760" cy="566928"/>
-          </a:xfrm>
-          <a:prstGeom prst="rect">
-            <a:avLst/>
-          </a:prstGeom>
-          <a:noFill/>
-          <a:ln/>
-        </p:spPr>
-        <p:txBody>
-          <a:bodyPr wrap="square" lIns="0" tIns="0" rIns="0" bIns="0" rtlCol="0" anchor="ctr"/>
-          <a:lstStyle/>
-          <a:p>
-            <a:pPr indent="0" marL="0">
-              <a:buNone/>
-            </a:pPr>
-            <a:r>
-              <a:rPr lang="en-US" sz="2000" b="1" dirty="0">
-                <a:solidFill>
-                  <a:srgbClr val="D8A73D"/>
+          <p:cNvPr id="24" name="click3"/>
+          <p:cNvSpPr/>
+          <p:nvPr/>
+        </p:nvSpPr>
+        <p:spPr>
+          <a:xfrm>
+            <a:off x="9098280" y="1554480"/>
+            <a:ext cx="329184" cy="329184"/>
+          </a:xfrm>
+          <a:prstGeom prst="ellipse">
+            <a:avLst/>
+          </a:prstGeom>
+          <a:solidFill>
+            <a:srgbClr val="D8A73D"/>
+          </a:solidFill>
+          <a:ln/>
+        </p:spPr>
+      </p:sp>
+      <p:sp>
+        <p:nvSpPr>
+          <p:cNvPr id="25" name="click3"/>
+          <p:cNvSpPr txBox="1"/>
+          <p:nvPr/>
+        </p:nvSpPr>
+        <p:spPr>
+          <a:xfrm>
+            <a:off x="9098280" y="1554480"/>
+            <a:ext cx="329184" cy="329184"/>
+          </a:xfrm>
+          <a:prstGeom prst="rect">
+            <a:avLst/>
+          </a:prstGeom>
+          <a:noFill/>
+          <a:ln/>
+        </p:spPr>
+        <p:txBody>
+          <a:bodyPr wrap="square" lIns="0" tIns="0" rIns="0" bIns="0" rtlCol="0" anchor="ctr"/>
+          <a:lstStyle/>
+          <a:p>
+            <a:pPr algn="ctr" indent="0" marL="0">
+              <a:buNone/>
+            </a:pPr>
+            <a:r>
+              <a:rPr lang="en-US" sz="1600" b="1" dirty="0">
+                <a:solidFill>
+                  <a:srgbClr val="1E1E24"/>
+                </a:solidFill>
+                <a:latin typeface="Cambria" pitchFamily="34" charset="0"/>
+                <a:ea typeface="Cambria" pitchFamily="34" charset="-122"/>
+                <a:cs typeface="Cambria" pitchFamily="34" charset="-120"/>
+              </a:rPr>
+              <a:t>3</a:t>
+            </a:r>
+            <a:endParaRPr lang="en-US" sz="1600" dirty="0"/>
+          </a:p>
+        </p:txBody>
+      </p:sp>
+      <p:sp>
+        <p:nvSpPr>
+          <p:cNvPr id="26" name="click3"/>
+          <p:cNvSpPr txBox="1"/>
+          <p:nvPr/>
+        </p:nvSpPr>
+        <p:spPr>
+          <a:xfrm>
+            <a:off x="9555480" y="1554480"/>
+            <a:ext cx="2084832" cy="329184"/>
+          </a:xfrm>
+          <a:prstGeom prst="rect">
+            <a:avLst/>
+          </a:prstGeom>
+          <a:noFill/>
+          <a:ln/>
+        </p:spPr>
+        <p:txBody>
+          <a:bodyPr wrap="square" lIns="0" tIns="0" rIns="0" bIns="0" rtlCol="0" anchor="ctr"/>
+          <a:lstStyle/>
+          <a:p>
+            <a:pPr indent="0" marL="0">
+              <a:buNone/>
+            </a:pPr>
+            <a:r>
+              <a:rPr lang="en-US" sz="1300" b="1" spc="200" kern="0" dirty="0">
+                <a:solidFill>
+                  <a:srgbClr val="6E6E7A"/>
                 </a:solidFill>
                 <a:latin typeface="Calibri" pitchFamily="34" charset="0"/>
                 <a:ea typeface="Calibri" pitchFamily="34" charset="-122"/>
                 <a:cs typeface="Calibri" pitchFamily="34" charset="-120"/>
               </a:rPr>
-              <a:t>✓ runs every time</a:t>
-            </a:r>
-            <a:endParaRPr lang="en-US" sz="2000" dirty="0"/>
-          </a:p>
-        </p:txBody>
-      </p:sp>
-      <p:sp>
-        <p:nvSpPr>
-          <p:cNvPr id="27" name="click3"/>
+              <a:t>WHAT IS PRINTED</a:t>
+            </a:r>
+            <a:endParaRPr lang="en-US" sz="1300" dirty="0"/>
+          </a:p>
+        </p:txBody>
+      </p:sp>
+      <p:sp>
+        <p:nvSpPr>
+          <p:cNvPr id="27" name="click3 · terminal"/>
           <p:cNvSpPr/>
           <p:nvPr/>
         </p:nvSpPr>
         <p:spPr>
           <a:xfrm>
-            <a:off x="9098280" y="1554480"/>
-            <a:ext cx="329184" cy="329184"/>
-          </a:xfrm>
-          <a:prstGeom prst="ellipse">
-            <a:avLst/>
-          </a:prstGeom>
-          <a:solidFill>
-            <a:srgbClr val="D8A73D"/>
-          </a:solidFill>
-          <a:ln/>
-        </p:spPr>
-      </p:sp>
-      <p:sp>
-        <p:nvSpPr>
-          <p:cNvPr id="28" name="click3"/>
-          <p:cNvSpPr txBox="1"/>
-          <p:nvPr/>
-        </p:nvSpPr>
-        <p:spPr>
-          <a:xfrm>
-            <a:off x="9098280" y="1554480"/>
-            <a:ext cx="329184" cy="329184"/>
-          </a:xfrm>
-          <a:prstGeom prst="rect">
-            <a:avLst/>
-          </a:prstGeom>
-          <a:noFill/>
-          <a:ln/>
-        </p:spPr>
-        <p:txBody>
-          <a:bodyPr wrap="square" lIns="0" tIns="0" rIns="0" bIns="0" rtlCol="0" anchor="ctr"/>
-          <a:lstStyle/>
-          <a:p>
-            <a:pPr algn="ctr" indent="0" marL="0">
-              <a:buNone/>
-            </a:pPr>
-            <a:r>
-              <a:rPr lang="en-US" sz="1600" b="1" dirty="0">
-                <a:solidFill>
-                  <a:srgbClr val="1E1E24"/>
-                </a:solidFill>
-                <a:latin typeface="Cambria" pitchFamily="34" charset="0"/>
-                <a:ea typeface="Cambria" pitchFamily="34" charset="-122"/>
-                <a:cs typeface="Cambria" pitchFamily="34" charset="-120"/>
-              </a:rPr>
-              <a:t>3</a:t>
-            </a:r>
-            <a:endParaRPr lang="en-US" sz="1600" dirty="0"/>
-          </a:p>
-        </p:txBody>
-      </p:sp>
-      <p:sp>
-        <p:nvSpPr>
-          <p:cNvPr id="29" name="click3"/>
-          <p:cNvSpPr txBox="1"/>
-          <p:nvPr/>
-        </p:nvSpPr>
-        <p:spPr>
-          <a:xfrm>
-            <a:off x="9555480" y="1554480"/>
-            <a:ext cx="2084832" cy="329184"/>
-          </a:xfrm>
-          <a:prstGeom prst="rect">
-            <a:avLst/>
-          </a:prstGeom>
-          <a:noFill/>
-          <a:ln/>
-        </p:spPr>
-        <p:txBody>
-          <a:bodyPr wrap="square" lIns="0" tIns="0" rIns="0" bIns="0" rtlCol="0" anchor="ctr"/>
-          <a:lstStyle/>
-          <a:p>
-            <a:pPr indent="0" marL="0">
-              <a:buNone/>
-            </a:pPr>
-            <a:r>
-              <a:rPr lang="en-US" sz="1300" b="1" spc="200" kern="0" dirty="0">
-                <a:solidFill>
-                  <a:srgbClr val="6E6E7A"/>
-                </a:solidFill>
-                <a:latin typeface="Calibri" pitchFamily="34" charset="0"/>
-                <a:ea typeface="Calibri" pitchFamily="34" charset="-122"/>
-                <a:cs typeface="Calibri" pitchFamily="34" charset="-120"/>
-              </a:rPr>
-              <a:t>WHAT IS PRINTED</a:t>
-            </a:r>
-            <a:endParaRPr lang="en-US" sz="1300" dirty="0"/>
-          </a:p>
-        </p:txBody>
-      </p:sp>
-      <p:sp>
-        <p:nvSpPr>
-          <p:cNvPr id="30" name="click3 · terminal"/>
-          <p:cNvSpPr/>
-          <p:nvPr/>
-        </p:nvSpPr>
-        <p:spPr>
-          <a:xfrm>
             <a:off x="9098280" y="2011680"/>
-            <a:ext cx="2542032" cy="1270000"/>
+            <a:ext cx="2542032" cy="863600"/>
           </a:xfrm>
           <a:prstGeom prst="roundRect">
             <a:avLst>
-              <a:gd name="adj" fmla="val 5760"/>
+              <a:gd name="adj" fmla="val 8471"/>
             </a:avLst>
           </a:prstGeom>
           <a:solidFill>
@@ -9729,7 +9301,7 @@
       </p:sp>
       <p:sp>
         <p:nvSpPr>
-          <p:cNvPr id="31" name="click3"/>
+          <p:cNvPr id="28" name="click3"/>
           <p:cNvSpPr txBox="1"/>
           <p:nvPr/>
         </p:nvSpPr>
@@ -9768,46 +9340,7 @@
       </p:sp>
       <p:sp>
         <p:nvSpPr>
-          <p:cNvPr id="32" name="click3"/>
-          <p:cNvSpPr txBox="1"/>
-          <p:nvPr/>
-        </p:nvSpPr>
-        <p:spPr>
-          <a:xfrm>
-            <a:off x="9326880" y="2646680"/>
-            <a:ext cx="2084832" cy="406400"/>
-          </a:xfrm>
-          <a:prstGeom prst="rect">
-            <a:avLst/>
-          </a:prstGeom>
-          <a:noFill/>
-          <a:ln/>
-        </p:spPr>
-        <p:txBody>
-          <a:bodyPr wrap="square" lIns="0" tIns="0" rIns="0" bIns="0" rtlCol="0" anchor="ctr"/>
-          <a:lstStyle/>
-          <a:p>
-            <a:pPr indent="0" marL="0">
-              <a:buNone/>
-            </a:pPr>
-            <a:r>
-              <a:rPr lang="en-US" sz="2000" dirty="0">
-                <a:solidFill>
-                  <a:srgbClr val="F5F5F3"/>
-                </a:solidFill>
-                <a:latin typeface="Consolas" pitchFamily="34" charset="0"/>
-                <a:ea typeface="Consolas" pitchFamily="34" charset="-122"/>
-                <a:cs typeface="Consolas" pitchFamily="34" charset="-120"/>
-              </a:rPr>
-              <a:t>Done</a:t>
-            </a:r>
-            <a:endParaRPr lang="en-US" sz="2000" dirty="0"/>
-          </a:p>
-        </p:txBody>
-      </p:sp>
-      <p:sp>
-        <p:nvSpPr>
-          <p:cNvPr id="33" name="Shape 30"/>
+          <p:cNvPr id="29" name="Shape 26"/>
           <p:cNvSpPr/>
           <p:nvPr/>
         </p:nvSpPr>
@@ -9829,7 +9362,7 @@
       </p:sp>
       <p:sp>
         <p:nvSpPr>
-          <p:cNvPr id="34" name="Shape 31"/>
+          <p:cNvPr id="30" name="Shape 27"/>
           <p:cNvSpPr/>
           <p:nvPr/>
         </p:nvSpPr>
@@ -9849,7 +9382,7 @@
       </p:sp>
       <p:sp>
         <p:nvSpPr>
-          <p:cNvPr id="35" name="Text 32"/>
+          <p:cNvPr id="31" name="Text 28"/>
           <p:cNvSpPr txBox="1"/>
           <p:nvPr/>
         </p:nvSpPr>
@@ -9888,7 +9421,7 @@
       </p:sp>
       <p:sp>
         <p:nvSpPr>
-          <p:cNvPr id="36" name="Text 33"/>
+          <p:cNvPr id="32" name="Text 29"/>
           <p:cNvSpPr txBox="1"/>
           <p:nvPr/>
         </p:nvSpPr>
@@ -9927,7 +9460,7 @@
       </p:sp>
       <p:sp>
         <p:nvSpPr>
-          <p:cNvPr id="37" name="Shape 34"/>
+          <p:cNvPr id="33" name="Shape 30"/>
           <p:cNvSpPr/>
           <p:nvPr/>
         </p:nvSpPr>
@@ -9947,7 +9480,7 @@
       </p:sp>
       <p:sp>
         <p:nvSpPr>
-          <p:cNvPr id="38" name="Text 35"/>
+          <p:cNvPr id="34" name="Text 31"/>
           <p:cNvSpPr txBox="1"/>
           <p:nvPr/>
         </p:nvSpPr>
@@ -9986,7 +9519,7 @@
       </p:sp>
       <p:sp>
         <p:nvSpPr>
-          <p:cNvPr id="39" name="Text 36"/>
+          <p:cNvPr id="35" name="Text 32"/>
           <p:cNvSpPr txBox="1"/>
           <p:nvPr/>
         </p:nvSpPr>
@@ -10025,7 +9558,7 @@
       </p:sp>
       <p:sp>
         <p:nvSpPr>
-          <p:cNvPr id="40" name="Shape 37"/>
+          <p:cNvPr id="36" name="Shape 33"/>
           <p:cNvSpPr/>
           <p:nvPr/>
         </p:nvSpPr>
@@ -10045,7 +9578,7 @@
       </p:sp>
       <p:sp>
         <p:nvSpPr>
-          <p:cNvPr id="41" name="Text 38"/>
+          <p:cNvPr id="37" name="Text 34"/>
           <p:cNvSpPr txBox="1"/>
           <p:nvPr/>
         </p:nvSpPr>
@@ -10084,7 +9617,7 @@
       </p:sp>
       <p:sp>
         <p:nvSpPr>
-          <p:cNvPr id="42" name="Text 39"/>
+          <p:cNvPr id="38" name="Text 35"/>
           <p:cNvSpPr txBox="1"/>
           <p:nvPr/>
         </p:nvSpPr>
@@ -10123,7 +9656,7 @@
       </p:sp>
       <p:sp>
         <p:nvSpPr>
-          <p:cNvPr id="43" name="Shape 40"/>
+          <p:cNvPr id="39" name="Shape 36"/>
           <p:cNvSpPr/>
           <p:nvPr/>
         </p:nvSpPr>
@@ -10145,7 +9678,7 @@
       </p:sp>
       <p:sp>
         <p:nvSpPr>
-          <p:cNvPr id="44" name="Text 41"/>
+          <p:cNvPr id="40" name="Text 37"/>
           <p:cNvSpPr txBox="1"/>
           <p:nvPr/>
         </p:nvSpPr>
@@ -10184,7 +9717,7 @@
       </p:sp>
       <p:pic>
         <p:nvPicPr>
-          <p:cNvPr id="45" name="Image 1" descr="Deliberate practice">    </p:cNvPr>
+          <p:cNvPr id="41" name="Image 1" descr="Deliberate practice">    </p:cNvPr>
           <p:cNvPicPr>
             <a:picLocks noChangeAspect="1"/>
           </p:cNvPicPr>
@@ -10208,7 +9741,7 @@
       </p:pic>
       <p:sp>
         <p:nvSpPr>
-          <p:cNvPr id="25" name="Slide Number Placeholder 0"/>
+          <p:cNvPr id="42" name="Slide Number Placeholder 0"/>
           <p:cNvSpPr>
             <a:spLocks noGrp="1"/>
           </p:cNvSpPr>
@@ -10293,7 +9826,7 @@
                                           </p:stCondLst>
                                         </p:cTn>
                                         <p:tgtEl>
-                                          <p:spTgt spid="16"/>
+                                          <p:spTgt spid="14"/>
                                         </p:tgtEl>
                                         <p:attrNameLst>
                                           <p:attrName>style.visibility</p:attrName>
@@ -10307,7 +9840,7 @@
                                       <p:cBhvr>
                                         <p:cTn id="7" dur="500"/>
                                         <p:tgtEl>
-                                          <p:spTgt spid="16"/>
+                                          <p:spTgt spid="14"/>
                                         </p:tgtEl>
                                       </p:cBhvr>
                                     </p:animEffect>
@@ -10328,7 +9861,7 @@
                                           </p:stCondLst>
                                         </p:cTn>
                                         <p:tgtEl>
-                                          <p:spTgt spid="17"/>
+                                          <p:spTgt spid="15"/>
                                         </p:tgtEl>
                                         <p:attrNameLst>
                                           <p:attrName>style.visibility</p:attrName>
@@ -10342,7 +9875,7 @@
                                       <p:cBhvr>
                                         <p:cTn id="10" dur="500"/>
                                         <p:tgtEl>
-                                          <p:spTgt spid="17"/>
+                                          <p:spTgt spid="15"/>
                                         </p:tgtEl>
                                       </p:cBhvr>
                                     </p:animEffect>
@@ -10363,7 +9896,7 @@
                                           </p:stCondLst>
                                         </p:cTn>
                                         <p:tgtEl>
-                                          <p:spTgt spid="18"/>
+                                          <p:spTgt spid="16"/>
                                         </p:tgtEl>
                                         <p:attrNameLst>
                                           <p:attrName>style.visibility</p:attrName>
@@ -10377,7 +9910,7 @@
                                       <p:cBhvr>
                                         <p:cTn id="13" dur="500"/>
                                         <p:tgtEl>
-                                          <p:spTgt spid="18"/>
+                                          <p:spTgt spid="16"/>
                                         </p:tgtEl>
                                       </p:cBhvr>
                                     </p:animEffect>
@@ -10398,7 +9931,7 @@
                                           </p:stCondLst>
                                         </p:cTn>
                                         <p:tgtEl>
-                                          <p:spTgt spid="19"/>
+                                          <p:spTgt spid="17"/>
                                         </p:tgtEl>
                                         <p:attrNameLst>
                                           <p:attrName>style.visibility</p:attrName>
@@ -10412,7 +9945,7 @@
                                       <p:cBhvr>
                                         <p:cTn id="16" dur="500"/>
                                         <p:tgtEl>
-                                          <p:spTgt spid="19"/>
+                                          <p:spTgt spid="17"/>
                                         </p:tgtEl>
                                       </p:cBhvr>
                                     </p:animEffect>
@@ -10433,7 +9966,7 @@
                                           </p:stCondLst>
                                         </p:cTn>
                                         <p:tgtEl>
-                                          <p:spTgt spid="20"/>
+                                          <p:spTgt spid="18"/>
                                         </p:tgtEl>
                                         <p:attrNameLst>
                                           <p:attrName>style.visibility</p:attrName>
@@ -10447,7 +9980,7 @@
                                       <p:cBhvr>
                                         <p:cTn id="19" dur="500"/>
                                         <p:tgtEl>
-                                          <p:spTgt spid="20"/>
+                                          <p:spTgt spid="18"/>
                                         </p:tgtEl>
                                       </p:cBhvr>
                                     </p:animEffect>
@@ -10468,7 +10001,7 @@
                                           </p:stCondLst>
                                         </p:cTn>
                                         <p:tgtEl>
-                                          <p:spTgt spid="21"/>
+                                          <p:spTgt spid="19"/>
                                         </p:tgtEl>
                                         <p:attrNameLst>
                                           <p:attrName>style.visibility</p:attrName>
@@ -10482,7 +10015,7 @@
                                       <p:cBhvr>
                                         <p:cTn id="22" dur="500"/>
                                         <p:tgtEl>
-                                          <p:spTgt spid="21"/>
+                                          <p:spTgt spid="19"/>
                                         </p:tgtEl>
                                       </p:cBhvr>
                                     </p:animEffect>
@@ -10521,7 +10054,7 @@
                                           </p:stCondLst>
                                         </p:cTn>
                                         <p:tgtEl>
-                                          <p:spTgt spid="22"/>
+                                          <p:spTgt spid="20"/>
                                         </p:tgtEl>
                                         <p:attrNameLst>
                                           <p:attrName>style.visibility</p:attrName>
@@ -10535,7 +10068,7 @@
                                       <p:cBhvr>
                                         <p:cTn id="27" dur="500"/>
                                         <p:tgtEl>
-                                          <p:spTgt spid="22"/>
+                                          <p:spTgt spid="20"/>
                                         </p:tgtEl>
                                       </p:cBhvr>
                                     </p:animEffect>
@@ -10556,7 +10089,7 @@
                                           </p:stCondLst>
                                         </p:cTn>
                                         <p:tgtEl>
-                                          <p:spTgt spid="23"/>
+                                          <p:spTgt spid="21"/>
                                         </p:tgtEl>
                                         <p:attrNameLst>
                                           <p:attrName>style.visibility</p:attrName>
@@ -10570,7 +10103,7 @@
                                       <p:cBhvr>
                                         <p:cTn id="30" dur="500"/>
                                         <p:tgtEl>
-                                          <p:spTgt spid="23"/>
+                                          <p:spTgt spid="21"/>
                                         </p:tgtEl>
                                       </p:cBhvr>
                                     </p:animEffect>
@@ -10591,7 +10124,7 @@
                                           </p:stCondLst>
                                         </p:cTn>
                                         <p:tgtEl>
-                                          <p:spTgt spid="24"/>
+                                          <p:spTgt spid="22"/>
                                         </p:tgtEl>
                                         <p:attrNameLst>
                                           <p:attrName>style.visibility</p:attrName>
@@ -10605,7 +10138,7 @@
                                       <p:cBhvr>
                                         <p:cTn id="33" dur="500"/>
                                         <p:tgtEl>
-                                          <p:spTgt spid="24"/>
+                                          <p:spTgt spid="22"/>
                                         </p:tgtEl>
                                       </p:cBhvr>
                                     </p:animEffect>
@@ -10626,7 +10159,7 @@
                                           </p:stCondLst>
                                         </p:cTn>
                                         <p:tgtEl>
-                                          <p:spTgt spid="25"/>
+                                          <p:spTgt spid="23"/>
                                         </p:tgtEl>
                                         <p:attrNameLst>
                                           <p:attrName>style.visibility</p:attrName>
@@ -10640,42 +10173,7 @@
                                       <p:cBhvr>
                                         <p:cTn id="36" dur="500"/>
                                         <p:tgtEl>
-                                          <p:spTgt spid="25"/>
-                                        </p:tgtEl>
-                                      </p:cBhvr>
-                                    </p:animEffect>
-                                  </p:childTnLst>
-                                </p:cTn>
-                              </p:par>
-                              <p:par>
-                                <p:cTn id="37" presetID="10" presetClass="entr" presetSubtype="0" fill="hold" grpId="0" nodeType="withEffect">
-                                  <p:stCondLst>
-                                    <p:cond delay="0"/>
-                                  </p:stCondLst>
-                                  <p:childTnLst>
-                                    <p:set>
-                                      <p:cBhvr>
-                                        <p:cTn id="38" dur="1" fill="hold">
-                                          <p:stCondLst>
-                                            <p:cond delay="0"/>
-                                          </p:stCondLst>
-                                        </p:cTn>
-                                        <p:tgtEl>
-                                          <p:spTgt spid="26"/>
-                                        </p:tgtEl>
-                                        <p:attrNameLst>
-                                          <p:attrName>style.visibility</p:attrName>
-                                        </p:attrNameLst>
-                                      </p:cBhvr>
-                                      <p:to>
-                                        <p:strVal val="visible"/>
-                                      </p:to>
-                                    </p:set>
-                                    <p:animEffect transition="in" filter="fade">
-                                      <p:cBhvr>
-                                        <p:cTn id="39" dur="500"/>
-                                        <p:tgtEl>
-                                          <p:spTgt spid="26"/>
+                                          <p:spTgt spid="23"/>
                                         </p:tgtEl>
                                       </p:cBhvr>
                                     </p:animEffect>
@@ -10689,19 +10187,54 @@
                     </p:cTn>
                   </p:par>
                   <p:par>
-                    <p:cTn id="40" fill="hold">
+                    <p:cTn id="37" fill="hold">
                       <p:stCondLst>
                         <p:cond delay="indefinite"/>
                       </p:stCondLst>
                       <p:childTnLst>
                         <p:par>
-                          <p:cTn id="41" fill="hold">
+                          <p:cTn id="38" fill="hold">
                             <p:stCondLst>
                               <p:cond delay="0"/>
                             </p:stCondLst>
                             <p:childTnLst>
                               <p:par>
-                                <p:cTn id="42" presetID="10" presetClass="entr" presetSubtype="0" fill="hold" nodeType="clickEffect">
+                                <p:cTn id="39" presetID="10" presetClass="entr" presetSubtype="0" fill="hold" nodeType="clickEffect">
+                                  <p:stCondLst>
+                                    <p:cond delay="0"/>
+                                  </p:stCondLst>
+                                  <p:childTnLst>
+                                    <p:set>
+                                      <p:cBhvr>
+                                        <p:cTn id="40" dur="1" fill="hold">
+                                          <p:stCondLst>
+                                            <p:cond delay="0"/>
+                                          </p:stCondLst>
+                                        </p:cTn>
+                                        <p:tgtEl>
+                                          <p:spTgt spid="24"/>
+                                        </p:tgtEl>
+                                        <p:attrNameLst>
+                                          <p:attrName>style.visibility</p:attrName>
+                                        </p:attrNameLst>
+                                      </p:cBhvr>
+                                      <p:to>
+                                        <p:strVal val="visible"/>
+                                      </p:to>
+                                    </p:set>
+                                    <p:animEffect transition="in" filter="fade">
+                                      <p:cBhvr>
+                                        <p:cTn id="41" dur="500"/>
+                                        <p:tgtEl>
+                                          <p:spTgt spid="24"/>
+                                        </p:tgtEl>
+                                      </p:cBhvr>
+                                    </p:animEffect>
+                                  </p:childTnLst>
+                                </p:cTn>
+                              </p:par>
+                              <p:par>
+                                <p:cTn id="42" presetID="10" presetClass="entr" presetSubtype="0" fill="hold" grpId="0" nodeType="withEffect">
                                   <p:stCondLst>
                                     <p:cond delay="0"/>
                                   </p:stCondLst>
@@ -10714,7 +10247,7 @@
                                           </p:stCondLst>
                                         </p:cTn>
                                         <p:tgtEl>
-                                          <p:spTgt spid="27"/>
+                                          <p:spTgt spid="25"/>
                                         </p:tgtEl>
                                         <p:attrNameLst>
                                           <p:attrName>style.visibility</p:attrName>
@@ -10728,7 +10261,7 @@
                                       <p:cBhvr>
                                         <p:cTn id="44" dur="500"/>
                                         <p:tgtEl>
-                                          <p:spTgt spid="27"/>
+                                          <p:spTgt spid="25"/>
                                         </p:tgtEl>
                                       </p:cBhvr>
                                     </p:animEffect>
@@ -10749,7 +10282,7 @@
                                           </p:stCondLst>
                                         </p:cTn>
                                         <p:tgtEl>
-                                          <p:spTgt spid="28"/>
+                                          <p:spTgt spid="26"/>
                                         </p:tgtEl>
                                         <p:attrNameLst>
                                           <p:attrName>style.visibility</p:attrName>
@@ -10763,7 +10296,7 @@
                                       <p:cBhvr>
                                         <p:cTn id="47" dur="500"/>
                                         <p:tgtEl>
-                                          <p:spTgt spid="28"/>
+                                          <p:spTgt spid="26"/>
                                         </p:tgtEl>
                                       </p:cBhvr>
                                     </p:animEffect>
@@ -10771,7 +10304,7 @@
                                 </p:cTn>
                               </p:par>
                               <p:par>
-                                <p:cTn id="48" presetID="10" presetClass="entr" presetSubtype="0" fill="hold" grpId="0" nodeType="withEffect">
+                                <p:cTn id="48" presetID="10" presetClass="entr" presetSubtype="0" fill="hold" nodeType="withEffect">
                                   <p:stCondLst>
                                     <p:cond delay="0"/>
                                   </p:stCondLst>
@@ -10784,7 +10317,7 @@
                                           </p:stCondLst>
                                         </p:cTn>
                                         <p:tgtEl>
-                                          <p:spTgt spid="29"/>
+                                          <p:spTgt spid="27"/>
                                         </p:tgtEl>
                                         <p:attrNameLst>
                                           <p:attrName>style.visibility</p:attrName>
@@ -10798,7 +10331,7 @@
                                       <p:cBhvr>
                                         <p:cTn id="50" dur="500"/>
                                         <p:tgtEl>
-                                          <p:spTgt spid="29"/>
+                                          <p:spTgt spid="27"/>
                                         </p:tgtEl>
                                       </p:cBhvr>
                                     </p:animEffect>
@@ -10806,7 +10339,7 @@
                                 </p:cTn>
                               </p:par>
                               <p:par>
-                                <p:cTn id="51" presetID="10" presetClass="entr" presetSubtype="0" fill="hold" nodeType="withEffect">
+                                <p:cTn id="51" presetID="10" presetClass="entr" presetSubtype="0" fill="hold" grpId="0" nodeType="withEffect">
                                   <p:stCondLst>
                                     <p:cond delay="0"/>
                                   </p:stCondLst>
@@ -10819,7 +10352,7 @@
                                           </p:stCondLst>
                                         </p:cTn>
                                         <p:tgtEl>
-                                          <p:spTgt spid="30"/>
+                                          <p:spTgt spid="28"/>
                                         </p:tgtEl>
                                         <p:attrNameLst>
                                           <p:attrName>style.visibility</p:attrName>
@@ -10833,77 +10366,7 @@
                                       <p:cBhvr>
                                         <p:cTn id="53" dur="500"/>
                                         <p:tgtEl>
-                                          <p:spTgt spid="30"/>
-                                        </p:tgtEl>
-                                      </p:cBhvr>
-                                    </p:animEffect>
-                                  </p:childTnLst>
-                                </p:cTn>
-                              </p:par>
-                              <p:par>
-                                <p:cTn id="54" presetID="10" presetClass="entr" presetSubtype="0" fill="hold" grpId="0" nodeType="withEffect">
-                                  <p:stCondLst>
-                                    <p:cond delay="0"/>
-                                  </p:stCondLst>
-                                  <p:childTnLst>
-                                    <p:set>
-                                      <p:cBhvr>
-                                        <p:cTn id="55" dur="1" fill="hold">
-                                          <p:stCondLst>
-                                            <p:cond delay="0"/>
-                                          </p:stCondLst>
-                                        </p:cTn>
-                                        <p:tgtEl>
-                                          <p:spTgt spid="31"/>
-                                        </p:tgtEl>
-                                        <p:attrNameLst>
-                                          <p:attrName>style.visibility</p:attrName>
-                                        </p:attrNameLst>
-                                      </p:cBhvr>
-                                      <p:to>
-                                        <p:strVal val="visible"/>
-                                      </p:to>
-                                    </p:set>
-                                    <p:animEffect transition="in" filter="fade">
-                                      <p:cBhvr>
-                                        <p:cTn id="56" dur="500"/>
-                                        <p:tgtEl>
-                                          <p:spTgt spid="31"/>
-                                        </p:tgtEl>
-                                      </p:cBhvr>
-                                    </p:animEffect>
-                                  </p:childTnLst>
-                                </p:cTn>
-                              </p:par>
-                              <p:par>
-                                <p:cTn id="57" presetID="10" presetClass="entr" presetSubtype="0" fill="hold" grpId="0" nodeType="withEffect">
-                                  <p:stCondLst>
-                                    <p:cond delay="0"/>
-                                  </p:stCondLst>
-                                  <p:childTnLst>
-                                    <p:set>
-                                      <p:cBhvr>
-                                        <p:cTn id="58" dur="1" fill="hold">
-                                          <p:stCondLst>
-                                            <p:cond delay="0"/>
-                                          </p:stCondLst>
-                                        </p:cTn>
-                                        <p:tgtEl>
-                                          <p:spTgt spid="32"/>
-                                        </p:tgtEl>
-                                        <p:attrNameLst>
-                                          <p:attrName>style.visibility</p:attrName>
-                                        </p:attrNameLst>
-                                      </p:cBhvr>
-                                      <p:to>
-                                        <p:strVal val="visible"/>
-                                      </p:to>
-                                    </p:set>
-                                    <p:animEffect transition="in" filter="fade">
-                                      <p:cBhvr>
-                                        <p:cTn id="59" dur="500"/>
-                                        <p:tgtEl>
-                                          <p:spTgt spid="32"/>
+                                          <p:spTgt spid="28"/>
                                         </p:tgtEl>
                                       </p:cBhvr>
                                     </p:animEffect>
@@ -10938,17 +10401,15 @@
       </p:par>
     </p:tnLst>
     <p:bldLst>
-      <p:bldP spid="17" grpId="0" animBg="1"/>
-      <p:bldP spid="18" grpId="0" animBg="1"/>
+      <p:bldP spid="15" grpId="0" animBg="1"/>
+      <p:bldP spid="16" grpId="0" animBg="1"/>
+      <p:bldP spid="19" grpId="0" animBg="1"/>
       <p:bldP spid="21" grpId="0" animBg="1"/>
+      <p:bldP spid="22" grpId="0" animBg="1"/>
       <p:bldP spid="23" grpId="0" animBg="1"/>
-      <p:bldP spid="24" grpId="0" animBg="1"/>
       <p:bldP spid="25" grpId="0" animBg="1"/>
       <p:bldP spid="26" grpId="0" animBg="1"/>
       <p:bldP spid="28" grpId="0" animBg="1"/>
-      <p:bldP spid="29" grpId="0" animBg="1"/>
-      <p:bldP spid="31" grpId="0" animBg="1"/>
-      <p:bldP spid="32" grpId="0" animBg="1"/>
     </p:bldLst>
   </p:timing>
 </p:sld>
@@ -11157,11 +10618,11 @@
         <p:spPr>
           <a:xfrm>
             <a:off x="548640" y="2011680"/>
-            <a:ext cx="3511296" cy="2688336"/>
+            <a:ext cx="3511296" cy="2231136"/>
           </a:xfrm>
           <a:prstGeom prst="roundRect">
             <a:avLst>
-              <a:gd name="adj" fmla="val 2721"/>
+              <a:gd name="adj" fmla="val 3279"/>
             </a:avLst>
           </a:prstGeom>
           <a:solidFill>
@@ -11623,11 +11084,11 @@
         <p:spPr>
           <a:xfrm>
             <a:off x="4334256" y="2011680"/>
-            <a:ext cx="3511296" cy="2688336"/>
+            <a:ext cx="3511296" cy="2231136"/>
           </a:xfrm>
           <a:prstGeom prst="roundRect">
             <a:avLst>
-              <a:gd name="adj" fmla="val 2721"/>
+              <a:gd name="adj" fmla="val 3279"/>
             </a:avLst>
           </a:prstGeom>
           <a:solidFill>
@@ -12023,88 +11484,7 @@
       </p:sp>
       <p:sp>
         <p:nvSpPr>
-          <p:cNvPr id="19" name="Text 16"/>
-          <p:cNvSpPr txBox="1"/>
-          <p:nvPr/>
-        </p:nvSpPr>
-        <p:spPr>
-          <a:xfrm>
-            <a:off x="4517136" y="4041648"/>
-            <a:ext cx="3236976" cy="457200"/>
-          </a:xfrm>
-          <a:prstGeom prst="rect">
-            <a:avLst/>
-          </a:prstGeom>
-          <a:noFill/>
-          <a:ln/>
-        </p:spPr>
-        <p:txBody>
-          <a:bodyPr wrap="square" lIns="0" tIns="0" rIns="0" bIns="0" rtlCol="0" anchor="ctr"/>
-          <a:lstStyle/>
-          <a:p>
-            <a:pPr indent="0" marL="0">
-              <a:buNone/>
-            </a:pPr>
-            <a:r>
-              <a:rPr lang="en-US" sz="2000" dirty="0">
-                <a:solidFill>
-                  <a:srgbClr val="E8C878"/>
-                </a:solidFill>
-                <a:latin typeface="Consolas" pitchFamily="34" charset="0"/>
-                <a:ea typeface="Consolas" pitchFamily="34" charset="-122"/>
-                <a:cs typeface="Consolas" pitchFamily="34" charset="-120"/>
-              </a:rPr>
-              <a:t>print</a:t>
-            </a:r>
-            <a:pPr indent="0" marL="0">
-              <a:buNone/>
-            </a:pPr>
-            <a:r>
-              <a:rPr lang="en-US" sz="2000" dirty="0">
-                <a:solidFill>
-                  <a:srgbClr val="A9A9B4"/>
-                </a:solidFill>
-                <a:latin typeface="Consolas" pitchFamily="34" charset="0"/>
-                <a:ea typeface="Consolas" pitchFamily="34" charset="-122"/>
-                <a:cs typeface="Consolas" pitchFamily="34" charset="-120"/>
-              </a:rPr>
-              <a:t>(</a:t>
-            </a:r>
-            <a:pPr indent="0" marL="0">
-              <a:buNone/>
-            </a:pPr>
-            <a:r>
-              <a:rPr lang="en-US" sz="2000" dirty="0">
-                <a:solidFill>
-                  <a:srgbClr val="E69F00"/>
-                </a:solidFill>
-                <a:latin typeface="Consolas" pitchFamily="34" charset="0"/>
-                <a:ea typeface="Consolas" pitchFamily="34" charset="-122"/>
-                <a:cs typeface="Consolas" pitchFamily="34" charset="-120"/>
-              </a:rPr>
-              <a:t>"Scan done"</a:t>
-            </a:r>
-            <a:pPr indent="0" marL="0">
-              <a:buNone/>
-            </a:pPr>
-            <a:r>
-              <a:rPr lang="en-US" sz="2000" dirty="0">
-                <a:solidFill>
-                  <a:srgbClr val="A9A9B4"/>
-                </a:solidFill>
-                <a:latin typeface="Consolas" pitchFamily="34" charset="0"/>
-                <a:ea typeface="Consolas" pitchFamily="34" charset="-122"/>
-                <a:cs typeface="Consolas" pitchFamily="34" charset="-120"/>
-              </a:rPr>
-              <a:t>)</a:t>
-            </a:r>
-            <a:endParaRPr lang="en-US" sz="2000" dirty="0"/>
-          </a:p>
-        </p:txBody>
-      </p:sp>
-      <p:sp>
-        <p:nvSpPr>
-          <p:cNvPr id="20" name="Shape 17"/>
+          <p:cNvPr id="19" name="Shape 16"/>
           <p:cNvSpPr/>
           <p:nvPr/>
         </p:nvSpPr>
@@ -12124,7 +11504,7 @@
       </p:sp>
       <p:sp>
         <p:nvSpPr>
-          <p:cNvPr id="21" name="Text 18"/>
+          <p:cNvPr id="20" name="Text 17"/>
           <p:cNvSpPr txBox="1"/>
           <p:nvPr/>
         </p:nvSpPr>
@@ -12163,18 +11543,18 @@
       </p:sp>
       <p:sp>
         <p:nvSpPr>
-          <p:cNvPr id="22" name="code"/>
+          <p:cNvPr id="21" name="code"/>
           <p:cNvSpPr/>
           <p:nvPr/>
         </p:nvSpPr>
         <p:spPr>
           <a:xfrm>
             <a:off x="8119872" y="2011680"/>
-            <a:ext cx="3511296" cy="2688336"/>
+            <a:ext cx="3511296" cy="2231136"/>
           </a:xfrm>
           <a:prstGeom prst="roundRect">
             <a:avLst>
-              <a:gd name="adj" fmla="val 2721"/>
+              <a:gd name="adj" fmla="val 3279"/>
             </a:avLst>
           </a:prstGeom>
           <a:solidFill>
@@ -12190,7 +11570,7 @@
       </p:sp>
       <p:sp>
         <p:nvSpPr>
-          <p:cNvPr id="23" name="Text 20"/>
+          <p:cNvPr id="22" name="Text 19"/>
           <p:cNvSpPr txBox="1"/>
           <p:nvPr/>
         </p:nvSpPr>
@@ -12327,7 +11707,7 @@
       </p:sp>
       <p:sp>
         <p:nvSpPr>
-          <p:cNvPr id="24" name="Text 21"/>
+          <p:cNvPr id="23" name="Text 20"/>
           <p:cNvSpPr txBox="1"/>
           <p:nvPr/>
         </p:nvSpPr>
@@ -12422,7 +11802,7 @@
       </p:sp>
       <p:sp>
         <p:nvSpPr>
-          <p:cNvPr id="25" name="Text 22"/>
+          <p:cNvPr id="24" name="Text 21"/>
           <p:cNvSpPr txBox="1"/>
           <p:nvPr/>
         </p:nvSpPr>
@@ -12475,7 +11855,7 @@
       </p:sp>
       <p:sp>
         <p:nvSpPr>
-          <p:cNvPr id="26" name="Text 23"/>
+          <p:cNvPr id="25" name="Text 22"/>
           <p:cNvSpPr txBox="1"/>
           <p:nvPr/>
         </p:nvSpPr>
@@ -12570,94 +11950,13 @@
       </p:sp>
       <p:sp>
         <p:nvSpPr>
-          <p:cNvPr id="27" name="Text 24"/>
-          <p:cNvSpPr txBox="1"/>
-          <p:nvPr/>
-        </p:nvSpPr>
-        <p:spPr>
-          <a:xfrm>
-            <a:off x="8302752" y="4041648"/>
-            <a:ext cx="3236976" cy="457200"/>
-          </a:xfrm>
-          <a:prstGeom prst="rect">
-            <a:avLst/>
-          </a:prstGeom>
-          <a:noFill/>
-          <a:ln/>
-        </p:spPr>
-        <p:txBody>
-          <a:bodyPr wrap="square" lIns="0" tIns="0" rIns="0" bIns="0" rtlCol="0" anchor="ctr"/>
-          <a:lstStyle/>
-          <a:p>
-            <a:pPr indent="0" marL="0">
-              <a:buNone/>
-            </a:pPr>
-            <a:r>
-              <a:rPr lang="en-US" sz="2000" dirty="0">
-                <a:solidFill>
-                  <a:srgbClr val="E8C878"/>
-                </a:solidFill>
-                <a:latin typeface="Consolas" pitchFamily="34" charset="0"/>
-                <a:ea typeface="Consolas" pitchFamily="34" charset="-122"/>
-                <a:cs typeface="Consolas" pitchFamily="34" charset="-120"/>
-              </a:rPr>
-              <a:t>print</a:t>
-            </a:r>
-            <a:pPr indent="0" marL="0">
-              <a:buNone/>
-            </a:pPr>
-            <a:r>
-              <a:rPr lang="en-US" sz="2000" dirty="0">
-                <a:solidFill>
-                  <a:srgbClr val="A9A9B4"/>
-                </a:solidFill>
-                <a:latin typeface="Consolas" pitchFamily="34" charset="0"/>
-                <a:ea typeface="Consolas" pitchFamily="34" charset="-122"/>
-                <a:cs typeface="Consolas" pitchFamily="34" charset="-120"/>
-              </a:rPr>
-              <a:t>(</a:t>
-            </a:r>
-            <a:pPr indent="0" marL="0">
-              <a:buNone/>
-            </a:pPr>
-            <a:r>
-              <a:rPr lang="en-US" sz="2000" dirty="0">
-                <a:solidFill>
-                  <a:srgbClr val="E69F00"/>
-                </a:solidFill>
-                <a:latin typeface="Consolas" pitchFamily="34" charset="0"/>
-                <a:ea typeface="Consolas" pitchFamily="34" charset="-122"/>
-                <a:cs typeface="Consolas" pitchFamily="34" charset="-120"/>
-              </a:rPr>
-              <a:t>"End"</a:t>
-            </a:r>
-            <a:pPr indent="0" marL="0">
-              <a:buNone/>
-            </a:pPr>
-            <a:r>
-              <a:rPr lang="en-US" sz="2000" dirty="0">
-                <a:solidFill>
-                  <a:srgbClr val="A9A9B4"/>
-                </a:solidFill>
-                <a:latin typeface="Consolas" pitchFamily="34" charset="0"/>
-                <a:ea typeface="Consolas" pitchFamily="34" charset="-122"/>
-                <a:cs typeface="Consolas" pitchFamily="34" charset="-120"/>
-              </a:rPr>
-              <a:t>)</a:t>
-            </a:r>
-            <a:endParaRPr lang="en-US" sz="2000" dirty="0"/>
-          </a:p>
-        </p:txBody>
-      </p:sp>
-      <p:sp>
-        <p:nvSpPr>
-          <p:cNvPr id="28" name="Shape 25"/>
+          <p:cNvPr id="26" name="Shape 23"/>
           <p:cNvSpPr/>
           <p:nvPr/>
         </p:nvSpPr>
         <p:spPr>
           <a:xfrm>
-            <a:off x="548640" y="5020056"/>
+            <a:off x="548640" y="4562856"/>
             <a:ext cx="11091672" cy="914400"/>
           </a:xfrm>
           <a:prstGeom prst="roundRect">
@@ -12678,13 +11977,13 @@
       </p:sp>
       <p:sp>
         <p:nvSpPr>
-          <p:cNvPr id="29" name="Text 26"/>
-          <p:cNvSpPr txBox="1"/>
-          <p:nvPr/>
-        </p:nvSpPr>
-        <p:spPr>
-          <a:xfrm>
-            <a:off x="914400" y="5020056"/>
+          <p:cNvPr id="27" name="Text 24"/>
+          <p:cNvSpPr txBox="1"/>
+          <p:nvPr/>
+        </p:nvSpPr>
+        <p:spPr>
+          <a:xfrm>
+            <a:off x="914400" y="4562856"/>
             <a:ext cx="10332720" cy="914400"/>
           </a:xfrm>
           <a:prstGeom prst="rect">
@@ -12731,7 +12030,7 @@
       </p:sp>
       <p:sp>
         <p:nvSpPr>
-          <p:cNvPr id="30" name="Shape 27"/>
+          <p:cNvPr id="28" name="Shape 25"/>
           <p:cNvSpPr/>
           <p:nvPr/>
         </p:nvSpPr>
@@ -12758,7 +12057,7 @@
       </p:sp>
       <p:sp>
         <p:nvSpPr>
-          <p:cNvPr id="31" name="Text 28"/>
+          <p:cNvPr id="29" name="Text 26"/>
           <p:cNvSpPr txBox="1"/>
           <p:nvPr/>
         </p:nvSpPr>
@@ -12797,7 +12096,7 @@
       </p:sp>
       <p:sp>
         <p:nvSpPr>
-          <p:cNvPr id="32" name="Shape 29"/>
+          <p:cNvPr id="30" name="Shape 27"/>
           <p:cNvSpPr/>
           <p:nvPr/>
         </p:nvSpPr>
@@ -12819,7 +12118,7 @@
       </p:sp>
       <p:sp>
         <p:nvSpPr>
-          <p:cNvPr id="33" name="Text 30"/>
+          <p:cNvPr id="31" name="Text 28"/>
           <p:cNvSpPr txBox="1"/>
           <p:nvPr/>
         </p:nvSpPr>
@@ -12858,7 +12157,7 @@
       </p:sp>
       <p:pic>
         <p:nvPicPr>
-          <p:cNvPr id="34" name="Image 1" descr="Deliberate practice">    </p:cNvPr>
+          <p:cNvPr id="32" name="Image 1" descr="Deliberate practice">    </p:cNvPr>
           <p:cNvPicPr>
             <a:picLocks noChangeAspect="1"/>
           </p:cNvPicPr>
@@ -12882,7 +12181,7 @@
       </p:pic>
       <p:sp>
         <p:nvSpPr>
-          <p:cNvPr id="25" name="Slide Number Placeholder 0"/>
+          <p:cNvPr id="33" name="Slide Number Placeholder 0"/>
           <p:cNvSpPr>
             <a:spLocks noGrp="1"/>
           </p:cNvSpPr>
@@ -13192,11 +12491,11 @@
         <p:spPr>
           <a:xfrm>
             <a:off x="548640" y="2011680"/>
-            <a:ext cx="3511296" cy="2688336"/>
+            <a:ext cx="3511296" cy="2231136"/>
           </a:xfrm>
           <a:prstGeom prst="roundRect">
             <a:avLst>
-              <a:gd name="adj" fmla="val 2721"/>
+              <a:gd name="adj" fmla="val 3279"/>
             </a:avLst>
           </a:prstGeom>
           <a:solidFill>
@@ -13598,7 +12897,7 @@
         </p:nvSpPr>
         <p:spPr>
           <a:xfrm>
-            <a:off x="548640" y="4882896"/>
+            <a:off x="548640" y="4425696"/>
             <a:ext cx="3511296" cy="822960"/>
           </a:xfrm>
           <a:prstGeom prst="roundRect">
@@ -13625,7 +12924,7 @@
         </p:nvSpPr>
         <p:spPr>
           <a:xfrm>
-            <a:off x="777240" y="5111496"/>
+            <a:off x="777240" y="4654296"/>
             <a:ext cx="3054096" cy="365760"/>
           </a:xfrm>
           <a:prstGeom prst="rect">
@@ -13777,11 +13076,11 @@
         <p:spPr>
           <a:xfrm>
             <a:off x="4334256" y="2011680"/>
-            <a:ext cx="3511296" cy="2688336"/>
+            <a:ext cx="3511296" cy="2231136"/>
           </a:xfrm>
           <a:prstGeom prst="roundRect">
             <a:avLst>
-              <a:gd name="adj" fmla="val 2721"/>
+              <a:gd name="adj" fmla="val 3279"/>
             </a:avLst>
           </a:prstGeom>
           <a:solidFill>
@@ -14177,99 +13476,18 @@
       </p:sp>
       <p:sp>
         <p:nvSpPr>
-          <p:cNvPr id="23" name="Text 20"/>
-          <p:cNvSpPr txBox="1"/>
-          <p:nvPr/>
-        </p:nvSpPr>
-        <p:spPr>
-          <a:xfrm>
-            <a:off x="4517136" y="4041648"/>
-            <a:ext cx="3236976" cy="457200"/>
-          </a:xfrm>
-          <a:prstGeom prst="rect">
-            <a:avLst/>
-          </a:prstGeom>
-          <a:noFill/>
-          <a:ln/>
-        </p:spPr>
-        <p:txBody>
-          <a:bodyPr wrap="square" lIns="0" tIns="0" rIns="0" bIns="0" rtlCol="0" anchor="ctr"/>
-          <a:lstStyle/>
-          <a:p>
-            <a:pPr indent="0" marL="0">
-              <a:buNone/>
-            </a:pPr>
-            <a:r>
-              <a:rPr lang="en-US" sz="2000" dirty="0">
-                <a:solidFill>
-                  <a:srgbClr val="E8C878"/>
-                </a:solidFill>
-                <a:latin typeface="Consolas" pitchFamily="34" charset="0"/>
-                <a:ea typeface="Consolas" pitchFamily="34" charset="-122"/>
-                <a:cs typeface="Consolas" pitchFamily="34" charset="-120"/>
-              </a:rPr>
-              <a:t>print</a:t>
-            </a:r>
-            <a:pPr indent="0" marL="0">
-              <a:buNone/>
-            </a:pPr>
-            <a:r>
-              <a:rPr lang="en-US" sz="2000" dirty="0">
-                <a:solidFill>
-                  <a:srgbClr val="A9A9B4"/>
-                </a:solidFill>
-                <a:latin typeface="Consolas" pitchFamily="34" charset="0"/>
-                <a:ea typeface="Consolas" pitchFamily="34" charset="-122"/>
-                <a:cs typeface="Consolas" pitchFamily="34" charset="-120"/>
-              </a:rPr>
-              <a:t>(</a:t>
-            </a:r>
-            <a:pPr indent="0" marL="0">
-              <a:buNone/>
-            </a:pPr>
-            <a:r>
-              <a:rPr lang="en-US" sz="2000" dirty="0">
-                <a:solidFill>
-                  <a:srgbClr val="E69F00"/>
-                </a:solidFill>
-                <a:latin typeface="Consolas" pitchFamily="34" charset="0"/>
-                <a:ea typeface="Consolas" pitchFamily="34" charset="-122"/>
-                <a:cs typeface="Consolas" pitchFamily="34" charset="-120"/>
-              </a:rPr>
-              <a:t>"Scan done"</a:t>
-            </a:r>
-            <a:pPr indent="0" marL="0">
-              <a:buNone/>
-            </a:pPr>
-            <a:r>
-              <a:rPr lang="en-US" sz="2000" dirty="0">
-                <a:solidFill>
-                  <a:srgbClr val="A9A9B4"/>
-                </a:solidFill>
-                <a:latin typeface="Consolas" pitchFamily="34" charset="0"/>
-                <a:ea typeface="Consolas" pitchFamily="34" charset="-122"/>
-                <a:cs typeface="Consolas" pitchFamily="34" charset="-120"/>
-              </a:rPr>
-              <a:t>)</a:t>
-            </a:r>
-            <a:endParaRPr lang="en-US" sz="2000" dirty="0"/>
-          </a:p>
-        </p:txBody>
-      </p:sp>
-      <p:sp>
-        <p:nvSpPr>
-          <p:cNvPr id="24" name="terminal"/>
+          <p:cNvPr id="23" name="terminal"/>
           <p:cNvSpPr/>
           <p:nvPr/>
         </p:nvSpPr>
         <p:spPr>
           <a:xfrm>
-            <a:off x="4334256" y="4882896"/>
-            <a:ext cx="3511296" cy="1188720"/>
+            <a:off x="4334256" y="4425696"/>
+            <a:ext cx="3511296" cy="822960"/>
           </a:xfrm>
           <a:prstGeom prst="roundRect">
             <a:avLst>
-              <a:gd name="adj" fmla="val 6154"/>
+              <a:gd name="adj" fmla="val 8889"/>
             </a:avLst>
           </a:prstGeom>
           <a:solidFill>
@@ -14285,13 +13503,13 @@
       </p:sp>
       <p:sp>
         <p:nvSpPr>
-          <p:cNvPr id="25" name="Text 22"/>
-          <p:cNvSpPr txBox="1"/>
-          <p:nvPr/>
-        </p:nvSpPr>
-        <p:spPr>
-          <a:xfrm>
-            <a:off x="4562856" y="5111496"/>
+          <p:cNvPr id="24" name="Text 21"/>
+          <p:cNvSpPr txBox="1"/>
+          <p:nvPr/>
+        </p:nvSpPr>
+        <p:spPr>
+          <a:xfrm>
+            <a:off x="4562856" y="4654296"/>
             <a:ext cx="3054096" cy="365760"/>
           </a:xfrm>
           <a:prstGeom prst="rect">
@@ -14324,46 +13542,7 @@
       </p:sp>
       <p:sp>
         <p:nvSpPr>
-          <p:cNvPr id="26" name="Text 23"/>
-          <p:cNvSpPr txBox="1"/>
-          <p:nvPr/>
-        </p:nvSpPr>
-        <p:spPr>
-          <a:xfrm>
-            <a:off x="4562856" y="5477256"/>
-            <a:ext cx="3054096" cy="365760"/>
-          </a:xfrm>
-          <a:prstGeom prst="rect">
-            <a:avLst/>
-          </a:prstGeom>
-          <a:noFill/>
-          <a:ln/>
-        </p:spPr>
-        <p:txBody>
-          <a:bodyPr wrap="square" lIns="0" tIns="0" rIns="0" bIns="0" rtlCol="0" anchor="ctr"/>
-          <a:lstStyle/>
-          <a:p>
-            <a:pPr indent="0" marL="0">
-              <a:buNone/>
-            </a:pPr>
-            <a:r>
-              <a:rPr lang="en-US" sz="1800" dirty="0">
-                <a:solidFill>
-                  <a:srgbClr val="F5F5F3"/>
-                </a:solidFill>
-                <a:latin typeface="Consolas" pitchFamily="34" charset="0"/>
-                <a:ea typeface="Consolas" pitchFamily="34" charset="-122"/>
-                <a:cs typeface="Consolas" pitchFamily="34" charset="-120"/>
-              </a:rPr>
-              <a:t>Scan done</a:t>
-            </a:r>
-            <a:endParaRPr lang="en-US" sz="1800" dirty="0"/>
-          </a:p>
-        </p:txBody>
-      </p:sp>
-      <p:sp>
-        <p:nvSpPr>
-          <p:cNvPr id="27" name="Shape 24"/>
+          <p:cNvPr id="25" name="Shape 22"/>
           <p:cNvSpPr/>
           <p:nvPr/>
         </p:nvSpPr>
@@ -14383,7 +13562,7 @@
       </p:sp>
       <p:sp>
         <p:nvSpPr>
-          <p:cNvPr id="28" name="Text 25"/>
+          <p:cNvPr id="26" name="Text 23"/>
           <p:cNvSpPr txBox="1"/>
           <p:nvPr/>
         </p:nvSpPr>
@@ -14422,7 +13601,7 @@
       </p:sp>
       <p:sp>
         <p:nvSpPr>
-          <p:cNvPr id="29" name="Text 26"/>
+          <p:cNvPr id="27" name="Text 24"/>
           <p:cNvSpPr txBox="1"/>
           <p:nvPr/>
         </p:nvSpPr>
@@ -14475,18 +13654,18 @@
       </p:sp>
       <p:sp>
         <p:nvSpPr>
-          <p:cNvPr id="30" name="code"/>
+          <p:cNvPr id="28" name="code"/>
           <p:cNvSpPr/>
           <p:nvPr/>
         </p:nvSpPr>
         <p:spPr>
           <a:xfrm>
             <a:off x="8119872" y="2011680"/>
-            <a:ext cx="3511296" cy="2688336"/>
+            <a:ext cx="3511296" cy="2231136"/>
           </a:xfrm>
           <a:prstGeom prst="roundRect">
             <a:avLst>
-              <a:gd name="adj" fmla="val 2721"/>
+              <a:gd name="adj" fmla="val 3279"/>
             </a:avLst>
           </a:prstGeom>
           <a:solidFill>
@@ -14502,7 +13681,7 @@
       </p:sp>
       <p:sp>
         <p:nvSpPr>
-          <p:cNvPr id="31" name="Text 28"/>
+          <p:cNvPr id="29" name="Text 26"/>
           <p:cNvSpPr txBox="1"/>
           <p:nvPr/>
         </p:nvSpPr>
@@ -14639,7 +13818,7 @@
       </p:sp>
       <p:sp>
         <p:nvSpPr>
-          <p:cNvPr id="32" name="Text 29"/>
+          <p:cNvPr id="30" name="Text 27"/>
           <p:cNvSpPr txBox="1"/>
           <p:nvPr/>
         </p:nvSpPr>
@@ -14734,7 +13913,7 @@
       </p:sp>
       <p:sp>
         <p:nvSpPr>
-          <p:cNvPr id="33" name="Text 30"/>
+          <p:cNvPr id="31" name="Text 28"/>
           <p:cNvSpPr txBox="1"/>
           <p:nvPr/>
         </p:nvSpPr>
@@ -14787,7 +13966,7 @@
       </p:sp>
       <p:sp>
         <p:nvSpPr>
-          <p:cNvPr id="34" name="Text 31"/>
+          <p:cNvPr id="32" name="Text 29"/>
           <p:cNvSpPr txBox="1"/>
           <p:nvPr/>
         </p:nvSpPr>
@@ -14882,99 +14061,18 @@
       </p:sp>
       <p:sp>
         <p:nvSpPr>
-          <p:cNvPr id="35" name="Text 32"/>
-          <p:cNvSpPr txBox="1"/>
-          <p:nvPr/>
-        </p:nvSpPr>
-        <p:spPr>
-          <a:xfrm>
-            <a:off x="8302752" y="4041648"/>
-            <a:ext cx="3236976" cy="457200"/>
-          </a:xfrm>
-          <a:prstGeom prst="rect">
-            <a:avLst/>
-          </a:prstGeom>
-          <a:noFill/>
-          <a:ln/>
-        </p:spPr>
-        <p:txBody>
-          <a:bodyPr wrap="square" lIns="0" tIns="0" rIns="0" bIns="0" rtlCol="0" anchor="ctr"/>
-          <a:lstStyle/>
-          <a:p>
-            <a:pPr indent="0" marL="0">
-              <a:buNone/>
-            </a:pPr>
-            <a:r>
-              <a:rPr lang="en-US" sz="2000" dirty="0">
-                <a:solidFill>
-                  <a:srgbClr val="E8C878"/>
-                </a:solidFill>
-                <a:latin typeface="Consolas" pitchFamily="34" charset="0"/>
-                <a:ea typeface="Consolas" pitchFamily="34" charset="-122"/>
-                <a:cs typeface="Consolas" pitchFamily="34" charset="-120"/>
-              </a:rPr>
-              <a:t>print</a:t>
-            </a:r>
-            <a:pPr indent="0" marL="0">
-              <a:buNone/>
-            </a:pPr>
-            <a:r>
-              <a:rPr lang="en-US" sz="2000" dirty="0">
-                <a:solidFill>
-                  <a:srgbClr val="A9A9B4"/>
-                </a:solidFill>
-                <a:latin typeface="Consolas" pitchFamily="34" charset="0"/>
-                <a:ea typeface="Consolas" pitchFamily="34" charset="-122"/>
-                <a:cs typeface="Consolas" pitchFamily="34" charset="-120"/>
-              </a:rPr>
-              <a:t>(</a:t>
-            </a:r>
-            <a:pPr indent="0" marL="0">
-              <a:buNone/>
-            </a:pPr>
-            <a:r>
-              <a:rPr lang="en-US" sz="2000" dirty="0">
-                <a:solidFill>
-                  <a:srgbClr val="E69F00"/>
-                </a:solidFill>
-                <a:latin typeface="Consolas" pitchFamily="34" charset="0"/>
-                <a:ea typeface="Consolas" pitchFamily="34" charset="-122"/>
-                <a:cs typeface="Consolas" pitchFamily="34" charset="-120"/>
-              </a:rPr>
-              <a:t>"End"</a:t>
-            </a:r>
-            <a:pPr indent="0" marL="0">
-              <a:buNone/>
-            </a:pPr>
-            <a:r>
-              <a:rPr lang="en-US" sz="2000" dirty="0">
-                <a:solidFill>
-                  <a:srgbClr val="A9A9B4"/>
-                </a:solidFill>
-                <a:latin typeface="Consolas" pitchFamily="34" charset="0"/>
-                <a:ea typeface="Consolas" pitchFamily="34" charset="-122"/>
-                <a:cs typeface="Consolas" pitchFamily="34" charset="-120"/>
-              </a:rPr>
-              <a:t>)</a:t>
-            </a:r>
-            <a:endParaRPr lang="en-US" sz="2000" dirty="0"/>
-          </a:p>
-        </p:txBody>
-      </p:sp>
-      <p:sp>
-        <p:nvSpPr>
-          <p:cNvPr id="36" name="terminal"/>
+          <p:cNvPr id="33" name="terminal"/>
           <p:cNvSpPr/>
           <p:nvPr/>
         </p:nvSpPr>
         <p:spPr>
           <a:xfrm>
-            <a:off x="8119872" y="4882896"/>
-            <a:ext cx="3511296" cy="1188720"/>
+            <a:off x="8119872" y="4425696"/>
+            <a:ext cx="3511296" cy="822960"/>
           </a:xfrm>
           <a:prstGeom prst="roundRect">
             <a:avLst>
-              <a:gd name="adj" fmla="val 6154"/>
+              <a:gd name="adj" fmla="val 8889"/>
             </a:avLst>
           </a:prstGeom>
           <a:solidFill>
@@ -14990,13 +14088,13 @@
       </p:sp>
       <p:sp>
         <p:nvSpPr>
-          <p:cNvPr id="37" name="Text 34"/>
-          <p:cNvSpPr txBox="1"/>
-          <p:nvPr/>
-        </p:nvSpPr>
-        <p:spPr>
-          <a:xfrm>
-            <a:off x="8348472" y="5111496"/>
+          <p:cNvPr id="34" name="Text 31"/>
+          <p:cNvSpPr txBox="1"/>
+          <p:nvPr/>
+        </p:nvSpPr>
+        <p:spPr>
+          <a:xfrm>
+            <a:off x="8348472" y="4654296"/>
             <a:ext cx="3054096" cy="365760"/>
           </a:xfrm>
           <a:prstGeom prst="rect">
@@ -15022,45 +14120,6 @@
                 <a:cs typeface="Consolas" pitchFamily="34" charset="-120"/>
               </a:rPr>
               <a:t>Ready</a:t>
-            </a:r>
-            <a:endParaRPr lang="en-US" sz="1800" dirty="0"/>
-          </a:p>
-        </p:txBody>
-      </p:sp>
-      <p:sp>
-        <p:nvSpPr>
-          <p:cNvPr id="38" name="Text 35"/>
-          <p:cNvSpPr txBox="1"/>
-          <p:nvPr/>
-        </p:nvSpPr>
-        <p:spPr>
-          <a:xfrm>
-            <a:off x="8348472" y="5477256"/>
-            <a:ext cx="3054096" cy="365760"/>
-          </a:xfrm>
-          <a:prstGeom prst="rect">
-            <a:avLst/>
-          </a:prstGeom>
-          <a:noFill/>
-          <a:ln/>
-        </p:spPr>
-        <p:txBody>
-          <a:bodyPr wrap="square" lIns="0" tIns="0" rIns="0" bIns="0" rtlCol="0" anchor="ctr"/>
-          <a:lstStyle/>
-          <a:p>
-            <a:pPr indent="0" marL="0">
-              <a:buNone/>
-            </a:pPr>
-            <a:r>
-              <a:rPr lang="en-US" sz="1800" dirty="0">
-                <a:solidFill>
-                  <a:srgbClr val="F5F5F3"/>
-                </a:solidFill>
-                <a:latin typeface="Consolas" pitchFamily="34" charset="0"/>
-                <a:ea typeface="Consolas" pitchFamily="34" charset="-122"/>
-                <a:cs typeface="Consolas" pitchFamily="34" charset="-120"/>
-              </a:rPr>
-              <a:t>End</a:t>
             </a:r>
             <a:endParaRPr lang="en-US" sz="1800" dirty="0"/>
           </a:p>
@@ -15068,7 +14127,7 @@
       </p:sp>
       <p:pic>
         <p:nvPicPr>
-          <p:cNvPr id="39" name="Image 1" descr="Feedback">    </p:cNvPr>
+          <p:cNvPr id="35" name="Image 1" descr="Feedback">    </p:cNvPr>
           <p:cNvPicPr>
             <a:picLocks noChangeAspect="1"/>
           </p:cNvPicPr>
@@ -15092,7 +14151,7 @@
       </p:pic>
       <p:sp>
         <p:nvSpPr>
-          <p:cNvPr id="25" name="Slide Number Placeholder 0"/>
+          <p:cNvPr id="36" name="Slide Number Placeholder 0"/>
           <p:cNvSpPr>
             <a:spLocks noGrp="1"/>
           </p:cNvSpPr>
@@ -18343,7 +17402,7 @@
       </p:pic>
       <p:sp>
         <p:nvSpPr>
-          <p:cNvPr id="25" name="Slide Number Placeholder 0"/>
+          <p:cNvPr id="57" name="Slide Number Placeholder 0"/>
           <p:cNvSpPr>
             <a:spLocks noGrp="1"/>
           </p:cNvSpPr>
@@ -21582,7 +20641,7 @@
       </p:pic>
       <p:sp>
         <p:nvSpPr>
-          <p:cNvPr id="25" name="Slide Number Placeholder 0"/>
+          <p:cNvPr id="57" name="Slide Number Placeholder 0"/>
           <p:cNvSpPr>
             <a:spLocks noGrp="1"/>
           </p:cNvSpPr>
@@ -24772,7 +23831,7 @@
       </p:pic>
       <p:sp>
         <p:nvSpPr>
-          <p:cNvPr id="25" name="Slide Number Placeholder 0"/>
+          <p:cNvPr id="38" name="Slide Number Placeholder 0"/>
           <p:cNvSpPr>
             <a:spLocks noGrp="1"/>
           </p:cNvSpPr>
@@ -27267,7 +26326,7 @@
       </p:pic>
       <p:sp>
         <p:nvSpPr>
-          <p:cNvPr id="25" name="Slide Number Placeholder 0"/>
+          <p:cNvPr id="43" name="Slide Number Placeholder 0"/>
           <p:cNvSpPr>
             <a:spLocks noGrp="1"/>
           </p:cNvSpPr>
@@ -29973,7 +29032,7 @@
       </p:pic>
       <p:sp>
         <p:nvSpPr>
-          <p:cNvPr id="25" name="Slide Number Placeholder 0"/>
+          <p:cNvPr id="64" name="Slide Number Placeholder 0"/>
           <p:cNvSpPr>
             <a:spLocks noGrp="1"/>
           </p:cNvSpPr>
@@ -33658,7 +32717,7 @@
       </p:pic>
       <p:sp>
         <p:nvSpPr>
-          <p:cNvPr id="25" name="Slide Number Placeholder 0"/>
+          <p:cNvPr id="56" name="Slide Number Placeholder 0"/>
           <p:cNvSpPr>
             <a:spLocks noGrp="1"/>
           </p:cNvSpPr>
@@ -36159,7 +35218,7 @@
       </p:pic>
       <p:sp>
         <p:nvSpPr>
-          <p:cNvPr id="25" name="Slide Number Placeholder 0"/>
+          <p:cNvPr id="59" name="Slide Number Placeholder 0"/>
           <p:cNvSpPr>
             <a:spLocks noGrp="1"/>
           </p:cNvSpPr>
@@ -42166,9 +41225,9 @@
           <p:nvPr/>
         </p:nvSpPr>
         <p:spPr>
-          <a:xfrm>
-            <a:off x="10149840" y="4983480"/>
-            <a:ext cx="-548640" cy="0"/>
+          <a:xfrm flipH="1">
+            <a:off x="9601200" y="4983480"/>
+            <a:ext cx="548640" cy="0"/>
           </a:xfrm>
           <a:prstGeom prst="line">
             <a:avLst/>
@@ -42311,7 +41370,7 @@
       </p:pic>
       <p:sp>
         <p:nvSpPr>
-          <p:cNvPr id="25" name="Slide Number Placeholder 0"/>
+          <p:cNvPr id="35" name="Slide Number Placeholder 0"/>
           <p:cNvSpPr>
             <a:spLocks noGrp="1"/>
           </p:cNvSpPr>
@@ -44394,7 +43453,7 @@
       </p:pic>
       <p:sp>
         <p:nvSpPr>
-          <p:cNvPr id="25" name="Slide Number Placeholder 0"/>
+          <p:cNvPr id="37" name="Slide Number Placeholder 0"/>
           <p:cNvSpPr>
             <a:spLocks noGrp="1"/>
           </p:cNvSpPr>
@@ -46193,7 +45252,7 @@
       </p:pic>
       <p:sp>
         <p:nvSpPr>
-          <p:cNvPr id="25" name="Slide Number Placeholder 0"/>
+          <p:cNvPr id="34" name="Slide Number Placeholder 0"/>
           <p:cNvSpPr>
             <a:spLocks noGrp="1"/>
           </p:cNvSpPr>
@@ -47997,7 +47056,7 @@
       </p:pic>
       <p:sp>
         <p:nvSpPr>
-          <p:cNvPr id="25" name="Slide Number Placeholder 0"/>
+          <p:cNvPr id="44" name="Slide Number Placeholder 0"/>
           <p:cNvSpPr>
             <a:spLocks noGrp="1"/>
           </p:cNvSpPr>

--- a/_presentations/Y9_Python/L2_Selection.pptx
+++ b/_presentations/Y9_Python/L2_Selection.pptx
@@ -29,9 +29,10 @@
     <p:sldId id="277" r:id="rId23"/>
     <p:sldId id="278" r:id="rId24"/>
     <p:sldId id="279" r:id="rId25"/>
+    <p:sldId id="280" r:id="rId26"/>
   </p:sldIdLst>
   <p:notesMasterIdLst>
-    <p:notesMasterId r:id="rId26"/>
+    <p:notesMasterId r:id="rId27"/>
   </p:notesMasterIdLst>
   <p:sldSz cx="12192000" cy="6858000"/>
   <p:notesSz cx="6858000" cy="12192000"/>
@@ -130,19 +131,19 @@
   <p:extLst>
     <p:ext uri="{521415D9-36F7-43E2-AB2F-B90AF26B5E84}">
       <p14:sectionLst xmlns:p14="http://schemas.microsoft.com/office/powerpoint/2010/main">
-        <p14:section name="Recap &amp; Recall" id="{0f421117-d509-24b3-9ccf-11a87fc1eccf}">
+        <p14:section name="Recap &amp; Recall" id="{fddc5c9a-9581-f635-f498-247c60b587c5}">
           <p14:sldIdLst>
             <p14:sldId id="256"/>
             <p14:sldId id="257"/>
           </p14:sldIdLst>
         </p14:section>
-        <p14:section name="Title" id="{ef6a82fd-3dcd-9664-e93a-15487647a331}">
+        <p14:section name="Title" id="{87b35a27-08e9-92b1-9d3d-93d7d00ceff6}">
           <p14:sldIdLst>
             <p14:sldId id="258"/>
             <p14:sldId id="259"/>
           </p14:sldIdLst>
         </p14:section>
-        <p14:section name="Conditions" id="{194a9aec-5710-3ce4-af3c-fd6852467943}">
+        <p14:section name="Conditions" id="{2652509f-47fe-d827-3b85-e477caaf3f1e}">
           <p14:sldIdLst>
             <p14:sldId id="260"/>
             <p14:sldId id="261"/>
@@ -151,7 +152,7 @@
             <p14:sldId id="264"/>
           </p14:sldIdLst>
         </p14:section>
-        <p14:section name="Round 1 — numbers" id="{be1aa771-b8b5-e5dc-316e-9e4b1bb0e89f}">
+        <p14:section name="Round 1 — numbers" id="{348098da-f3fc-c95f-ca3a-85b672bf595e}">
           <p14:sldIdLst>
             <p14:sldId id="265"/>
             <p14:sldId id="266"/>
@@ -160,7 +161,7 @@
             <p14:sldId id="269"/>
           </p14:sldIdLst>
         </p14:section>
-        <p14:section name="Round 2 — a variable" id="{9b5a94b4-dc66-0155-907a-fdf655c1e2f8}">
+        <p14:section name="Round 2 — a variable" id="{418cd184-e058-59fe-3c87-4cc6e3840a43}">
           <p14:sldIdLst>
             <p14:sldId id="270"/>
             <p14:sldId id="271"/>
@@ -169,21 +170,26 @@
             <p14:sldId id="274"/>
           </p14:sldIdLst>
         </p14:section>
-        <p14:section name="elif" id="{b49baefc-1053-6b73-8f5a-3d1aa40be04d}">
+        <p14:section name="elif" id="{c6ec689e-9140-98ce-efef-f15b0cd25565}">
           <p14:sldIdLst>
             <p14:sldId id="275"/>
             <p14:sldId id="276"/>
           </p14:sldIdLst>
         </p14:section>
-        <p14:section name="Proximity" id="{8eaa23fa-3156-f0c4-1984-11aa473c78d6}">
+        <p14:section name="Numbers from input" id="{a225005f-6bbd-e81d-1b71-830ea4c5ecd3}">
           <p14:sldIdLst>
             <p14:sldId id="277"/>
-            <p14:sldId id="278"/>
           </p14:sldIdLst>
         </p14:section>
-        <p14:section name="Plenary" id="{f0496135-4aa6-0d0e-b45a-46aa52f31c4d}">
+        <p14:section name="Proximity" id="{74cc8fef-ec61-91d8-9629-2a641386db5e}">
           <p14:sldIdLst>
+            <p14:sldId id="278"/>
             <p14:sldId id="279"/>
+          </p14:sldIdLst>
+        </p14:section>
+        <p14:section name="Plenary" id="{1f8487e9-7b3c-12da-adc3-49f76103f5d9}">
+          <p14:sldIdLst>
+            <p14:sldId id="280"/>
           </p14:sldIdLst>
         </p14:section>
       </p14:sectionLst>
@@ -591,7 +597,7 @@
             <a:r>
               <a:rPr lang="en-US" dirty="0"/>
               <a:t>DO NOW — 5 minutes, silent, no notes. Mini-whiteboards or books.
-Q1 is from Year 8 (variables); Q2–4 are from last lesson (joining, TypeError, str()).
+Q1 is from Year 8 (variables); Q2–4 are from last lesson, Wake Up (joining, the NameError bug, input()).
 Q1–2 are multiple choice (everyone commits to an answer). Q3–4 need a written answer.
 Confidence rating 1–3 next to each answer — confident-but-wrong is the one most worth correcting.</a:t>
             </a:r>
@@ -1597,8 +1603,8 @@
               <a:t>Reveal and self-mark. Hands up for "confident and wrong" on each.
 Q1: = STORES. Don't explain == yet — just say "keep that question in your head, we answer it today".
 Q2: "5" and "5" are strings (orange), so + joins them: 55. No space appears because there's no space inside the quotes.
-Q3: crew is a number (int), and + can't join text and a number. TypeError. Fix: str(crew).
-Q4: 90 − 25 = 65, then str() turns it into text so + can join it.</a:t>
+Q3: Python is case-sensitive: name and Name are different boxes, and Name was never stored. NameError — the Break it bug from Wake Up.
+Q4: input() always gives back text, even when you type a number: age holds "14", so + JOINS it to itself: 1414, not 28. Don't fix it yet — "we'll see how to turn it into a number before the activity".</a:t>
             </a:r>
             <a:endParaRPr lang="en-US" dirty="0"/>
           </a:p>
@@ -1870,11 +1876,12 @@
           <a:p>
             <a:r>
               <a:rPr lang="en-US" dirty="0"/>
-              <a:t>Students open "Proximity — Selection" from Google Classroom (Y9 › Python › Lesson 2).
-Predict (5 questions: Program A is if / else, Program B adds one elif) → Run (85, 20, 5) → Investigate (4 steps: swap the numbers, elif → if, &gt;= → &gt;, then Break it: int() removed → TypeError) → Modify (4 steps; step 1 is the lockdown choice) → Make (radiation scanner, plus the power choice).
-Circulate. During Investigate, point students back to the debugging recipe (Lesson 1) before they press Get help.
-Anyone who missed Lesson 1: the activity's "Previously…" recap catches them up on the story.
-Fast finishers: the Make extension (SCANNER FAULT below 0, EVACUATE from 500).</a:t>
+              <a:t>Casting is new for most of the class this year: it was in Lesson 1's second round (Life Support), which most students didn't reach.
+Link to Do Now Q4: age + age gave 1414 because input() gives TEXT.
+6 clicks: each line, then what's on screen, then what's in memory. The screen is the same both times: the difference is only in memory.
+Line 1: the box is orange (str) and holds "30" in quotes. An if can't compare that with 50: Python gives a TypeError (they'll do exactly this in Investigate's Break it step).
+Line 2: read it inside-out with your finger: input() asks, int() converts, = stores. The box is now an int: 30, no quotes.
+If someone types a word, like thirty, int() can't convert it: ValueError. The activity's "Remind me" card on the bug step says the same.</a:t>
             </a:r>
             <a:endParaRPr lang="en-US" dirty="0"/>
           </a:p>
@@ -1962,9 +1969,13 @@
           <a:p>
             <a:r>
               <a:rPr lang="en-US" dirty="0"/>
-              <a:t>Whole-class feedback after the activity — this was the Break it step in Investigate.
-Ask: "Which line did Python point to?" (2) "What's in the box?" (the text "30", orange: a str) "Why can't &gt;= compare it with 50?" (text and a number).
-The error shows on the line that USES the value, but the fix is on the line that STORED it. Same rule as last lesson: input() always gives text.</a:t>
+              <a:t>Students open "Proximity — Selection" from Google Classroom (Y9 › Python › Lesson 2).
+Predict (5 questions: Program A is if / else, Program B adds one elif) → Run (85, 20, 5) → Investigate (4 steps: swap the numbers, elif → if, &gt;= → &gt;, then Break it: int() removed → TypeError) → Modify (4 steps; step 1 is the lockdown choice) → Make (radiation scanner, plus the power choice).
+The three calls: Investigate step 1 opens with the CRISIS — frost is spreading across Pods 3 and 5, and the heaters can save one. Whoever isn't heated (Chen or Patel) goes critical, and their heart rate falls on every report until the lockdown (Modify 1) and power (Make) calls save them, or don't. There's no right answer to the crisis: let students argue about it. Step 1's task only appears once they've picked.
+Students whose Wake Up choices left Patel critical see that on the crisis card: heating Pod 5 saves him.
+Circulate. During Investigate, point students back to the debugging recipe (Lesson 1) before they press Get help.
+Anyone who missed Lesson 1, or didn't finish Wake Up: the activity's "Previously…" recap tells them all of it (Hale's pod, his last log, the tag that isn't human). They don't need to go back to Lesson 1. Life Support is now an optional bonus round, not needed for today.
+Fast finishers: the Make extension (SCANNER FAULT below 0, EVACUATE from 500).</a:t>
             </a:r>
             <a:endParaRPr lang="en-US" dirty="0"/>
           </a:p>
@@ -2052,11 +2063,9 @@
           <a:p>
             <a:r>
               <a:rPr lang="en-US" dirty="0"/>
-              <a:t>Exit task on whiteboards or a sticky note.
-1. if temp &gt;= 30: print("Hot") / elif temp &gt;= 15: print("Warm") / else: print("Cold"). Follow-up question: what does yours print when temp = 15? (Warm: 15 &gt;= 15 is True.) Any order that works is fine — check they didn't put &gt;= 15 first (then 30 would print Warm).
-2. if answer == "y": — one = stores, an if needs == to ask. It's a SyntaxError.
-Close the story: "For one frame, the sensors catch it: a figure in Hale's overalls, moving wrong. Then the airlock seals, and WARDEN changes the access code. Next lesson: you're locked in."
-In Slide Show this slide fades in through black and the red alarm creeps in by itself: Chapter 3's state, which Lesson 3's deck opens with.</a:t>
+              <a:t>Whole-class feedback after the activity — this was the Break it step in Investigate.
+Ask: "Which line did Python point to?" (2) "What's in the box?" (the text "30", orange: a str) "Why can't &gt;= compare it with 50?" (text and a number).
+The error shows on the line that USES the value, but the fix is on the line that STORED it. Same rule as last lesson: input() always gives text.</a:t>
             </a:r>
             <a:endParaRPr lang="en-US" dirty="0"/>
           </a:p>
@@ -2080,6 +2089,99 @@
             <a:fld id="{F7021451-1387-4CA6-816F-3879F97B5CBC}" type="slidenum">
               <a:rPr lang="en-US"/>
               <a:t>24</a:t>
+            </a:fld>
+            <a:endParaRPr lang="en-US"/>
+          </a:p>
+        </p:txBody>
+      </p:sp>
+    </p:spTree>
+    <p:extLst>
+      <p:ext uri="{BB962C8B-B14F-4D97-AF65-F5344CB8AC3E}">
+        <p14:creationId xmlns:p14="http://schemas.microsoft.com/office/powerpoint/2010/main" val="1024086991"/>
+      </p:ext>
+    </p:extLst>
+  </p:cSld>
+  <p:clrMapOvr>
+    <a:masterClrMapping/>
+  </p:clrMapOvr>
+</p:notes>
+</file>
+
+<file path=ppt/notesSlides/notesSlide25.xml><?xml version="1.0" encoding="utf-8"?>
+<p:notes xmlns:a="http://schemas.openxmlformats.org/drawingml/2006/main" xmlns:r="http://schemas.openxmlformats.org/officeDocument/2006/relationships" xmlns:p="http://schemas.openxmlformats.org/presentationml/2006/main">
+  <p:cSld>
+    <p:spTree>
+      <p:nvGrpSpPr>
+        <p:cNvPr id="1" name=""/>
+        <p:cNvGrpSpPr/>
+        <p:nvPr/>
+      </p:nvGrpSpPr>
+      <p:grpSpPr>
+        <a:xfrm>
+          <a:off x="0" y="0"/>
+          <a:ext cx="0" cy="0"/>
+          <a:chOff x="0" y="0"/>
+          <a:chExt cx="0" cy="0"/>
+        </a:xfrm>
+      </p:grpSpPr>
+      <p:sp>
+        <p:nvSpPr>
+          <p:cNvPr id="2" name="Slide Image Placeholder 1"/>
+          <p:cNvSpPr>
+            <a:spLocks noGrp="1" noRot="1" noChangeAspect="1"/>
+          </p:cNvSpPr>
+          <p:nvPr>
+            <p:ph type="sldImg"/>
+          </p:nvPr>
+        </p:nvSpPr>
+        <p:spPr/>
+      </p:sp>
+      <p:sp>
+        <p:nvSpPr>
+          <p:cNvPr id="3" name="Notes Placeholder 2"/>
+          <p:cNvSpPr>
+            <a:spLocks noGrp="1"/>
+          </p:cNvSpPr>
+          <p:nvPr>
+            <p:ph type="body" idx="1"/>
+          </p:nvPr>
+        </p:nvSpPr>
+        <p:spPr/>
+        <p:txBody>
+          <a:bodyPr/>
+          <a:lstStyle/>
+          <a:p>
+            <a:r>
+              <a:rPr lang="en-US" dirty="0"/>
+              <a:t>Exit task on whiteboards or a sticky note.
+1. if temp &gt;= 30: print("Hot") / elif temp &gt;= 15: print("Warm") / else: print("Cold"). Follow-up question: what does yours print when temp = 15? (Warm: 15 &gt;= 15 is True.) Any order that works is fine — check they didn't put &gt;= 15 first (then 30 would print Warm).
+2. if answer == "y": — one = stores, an if needs == to ask. It's a SyntaxError.
+Close the story: "For one frame, the sensors catch it: a figure in Hale's overalls, moving wrong. Then the airlock seals, and WARDEN changes the access code. Next lesson: you're locked in."
+Quick hands-up: "Whose crew member is still critical?" (Only students whose lockdown left the Cryo Bay open AND sent power to the sensors.) Their crew member can still be saved later: the rescue ship has to be fast.
+In Slide Show this slide fades in through black and the red alarm creeps in by itself: Chapter 3's state, which Lesson 3's deck opens with.</a:t>
+            </a:r>
+            <a:endParaRPr lang="en-US" dirty="0"/>
+          </a:p>
+        </p:txBody>
+      </p:sp>
+      <p:sp>
+        <p:nvSpPr>
+          <p:cNvPr id="4" name="Slide Number Placeholder 3"/>
+          <p:cNvSpPr>
+            <a:spLocks noGrp="1"/>
+          </p:cNvSpPr>
+          <p:nvPr>
+            <p:ph type="sldNum" sz="quarter" idx="10"/>
+          </p:nvPr>
+        </p:nvSpPr>
+        <p:spPr/>
+        <p:txBody>
+          <a:bodyPr/>
+          <a:lstStyle/>
+          <a:p>
+            <a:fld id="{F7021451-1387-4CA6-816F-3879F97B5CBC}" type="slidenum">
+              <a:rPr lang="en-US"/>
+              <a:t>25</a:t>
             </a:fld>
             <a:endParaRPr lang="en-US"/>
           </a:p>
@@ -4862,7 +4964,7 @@
                 <a:ea typeface="Calibri" pitchFamily="34" charset="-122"/>
                 <a:cs typeface="Calibri" pitchFamily="34" charset="-120"/>
               </a:rPr>
-              <a:t>This line crashes. Which error?</a:t>
+              <a:t>Line 2 crashes. Which error?</a:t>
             </a:r>
             <a:endParaRPr lang="en-US" sz="2000" dirty="0"/>
           </a:p>
@@ -4923,7 +5025,7 @@
                 <a:ea typeface="Consolas" pitchFamily="34" charset="-122"/>
                 <a:cs typeface="Consolas" pitchFamily="34" charset="-120"/>
               </a:rPr>
-              <a:t>crew</a:t>
+              <a:t>name</a:t>
             </a:r>
             <a:pPr indent="0" marL="0">
               <a:buNone/>
@@ -4973,13 +5075,55 @@
             <a:r>
               <a:rPr lang="en-US" sz="1800" dirty="0">
                 <a:solidFill>
-                  <a:srgbClr val="56B4E9"/>
-                </a:solidFill>
-                <a:latin typeface="Consolas" pitchFamily="34" charset="0"/>
-                <a:ea typeface="Consolas" pitchFamily="34" charset="-122"/>
-                <a:cs typeface="Consolas" pitchFamily="34" charset="-120"/>
-              </a:rPr>
-              <a:t>4</a:t>
+                  <a:srgbClr val="E8C878"/>
+                </a:solidFill>
+                <a:latin typeface="Consolas" pitchFamily="34" charset="0"/>
+                <a:ea typeface="Consolas" pitchFamily="34" charset="-122"/>
+                <a:cs typeface="Consolas" pitchFamily="34" charset="-120"/>
+              </a:rPr>
+              <a:t>input</a:t>
+            </a:r>
+            <a:pPr indent="0" marL="0">
+              <a:buNone/>
+            </a:pPr>
+            <a:r>
+              <a:rPr lang="en-US" sz="1800" dirty="0">
+                <a:solidFill>
+                  <a:srgbClr val="A9A9B4"/>
+                </a:solidFill>
+                <a:latin typeface="Consolas" pitchFamily="34" charset="0"/>
+                <a:ea typeface="Consolas" pitchFamily="34" charset="-122"/>
+                <a:cs typeface="Consolas" pitchFamily="34" charset="-120"/>
+              </a:rPr>
+              <a:t>(</a:t>
+            </a:r>
+            <a:pPr indent="0" marL="0">
+              <a:buNone/>
+            </a:pPr>
+            <a:r>
+              <a:rPr lang="en-US" sz="1800" dirty="0">
+                <a:solidFill>
+                  <a:srgbClr val="E69F00"/>
+                </a:solidFill>
+                <a:latin typeface="Consolas" pitchFamily="34" charset="0"/>
+                <a:ea typeface="Consolas" pitchFamily="34" charset="-122"/>
+                <a:cs typeface="Consolas" pitchFamily="34" charset="-120"/>
+              </a:rPr>
+              <a:t>"Name? "</a:t>
+            </a:r>
+            <a:pPr indent="0" marL="0">
+              <a:buNone/>
+            </a:pPr>
+            <a:r>
+              <a:rPr lang="en-US" sz="1800" dirty="0">
+                <a:solidFill>
+                  <a:srgbClr val="A9A9B4"/>
+                </a:solidFill>
+                <a:latin typeface="Consolas" pitchFamily="34" charset="0"/>
+                <a:ea typeface="Consolas" pitchFamily="34" charset="-122"/>
+                <a:cs typeface="Consolas" pitchFamily="34" charset="-120"/>
+              </a:rPr>
+              <a:t>)</a:t>
             </a:r>
             <a:endParaRPr lang="en-US" sz="1800" dirty="0"/>
           </a:p>
@@ -5046,7 +5190,7 @@
                 <a:ea typeface="Consolas" pitchFamily="34" charset="-122"/>
                 <a:cs typeface="Consolas" pitchFamily="34" charset="-120"/>
               </a:rPr>
-              <a:t>"Crew: "</a:t>
+              <a:t>"Hi "</a:t>
             </a:r>
             <a:pPr indent="0" marL="0">
               <a:buNone/>
@@ -5102,7 +5246,7 @@
                 <a:ea typeface="Consolas" pitchFamily="34" charset="-122"/>
                 <a:cs typeface="Consolas" pitchFamily="34" charset="-120"/>
               </a:rPr>
-              <a:t>crew</a:t>
+              <a:t>Name</a:t>
             </a:r>
             <a:pPr indent="0" marL="0">
               <a:buNone/>
@@ -5368,7 +5512,7 @@
                 <a:ea typeface="Calibri" pitchFamily="34" charset="-122"/>
                 <a:cs typeface="Calibri" pitchFamily="34" charset="-120"/>
               </a:rPr>
-              <a:t>Write exactly what this prints.</a:t>
+              <a:t>They type 14. What is printed?</a:t>
             </a:r>
             <a:endParaRPr lang="en-US" sz="2000" dirty="0"/>
           </a:p>
@@ -5429,7 +5573,7 @@
                 <a:ea typeface="Consolas" pitchFamily="34" charset="-122"/>
                 <a:cs typeface="Consolas" pitchFamily="34" charset="-120"/>
               </a:rPr>
-              <a:t>o2</a:t>
+              <a:t>age</a:t>
             </a:r>
             <a:pPr indent="0" marL="0">
               <a:buNone/>
@@ -5479,13 +5623,13 @@
             <a:r>
               <a:rPr lang="en-US" sz="1800" dirty="0">
                 <a:solidFill>
-                  <a:srgbClr val="56B4E9"/>
-                </a:solidFill>
-                <a:latin typeface="Consolas" pitchFamily="34" charset="0"/>
-                <a:ea typeface="Consolas" pitchFamily="34" charset="-122"/>
-                <a:cs typeface="Consolas" pitchFamily="34" charset="-120"/>
-              </a:rPr>
-              <a:t>90</a:t>
+                  <a:srgbClr val="E8C878"/>
+                </a:solidFill>
+                <a:latin typeface="Consolas" pitchFamily="34" charset="0"/>
+                <a:ea typeface="Consolas" pitchFamily="34" charset="-122"/>
+                <a:cs typeface="Consolas" pitchFamily="34" charset="-120"/>
+              </a:rPr>
+              <a:t>input</a:t>
             </a:r>
             <a:pPr indent="0" marL="0">
               <a:buNone/>
@@ -5493,13 +5637,13 @@
             <a:r>
               <a:rPr lang="en-US" sz="1800" dirty="0">
                 <a:solidFill>
-                  <a:srgbClr val="F5F5F3"/>
-                </a:solidFill>
-                <a:latin typeface="Consolas" pitchFamily="34" charset="0"/>
-                <a:ea typeface="Consolas" pitchFamily="34" charset="-122"/>
-                <a:cs typeface="Consolas" pitchFamily="34" charset="-120"/>
-              </a:rPr>
-              <a:t> </a:t>
+                  <a:srgbClr val="A9A9B4"/>
+                </a:solidFill>
+                <a:latin typeface="Consolas" pitchFamily="34" charset="0"/>
+                <a:ea typeface="Consolas" pitchFamily="34" charset="-122"/>
+                <a:cs typeface="Consolas" pitchFamily="34" charset="-120"/>
+              </a:rPr>
+              <a:t>(</a:t>
             </a:r>
             <a:pPr indent="0" marL="0">
               <a:buNone/>
@@ -5507,41 +5651,27 @@
             <a:r>
               <a:rPr lang="en-US" sz="1800" dirty="0">
                 <a:solidFill>
+                  <a:srgbClr val="E69F00"/>
+                </a:solidFill>
+                <a:latin typeface="Consolas" pitchFamily="34" charset="0"/>
+                <a:ea typeface="Consolas" pitchFamily="34" charset="-122"/>
+                <a:cs typeface="Consolas" pitchFamily="34" charset="-120"/>
+              </a:rPr>
+              <a:t>"Age? "</a:t>
+            </a:r>
+            <a:pPr indent="0" marL="0">
+              <a:buNone/>
+            </a:pPr>
+            <a:r>
+              <a:rPr lang="en-US" sz="1800" dirty="0">
+                <a:solidFill>
                   <a:srgbClr val="A9A9B4"/>
                 </a:solidFill>
                 <a:latin typeface="Consolas" pitchFamily="34" charset="0"/>
                 <a:ea typeface="Consolas" pitchFamily="34" charset="-122"/>
                 <a:cs typeface="Consolas" pitchFamily="34" charset="-120"/>
               </a:rPr>
-              <a:t>-</a:t>
-            </a:r>
-            <a:pPr indent="0" marL="0">
-              <a:buNone/>
-            </a:pPr>
-            <a:r>
-              <a:rPr lang="en-US" sz="1800" dirty="0">
-                <a:solidFill>
-                  <a:srgbClr val="F5F5F3"/>
-                </a:solidFill>
-                <a:latin typeface="Consolas" pitchFamily="34" charset="0"/>
-                <a:ea typeface="Consolas" pitchFamily="34" charset="-122"/>
-                <a:cs typeface="Consolas" pitchFamily="34" charset="-120"/>
-              </a:rPr>
-              <a:t> </a:t>
-            </a:r>
-            <a:pPr indent="0" marL="0">
-              <a:buNone/>
-            </a:pPr>
-            <a:r>
-              <a:rPr lang="en-US" sz="1800" dirty="0">
-                <a:solidFill>
-                  <a:srgbClr val="56B4E9"/>
-                </a:solidFill>
-                <a:latin typeface="Consolas" pitchFamily="34" charset="0"/>
-                <a:ea typeface="Consolas" pitchFamily="34" charset="-122"/>
-                <a:cs typeface="Consolas" pitchFamily="34" charset="-120"/>
-              </a:rPr>
-              <a:t>25</a:t>
+              <a:t>)</a:t>
             </a:r>
             <a:endParaRPr lang="en-US" sz="1800" dirty="0"/>
           </a:p>
@@ -5602,13 +5732,13 @@
             <a:r>
               <a:rPr lang="en-US" sz="1800" dirty="0">
                 <a:solidFill>
-                  <a:srgbClr val="E69F00"/>
-                </a:solidFill>
-                <a:latin typeface="Consolas" pitchFamily="34" charset="0"/>
-                <a:ea typeface="Consolas" pitchFamily="34" charset="-122"/>
-                <a:cs typeface="Consolas" pitchFamily="34" charset="-120"/>
-              </a:rPr>
-              <a:t>"O2: "</a:t>
+                  <a:srgbClr val="F5F5F3"/>
+                </a:solidFill>
+                <a:latin typeface="Consolas" pitchFamily="34" charset="0"/>
+                <a:ea typeface="Consolas" pitchFamily="34" charset="-122"/>
+                <a:cs typeface="Consolas" pitchFamily="34" charset="-120"/>
+              </a:rPr>
+              <a:t>age</a:t>
             </a:r>
             <a:pPr indent="0" marL="0">
               <a:buNone/>
@@ -5658,55 +5788,13 @@
             <a:r>
               <a:rPr lang="en-US" sz="1800" dirty="0">
                 <a:solidFill>
-                  <a:srgbClr val="E8C878"/>
-                </a:solidFill>
-                <a:latin typeface="Consolas" pitchFamily="34" charset="0"/>
-                <a:ea typeface="Consolas" pitchFamily="34" charset="-122"/>
-                <a:cs typeface="Consolas" pitchFamily="34" charset="-120"/>
-              </a:rPr>
-              <a:t>str</a:t>
-            </a:r>
-            <a:pPr indent="0" marL="0">
-              <a:buNone/>
-            </a:pPr>
-            <a:r>
-              <a:rPr lang="en-US" sz="1800" dirty="0">
-                <a:solidFill>
-                  <a:srgbClr val="A9A9B4"/>
-                </a:solidFill>
-                <a:latin typeface="Consolas" pitchFamily="34" charset="0"/>
-                <a:ea typeface="Consolas" pitchFamily="34" charset="-122"/>
-                <a:cs typeface="Consolas" pitchFamily="34" charset="-120"/>
-              </a:rPr>
-              <a:t>(</a:t>
-            </a:r>
-            <a:pPr indent="0" marL="0">
-              <a:buNone/>
-            </a:pPr>
-            <a:r>
-              <a:rPr lang="en-US" sz="1800" dirty="0">
-                <a:solidFill>
                   <a:srgbClr val="F5F5F3"/>
                 </a:solidFill>
                 <a:latin typeface="Consolas" pitchFamily="34" charset="0"/>
                 <a:ea typeface="Consolas" pitchFamily="34" charset="-122"/>
                 <a:cs typeface="Consolas" pitchFamily="34" charset="-120"/>
               </a:rPr>
-              <a:t>o2</a:t>
-            </a:r>
-            <a:pPr indent="0" marL="0">
-              <a:buNone/>
-            </a:pPr>
-            <a:r>
-              <a:rPr lang="en-US" sz="1800" dirty="0">
-                <a:solidFill>
-                  <a:srgbClr val="A9A9B4"/>
-                </a:solidFill>
-                <a:latin typeface="Consolas" pitchFamily="34" charset="0"/>
-                <a:ea typeface="Consolas" pitchFamily="34" charset="-122"/>
-                <a:cs typeface="Consolas" pitchFamily="34" charset="-120"/>
-              </a:rPr>
-              <a:t>)</a:t>
+              <a:t>age</a:t>
             </a:r>
             <a:pPr indent="0" marL="0">
               <a:buNone/>
@@ -28427,7 +28515,7 @@
                 <a:ea typeface="Calibri" pitchFamily="34" charset="-122"/>
                 <a:cs typeface="Calibri" pitchFamily="34" charset="-120"/>
               </a:rPr>
-              <a:t>This line crashes. Which error?</a:t>
+              <a:t>Line 2 crashes. Which error?</a:t>
             </a:r>
             <a:endParaRPr lang="en-US" sz="2000" dirty="0"/>
           </a:p>
@@ -28488,7 +28576,7 @@
                 <a:ea typeface="Consolas" pitchFamily="34" charset="-122"/>
                 <a:cs typeface="Consolas" pitchFamily="34" charset="-120"/>
               </a:rPr>
-              <a:t>crew</a:t>
+              <a:t>name</a:t>
             </a:r>
             <a:pPr indent="0" marL="0">
               <a:buNone/>
@@ -28538,13 +28626,55 @@
             <a:r>
               <a:rPr lang="en-US" sz="1800" dirty="0">
                 <a:solidFill>
-                  <a:srgbClr val="56B4E9"/>
-                </a:solidFill>
-                <a:latin typeface="Consolas" pitchFamily="34" charset="0"/>
-                <a:ea typeface="Consolas" pitchFamily="34" charset="-122"/>
-                <a:cs typeface="Consolas" pitchFamily="34" charset="-120"/>
-              </a:rPr>
-              <a:t>4</a:t>
+                  <a:srgbClr val="E8C878"/>
+                </a:solidFill>
+                <a:latin typeface="Consolas" pitchFamily="34" charset="0"/>
+                <a:ea typeface="Consolas" pitchFamily="34" charset="-122"/>
+                <a:cs typeface="Consolas" pitchFamily="34" charset="-120"/>
+              </a:rPr>
+              <a:t>input</a:t>
+            </a:r>
+            <a:pPr indent="0" marL="0">
+              <a:buNone/>
+            </a:pPr>
+            <a:r>
+              <a:rPr lang="en-US" sz="1800" dirty="0">
+                <a:solidFill>
+                  <a:srgbClr val="A9A9B4"/>
+                </a:solidFill>
+                <a:latin typeface="Consolas" pitchFamily="34" charset="0"/>
+                <a:ea typeface="Consolas" pitchFamily="34" charset="-122"/>
+                <a:cs typeface="Consolas" pitchFamily="34" charset="-120"/>
+              </a:rPr>
+              <a:t>(</a:t>
+            </a:r>
+            <a:pPr indent="0" marL="0">
+              <a:buNone/>
+            </a:pPr>
+            <a:r>
+              <a:rPr lang="en-US" sz="1800" dirty="0">
+                <a:solidFill>
+                  <a:srgbClr val="E69F00"/>
+                </a:solidFill>
+                <a:latin typeface="Consolas" pitchFamily="34" charset="0"/>
+                <a:ea typeface="Consolas" pitchFamily="34" charset="-122"/>
+                <a:cs typeface="Consolas" pitchFamily="34" charset="-120"/>
+              </a:rPr>
+              <a:t>"Name? "</a:t>
+            </a:r>
+            <a:pPr indent="0" marL="0">
+              <a:buNone/>
+            </a:pPr>
+            <a:r>
+              <a:rPr lang="en-US" sz="1800" dirty="0">
+                <a:solidFill>
+                  <a:srgbClr val="A9A9B4"/>
+                </a:solidFill>
+                <a:latin typeface="Consolas" pitchFamily="34" charset="0"/>
+                <a:ea typeface="Consolas" pitchFamily="34" charset="-122"/>
+                <a:cs typeface="Consolas" pitchFamily="34" charset="-120"/>
+              </a:rPr>
+              <a:t>)</a:t>
             </a:r>
             <a:endParaRPr lang="en-US" sz="1800" dirty="0"/>
           </a:p>
@@ -28611,7 +28741,7 @@
                 <a:ea typeface="Consolas" pitchFamily="34" charset="-122"/>
                 <a:cs typeface="Consolas" pitchFamily="34" charset="-120"/>
               </a:rPr>
-              <a:t>"Crew: "</a:t>
+              <a:t>"Hi "</a:t>
             </a:r>
             <a:pPr indent="0" marL="0">
               <a:buNone/>
@@ -28667,7 +28797,7 @@
                 <a:ea typeface="Consolas" pitchFamily="34" charset="-122"/>
                 <a:cs typeface="Consolas" pitchFamily="34" charset="-120"/>
               </a:rPr>
-              <a:t>crew</a:t>
+              <a:t>Name</a:t>
             </a:r>
             <a:pPr indent="0" marL="0">
               <a:buNone/>
@@ -28720,7 +28850,7 @@
                 <a:ea typeface="Calibri" pitchFamily="34" charset="-122"/>
                 <a:cs typeface="Calibri" pitchFamily="34" charset="-120"/>
               </a:rPr>
-              <a:t>TypeError</a:t>
+              <a:t>NameError</a:t>
             </a:r>
             <a:pPr indent="0" marL="0">
               <a:buNone/>
@@ -28734,7 +28864,7 @@
                 <a:ea typeface="Calibri" pitchFamily="34" charset="-122"/>
                 <a:cs typeface="Calibri" pitchFamily="34" charset="-120"/>
               </a:rPr>
-              <a:t>   fix it with str(crew)</a:t>
+              <a:t>   Name (capital N) was never stored</a:t>
             </a:r>
             <a:endParaRPr lang="en-US" sz="2200" dirty="0"/>
           </a:p>
@@ -28991,7 +29121,7 @@
                 <a:ea typeface="Calibri" pitchFamily="34" charset="-122"/>
                 <a:cs typeface="Calibri" pitchFamily="34" charset="-120"/>
               </a:rPr>
-              <a:t>Write exactly what this prints.</a:t>
+              <a:t>They type 14. What is printed?</a:t>
             </a:r>
             <a:endParaRPr lang="en-US" sz="2000" dirty="0"/>
           </a:p>
@@ -29052,7 +29182,7 @@
                 <a:ea typeface="Consolas" pitchFamily="34" charset="-122"/>
                 <a:cs typeface="Consolas" pitchFamily="34" charset="-120"/>
               </a:rPr>
-              <a:t>o2</a:t>
+              <a:t>age</a:t>
             </a:r>
             <a:pPr indent="0" marL="0">
               <a:buNone/>
@@ -29102,13 +29232,13 @@
             <a:r>
               <a:rPr lang="en-US" sz="1800" dirty="0">
                 <a:solidFill>
-                  <a:srgbClr val="56B4E9"/>
-                </a:solidFill>
-                <a:latin typeface="Consolas" pitchFamily="34" charset="0"/>
-                <a:ea typeface="Consolas" pitchFamily="34" charset="-122"/>
-                <a:cs typeface="Consolas" pitchFamily="34" charset="-120"/>
-              </a:rPr>
-              <a:t>90</a:t>
+                  <a:srgbClr val="E8C878"/>
+                </a:solidFill>
+                <a:latin typeface="Consolas" pitchFamily="34" charset="0"/>
+                <a:ea typeface="Consolas" pitchFamily="34" charset="-122"/>
+                <a:cs typeface="Consolas" pitchFamily="34" charset="-120"/>
+              </a:rPr>
+              <a:t>input</a:t>
             </a:r>
             <a:pPr indent="0" marL="0">
               <a:buNone/>
@@ -29116,13 +29246,13 @@
             <a:r>
               <a:rPr lang="en-US" sz="1800" dirty="0">
                 <a:solidFill>
-                  <a:srgbClr val="F5F5F3"/>
-                </a:solidFill>
-                <a:latin typeface="Consolas" pitchFamily="34" charset="0"/>
-                <a:ea typeface="Consolas" pitchFamily="34" charset="-122"/>
-                <a:cs typeface="Consolas" pitchFamily="34" charset="-120"/>
-              </a:rPr>
-              <a:t> </a:t>
+                  <a:srgbClr val="A9A9B4"/>
+                </a:solidFill>
+                <a:latin typeface="Consolas" pitchFamily="34" charset="0"/>
+                <a:ea typeface="Consolas" pitchFamily="34" charset="-122"/>
+                <a:cs typeface="Consolas" pitchFamily="34" charset="-120"/>
+              </a:rPr>
+              <a:t>(</a:t>
             </a:r>
             <a:pPr indent="0" marL="0">
               <a:buNone/>
@@ -29130,41 +29260,27 @@
             <a:r>
               <a:rPr lang="en-US" sz="1800" dirty="0">
                 <a:solidFill>
+                  <a:srgbClr val="E69F00"/>
+                </a:solidFill>
+                <a:latin typeface="Consolas" pitchFamily="34" charset="0"/>
+                <a:ea typeface="Consolas" pitchFamily="34" charset="-122"/>
+                <a:cs typeface="Consolas" pitchFamily="34" charset="-120"/>
+              </a:rPr>
+              <a:t>"Age? "</a:t>
+            </a:r>
+            <a:pPr indent="0" marL="0">
+              <a:buNone/>
+            </a:pPr>
+            <a:r>
+              <a:rPr lang="en-US" sz="1800" dirty="0">
+                <a:solidFill>
                   <a:srgbClr val="A9A9B4"/>
                 </a:solidFill>
                 <a:latin typeface="Consolas" pitchFamily="34" charset="0"/>
                 <a:ea typeface="Consolas" pitchFamily="34" charset="-122"/>
                 <a:cs typeface="Consolas" pitchFamily="34" charset="-120"/>
               </a:rPr>
-              <a:t>-</a:t>
-            </a:r>
-            <a:pPr indent="0" marL="0">
-              <a:buNone/>
-            </a:pPr>
-            <a:r>
-              <a:rPr lang="en-US" sz="1800" dirty="0">
-                <a:solidFill>
-                  <a:srgbClr val="F5F5F3"/>
-                </a:solidFill>
-                <a:latin typeface="Consolas" pitchFamily="34" charset="0"/>
-                <a:ea typeface="Consolas" pitchFamily="34" charset="-122"/>
-                <a:cs typeface="Consolas" pitchFamily="34" charset="-120"/>
-              </a:rPr>
-              <a:t> </a:t>
-            </a:r>
-            <a:pPr indent="0" marL="0">
-              <a:buNone/>
-            </a:pPr>
-            <a:r>
-              <a:rPr lang="en-US" sz="1800" dirty="0">
-                <a:solidFill>
-                  <a:srgbClr val="56B4E9"/>
-                </a:solidFill>
-                <a:latin typeface="Consolas" pitchFamily="34" charset="0"/>
-                <a:ea typeface="Consolas" pitchFamily="34" charset="-122"/>
-                <a:cs typeface="Consolas" pitchFamily="34" charset="-120"/>
-              </a:rPr>
-              <a:t>25</a:t>
+              <a:t>)</a:t>
             </a:r>
             <a:endParaRPr lang="en-US" sz="1800" dirty="0"/>
           </a:p>
@@ -29225,13 +29341,13 @@
             <a:r>
               <a:rPr lang="en-US" sz="1800" dirty="0">
                 <a:solidFill>
-                  <a:srgbClr val="E69F00"/>
-                </a:solidFill>
-                <a:latin typeface="Consolas" pitchFamily="34" charset="0"/>
-                <a:ea typeface="Consolas" pitchFamily="34" charset="-122"/>
-                <a:cs typeface="Consolas" pitchFamily="34" charset="-120"/>
-              </a:rPr>
-              <a:t>"O2: "</a:t>
+                  <a:srgbClr val="F5F5F3"/>
+                </a:solidFill>
+                <a:latin typeface="Consolas" pitchFamily="34" charset="0"/>
+                <a:ea typeface="Consolas" pitchFamily="34" charset="-122"/>
+                <a:cs typeface="Consolas" pitchFamily="34" charset="-120"/>
+              </a:rPr>
+              <a:t>age</a:t>
             </a:r>
             <a:pPr indent="0" marL="0">
               <a:buNone/>
@@ -29281,55 +29397,13 @@
             <a:r>
               <a:rPr lang="en-US" sz="1800" dirty="0">
                 <a:solidFill>
-                  <a:srgbClr val="E8C878"/>
-                </a:solidFill>
-                <a:latin typeface="Consolas" pitchFamily="34" charset="0"/>
-                <a:ea typeface="Consolas" pitchFamily="34" charset="-122"/>
-                <a:cs typeface="Consolas" pitchFamily="34" charset="-120"/>
-              </a:rPr>
-              <a:t>str</a:t>
-            </a:r>
-            <a:pPr indent="0" marL="0">
-              <a:buNone/>
-            </a:pPr>
-            <a:r>
-              <a:rPr lang="en-US" sz="1800" dirty="0">
-                <a:solidFill>
-                  <a:srgbClr val="A9A9B4"/>
-                </a:solidFill>
-                <a:latin typeface="Consolas" pitchFamily="34" charset="0"/>
-                <a:ea typeface="Consolas" pitchFamily="34" charset="-122"/>
-                <a:cs typeface="Consolas" pitchFamily="34" charset="-120"/>
-              </a:rPr>
-              <a:t>(</a:t>
-            </a:r>
-            <a:pPr indent="0" marL="0">
-              <a:buNone/>
-            </a:pPr>
-            <a:r>
-              <a:rPr lang="en-US" sz="1800" dirty="0">
-                <a:solidFill>
                   <a:srgbClr val="F5F5F3"/>
                 </a:solidFill>
                 <a:latin typeface="Consolas" pitchFamily="34" charset="0"/>
                 <a:ea typeface="Consolas" pitchFamily="34" charset="-122"/>
                 <a:cs typeface="Consolas" pitchFamily="34" charset="-120"/>
               </a:rPr>
-              <a:t>o2</a:t>
-            </a:r>
-            <a:pPr indent="0" marL="0">
-              <a:buNone/>
-            </a:pPr>
-            <a:r>
-              <a:rPr lang="en-US" sz="1800" dirty="0">
-                <a:solidFill>
-                  <a:srgbClr val="A9A9B4"/>
-                </a:solidFill>
-                <a:latin typeface="Consolas" pitchFamily="34" charset="0"/>
-                <a:ea typeface="Consolas" pitchFamily="34" charset="-122"/>
-                <a:cs typeface="Consolas" pitchFamily="34" charset="-120"/>
-              </a:rPr>
-              <a:t>)</a:t>
+              <a:t>age</a:t>
             </a:r>
             <a:pPr indent="0" marL="0">
               <a:buNone/>
@@ -29382,7 +29456,7 @@
                 <a:ea typeface="Consolas" pitchFamily="34" charset="-122"/>
                 <a:cs typeface="Consolas" pitchFamily="34" charset="-120"/>
               </a:rPr>
-              <a:t>O2: 65</a:t>
+              <a:t>1414</a:t>
             </a:r>
             <a:pPr indent="0" marL="0">
               <a:buNone/>
@@ -29396,7 +29470,7 @@
                 <a:ea typeface="Calibri" pitchFamily="34" charset="-122"/>
                 <a:cs typeface="Calibri" pitchFamily="34" charset="-120"/>
               </a:rPr>
-              <a:t>   str() turns 65 into text</a:t>
+              <a:t>   input() gives text, so + joins</a:t>
             </a:r>
             <a:endParaRPr lang="en-US" sz="2200" dirty="0"/>
           </a:p>
@@ -36827,349 +36901,179 @@
       <p:sp>
         <p:nvSpPr>
           <p:cNvPr id="4" name="Text 1"/>
-          <p:cNvSpPr txBox="1"/>
-          <p:nvPr/>
-        </p:nvSpPr>
-        <p:spPr>
-          <a:xfrm>
-            <a:off x="548640" y="548640"/>
-            <a:ext cx="5486400" cy="320040"/>
-          </a:xfrm>
-          <a:prstGeom prst="rect">
-            <a:avLst/>
-          </a:prstGeom>
-          <a:noFill/>
-          <a:ln/>
-        </p:spPr>
-        <p:txBody>
-          <a:bodyPr wrap="square" lIns="0" tIns="0" rIns="0" bIns="0" rtlCol="0" anchor="ctr"/>
-          <a:lstStyle/>
-          <a:p>
-            <a:pPr indent="0" marL="0">
-              <a:buNone/>
-            </a:pPr>
-            <a:r>
-              <a:rPr lang="en-US" sz="1400" b="1" spc="300" kern="0" dirty="0">
-                <a:solidFill>
-                  <a:srgbClr val="D8A73D"/>
+          <p:cNvSpPr/>
+          <p:nvPr>
+            <p:ph idx="101" type="title" hasCustomPrompt="1"/>
+          </p:nvPr>
+        </p:nvSpPr>
+        <p:spPr>
+          <a:xfrm>
+            <a:off x="548640" y="411480"/>
+            <a:ext cx="9418320" cy="777240"/>
+          </a:xfrm>
+          <a:prstGeom prst="rect">
+            <a:avLst/>
+          </a:prstGeom>
+          <a:noFill/>
+          <a:ln/>
+        </p:spPr>
+        <p:txBody>
+          <a:bodyPr wrap="square" lIns="0" tIns="0" rIns="0" bIns="0" rtlCol="0" anchor="ctr"/>
+          <a:lstStyle/>
+          <a:p>
+            <a:pPr algn="l" indent="0" marL="0">
+              <a:buNone/>
+            </a:pPr>
+            <a:r>
+              <a:rPr lang="en-US" sz="3600" b="1" dirty="0">
+                <a:solidFill>
+                  <a:srgbClr val="F5F5F3"/>
+                </a:solidFill>
+                <a:latin typeface="Cambria" pitchFamily="34" charset="0"/>
+                <a:ea typeface="Cambria" pitchFamily="34" charset="-122"/>
+                <a:cs typeface="Cambria" pitchFamily="34" charset="-120"/>
+              </a:rPr>
+              <a:t>input() gives text. int() makes it a number.</a:t>
+            </a:r>
+            <a:endParaRPr lang="en-US" sz="3600" dirty="0"/>
+          </a:p>
+        </p:txBody>
+      </p:sp>
+      <p:sp>
+        <p:nvSpPr>
+          <p:cNvPr id="5" name="Text 2"/>
+          <p:cNvSpPr txBox="1"/>
+          <p:nvPr/>
+        </p:nvSpPr>
+        <p:spPr>
+          <a:xfrm>
+            <a:off x="548640" y="1481328"/>
+            <a:ext cx="2743200" cy="274320"/>
+          </a:xfrm>
+          <a:prstGeom prst="rect">
+            <a:avLst/>
+          </a:prstGeom>
+          <a:noFill/>
+          <a:ln/>
+        </p:spPr>
+        <p:txBody>
+          <a:bodyPr wrap="square" lIns="0" tIns="0" rIns="0" bIns="0" rtlCol="0" anchor="ctr"/>
+          <a:lstStyle/>
+          <a:p>
+            <a:pPr indent="0" marL="0">
+              <a:buNone/>
+            </a:pPr>
+            <a:r>
+              <a:rPr lang="en-US" sz="1300" b="1" spc="200" kern="0" dirty="0">
+                <a:solidFill>
+                  <a:srgbClr val="6E6E7A"/>
                 </a:solidFill>
                 <a:latin typeface="Calibri" pitchFamily="34" charset="0"/>
                 <a:ea typeface="Calibri" pitchFamily="34" charset="-122"/>
                 <a:cs typeface="Calibri" pitchFamily="34" charset="-120"/>
               </a:rPr>
-              <a:t>CHAPTER 2</a:t>
-            </a:r>
-            <a:endParaRPr lang="en-US" sz="1400" dirty="0"/>
-          </a:p>
-        </p:txBody>
-      </p:sp>
-      <p:sp>
-        <p:nvSpPr>
-          <p:cNvPr id="5" name="Text 2"/>
-          <p:cNvSpPr txBox="1"/>
-          <p:nvPr/>
-        </p:nvSpPr>
-        <p:spPr>
-          <a:xfrm>
-            <a:off x="548640" y="914400"/>
-            <a:ext cx="5486400" cy="914400"/>
-          </a:xfrm>
-          <a:prstGeom prst="rect">
-            <a:avLst/>
-          </a:prstGeom>
-          <a:noFill/>
-          <a:ln/>
-        </p:spPr>
-        <p:txBody>
-          <a:bodyPr wrap="square" lIns="0" tIns="0" rIns="0" bIns="0" rtlCol="0" anchor="ctr"/>
-          <a:lstStyle/>
-          <a:p>
-            <a:pPr indent="0" marL="0">
-              <a:buNone/>
-            </a:pPr>
-            <a:r>
-              <a:rPr lang="en-US" sz="4800" b="1" dirty="0">
-                <a:solidFill>
-                  <a:srgbClr val="F5F5F3"/>
-                </a:solidFill>
-                <a:latin typeface="Cambria" pitchFamily="34" charset="0"/>
-                <a:ea typeface="Cambria" pitchFamily="34" charset="-122"/>
-                <a:cs typeface="Cambria" pitchFamily="34" charset="-120"/>
-              </a:rPr>
-              <a:t>Proximity</a:t>
-            </a:r>
-            <a:endParaRPr lang="en-US" sz="4800" dirty="0"/>
-          </a:p>
-        </p:txBody>
-      </p:sp>
-      <p:sp>
-        <p:nvSpPr>
-          <p:cNvPr id="6" name="terminal"/>
-          <p:cNvSpPr/>
-          <p:nvPr/>
-        </p:nvSpPr>
-        <p:spPr>
-          <a:xfrm>
-            <a:off x="548640" y="2148840"/>
-            <a:ext cx="5212080" cy="2788920"/>
-          </a:xfrm>
-          <a:prstGeom prst="roundRect">
-            <a:avLst>
-              <a:gd name="adj" fmla="val 2623"/>
-            </a:avLst>
-          </a:prstGeom>
-          <a:solidFill>
-            <a:srgbClr val="0D1310"/>
-          </a:solidFill>
-          <a:ln w="15875">
-            <a:solidFill>
-              <a:srgbClr val="2C4434"/>
-            </a:solidFill>
-            <a:prstDash val="solid"/>
-          </a:ln>
-        </p:spPr>
-      </p:sp>
-      <p:sp>
-        <p:nvSpPr>
-          <p:cNvPr id="7" name="Text 4"/>
-          <p:cNvSpPr txBox="1"/>
-          <p:nvPr/>
-        </p:nvSpPr>
-        <p:spPr>
-          <a:xfrm>
-            <a:off x="777240" y="2331720"/>
-            <a:ext cx="4754880" cy="274320"/>
-          </a:xfrm>
-          <a:prstGeom prst="rect">
-            <a:avLst/>
-          </a:prstGeom>
-          <a:noFill/>
-          <a:ln/>
-        </p:spPr>
-        <p:txBody>
-          <a:bodyPr wrap="square" lIns="0" tIns="0" rIns="0" bIns="0" rtlCol="0" anchor="ctr"/>
-          <a:lstStyle/>
-          <a:p>
-            <a:pPr indent="0" marL="0">
-              <a:buNone/>
-            </a:pPr>
-            <a:r>
-              <a:rPr lang="en-US" sz="1200" b="1" spc="200" kern="0" dirty="0">
-                <a:solidFill>
-                  <a:srgbClr val="7FD99A"/>
+              <a:t>THE CODE</a:t>
+            </a:r>
+            <a:endParaRPr lang="en-US" sz="1300" dirty="0"/>
+          </a:p>
+        </p:txBody>
+      </p:sp>
+      <p:sp>
+        <p:nvSpPr>
+          <p:cNvPr id="6" name="Text 3"/>
+          <p:cNvSpPr txBox="1"/>
+          <p:nvPr/>
+        </p:nvSpPr>
+        <p:spPr>
+          <a:xfrm>
+            <a:off x="6446520" y="1481328"/>
+            <a:ext cx="2743200" cy="274320"/>
+          </a:xfrm>
+          <a:prstGeom prst="rect">
+            <a:avLst/>
+          </a:prstGeom>
+          <a:noFill/>
+          <a:ln/>
+        </p:spPr>
+        <p:txBody>
+          <a:bodyPr wrap="square" lIns="0" tIns="0" rIns="0" bIns="0" rtlCol="0" anchor="ctr"/>
+          <a:lstStyle/>
+          <a:p>
+            <a:pPr indent="0" marL="0">
+              <a:buNone/>
+            </a:pPr>
+            <a:r>
+              <a:rPr lang="en-US" sz="1300" b="1" spc="200" kern="0" dirty="0">
+                <a:solidFill>
+                  <a:srgbClr val="6E6E7A"/>
                 </a:solidFill>
                 <a:latin typeface="Calibri" pitchFamily="34" charset="0"/>
                 <a:ea typeface="Calibri" pitchFamily="34" charset="-122"/>
                 <a:cs typeface="Calibri" pitchFamily="34" charset="-120"/>
               </a:rPr>
-              <a:t>SENSOR OPS</a:t>
-            </a:r>
-            <a:endParaRPr lang="en-US" sz="1200" dirty="0"/>
-          </a:p>
-        </p:txBody>
-      </p:sp>
-      <p:sp>
-        <p:nvSpPr>
-          <p:cNvPr id="8" name="Text 5"/>
-          <p:cNvSpPr txBox="1"/>
-          <p:nvPr/>
-        </p:nvSpPr>
-        <p:spPr>
-          <a:xfrm>
-            <a:off x="777240" y="2697480"/>
-            <a:ext cx="4754880" cy="406400"/>
-          </a:xfrm>
-          <a:prstGeom prst="rect">
-            <a:avLst/>
-          </a:prstGeom>
-          <a:noFill/>
-          <a:ln/>
-        </p:spPr>
-        <p:txBody>
-          <a:bodyPr wrap="square" lIns="0" tIns="0" rIns="0" bIns="0" rtlCol="0" anchor="ctr"/>
-          <a:lstStyle/>
-          <a:p>
-            <a:pPr indent="0" marL="0">
-              <a:buNone/>
-            </a:pPr>
-            <a:r>
-              <a:rPr lang="en-US" sz="2000" dirty="0">
-                <a:solidFill>
-                  <a:srgbClr val="7FD99A"/>
-                </a:solidFill>
-                <a:latin typeface="Consolas" pitchFamily="34" charset="0"/>
-                <a:ea typeface="Consolas" pitchFamily="34" charset="-122"/>
-                <a:cs typeface="Consolas" pitchFamily="34" charset="-120"/>
-              </a:rPr>
-              <a:t>The room is empty.</a:t>
-            </a:r>
-            <a:endParaRPr lang="en-US" sz="2000" dirty="0"/>
-          </a:p>
-        </p:txBody>
-      </p:sp>
-      <p:sp>
-        <p:nvSpPr>
-          <p:cNvPr id="9" name="Text 6"/>
-          <p:cNvSpPr txBox="1"/>
-          <p:nvPr/>
-        </p:nvSpPr>
-        <p:spPr>
-          <a:xfrm>
-            <a:off x="777240" y="3103880"/>
-            <a:ext cx="4754880" cy="406400"/>
-          </a:xfrm>
-          <a:prstGeom prst="rect">
-            <a:avLst/>
-          </a:prstGeom>
-          <a:noFill/>
-          <a:ln/>
-        </p:spPr>
-        <p:txBody>
-          <a:bodyPr wrap="square" lIns="0" tIns="0" rIns="0" bIns="0" rtlCol="0" anchor="ctr"/>
-          <a:lstStyle/>
-          <a:p>
-            <a:pPr indent="0" marL="0">
-              <a:buNone/>
-            </a:pPr>
-            <a:endParaRPr lang="en-US" sz="2000" dirty="0"/>
-          </a:p>
-        </p:txBody>
-      </p:sp>
-      <p:sp>
-        <p:nvSpPr>
-          <p:cNvPr id="10" name="Text 7"/>
-          <p:cNvSpPr txBox="1"/>
-          <p:nvPr/>
-        </p:nvSpPr>
-        <p:spPr>
-          <a:xfrm>
-            <a:off x="777240" y="3510280"/>
-            <a:ext cx="4754880" cy="406400"/>
-          </a:xfrm>
-          <a:prstGeom prst="rect">
-            <a:avLst/>
-          </a:prstGeom>
-          <a:noFill/>
-          <a:ln/>
-        </p:spPr>
-        <p:txBody>
-          <a:bodyPr wrap="square" lIns="0" tIns="0" rIns="0" bIns="0" rtlCol="0" anchor="ctr"/>
-          <a:lstStyle/>
-          <a:p>
-            <a:pPr indent="0" marL="0">
-              <a:buNone/>
-            </a:pPr>
-            <a:r>
-              <a:rPr lang="en-US" sz="2000" dirty="0">
-                <a:solidFill>
-                  <a:srgbClr val="7FD99A"/>
-                </a:solidFill>
-                <a:latin typeface="Consolas" pitchFamily="34" charset="0"/>
-                <a:ea typeface="Consolas" pitchFamily="34" charset="-122"/>
-                <a:cs typeface="Consolas" pitchFamily="34" charset="-120"/>
-              </a:rPr>
-              <a:t>Frost on the floor.</a:t>
-            </a:r>
-            <a:endParaRPr lang="en-US" sz="2000" dirty="0"/>
-          </a:p>
-        </p:txBody>
-      </p:sp>
-      <p:sp>
-        <p:nvSpPr>
-          <p:cNvPr id="11" name="Text 8"/>
-          <p:cNvSpPr txBox="1"/>
-          <p:nvPr/>
-        </p:nvSpPr>
-        <p:spPr>
-          <a:xfrm>
-            <a:off x="777240" y="3916680"/>
-            <a:ext cx="4754880" cy="406400"/>
-          </a:xfrm>
-          <a:prstGeom prst="rect">
-            <a:avLst/>
-          </a:prstGeom>
-          <a:noFill/>
-          <a:ln/>
-        </p:spPr>
-        <p:txBody>
-          <a:bodyPr wrap="square" lIns="0" tIns="0" rIns="0" bIns="0" rtlCol="0" anchor="ctr"/>
-          <a:lstStyle/>
-          <a:p>
-            <a:pPr indent="0" marL="0">
-              <a:buNone/>
-            </a:pPr>
-            <a:r>
-              <a:rPr lang="en-US" sz="2000" dirty="0">
-                <a:solidFill>
-                  <a:srgbClr val="7FD99A"/>
-                </a:solidFill>
-                <a:latin typeface="Consolas" pitchFamily="34" charset="0"/>
-                <a:ea typeface="Consolas" pitchFamily="34" charset="-122"/>
-                <a:cs typeface="Consolas" pitchFamily="34" charset="-120"/>
-              </a:rPr>
-              <a:t>A vent cover hangs open</a:t>
-            </a:r>
-            <a:endParaRPr lang="en-US" sz="2000" dirty="0"/>
-          </a:p>
-        </p:txBody>
-      </p:sp>
-      <p:sp>
-        <p:nvSpPr>
-          <p:cNvPr id="12" name="Text 9"/>
-          <p:cNvSpPr txBox="1"/>
-          <p:nvPr/>
-        </p:nvSpPr>
-        <p:spPr>
-          <a:xfrm>
-            <a:off x="777240" y="4323080"/>
-            <a:ext cx="4754880" cy="406400"/>
-          </a:xfrm>
-          <a:prstGeom prst="rect">
-            <a:avLst/>
-          </a:prstGeom>
-          <a:noFill/>
-          <a:ln/>
-        </p:spPr>
-        <p:txBody>
-          <a:bodyPr wrap="square" lIns="0" tIns="0" rIns="0" bIns="0" rtlCol="0" anchor="ctr"/>
-          <a:lstStyle/>
-          <a:p>
-            <a:pPr indent="0" marL="0">
-              <a:buNone/>
-            </a:pPr>
-            <a:r>
-              <a:rPr lang="en-US" sz="2000" dirty="0">
-                <a:solidFill>
-                  <a:srgbClr val="7FD99A"/>
-                </a:solidFill>
-                <a:latin typeface="Consolas" pitchFamily="34" charset="0"/>
-                <a:ea typeface="Consolas" pitchFamily="34" charset="-122"/>
-                <a:cs typeface="Consolas" pitchFamily="34" charset="-120"/>
-              </a:rPr>
-              <a:t>above the console.</a:t>
-            </a:r>
-            <a:endParaRPr lang="en-US" sz="2000" dirty="0"/>
-          </a:p>
-        </p:txBody>
-      </p:sp>
-      <p:sp>
-        <p:nvSpPr>
-          <p:cNvPr id="13" name="Shape 10"/>
+              <a:t>ON SCREEN</a:t>
+            </a:r>
+            <a:endParaRPr lang="en-US" sz="1300" dirty="0"/>
+          </a:p>
+        </p:txBody>
+      </p:sp>
+      <p:sp>
+        <p:nvSpPr>
+          <p:cNvPr id="7" name="Text 4"/>
+          <p:cNvSpPr txBox="1"/>
+          <p:nvPr/>
+        </p:nvSpPr>
+        <p:spPr>
+          <a:xfrm>
+            <a:off x="9601200" y="1481328"/>
+            <a:ext cx="2743200" cy="274320"/>
+          </a:xfrm>
+          <a:prstGeom prst="rect">
+            <a:avLst/>
+          </a:prstGeom>
+          <a:noFill/>
+          <a:ln/>
+        </p:spPr>
+        <p:txBody>
+          <a:bodyPr wrap="square" lIns="0" tIns="0" rIns="0" bIns="0" rtlCol="0" anchor="ctr"/>
+          <a:lstStyle/>
+          <a:p>
+            <a:pPr indent="0" marL="0">
+              <a:buNone/>
+            </a:pPr>
+            <a:r>
+              <a:rPr lang="en-US" sz="1300" b="1" spc="200" kern="0" dirty="0">
+                <a:solidFill>
+                  <a:srgbClr val="6E6E7A"/>
+                </a:solidFill>
+                <a:latin typeface="Calibri" pitchFamily="34" charset="0"/>
+                <a:ea typeface="Calibri" pitchFamily="34" charset="-122"/>
+                <a:cs typeface="Calibri" pitchFamily="34" charset="-120"/>
+              </a:rPr>
+              <a:t>IN MEMORY</a:t>
+            </a:r>
+            <a:endParaRPr lang="en-US" sz="1300" dirty="0"/>
+          </a:p>
+        </p:txBody>
+      </p:sp>
+      <p:sp>
+        <p:nvSpPr>
+          <p:cNvPr id="8" name="click1 · code"/>
           <p:cNvSpPr/>
           <p:nvPr/>
         </p:nvSpPr>
         <p:spPr>
           <a:xfrm>
-            <a:off x="6172200" y="1417320"/>
-            <a:ext cx="5468112" cy="4434840"/>
+            <a:off x="548640" y="1874520"/>
+            <a:ext cx="5577840" cy="868680"/>
           </a:xfrm>
           <a:prstGeom prst="roundRect">
             <a:avLst>
-              <a:gd name="adj" fmla="val 1649"/>
+              <a:gd name="adj" fmla="val 8421"/>
             </a:avLst>
           </a:prstGeom>
           <a:solidFill>
-            <a:srgbClr val="2A2A32"/>
+            <a:srgbClr val="111115"/>
           </a:solidFill>
           <a:ln w="15875">
             <a:solidFill>
@@ -37181,69 +37085,220 @@
       </p:sp>
       <p:sp>
         <p:nvSpPr>
-          <p:cNvPr id="14" name="Text 11"/>
-          <p:cNvSpPr txBox="1"/>
-          <p:nvPr/>
-        </p:nvSpPr>
-        <p:spPr>
-          <a:xfrm>
-            <a:off x="6492240" y="1645920"/>
-            <a:ext cx="2743200" cy="274320"/>
-          </a:xfrm>
-          <a:prstGeom prst="rect">
-            <a:avLst/>
-          </a:prstGeom>
-          <a:noFill/>
-          <a:ln/>
-        </p:spPr>
-        <p:txBody>
-          <a:bodyPr wrap="square" lIns="0" tIns="0" rIns="0" bIns="0" rtlCol="0" anchor="ctr"/>
-          <a:lstStyle/>
-          <a:p>
-            <a:pPr indent="0" marL="0">
-              <a:buNone/>
-            </a:pPr>
-            <a:r>
-              <a:rPr lang="en-US" sz="1300" b="1" spc="200" kern="0" dirty="0">
+          <p:cNvPr id="9" name="click1"/>
+          <p:cNvSpPr txBox="1"/>
+          <p:nvPr/>
+        </p:nvSpPr>
+        <p:spPr>
+          <a:xfrm>
+            <a:off x="658368" y="2075688"/>
+            <a:ext cx="274320" cy="440055"/>
+          </a:xfrm>
+          <a:prstGeom prst="rect">
+            <a:avLst/>
+          </a:prstGeom>
+          <a:noFill/>
+          <a:ln/>
+        </p:spPr>
+        <p:txBody>
+          <a:bodyPr wrap="square" lIns="0" tIns="0" rIns="0" bIns="0" rtlCol="0" anchor="ctr"/>
+          <a:lstStyle/>
+          <a:p>
+            <a:pPr algn="r" indent="0" marL="0">
+              <a:buNone/>
+            </a:pPr>
+            <a:r>
+              <a:rPr lang="en-US" sz="1700" dirty="0">
                 <a:solidFill>
                   <a:srgbClr val="6E6E7A"/>
+                </a:solidFill>
+                <a:latin typeface="Consolas" pitchFamily="34" charset="0"/>
+                <a:ea typeface="Consolas" pitchFamily="34" charset="-122"/>
+                <a:cs typeface="Consolas" pitchFamily="34" charset="-120"/>
+              </a:rPr>
+              <a:t>1</a:t>
+            </a:r>
+            <a:endParaRPr lang="en-US" sz="1700" dirty="0"/>
+          </a:p>
+        </p:txBody>
+      </p:sp>
+      <p:sp>
+        <p:nvSpPr>
+          <p:cNvPr id="10" name="click1"/>
+          <p:cNvSpPr txBox="1"/>
+          <p:nvPr/>
+        </p:nvSpPr>
+        <p:spPr>
+          <a:xfrm>
+            <a:off x="1188720" y="2075688"/>
+            <a:ext cx="4846320" cy="440055"/>
+          </a:xfrm>
+          <a:prstGeom prst="rect">
+            <a:avLst/>
+          </a:prstGeom>
+          <a:noFill/>
+          <a:ln/>
+        </p:spPr>
+        <p:txBody>
+          <a:bodyPr wrap="square" lIns="0" tIns="0" rIns="0" bIns="0" rtlCol="0" anchor="ctr"/>
+          <a:lstStyle/>
+          <a:p>
+            <a:pPr indent="0" marL="0">
+              <a:buNone/>
+            </a:pPr>
+            <a:r>
+              <a:rPr lang="en-US" sz="2100" dirty="0">
+                <a:solidFill>
+                  <a:srgbClr val="F5F5F3"/>
+                </a:solidFill>
+                <a:latin typeface="Consolas" pitchFamily="34" charset="0"/>
+                <a:ea typeface="Consolas" pitchFamily="34" charset="-122"/>
+                <a:cs typeface="Consolas" pitchFamily="34" charset="-120"/>
+              </a:rPr>
+              <a:t>dist</a:t>
+            </a:r>
+            <a:pPr indent="0" marL="0">
+              <a:buNone/>
+            </a:pPr>
+            <a:r>
+              <a:rPr lang="en-US" sz="2100" dirty="0">
+                <a:solidFill>
+                  <a:srgbClr val="F5F5F3"/>
+                </a:solidFill>
+                <a:latin typeface="Consolas" pitchFamily="34" charset="0"/>
+                <a:ea typeface="Consolas" pitchFamily="34" charset="-122"/>
+                <a:cs typeface="Consolas" pitchFamily="34" charset="-120"/>
+              </a:rPr>
+              <a:t> </a:t>
+            </a:r>
+            <a:pPr indent="0" marL="0">
+              <a:buNone/>
+            </a:pPr>
+            <a:r>
+              <a:rPr lang="en-US" sz="2100" dirty="0">
+                <a:solidFill>
+                  <a:srgbClr val="A9A9B4"/>
+                </a:solidFill>
+                <a:latin typeface="Consolas" pitchFamily="34" charset="0"/>
+                <a:ea typeface="Consolas" pitchFamily="34" charset="-122"/>
+                <a:cs typeface="Consolas" pitchFamily="34" charset="-120"/>
+              </a:rPr>
+              <a:t>=</a:t>
+            </a:r>
+            <a:pPr indent="0" marL="0">
+              <a:buNone/>
+            </a:pPr>
+            <a:r>
+              <a:rPr lang="en-US" sz="2100" dirty="0">
+                <a:solidFill>
+                  <a:srgbClr val="F5F5F3"/>
+                </a:solidFill>
+                <a:latin typeface="Consolas" pitchFamily="34" charset="0"/>
+                <a:ea typeface="Consolas" pitchFamily="34" charset="-122"/>
+                <a:cs typeface="Consolas" pitchFamily="34" charset="-120"/>
+              </a:rPr>
+              <a:t> </a:t>
+            </a:r>
+            <a:pPr indent="0" marL="0">
+              <a:buNone/>
+            </a:pPr>
+            <a:r>
+              <a:rPr lang="en-US" sz="2100" dirty="0">
+                <a:solidFill>
+                  <a:srgbClr val="E8C878"/>
+                </a:solidFill>
+                <a:latin typeface="Consolas" pitchFamily="34" charset="0"/>
+                <a:ea typeface="Consolas" pitchFamily="34" charset="-122"/>
+                <a:cs typeface="Consolas" pitchFamily="34" charset="-120"/>
+              </a:rPr>
+              <a:t>input</a:t>
+            </a:r>
+            <a:pPr indent="0" marL="0">
+              <a:buNone/>
+            </a:pPr>
+            <a:r>
+              <a:rPr lang="en-US" sz="2100" dirty="0">
+                <a:solidFill>
+                  <a:srgbClr val="A9A9B4"/>
+                </a:solidFill>
+                <a:latin typeface="Consolas" pitchFamily="34" charset="0"/>
+                <a:ea typeface="Consolas" pitchFamily="34" charset="-122"/>
+                <a:cs typeface="Consolas" pitchFamily="34" charset="-120"/>
+              </a:rPr>
+              <a:t>(</a:t>
+            </a:r>
+            <a:pPr indent="0" marL="0">
+              <a:buNone/>
+            </a:pPr>
+            <a:r>
+              <a:rPr lang="en-US" sz="2100" dirty="0">
+                <a:solidFill>
+                  <a:srgbClr val="E69F00"/>
+                </a:solidFill>
+                <a:latin typeface="Consolas" pitchFamily="34" charset="0"/>
+                <a:ea typeface="Consolas" pitchFamily="34" charset="-122"/>
+                <a:cs typeface="Consolas" pitchFamily="34" charset="-120"/>
+              </a:rPr>
+              <a:t>"Dist? "</a:t>
+            </a:r>
+            <a:pPr indent="0" marL="0">
+              <a:buNone/>
+            </a:pPr>
+            <a:r>
+              <a:rPr lang="en-US" sz="2100" dirty="0">
+                <a:solidFill>
+                  <a:srgbClr val="A9A9B4"/>
+                </a:solidFill>
+                <a:latin typeface="Consolas" pitchFamily="34" charset="0"/>
+                <a:ea typeface="Consolas" pitchFamily="34" charset="-122"/>
+                <a:cs typeface="Consolas" pitchFamily="34" charset="-120"/>
+              </a:rPr>
+              <a:t>)</a:t>
+            </a:r>
+            <a:endParaRPr lang="en-US" sz="2100" dirty="0"/>
+          </a:p>
+        </p:txBody>
+      </p:sp>
+      <p:sp>
+        <p:nvSpPr>
+          <p:cNvPr id="11" name="click1"/>
+          <p:cNvSpPr txBox="1"/>
+          <p:nvPr/>
+        </p:nvSpPr>
+        <p:spPr>
+          <a:xfrm>
+            <a:off x="640080" y="2880360"/>
+            <a:ext cx="5394960" cy="868680"/>
+          </a:xfrm>
+          <a:prstGeom prst="rect">
+            <a:avLst/>
+          </a:prstGeom>
+          <a:noFill/>
+          <a:ln/>
+        </p:spPr>
+        <p:txBody>
+          <a:bodyPr wrap="square" lIns="0" tIns="0" rIns="0" bIns="0" rtlCol="0" anchor="t"/>
+          <a:lstStyle/>
+          <a:p>
+            <a:pPr indent="0" marL="0">
+              <a:buNone/>
+            </a:pPr>
+            <a:r>
+              <a:rPr lang="en-US" sz="2000" b="1" dirty="0">
+                <a:solidFill>
+                  <a:srgbClr val="D8A73D"/>
                 </a:solidFill>
                 <a:latin typeface="Calibri" pitchFamily="34" charset="0"/>
                 <a:ea typeface="Calibri" pitchFamily="34" charset="-122"/>
                 <a:cs typeface="Calibri" pitchFamily="34" charset="-120"/>
               </a:rPr>
-              <a:t>YOUR TASK</a:t>
-            </a:r>
-            <a:endParaRPr lang="en-US" sz="1300" dirty="0"/>
-          </a:p>
-        </p:txBody>
-      </p:sp>
-      <p:sp>
-        <p:nvSpPr>
-          <p:cNvPr id="15" name="Text 12"/>
-          <p:cNvSpPr txBox="1"/>
-          <p:nvPr/>
-        </p:nvSpPr>
-        <p:spPr>
-          <a:xfrm>
-            <a:off x="6492240" y="1965960"/>
-            <a:ext cx="4828032" cy="822960"/>
-          </a:xfrm>
-          <a:prstGeom prst="rect">
-            <a:avLst/>
-          </a:prstGeom>
-          <a:noFill/>
-          <a:ln/>
-        </p:spPr>
-        <p:txBody>
-          <a:bodyPr wrap="square" lIns="0" tIns="0" rIns="0" bIns="0" rtlCol="0" anchor="ctr"/>
-          <a:lstStyle/>
-          <a:p>
-            <a:pPr indent="0" marL="0">
-              <a:buNone/>
-            </a:pPr>
-            <a:r>
-              <a:rPr lang="en-US" sz="2600" dirty="0">
+              <a:t>Asks</a:t>
+            </a:r>
+            <a:pPr indent="0" marL="0">
+              <a:buNone/>
+            </a:pPr>
+            <a:r>
+              <a:rPr lang="en-US" sz="2000" dirty="0">
                 <a:solidFill>
                   <a:srgbClr val="F5F5F3"/>
                 </a:solidFill>
@@ -37251,13 +37306,13 @@
                 <a:ea typeface="Calibri" pitchFamily="34" charset="-122"/>
                 <a:cs typeface="Calibri" pitchFamily="34" charset="-120"/>
               </a:rPr>
-              <a:t>Open </a:t>
-            </a:r>
-            <a:pPr indent="0" marL="0">
-              <a:buNone/>
-            </a:pPr>
-            <a:r>
-              <a:rPr lang="en-US" sz="2600" b="1" dirty="0">
+              <a:t> and </a:t>
+            </a:r>
+            <a:pPr indent="0" marL="0">
+              <a:buNone/>
+            </a:pPr>
+            <a:r>
+              <a:rPr lang="en-US" sz="2000" b="1" dirty="0">
                 <a:solidFill>
                   <a:srgbClr val="D8A73D"/>
                 </a:solidFill>
@@ -37265,13 +37320,13 @@
                 <a:ea typeface="Calibri" pitchFamily="34" charset="-122"/>
                 <a:cs typeface="Calibri" pitchFamily="34" charset="-120"/>
               </a:rPr>
-              <a:t>Proximity</a:t>
-            </a:r>
-            <a:pPr indent="0" marL="0">
-              <a:buNone/>
-            </a:pPr>
-            <a:r>
-              <a:rPr lang="en-US" sz="2600" dirty="0">
+              <a:t>stores</a:t>
+            </a:r>
+            <a:pPr indent="0" marL="0">
+              <a:buNone/>
+            </a:pPr>
+            <a:r>
+              <a:rPr lang="en-US" sz="2000" dirty="0">
                 <a:solidFill>
                   <a:srgbClr val="F5F5F3"/>
                 </a:solidFill>
@@ -37279,34 +37334,62 @@
                 <a:ea typeface="Calibri" pitchFamily="34" charset="-122"/>
                 <a:cs typeface="Calibri" pitchFamily="34" charset="-120"/>
               </a:rPr>
-              <a:t> from Google Classroom</a:t>
-            </a:r>
-            <a:endParaRPr lang="en-US" sz="2600" dirty="0"/>
-          </a:p>
-        </p:txBody>
-      </p:sp>
-      <p:sp>
-        <p:nvSpPr>
-          <p:cNvPr id="16" name="Shape 13"/>
+              <a:t> what was typed, as </a:t>
+            </a:r>
+            <a:pPr indent="0" marL="0">
+              <a:buNone/>
+            </a:pPr>
+            <a:r>
+              <a:rPr lang="en-US" sz="2000" b="1" dirty="0">
+                <a:solidFill>
+                  <a:srgbClr val="E69F00"/>
+                </a:solidFill>
+                <a:latin typeface="Calibri" pitchFamily="34" charset="0"/>
+                <a:ea typeface="Calibri" pitchFamily="34" charset="-122"/>
+                <a:cs typeface="Calibri" pitchFamily="34" charset="-120"/>
+              </a:rPr>
+              <a:t>text</a:t>
+            </a:r>
+            <a:pPr indent="0" marL="0">
+              <a:buNone/>
+            </a:pPr>
+            <a:r>
+              <a:rPr lang="en-US" sz="2000" dirty="0">
+                <a:solidFill>
+                  <a:srgbClr val="F5F5F3"/>
+                </a:solidFill>
+                <a:latin typeface="Calibri" pitchFamily="34" charset="0"/>
+                <a:ea typeface="Calibri" pitchFamily="34" charset="-122"/>
+                <a:cs typeface="Calibri" pitchFamily="34" charset="-120"/>
+              </a:rPr>
+              <a:t>, even though it looks like a number</a:t>
+            </a:r>
+            <a:endParaRPr lang="en-US" sz="2000" dirty="0"/>
+          </a:p>
+        </p:txBody>
+      </p:sp>
+      <p:sp>
+        <p:nvSpPr>
+          <p:cNvPr id="12" name="click2 · terminal"/>
           <p:cNvSpPr/>
           <p:nvPr/>
         </p:nvSpPr>
         <p:spPr>
           <a:xfrm>
-            <a:off x="6492240" y="3063240"/>
-            <a:ext cx="914400" cy="685800"/>
+            <a:off x="6446520" y="1874520"/>
+            <a:ext cx="2926080" cy="1325880"/>
           </a:xfrm>
           <a:prstGeom prst="roundRect">
             <a:avLst>
-              <a:gd name="adj" fmla="val 8000"/>
+              <a:gd name="adj" fmla="val 5517"/>
             </a:avLst>
           </a:prstGeom>
           <a:solidFill>
-            <a:srgbClr val="1E1E24"/>
+            <a:srgbClr val="0A0A0D"/>
           </a:solidFill>
           <a:ln w="15875">
             <a:solidFill>
-              <a:srgbClr val="D8A73D"/>
+              <a:srgbClr val="3A3A44"/>
             </a:solidFill>
             <a:prstDash val="solid"/>
           </a:ln>
@@ -37314,69 +37397,83 @@
       </p:sp>
       <p:sp>
         <p:nvSpPr>
-          <p:cNvPr id="17" name="Text 14"/>
-          <p:cNvSpPr txBox="1"/>
-          <p:nvPr/>
-        </p:nvSpPr>
-        <p:spPr>
-          <a:xfrm>
-            <a:off x="6492240" y="3063240"/>
-            <a:ext cx="914400" cy="685800"/>
-          </a:xfrm>
-          <a:prstGeom prst="rect">
-            <a:avLst/>
-          </a:prstGeom>
-          <a:noFill/>
-          <a:ln/>
-        </p:spPr>
-        <p:txBody>
-          <a:bodyPr wrap="square" lIns="0" tIns="0" rIns="0" bIns="0" rtlCol="0" anchor="ctr"/>
-          <a:lstStyle/>
-          <a:p>
-            <a:pPr algn="ctr" indent="0" marL="0">
-              <a:buNone/>
-            </a:pPr>
-            <a:r>
-              <a:rPr lang="en-US" sz="2800" b="1" dirty="0">
-                <a:solidFill>
-                  <a:srgbClr val="D8A73D"/>
-                </a:solidFill>
-                <a:latin typeface="Cambria" pitchFamily="34" charset="0"/>
-                <a:ea typeface="Cambria" pitchFamily="34" charset="-122"/>
-                <a:cs typeface="Cambria" pitchFamily="34" charset="-120"/>
-              </a:rPr>
-              <a:t>P</a:t>
-            </a:r>
-            <a:endParaRPr lang="en-US" sz="2800" dirty="0"/>
-          </a:p>
-        </p:txBody>
-      </p:sp>
-      <p:sp>
-        <p:nvSpPr>
-          <p:cNvPr id="18" name="Text 15"/>
-          <p:cNvSpPr txBox="1"/>
-          <p:nvPr/>
-        </p:nvSpPr>
-        <p:spPr>
-          <a:xfrm>
-            <a:off x="6400800" y="3794760"/>
-            <a:ext cx="1097280" cy="274320"/>
-          </a:xfrm>
-          <a:prstGeom prst="rect">
-            <a:avLst/>
-          </a:prstGeom>
-          <a:noFill/>
-          <a:ln/>
-        </p:spPr>
-        <p:txBody>
-          <a:bodyPr wrap="square" lIns="0" tIns="0" rIns="0" bIns="0" rtlCol="0" anchor="ctr"/>
-          <a:lstStyle/>
-          <a:p>
-            <a:pPr algn="ctr" indent="0" marL="0">
-              <a:buNone/>
-            </a:pPr>
-            <a:r>
-              <a:rPr lang="en-US" sz="1200" dirty="0">
+          <p:cNvPr id="13" name="click2"/>
+          <p:cNvSpPr txBox="1"/>
+          <p:nvPr/>
+        </p:nvSpPr>
+        <p:spPr>
+          <a:xfrm>
+            <a:off x="6675120" y="2103120"/>
+            <a:ext cx="2468880" cy="447040"/>
+          </a:xfrm>
+          <a:prstGeom prst="rect">
+            <a:avLst/>
+          </a:prstGeom>
+          <a:noFill/>
+          <a:ln/>
+        </p:spPr>
+        <p:txBody>
+          <a:bodyPr wrap="square" lIns="0" tIns="0" rIns="0" bIns="0" rtlCol="0" anchor="ctr"/>
+          <a:lstStyle/>
+          <a:p>
+            <a:pPr indent="0" marL="0">
+              <a:buNone/>
+            </a:pPr>
+            <a:r>
+              <a:rPr lang="en-US" sz="2200" dirty="0">
+                <a:solidFill>
+                  <a:srgbClr val="F5F5F3"/>
+                </a:solidFill>
+                <a:latin typeface="Consolas" pitchFamily="34" charset="0"/>
+                <a:ea typeface="Consolas" pitchFamily="34" charset="-122"/>
+                <a:cs typeface="Consolas" pitchFamily="34" charset="-120"/>
+              </a:rPr>
+              <a:t>Dist? </a:t>
+            </a:r>
+            <a:pPr indent="0" marL="0">
+              <a:buNone/>
+            </a:pPr>
+            <a:r>
+              <a:rPr lang="en-US" sz="2200" b="1" dirty="0">
+                <a:solidFill>
+                  <a:srgbClr val="E69F00"/>
+                </a:solidFill>
+                <a:latin typeface="Consolas" pitchFamily="34" charset="0"/>
+                <a:ea typeface="Consolas" pitchFamily="34" charset="-122"/>
+                <a:cs typeface="Consolas" pitchFamily="34" charset="-120"/>
+              </a:rPr>
+              <a:t>30</a:t>
+            </a:r>
+            <a:endParaRPr lang="en-US" sz="2200" dirty="0"/>
+          </a:p>
+        </p:txBody>
+      </p:sp>
+      <p:sp>
+        <p:nvSpPr>
+          <p:cNvPr id="14" name="click2"/>
+          <p:cNvSpPr txBox="1"/>
+          <p:nvPr/>
+        </p:nvSpPr>
+        <p:spPr>
+          <a:xfrm>
+            <a:off x="6446520" y="3291840"/>
+            <a:ext cx="2926080" cy="320040"/>
+          </a:xfrm>
+          <a:prstGeom prst="rect">
+            <a:avLst/>
+          </a:prstGeom>
+          <a:noFill/>
+          <a:ln/>
+        </p:spPr>
+        <p:txBody>
+          <a:bodyPr wrap="square" lIns="0" tIns="0" rIns="0" bIns="0" rtlCol="0" anchor="ctr"/>
+          <a:lstStyle/>
+          <a:p>
+            <a:pPr indent="0" marL="0">
+              <a:buNone/>
+            </a:pPr>
+            <a:r>
+              <a:rPr lang="en-US" sz="1400" i="1" dirty="0">
                 <a:solidFill>
                   <a:srgbClr val="A9A9B4"/>
                 </a:solidFill>
@@ -37384,34 +37481,223 @@
                 <a:ea typeface="Calibri" pitchFamily="34" charset="-122"/>
                 <a:cs typeface="Calibri" pitchFamily="34" charset="-120"/>
               </a:rPr>
-              <a:t>Predict</a:t>
-            </a:r>
-            <a:endParaRPr lang="en-US" sz="1200" dirty="0"/>
-          </a:p>
-        </p:txBody>
-      </p:sp>
-      <p:sp>
-        <p:nvSpPr>
-          <p:cNvPr id="19" name="Shape 16"/>
+              <a:t>The user typed 30</a:t>
+            </a:r>
+            <a:endParaRPr lang="en-US" sz="1400" dirty="0"/>
+          </a:p>
+        </p:txBody>
+      </p:sp>
+      <p:sp>
+        <p:nvSpPr>
+          <p:cNvPr id="15" name="click3"/>
           <p:cNvSpPr/>
           <p:nvPr/>
         </p:nvSpPr>
         <p:spPr>
           <a:xfrm>
-            <a:off x="7470648" y="3063240"/>
-            <a:ext cx="914400" cy="685800"/>
+            <a:off x="9601200" y="2148840"/>
+            <a:ext cx="2039112" cy="868680"/>
           </a:xfrm>
           <a:prstGeom prst="roundRect">
             <a:avLst>
-              <a:gd name="adj" fmla="val 8000"/>
+              <a:gd name="adj" fmla="val 6316"/>
             </a:avLst>
           </a:prstGeom>
           <a:solidFill>
-            <a:srgbClr val="1E1E24"/>
+            <a:srgbClr val="111115"/>
+          </a:solidFill>
+          <a:ln w="25400">
+            <a:solidFill>
+              <a:srgbClr val="E69F00"/>
+            </a:solidFill>
+            <a:prstDash val="solid"/>
+          </a:ln>
+        </p:spPr>
+      </p:sp>
+      <p:sp>
+        <p:nvSpPr>
+          <p:cNvPr id="16" name="click3"/>
+          <p:cNvSpPr/>
+          <p:nvPr/>
+        </p:nvSpPr>
+        <p:spPr>
+          <a:xfrm>
+            <a:off x="9738360" y="1965960"/>
+            <a:ext cx="1481328" cy="347472"/>
+          </a:xfrm>
+          <a:prstGeom prst="roundRect">
+            <a:avLst>
+              <a:gd name="adj" fmla="val 13158"/>
+            </a:avLst>
+          </a:prstGeom>
+          <a:solidFill>
+            <a:srgbClr val="E69F00"/>
+          </a:solidFill>
+          <a:ln/>
+        </p:spPr>
+      </p:sp>
+      <p:sp>
+        <p:nvSpPr>
+          <p:cNvPr id="17" name="click3"/>
+          <p:cNvSpPr txBox="1"/>
+          <p:nvPr/>
+        </p:nvSpPr>
+        <p:spPr>
+          <a:xfrm>
+            <a:off x="9738360" y="1965960"/>
+            <a:ext cx="1481328" cy="347472"/>
+          </a:xfrm>
+          <a:prstGeom prst="rect">
+            <a:avLst/>
+          </a:prstGeom>
+          <a:noFill/>
+          <a:ln/>
+        </p:spPr>
+        <p:txBody>
+          <a:bodyPr wrap="square" lIns="0" tIns="0" rIns="0" bIns="0" rtlCol="0" anchor="ctr"/>
+          <a:lstStyle/>
+          <a:p>
+            <a:pPr algn="ctr" indent="0" marL="0">
+              <a:buNone/>
+            </a:pPr>
+            <a:r>
+              <a:rPr lang="en-US" sz="1400" b="1" dirty="0">
+                <a:solidFill>
+                  <a:srgbClr val="111115"/>
+                </a:solidFill>
+                <a:latin typeface="Consolas" pitchFamily="34" charset="0"/>
+                <a:ea typeface="Consolas" pitchFamily="34" charset="-122"/>
+                <a:cs typeface="Consolas" pitchFamily="34" charset="-120"/>
+              </a:rPr>
+              <a:t>dist  ·  str</a:t>
+            </a:r>
+            <a:endParaRPr lang="en-US" sz="1400" dirty="0"/>
+          </a:p>
+        </p:txBody>
+      </p:sp>
+      <p:sp>
+        <p:nvSpPr>
+          <p:cNvPr id="18" name="click3"/>
+          <p:cNvSpPr txBox="1"/>
+          <p:nvPr/>
+        </p:nvSpPr>
+        <p:spPr>
+          <a:xfrm>
+            <a:off x="9692640" y="2331720"/>
+            <a:ext cx="1856232" cy="640080"/>
+          </a:xfrm>
+          <a:prstGeom prst="rect">
+            <a:avLst/>
+          </a:prstGeom>
+          <a:noFill/>
+          <a:ln/>
+        </p:spPr>
+        <p:txBody>
+          <a:bodyPr wrap="square" lIns="0" tIns="0" rIns="0" bIns="0" rtlCol="0" anchor="ctr"/>
+          <a:lstStyle/>
+          <a:p>
+            <a:pPr algn="ctr" indent="0" marL="0">
+              <a:buNone/>
+            </a:pPr>
+            <a:r>
+              <a:rPr lang="en-US" sz="2400" dirty="0">
+                <a:solidFill>
+                  <a:srgbClr val="F5F5F3"/>
+                </a:solidFill>
+                <a:latin typeface="Consolas" pitchFamily="34" charset="0"/>
+                <a:ea typeface="Consolas" pitchFamily="34" charset="-122"/>
+                <a:cs typeface="Consolas" pitchFamily="34" charset="-120"/>
+              </a:rPr>
+              <a:t>"30"</a:t>
+            </a:r>
+            <a:endParaRPr lang="en-US" sz="2400" dirty="0"/>
+          </a:p>
+        </p:txBody>
+      </p:sp>
+      <p:sp>
+        <p:nvSpPr>
+          <p:cNvPr id="19" name="click3"/>
+          <p:cNvSpPr txBox="1"/>
+          <p:nvPr/>
+        </p:nvSpPr>
+        <p:spPr>
+          <a:xfrm>
+            <a:off x="9601200" y="3108960"/>
+            <a:ext cx="2039112" cy="320040"/>
+          </a:xfrm>
+          <a:prstGeom prst="rect">
+            <a:avLst/>
+          </a:prstGeom>
+          <a:noFill/>
+          <a:ln/>
+        </p:spPr>
+        <p:txBody>
+          <a:bodyPr wrap="square" lIns="0" tIns="0" rIns="0" bIns="0" rtlCol="0" anchor="ctr"/>
+          <a:lstStyle/>
+          <a:p>
+            <a:pPr indent="0" marL="0">
+              <a:buNone/>
+            </a:pPr>
+            <a:r>
+              <a:rPr lang="en-US" sz="1400" i="1" dirty="0">
+                <a:solidFill>
+                  <a:srgbClr val="A9A9B4"/>
+                </a:solidFill>
+                <a:latin typeface="Calibri" pitchFamily="34" charset="0"/>
+                <a:ea typeface="Calibri" pitchFamily="34" charset="-122"/>
+                <a:cs typeface="Calibri" pitchFamily="34" charset="-120"/>
+              </a:rPr>
+              <a:t>Text: can’t compare with 50</a:t>
+            </a:r>
+            <a:endParaRPr lang="en-US" sz="1400" dirty="0"/>
+          </a:p>
+        </p:txBody>
+      </p:sp>
+      <p:sp>
+        <p:nvSpPr>
+          <p:cNvPr id="20" name="click4"/>
+          <p:cNvSpPr/>
+          <p:nvPr/>
+        </p:nvSpPr>
+        <p:spPr>
+          <a:xfrm>
+            <a:off x="548640" y="3977640"/>
+            <a:ext cx="11091672" cy="0"/>
+          </a:xfrm>
+          <a:prstGeom prst="line">
+            <a:avLst/>
+          </a:prstGeom>
+          <a:noFill/>
+          <a:ln w="12700">
+            <a:solidFill>
+              <a:srgbClr val="3A3A44"/>
+            </a:solidFill>
+            <a:prstDash val="solid"/>
+          </a:ln>
+        </p:spPr>
+      </p:sp>
+      <p:sp>
+        <p:nvSpPr>
+          <p:cNvPr id="21" name="click4 · code"/>
+          <p:cNvSpPr/>
+          <p:nvPr/>
+        </p:nvSpPr>
+        <p:spPr>
+          <a:xfrm>
+            <a:off x="548640" y="4069080"/>
+            <a:ext cx="5577840" cy="868680"/>
+          </a:xfrm>
+          <a:prstGeom prst="roundRect">
+            <a:avLst>
+              <a:gd name="adj" fmla="val 8421"/>
+            </a:avLst>
+          </a:prstGeom>
+          <a:solidFill>
+            <a:srgbClr val="111115"/>
           </a:solidFill>
           <a:ln w="15875">
             <a:solidFill>
-              <a:srgbClr val="D8A73D"/>
+              <a:srgbClr val="3A3A44"/>
             </a:solidFill>
             <a:prstDash val="solid"/>
           </a:ln>
@@ -37419,104 +37705,353 @@
       </p:sp>
       <p:sp>
         <p:nvSpPr>
-          <p:cNvPr id="20" name="Text 17"/>
-          <p:cNvSpPr txBox="1"/>
-          <p:nvPr/>
-        </p:nvSpPr>
-        <p:spPr>
-          <a:xfrm>
-            <a:off x="7470648" y="3063240"/>
-            <a:ext cx="914400" cy="685800"/>
-          </a:xfrm>
-          <a:prstGeom prst="rect">
-            <a:avLst/>
-          </a:prstGeom>
-          <a:noFill/>
-          <a:ln/>
-        </p:spPr>
-        <p:txBody>
-          <a:bodyPr wrap="square" lIns="0" tIns="0" rIns="0" bIns="0" rtlCol="0" anchor="ctr"/>
-          <a:lstStyle/>
-          <a:p>
-            <a:pPr algn="ctr" indent="0" marL="0">
-              <a:buNone/>
-            </a:pPr>
-            <a:r>
-              <a:rPr lang="en-US" sz="2800" b="1" dirty="0">
+          <p:cNvPr id="22" name="click4"/>
+          <p:cNvSpPr txBox="1"/>
+          <p:nvPr/>
+        </p:nvSpPr>
+        <p:spPr>
+          <a:xfrm>
+            <a:off x="658368" y="4270248"/>
+            <a:ext cx="274320" cy="440055"/>
+          </a:xfrm>
+          <a:prstGeom prst="rect">
+            <a:avLst/>
+          </a:prstGeom>
+          <a:noFill/>
+          <a:ln/>
+        </p:spPr>
+        <p:txBody>
+          <a:bodyPr wrap="square" lIns="0" tIns="0" rIns="0" bIns="0" rtlCol="0" anchor="ctr"/>
+          <a:lstStyle/>
+          <a:p>
+            <a:pPr algn="r" indent="0" marL="0">
+              <a:buNone/>
+            </a:pPr>
+            <a:r>
+              <a:rPr lang="en-US" sz="1700" dirty="0">
+                <a:solidFill>
+                  <a:srgbClr val="6E6E7A"/>
+                </a:solidFill>
+                <a:latin typeface="Consolas" pitchFamily="34" charset="0"/>
+                <a:ea typeface="Consolas" pitchFamily="34" charset="-122"/>
+                <a:cs typeface="Consolas" pitchFamily="34" charset="-120"/>
+              </a:rPr>
+              <a:t>2</a:t>
+            </a:r>
+            <a:endParaRPr lang="en-US" sz="1700" dirty="0"/>
+          </a:p>
+        </p:txBody>
+      </p:sp>
+      <p:sp>
+        <p:nvSpPr>
+          <p:cNvPr id="23" name="click4"/>
+          <p:cNvSpPr txBox="1"/>
+          <p:nvPr/>
+        </p:nvSpPr>
+        <p:spPr>
+          <a:xfrm>
+            <a:off x="1188720" y="4270248"/>
+            <a:ext cx="4846320" cy="440055"/>
+          </a:xfrm>
+          <a:prstGeom prst="rect">
+            <a:avLst/>
+          </a:prstGeom>
+          <a:noFill/>
+          <a:ln/>
+        </p:spPr>
+        <p:txBody>
+          <a:bodyPr wrap="square" lIns="0" tIns="0" rIns="0" bIns="0" rtlCol="0" anchor="ctr"/>
+          <a:lstStyle/>
+          <a:p>
+            <a:pPr indent="0" marL="0">
+              <a:buNone/>
+            </a:pPr>
+            <a:r>
+              <a:rPr lang="en-US" sz="2100" dirty="0">
+                <a:solidFill>
+                  <a:srgbClr val="F5F5F3"/>
+                </a:solidFill>
+                <a:latin typeface="Consolas" pitchFamily="34" charset="0"/>
+                <a:ea typeface="Consolas" pitchFamily="34" charset="-122"/>
+                <a:cs typeface="Consolas" pitchFamily="34" charset="-120"/>
+              </a:rPr>
+              <a:t>dist</a:t>
+            </a:r>
+            <a:pPr indent="0" marL="0">
+              <a:buNone/>
+            </a:pPr>
+            <a:r>
+              <a:rPr lang="en-US" sz="2100" dirty="0">
+                <a:solidFill>
+                  <a:srgbClr val="F5F5F3"/>
+                </a:solidFill>
+                <a:latin typeface="Consolas" pitchFamily="34" charset="0"/>
+                <a:ea typeface="Consolas" pitchFamily="34" charset="-122"/>
+                <a:cs typeface="Consolas" pitchFamily="34" charset="-120"/>
+              </a:rPr>
+              <a:t> </a:t>
+            </a:r>
+            <a:pPr indent="0" marL="0">
+              <a:buNone/>
+            </a:pPr>
+            <a:r>
+              <a:rPr lang="en-US" sz="2100" dirty="0">
+                <a:solidFill>
+                  <a:srgbClr val="A9A9B4"/>
+                </a:solidFill>
+                <a:latin typeface="Consolas" pitchFamily="34" charset="0"/>
+                <a:ea typeface="Consolas" pitchFamily="34" charset="-122"/>
+                <a:cs typeface="Consolas" pitchFamily="34" charset="-120"/>
+              </a:rPr>
+              <a:t>=</a:t>
+            </a:r>
+            <a:pPr indent="0" marL="0">
+              <a:buNone/>
+            </a:pPr>
+            <a:r>
+              <a:rPr lang="en-US" sz="2100" dirty="0">
+                <a:solidFill>
+                  <a:srgbClr val="F5F5F3"/>
+                </a:solidFill>
+                <a:latin typeface="Consolas" pitchFamily="34" charset="0"/>
+                <a:ea typeface="Consolas" pitchFamily="34" charset="-122"/>
+                <a:cs typeface="Consolas" pitchFamily="34" charset="-120"/>
+              </a:rPr>
+              <a:t> </a:t>
+            </a:r>
+            <a:pPr indent="0" marL="0">
+              <a:buNone/>
+            </a:pPr>
+            <a:r>
+              <a:rPr lang="en-US" sz="2100" dirty="0">
+                <a:solidFill>
+                  <a:srgbClr val="E8C878"/>
+                </a:solidFill>
+                <a:latin typeface="Consolas" pitchFamily="34" charset="0"/>
+                <a:ea typeface="Consolas" pitchFamily="34" charset="-122"/>
+                <a:cs typeface="Consolas" pitchFamily="34" charset="-120"/>
+              </a:rPr>
+              <a:t>int</a:t>
+            </a:r>
+            <a:pPr indent="0" marL="0">
+              <a:buNone/>
+            </a:pPr>
+            <a:r>
+              <a:rPr lang="en-US" sz="2100" dirty="0">
+                <a:solidFill>
+                  <a:srgbClr val="A9A9B4"/>
+                </a:solidFill>
+                <a:latin typeface="Consolas" pitchFamily="34" charset="0"/>
+                <a:ea typeface="Consolas" pitchFamily="34" charset="-122"/>
+                <a:cs typeface="Consolas" pitchFamily="34" charset="-120"/>
+              </a:rPr>
+              <a:t>(</a:t>
+            </a:r>
+            <a:pPr indent="0" marL="0">
+              <a:buNone/>
+            </a:pPr>
+            <a:r>
+              <a:rPr lang="en-US" sz="2100" dirty="0">
+                <a:solidFill>
+                  <a:srgbClr val="E8C878"/>
+                </a:solidFill>
+                <a:latin typeface="Consolas" pitchFamily="34" charset="0"/>
+                <a:ea typeface="Consolas" pitchFamily="34" charset="-122"/>
+                <a:cs typeface="Consolas" pitchFamily="34" charset="-120"/>
+              </a:rPr>
+              <a:t>input</a:t>
+            </a:r>
+            <a:pPr indent="0" marL="0">
+              <a:buNone/>
+            </a:pPr>
+            <a:r>
+              <a:rPr lang="en-US" sz="2100" dirty="0">
+                <a:solidFill>
+                  <a:srgbClr val="A9A9B4"/>
+                </a:solidFill>
+                <a:latin typeface="Consolas" pitchFamily="34" charset="0"/>
+                <a:ea typeface="Consolas" pitchFamily="34" charset="-122"/>
+                <a:cs typeface="Consolas" pitchFamily="34" charset="-120"/>
+              </a:rPr>
+              <a:t>(</a:t>
+            </a:r>
+            <a:pPr indent="0" marL="0">
+              <a:buNone/>
+            </a:pPr>
+            <a:r>
+              <a:rPr lang="en-US" sz="2100" dirty="0">
+                <a:solidFill>
+                  <a:srgbClr val="E69F00"/>
+                </a:solidFill>
+                <a:latin typeface="Consolas" pitchFamily="34" charset="0"/>
+                <a:ea typeface="Consolas" pitchFamily="34" charset="-122"/>
+                <a:cs typeface="Consolas" pitchFamily="34" charset="-120"/>
+              </a:rPr>
+              <a:t>"Dist? "</a:t>
+            </a:r>
+            <a:pPr indent="0" marL="0">
+              <a:buNone/>
+            </a:pPr>
+            <a:r>
+              <a:rPr lang="en-US" sz="2100" dirty="0">
+                <a:solidFill>
+                  <a:srgbClr val="A9A9B4"/>
+                </a:solidFill>
+                <a:latin typeface="Consolas" pitchFamily="34" charset="0"/>
+                <a:ea typeface="Consolas" pitchFamily="34" charset="-122"/>
+                <a:cs typeface="Consolas" pitchFamily="34" charset="-120"/>
+              </a:rPr>
+              <a:t>)</a:t>
+            </a:r>
+            <a:pPr indent="0" marL="0">
+              <a:buNone/>
+            </a:pPr>
+            <a:r>
+              <a:rPr lang="en-US" sz="2100" dirty="0">
+                <a:solidFill>
+                  <a:srgbClr val="A9A9B4"/>
+                </a:solidFill>
+                <a:latin typeface="Consolas" pitchFamily="34" charset="0"/>
+                <a:ea typeface="Consolas" pitchFamily="34" charset="-122"/>
+                <a:cs typeface="Consolas" pitchFamily="34" charset="-120"/>
+              </a:rPr>
+              <a:t>)</a:t>
+            </a:r>
+            <a:endParaRPr lang="en-US" sz="2100" dirty="0"/>
+          </a:p>
+        </p:txBody>
+      </p:sp>
+      <p:sp>
+        <p:nvSpPr>
+          <p:cNvPr id="24" name="click4"/>
+          <p:cNvSpPr txBox="1"/>
+          <p:nvPr/>
+        </p:nvSpPr>
+        <p:spPr>
+          <a:xfrm>
+            <a:off x="640080" y="5074920"/>
+            <a:ext cx="5394960" cy="868680"/>
+          </a:xfrm>
+          <a:prstGeom prst="rect">
+            <a:avLst/>
+          </a:prstGeom>
+          <a:noFill/>
+          <a:ln/>
+        </p:spPr>
+        <p:txBody>
+          <a:bodyPr wrap="square" lIns="0" tIns="0" rIns="0" bIns="0" rtlCol="0" anchor="t"/>
+          <a:lstStyle/>
+          <a:p>
+            <a:pPr indent="0" marL="0">
+              <a:buNone/>
+            </a:pPr>
+            <a:r>
+              <a:rPr lang="en-US" sz="2000" b="1" dirty="0">
                 <a:solidFill>
                   <a:srgbClr val="D8A73D"/>
-                </a:solidFill>
-                <a:latin typeface="Cambria" pitchFamily="34" charset="0"/>
-                <a:ea typeface="Cambria" pitchFamily="34" charset="-122"/>
-                <a:cs typeface="Cambria" pitchFamily="34" charset="-120"/>
-              </a:rPr>
-              <a:t>R</a:t>
-            </a:r>
-            <a:endParaRPr lang="en-US" sz="2800" dirty="0"/>
-          </a:p>
-        </p:txBody>
-      </p:sp>
-      <p:sp>
-        <p:nvSpPr>
-          <p:cNvPr id="21" name="Text 18"/>
-          <p:cNvSpPr txBox="1"/>
-          <p:nvPr/>
-        </p:nvSpPr>
-        <p:spPr>
-          <a:xfrm>
-            <a:off x="7379208" y="3794760"/>
-            <a:ext cx="1097280" cy="274320"/>
-          </a:xfrm>
-          <a:prstGeom prst="rect">
-            <a:avLst/>
-          </a:prstGeom>
-          <a:noFill/>
-          <a:ln/>
-        </p:spPr>
-        <p:txBody>
-          <a:bodyPr wrap="square" lIns="0" tIns="0" rIns="0" bIns="0" rtlCol="0" anchor="ctr"/>
-          <a:lstStyle/>
-          <a:p>
-            <a:pPr algn="ctr" indent="0" marL="0">
-              <a:buNone/>
-            </a:pPr>
-            <a:r>
-              <a:rPr lang="en-US" sz="1200" dirty="0">
-                <a:solidFill>
-                  <a:srgbClr val="A9A9B4"/>
                 </a:solidFill>
                 <a:latin typeface="Calibri" pitchFamily="34" charset="0"/>
                 <a:ea typeface="Calibri" pitchFamily="34" charset="-122"/>
                 <a:cs typeface="Calibri" pitchFamily="34" charset="-120"/>
               </a:rPr>
-              <a:t>Run</a:t>
-            </a:r>
-            <a:endParaRPr lang="en-US" sz="1200" dirty="0"/>
-          </a:p>
-        </p:txBody>
-      </p:sp>
-      <p:sp>
-        <p:nvSpPr>
-          <p:cNvPr id="22" name="Shape 19"/>
+              <a:t>Asks</a:t>
+            </a:r>
+            <a:pPr indent="0" marL="0">
+              <a:buNone/>
+            </a:pPr>
+            <a:r>
+              <a:rPr lang="en-US" sz="2000" dirty="0">
+                <a:solidFill>
+                  <a:srgbClr val="F5F5F3"/>
+                </a:solidFill>
+                <a:latin typeface="Calibri" pitchFamily="34" charset="0"/>
+                <a:ea typeface="Calibri" pitchFamily="34" charset="-122"/>
+                <a:cs typeface="Calibri" pitchFamily="34" charset="-120"/>
+              </a:rPr>
+              <a:t>, then </a:t>
+            </a:r>
+            <a:pPr indent="0" marL="0">
+              <a:buNone/>
+            </a:pPr>
+            <a:r>
+              <a:rPr lang="en-US" sz="2000" dirty="0">
+                <a:solidFill>
+                  <a:srgbClr val="F5F5F3"/>
+                </a:solidFill>
+                <a:latin typeface="Consolas" pitchFamily="34" charset="0"/>
+                <a:ea typeface="Consolas" pitchFamily="34" charset="-122"/>
+                <a:cs typeface="Consolas" pitchFamily="34" charset="-120"/>
+              </a:rPr>
+              <a:t>int()</a:t>
+            </a:r>
+            <a:pPr indent="0" marL="0">
+              <a:buNone/>
+            </a:pPr>
+            <a:r>
+              <a:rPr lang="en-US" sz="2000" dirty="0">
+                <a:solidFill>
+                  <a:srgbClr val="F5F5F3"/>
+                </a:solidFill>
+                <a:latin typeface="Calibri" pitchFamily="34" charset="0"/>
+                <a:ea typeface="Calibri" pitchFamily="34" charset="-122"/>
+                <a:cs typeface="Calibri" pitchFamily="34" charset="-120"/>
+              </a:rPr>
+              <a:t> turns the text into a </a:t>
+            </a:r>
+            <a:pPr indent="0" marL="0">
+              <a:buNone/>
+            </a:pPr>
+            <a:r>
+              <a:rPr lang="en-US" sz="2000" b="1" dirty="0">
+                <a:solidFill>
+                  <a:srgbClr val="56B4E9"/>
+                </a:solidFill>
+                <a:latin typeface="Calibri" pitchFamily="34" charset="0"/>
+                <a:ea typeface="Calibri" pitchFamily="34" charset="-122"/>
+                <a:cs typeface="Calibri" pitchFamily="34" charset="-120"/>
+              </a:rPr>
+              <a:t>whole number</a:t>
+            </a:r>
+            <a:pPr indent="0" marL="0">
+              <a:buNone/>
+            </a:pPr>
+            <a:r>
+              <a:rPr lang="en-US" sz="2000" dirty="0">
+                <a:solidFill>
+                  <a:srgbClr val="F5F5F3"/>
+                </a:solidFill>
+                <a:latin typeface="Calibri" pitchFamily="34" charset="0"/>
+                <a:ea typeface="Calibri" pitchFamily="34" charset="-122"/>
+                <a:cs typeface="Calibri" pitchFamily="34" charset="-120"/>
+              </a:rPr>
+              <a:t> before = stores it</a:t>
+            </a:r>
+            <a:endParaRPr lang="en-US" sz="2000" dirty="0"/>
+          </a:p>
+        </p:txBody>
+      </p:sp>
+      <p:sp>
+        <p:nvSpPr>
+          <p:cNvPr id="25" name="click5 · terminal"/>
           <p:cNvSpPr/>
           <p:nvPr/>
         </p:nvSpPr>
         <p:spPr>
           <a:xfrm>
-            <a:off x="8449056" y="3063240"/>
-            <a:ext cx="914400" cy="685800"/>
+            <a:off x="6446520" y="4069080"/>
+            <a:ext cx="2926080" cy="1325880"/>
           </a:xfrm>
           <a:prstGeom prst="roundRect">
             <a:avLst>
-              <a:gd name="adj" fmla="val 8000"/>
+              <a:gd name="adj" fmla="val 5517"/>
             </a:avLst>
           </a:prstGeom>
           <a:solidFill>
-            <a:srgbClr val="1E1E24"/>
+            <a:srgbClr val="0A0A0D"/>
           </a:solidFill>
           <a:ln w="15875">
             <a:solidFill>
-              <a:srgbClr val="D8A73D"/>
+              <a:srgbClr val="3A3A44"/>
             </a:solidFill>
             <a:prstDash val="solid"/>
           </a:ln>
@@ -37524,69 +38059,83 @@
       </p:sp>
       <p:sp>
         <p:nvSpPr>
-          <p:cNvPr id="23" name="Text 20"/>
-          <p:cNvSpPr txBox="1"/>
-          <p:nvPr/>
-        </p:nvSpPr>
-        <p:spPr>
-          <a:xfrm>
-            <a:off x="8449056" y="3063240"/>
-            <a:ext cx="914400" cy="685800"/>
-          </a:xfrm>
-          <a:prstGeom prst="rect">
-            <a:avLst/>
-          </a:prstGeom>
-          <a:noFill/>
-          <a:ln/>
-        </p:spPr>
-        <p:txBody>
-          <a:bodyPr wrap="square" lIns="0" tIns="0" rIns="0" bIns="0" rtlCol="0" anchor="ctr"/>
-          <a:lstStyle/>
-          <a:p>
-            <a:pPr algn="ctr" indent="0" marL="0">
-              <a:buNone/>
-            </a:pPr>
-            <a:r>
-              <a:rPr lang="en-US" sz="2800" b="1" dirty="0">
-                <a:solidFill>
-                  <a:srgbClr val="D8A73D"/>
-                </a:solidFill>
-                <a:latin typeface="Cambria" pitchFamily="34" charset="0"/>
-                <a:ea typeface="Cambria" pitchFamily="34" charset="-122"/>
-                <a:cs typeface="Cambria" pitchFamily="34" charset="-120"/>
-              </a:rPr>
-              <a:t>I</a:t>
-            </a:r>
-            <a:endParaRPr lang="en-US" sz="2800" dirty="0"/>
-          </a:p>
-        </p:txBody>
-      </p:sp>
-      <p:sp>
-        <p:nvSpPr>
-          <p:cNvPr id="24" name="Text 21"/>
-          <p:cNvSpPr txBox="1"/>
-          <p:nvPr/>
-        </p:nvSpPr>
-        <p:spPr>
-          <a:xfrm>
-            <a:off x="8357616" y="3794760"/>
-            <a:ext cx="1097280" cy="274320"/>
-          </a:xfrm>
-          <a:prstGeom prst="rect">
-            <a:avLst/>
-          </a:prstGeom>
-          <a:noFill/>
-          <a:ln/>
-        </p:spPr>
-        <p:txBody>
-          <a:bodyPr wrap="square" lIns="0" tIns="0" rIns="0" bIns="0" rtlCol="0" anchor="ctr"/>
-          <a:lstStyle/>
-          <a:p>
-            <a:pPr algn="ctr" indent="0" marL="0">
-              <a:buNone/>
-            </a:pPr>
-            <a:r>
-              <a:rPr lang="en-US" sz="1200" dirty="0">
+          <p:cNvPr id="26" name="click5"/>
+          <p:cNvSpPr txBox="1"/>
+          <p:nvPr/>
+        </p:nvSpPr>
+        <p:spPr>
+          <a:xfrm>
+            <a:off x="6675120" y="4297680"/>
+            <a:ext cx="2468880" cy="447040"/>
+          </a:xfrm>
+          <a:prstGeom prst="rect">
+            <a:avLst/>
+          </a:prstGeom>
+          <a:noFill/>
+          <a:ln/>
+        </p:spPr>
+        <p:txBody>
+          <a:bodyPr wrap="square" lIns="0" tIns="0" rIns="0" bIns="0" rtlCol="0" anchor="ctr"/>
+          <a:lstStyle/>
+          <a:p>
+            <a:pPr indent="0" marL="0">
+              <a:buNone/>
+            </a:pPr>
+            <a:r>
+              <a:rPr lang="en-US" sz="2200" dirty="0">
+                <a:solidFill>
+                  <a:srgbClr val="F5F5F3"/>
+                </a:solidFill>
+                <a:latin typeface="Consolas" pitchFamily="34" charset="0"/>
+                <a:ea typeface="Consolas" pitchFamily="34" charset="-122"/>
+                <a:cs typeface="Consolas" pitchFamily="34" charset="-120"/>
+              </a:rPr>
+              <a:t>Dist? </a:t>
+            </a:r>
+            <a:pPr indent="0" marL="0">
+              <a:buNone/>
+            </a:pPr>
+            <a:r>
+              <a:rPr lang="en-US" sz="2200" b="1" dirty="0">
+                <a:solidFill>
+                  <a:srgbClr val="E69F00"/>
+                </a:solidFill>
+                <a:latin typeface="Consolas" pitchFamily="34" charset="0"/>
+                <a:ea typeface="Consolas" pitchFamily="34" charset="-122"/>
+                <a:cs typeface="Consolas" pitchFamily="34" charset="-120"/>
+              </a:rPr>
+              <a:t>30</a:t>
+            </a:r>
+            <a:endParaRPr lang="en-US" sz="2200" dirty="0"/>
+          </a:p>
+        </p:txBody>
+      </p:sp>
+      <p:sp>
+        <p:nvSpPr>
+          <p:cNvPr id="27" name="click5"/>
+          <p:cNvSpPr txBox="1"/>
+          <p:nvPr/>
+        </p:nvSpPr>
+        <p:spPr>
+          <a:xfrm>
+            <a:off x="6446520" y="5486400"/>
+            <a:ext cx="2926080" cy="320040"/>
+          </a:xfrm>
+          <a:prstGeom prst="rect">
+            <a:avLst/>
+          </a:prstGeom>
+          <a:noFill/>
+          <a:ln/>
+        </p:spPr>
+        <p:txBody>
+          <a:bodyPr wrap="square" lIns="0" tIns="0" rIns="0" bIns="0" rtlCol="0" anchor="ctr"/>
+          <a:lstStyle/>
+          <a:p>
+            <a:pPr indent="0" marL="0">
+              <a:buNone/>
+            </a:pPr>
+            <a:r>
+              <a:rPr lang="en-US" sz="1400" i="1" dirty="0">
                 <a:solidFill>
                   <a:srgbClr val="A9A9B4"/>
                 </a:solidFill>
@@ -37594,34 +38143,34 @@
                 <a:ea typeface="Calibri" pitchFamily="34" charset="-122"/>
                 <a:cs typeface="Calibri" pitchFamily="34" charset="-120"/>
               </a:rPr>
-              <a:t>Investigate</a:t>
-            </a:r>
-            <a:endParaRPr lang="en-US" sz="1200" dirty="0"/>
-          </a:p>
-        </p:txBody>
-      </p:sp>
-      <p:sp>
-        <p:nvSpPr>
-          <p:cNvPr id="25" name="Shape 22"/>
+              <a:t>The same 30 typed</a:t>
+            </a:r>
+            <a:endParaRPr lang="en-US" sz="1400" dirty="0"/>
+          </a:p>
+        </p:txBody>
+      </p:sp>
+      <p:sp>
+        <p:nvSpPr>
+          <p:cNvPr id="28" name="click6"/>
           <p:cNvSpPr/>
           <p:nvPr/>
         </p:nvSpPr>
         <p:spPr>
           <a:xfrm>
-            <a:off x="9427464" y="3063240"/>
-            <a:ext cx="914400" cy="685800"/>
+            <a:off x="9601200" y="4343400"/>
+            <a:ext cx="2039112" cy="868680"/>
           </a:xfrm>
           <a:prstGeom prst="roundRect">
             <a:avLst>
-              <a:gd name="adj" fmla="val 8000"/>
+              <a:gd name="adj" fmla="val 6316"/>
             </a:avLst>
           </a:prstGeom>
           <a:solidFill>
-            <a:srgbClr val="1E1E24"/>
+            <a:srgbClr val="111115"/>
           </a:solidFill>
-          <a:ln w="15875">
+          <a:ln w="25400">
             <a:solidFill>
-              <a:srgbClr val="D8A73D"/>
+              <a:srgbClr val="56B4E9"/>
             </a:solidFill>
             <a:prstDash val="solid"/>
           </a:ln>
@@ -37629,14 +38178,36 @@
       </p:sp>
       <p:sp>
         <p:nvSpPr>
-          <p:cNvPr id="26" name="Text 23"/>
-          <p:cNvSpPr txBox="1"/>
-          <p:nvPr/>
-        </p:nvSpPr>
-        <p:spPr>
-          <a:xfrm>
-            <a:off x="9427464" y="3063240"/>
-            <a:ext cx="914400" cy="685800"/>
+          <p:cNvPr id="29" name="click6"/>
+          <p:cNvSpPr/>
+          <p:nvPr/>
+        </p:nvSpPr>
+        <p:spPr>
+          <a:xfrm>
+            <a:off x="9738360" y="4160520"/>
+            <a:ext cx="1481328" cy="347472"/>
+          </a:xfrm>
+          <a:prstGeom prst="roundRect">
+            <a:avLst>
+              <a:gd name="adj" fmla="val 13158"/>
+            </a:avLst>
+          </a:prstGeom>
+          <a:solidFill>
+            <a:srgbClr val="56B4E9"/>
+          </a:solidFill>
+          <a:ln/>
+        </p:spPr>
+      </p:sp>
+      <p:sp>
+        <p:nvSpPr>
+          <p:cNvPr id="30" name="click6"/>
+          <p:cNvSpPr txBox="1"/>
+          <p:nvPr/>
+        </p:nvSpPr>
+        <p:spPr>
+          <a:xfrm>
+            <a:off x="9738360" y="4160520"/>
+            <a:ext cx="1481328" cy="347472"/>
           </a:xfrm>
           <a:prstGeom prst="rect">
             <a:avLst/>
@@ -37652,30 +38223,30 @@
               <a:buNone/>
             </a:pPr>
             <a:r>
-              <a:rPr lang="en-US" sz="2800" b="1" dirty="0">
-                <a:solidFill>
-                  <a:srgbClr val="D8A73D"/>
-                </a:solidFill>
-                <a:latin typeface="Cambria" pitchFamily="34" charset="0"/>
-                <a:ea typeface="Cambria" pitchFamily="34" charset="-122"/>
-                <a:cs typeface="Cambria" pitchFamily="34" charset="-120"/>
-              </a:rPr>
-              <a:t>M</a:t>
-            </a:r>
-            <a:endParaRPr lang="en-US" sz="2800" dirty="0"/>
-          </a:p>
-        </p:txBody>
-      </p:sp>
-      <p:sp>
-        <p:nvSpPr>
-          <p:cNvPr id="27" name="Text 24"/>
-          <p:cNvSpPr txBox="1"/>
-          <p:nvPr/>
-        </p:nvSpPr>
-        <p:spPr>
-          <a:xfrm>
-            <a:off x="9336024" y="3794760"/>
-            <a:ext cx="1097280" cy="274320"/>
+              <a:rPr lang="en-US" sz="1400" b="1" dirty="0">
+                <a:solidFill>
+                  <a:srgbClr val="111115"/>
+                </a:solidFill>
+                <a:latin typeface="Consolas" pitchFamily="34" charset="0"/>
+                <a:ea typeface="Consolas" pitchFamily="34" charset="-122"/>
+                <a:cs typeface="Consolas" pitchFamily="34" charset="-120"/>
+              </a:rPr>
+              <a:t>dist  ·  int</a:t>
+            </a:r>
+            <a:endParaRPr lang="en-US" sz="1400" dirty="0"/>
+          </a:p>
+        </p:txBody>
+      </p:sp>
+      <p:sp>
+        <p:nvSpPr>
+          <p:cNvPr id="31" name="click6"/>
+          <p:cNvSpPr txBox="1"/>
+          <p:nvPr/>
+        </p:nvSpPr>
+        <p:spPr>
+          <a:xfrm>
+            <a:off x="9692640" y="4526280"/>
+            <a:ext cx="1856232" cy="640080"/>
           </a:xfrm>
           <a:prstGeom prst="rect">
             <a:avLst/>
@@ -37691,7 +38262,46 @@
               <a:buNone/>
             </a:pPr>
             <a:r>
-              <a:rPr lang="en-US" sz="1200" dirty="0">
+              <a:rPr lang="en-US" sz="2400" dirty="0">
+                <a:solidFill>
+                  <a:srgbClr val="F5F5F3"/>
+                </a:solidFill>
+                <a:latin typeface="Consolas" pitchFamily="34" charset="0"/>
+                <a:ea typeface="Consolas" pitchFamily="34" charset="-122"/>
+                <a:cs typeface="Consolas" pitchFamily="34" charset="-120"/>
+              </a:rPr>
+              <a:t>30</a:t>
+            </a:r>
+            <a:endParaRPr lang="en-US" sz="2400" dirty="0"/>
+          </a:p>
+        </p:txBody>
+      </p:sp>
+      <p:sp>
+        <p:nvSpPr>
+          <p:cNvPr id="32" name="click6"/>
+          <p:cNvSpPr txBox="1"/>
+          <p:nvPr/>
+        </p:nvSpPr>
+        <p:spPr>
+          <a:xfrm>
+            <a:off x="9601200" y="5303520"/>
+            <a:ext cx="2039112" cy="320040"/>
+          </a:xfrm>
+          <a:prstGeom prst="rect">
+            <a:avLst/>
+          </a:prstGeom>
+          <a:noFill/>
+          <a:ln/>
+        </p:spPr>
+        <p:txBody>
+          <a:bodyPr wrap="square" lIns="0" tIns="0" rIns="0" bIns="0" rtlCol="0" anchor="ctr"/>
+          <a:lstStyle/>
+          <a:p>
+            <a:pPr indent="0" marL="0">
+              <a:buNone/>
+            </a:pPr>
+            <a:r>
+              <a:rPr lang="en-US" sz="1400" i="1" dirty="0">
                 <a:solidFill>
                   <a:srgbClr val="A9A9B4"/>
                 </a:solidFill>
@@ -37699,231 +38309,7 @@
                 <a:ea typeface="Calibri" pitchFamily="34" charset="-122"/>
                 <a:cs typeface="Calibri" pitchFamily="34" charset="-120"/>
               </a:rPr>
-              <a:t>Modify</a:t>
-            </a:r>
-            <a:endParaRPr lang="en-US" sz="1200" dirty="0"/>
-          </a:p>
-        </p:txBody>
-      </p:sp>
-      <p:sp>
-        <p:nvSpPr>
-          <p:cNvPr id="28" name="Shape 25"/>
-          <p:cNvSpPr/>
-          <p:nvPr/>
-        </p:nvSpPr>
-        <p:spPr>
-          <a:xfrm>
-            <a:off x="10405872" y="3063240"/>
-            <a:ext cx="914400" cy="685800"/>
-          </a:xfrm>
-          <a:prstGeom prst="roundRect">
-            <a:avLst>
-              <a:gd name="adj" fmla="val 8000"/>
-            </a:avLst>
-          </a:prstGeom>
-          <a:solidFill>
-            <a:srgbClr val="1E1E24"/>
-          </a:solidFill>
-          <a:ln w="15875">
-            <a:solidFill>
-              <a:srgbClr val="D8A73D"/>
-            </a:solidFill>
-            <a:prstDash val="solid"/>
-          </a:ln>
-        </p:spPr>
-      </p:sp>
-      <p:sp>
-        <p:nvSpPr>
-          <p:cNvPr id="29" name="Text 26"/>
-          <p:cNvSpPr txBox="1"/>
-          <p:nvPr/>
-        </p:nvSpPr>
-        <p:spPr>
-          <a:xfrm>
-            <a:off x="10405872" y="3063240"/>
-            <a:ext cx="914400" cy="685800"/>
-          </a:xfrm>
-          <a:prstGeom prst="rect">
-            <a:avLst/>
-          </a:prstGeom>
-          <a:noFill/>
-          <a:ln/>
-        </p:spPr>
-        <p:txBody>
-          <a:bodyPr wrap="square" lIns="0" tIns="0" rIns="0" bIns="0" rtlCol="0" anchor="ctr"/>
-          <a:lstStyle/>
-          <a:p>
-            <a:pPr algn="ctr" indent="0" marL="0">
-              <a:buNone/>
-            </a:pPr>
-            <a:r>
-              <a:rPr lang="en-US" sz="2800" b="1" dirty="0">
-                <a:solidFill>
-                  <a:srgbClr val="D8A73D"/>
-                </a:solidFill>
-                <a:latin typeface="Cambria" pitchFamily="34" charset="0"/>
-                <a:ea typeface="Cambria" pitchFamily="34" charset="-122"/>
-                <a:cs typeface="Cambria" pitchFamily="34" charset="-120"/>
-              </a:rPr>
-              <a:t>M</a:t>
-            </a:r>
-            <a:endParaRPr lang="en-US" sz="2800" dirty="0"/>
-          </a:p>
-        </p:txBody>
-      </p:sp>
-      <p:sp>
-        <p:nvSpPr>
-          <p:cNvPr id="30" name="Text 27"/>
-          <p:cNvSpPr txBox="1"/>
-          <p:nvPr/>
-        </p:nvSpPr>
-        <p:spPr>
-          <a:xfrm>
-            <a:off x="10314432" y="3794760"/>
-            <a:ext cx="1097280" cy="274320"/>
-          </a:xfrm>
-          <a:prstGeom prst="rect">
-            <a:avLst/>
-          </a:prstGeom>
-          <a:noFill/>
-          <a:ln/>
-        </p:spPr>
-        <p:txBody>
-          <a:bodyPr wrap="square" lIns="0" tIns="0" rIns="0" bIns="0" rtlCol="0" anchor="ctr"/>
-          <a:lstStyle/>
-          <a:p>
-            <a:pPr algn="ctr" indent="0" marL="0">
-              <a:buNone/>
-            </a:pPr>
-            <a:r>
-              <a:rPr lang="en-US" sz="1200" dirty="0">
-                <a:solidFill>
-                  <a:srgbClr val="A9A9B4"/>
-                </a:solidFill>
-                <a:latin typeface="Calibri" pitchFamily="34" charset="0"/>
-                <a:ea typeface="Calibri" pitchFamily="34" charset="-122"/>
-                <a:cs typeface="Calibri" pitchFamily="34" charset="-120"/>
-              </a:rPr>
-              <a:t>Make</a:t>
-            </a:r>
-            <a:endParaRPr lang="en-US" sz="1200" dirty="0"/>
-          </a:p>
-        </p:txBody>
-      </p:sp>
-      <p:sp>
-        <p:nvSpPr>
-          <p:cNvPr id="31" name="Text 28"/>
-          <p:cNvSpPr txBox="1"/>
-          <p:nvPr/>
-        </p:nvSpPr>
-        <p:spPr>
-          <a:xfrm>
-            <a:off x="6492240" y="4343400"/>
-            <a:ext cx="4828032" cy="1280160"/>
-          </a:xfrm>
-          <a:prstGeom prst="rect">
-            <a:avLst/>
-          </a:prstGeom>
-          <a:noFill/>
-          <a:ln/>
-        </p:spPr>
-        <p:txBody>
-          <a:bodyPr wrap="square" lIns="0" tIns="0" rIns="0" bIns="0" rtlCol="0" anchor="ctr"/>
-          <a:lstStyle/>
-          <a:p>
-            <a:pPr indent="0" marL="0">
-              <a:buNone/>
-            </a:pPr>
-            <a:r>
-              <a:rPr lang="en-US" sz="1900" b="1" dirty="0">
-                <a:solidFill>
-                  <a:srgbClr val="D8A73D"/>
-                </a:solidFill>
-                <a:latin typeface="Calibri" pitchFamily="34" charset="0"/>
-                <a:ea typeface="Calibri" pitchFamily="34" charset="-122"/>
-                <a:cs typeface="Calibri" pitchFamily="34" charset="-120"/>
-              </a:rPr>
-              <a:t>Two calls this time: </a:t>
-            </a:r>
-            <a:pPr indent="0" marL="0">
-              <a:buNone/>
-            </a:pPr>
-            <a:r>
-              <a:rPr lang="en-US" sz="1900" dirty="0">
-                <a:solidFill>
-                  <a:srgbClr val="F5F5F3"/>
-                </a:solidFill>
-                <a:latin typeface="Calibri" pitchFamily="34" charset="0"/>
-                <a:ea typeface="Calibri" pitchFamily="34" charset="-122"/>
-                <a:cs typeface="Calibri" pitchFamily="34" charset="-120"/>
-              </a:rPr>
-              <a:t>one in Modify, one in Make. They change the story, not your score.</a:t>
-            </a:r>
-            <a:endParaRPr lang="en-US" sz="1900" dirty="0"/>
-          </a:p>
-        </p:txBody>
-      </p:sp>
-      <p:sp>
-        <p:nvSpPr>
-          <p:cNvPr id="32" name="Shape 29"/>
-          <p:cNvSpPr/>
-          <p:nvPr/>
-        </p:nvSpPr>
-        <p:spPr>
-          <a:xfrm>
-            <a:off x="10131552" y="1627632"/>
-            <a:ext cx="1280160" cy="329184"/>
-          </a:xfrm>
-          <a:prstGeom prst="roundRect">
-            <a:avLst>
-              <a:gd name="adj" fmla="val 50000"/>
-            </a:avLst>
-          </a:prstGeom>
-          <a:solidFill>
-            <a:srgbClr val="1E1E24"/>
-          </a:solidFill>
-          <a:ln w="15875">
-            <a:solidFill>
-              <a:srgbClr val="D8A73D"/>
-            </a:solidFill>
-            <a:prstDash val="solid"/>
-          </a:ln>
-        </p:spPr>
-      </p:sp>
-      <p:sp>
-        <p:nvSpPr>
-          <p:cNvPr id="33" name="Text 30"/>
-          <p:cNvSpPr txBox="1"/>
-          <p:nvPr/>
-        </p:nvSpPr>
-        <p:spPr>
-          <a:xfrm>
-            <a:off x="10131552" y="1627632"/>
-            <a:ext cx="1280160" cy="329184"/>
-          </a:xfrm>
-          <a:prstGeom prst="rect">
-            <a:avLst/>
-          </a:prstGeom>
-          <a:noFill/>
-          <a:ln/>
-        </p:spPr>
-        <p:txBody>
-          <a:bodyPr wrap="square" lIns="0" tIns="0" rIns="0" bIns="0" rtlCol="0" anchor="ctr"/>
-          <a:lstStyle/>
-          <a:p>
-            <a:pPr algn="ctr" indent="0" marL="0">
-              <a:buNone/>
-            </a:pPr>
-            <a:r>
-              <a:rPr lang="en-US" sz="1400" b="1" spc="100" kern="0" dirty="0">
-                <a:solidFill>
-                  <a:srgbClr val="D8A73D"/>
-                </a:solidFill>
-                <a:latin typeface="Calibri" pitchFamily="34" charset="0"/>
-                <a:ea typeface="Calibri" pitchFamily="34" charset="-122"/>
-                <a:cs typeface="Calibri" pitchFamily="34" charset="-120"/>
-              </a:rPr>
-              <a:t>⏱  ≈30 MIN</a:t>
+              <a:t>A number: 30 &gt;= 50 works</a:t>
             </a:r>
             <a:endParaRPr lang="en-US" sz="1400" dirty="0"/>
           </a:p>
@@ -37931,7 +38317,7 @@
       </p:sp>
       <p:pic>
         <p:nvPicPr>
-          <p:cNvPr id="34" name="Image 1" descr="Deliberate practice">    </p:cNvPr>
+          <p:cNvPr id="33" name="Image 1" descr="New information">    </p:cNvPr>
           <p:cNvPicPr>
             <a:picLocks noChangeAspect="1"/>
           </p:cNvPicPr>
@@ -37953,11 +38339,1090 @@
           </a:prstGeom>
         </p:spPr>
       </p:pic>
+      <p:sp>
+        <p:nvSpPr>
+          <p:cNvPr id="34" name="Slide Number Placeholder 0"/>
+          <p:cNvSpPr>
+            <a:spLocks noGrp="1"/>
+          </p:cNvSpPr>
+          <p:nvPr>
+            <p:ph type="sldNum" sz="quarter" idx="4294967295"/>
+          </p:nvPr>
+        </p:nvSpPr>
+        <p:spPr>
+          <a:xfrm>
+            <a:off x="11155680" y="6382512"/>
+            <a:ext cx="502920" cy="274320"/>
+          </a:xfrm>
+          <a:prstGeom prst="rect">
+            <a:avLst/>
+          </a:prstGeom>
+          <a:extLst>
+            <a:ext uri="{C572A759-6A51-4108-AA02-DFA0A04FC94B}">
+              <ma14:wrappingTextBoxFlag xmlns:ma14="http://schemas.microsoft.com/office/mac/drawingml/2011/main" val="0"/>
+            </a:ext>
+          </a:extLst>
+        </p:spPr>
+        <p:txBody>
+          <a:bodyPr/>
+          <a:lstStyle>
+            <a:lvl1pPr>
+              <a:defRPr sz="1200">
+                <a:solidFill>
+                  <a:srgbClr val="6E6E7A"/>
+                </a:solidFill>
+                <a:latin typeface="Calibri"/>
+                <a:ea typeface="Calibri"/>
+                <a:cs typeface="Calibri"/>
+              </a:defRPr>
+            </a:lvl1pPr>
+          </a:lstStyle>
+          <a:p>
+            <a:pPr algn="r"/>
+            <a:fld id="{F7021451-1387-4CA6-816F-3879F97B5CBC}" type="slidenum">
+              <a:rPr b="0" lang="en-US"/>
+              <a:t>22</a:t>
+            </a:fld>
+            <a:endParaRPr lang="en-US"/>
+          </a:p>
+        </p:txBody>
+      </p:sp>
     </p:spTree>
   </p:cSld>
   <p:clrMapOvr>
     <a:masterClrMapping/>
   </p:clrMapOvr>
+  <p:timing>
+    <p:tnLst>
+      <p:par>
+        <p:cTn id="1" dur="indefinite" restart="never" nodeType="tmRoot">
+          <p:childTnLst>
+            <p:seq concurrent="1" nextAc="seek">
+              <p:cTn id="2" dur="indefinite" nodeType="mainSeq">
+                <p:childTnLst>
+                  <p:par>
+                    <p:cTn id="3" fill="hold">
+                      <p:stCondLst>
+                        <p:cond delay="indefinite"/>
+                      </p:stCondLst>
+                      <p:childTnLst>
+                        <p:par>
+                          <p:cTn id="4" fill="hold">
+                            <p:stCondLst>
+                              <p:cond delay="0"/>
+                            </p:stCondLst>
+                            <p:childTnLst>
+                              <p:par>
+                                <p:cTn id="5" presetID="10" presetClass="entr" presetSubtype="0" fill="hold" nodeType="clickEffect">
+                                  <p:stCondLst>
+                                    <p:cond delay="0"/>
+                                  </p:stCondLst>
+                                  <p:childTnLst>
+                                    <p:set>
+                                      <p:cBhvr>
+                                        <p:cTn id="6" dur="1" fill="hold">
+                                          <p:stCondLst>
+                                            <p:cond delay="0"/>
+                                          </p:stCondLst>
+                                        </p:cTn>
+                                        <p:tgtEl>
+                                          <p:spTgt spid="8"/>
+                                        </p:tgtEl>
+                                        <p:attrNameLst>
+                                          <p:attrName>style.visibility</p:attrName>
+                                        </p:attrNameLst>
+                                      </p:cBhvr>
+                                      <p:to>
+                                        <p:strVal val="visible"/>
+                                      </p:to>
+                                    </p:set>
+                                    <p:animEffect transition="in" filter="fade">
+                                      <p:cBhvr>
+                                        <p:cTn id="7" dur="500"/>
+                                        <p:tgtEl>
+                                          <p:spTgt spid="8"/>
+                                        </p:tgtEl>
+                                      </p:cBhvr>
+                                    </p:animEffect>
+                                  </p:childTnLst>
+                                </p:cTn>
+                              </p:par>
+                              <p:par>
+                                <p:cTn id="8" presetID="10" presetClass="entr" presetSubtype="0" fill="hold" grpId="0" nodeType="withEffect">
+                                  <p:stCondLst>
+                                    <p:cond delay="0"/>
+                                  </p:stCondLst>
+                                  <p:childTnLst>
+                                    <p:set>
+                                      <p:cBhvr>
+                                        <p:cTn id="9" dur="1" fill="hold">
+                                          <p:stCondLst>
+                                            <p:cond delay="0"/>
+                                          </p:stCondLst>
+                                        </p:cTn>
+                                        <p:tgtEl>
+                                          <p:spTgt spid="9"/>
+                                        </p:tgtEl>
+                                        <p:attrNameLst>
+                                          <p:attrName>style.visibility</p:attrName>
+                                        </p:attrNameLst>
+                                      </p:cBhvr>
+                                      <p:to>
+                                        <p:strVal val="visible"/>
+                                      </p:to>
+                                    </p:set>
+                                    <p:animEffect transition="in" filter="fade">
+                                      <p:cBhvr>
+                                        <p:cTn id="10" dur="500"/>
+                                        <p:tgtEl>
+                                          <p:spTgt spid="9"/>
+                                        </p:tgtEl>
+                                      </p:cBhvr>
+                                    </p:animEffect>
+                                  </p:childTnLst>
+                                </p:cTn>
+                              </p:par>
+                              <p:par>
+                                <p:cTn id="11" presetID="10" presetClass="entr" presetSubtype="0" fill="hold" grpId="0" nodeType="withEffect">
+                                  <p:stCondLst>
+                                    <p:cond delay="0"/>
+                                  </p:stCondLst>
+                                  <p:childTnLst>
+                                    <p:set>
+                                      <p:cBhvr>
+                                        <p:cTn id="12" dur="1" fill="hold">
+                                          <p:stCondLst>
+                                            <p:cond delay="0"/>
+                                          </p:stCondLst>
+                                        </p:cTn>
+                                        <p:tgtEl>
+                                          <p:spTgt spid="10"/>
+                                        </p:tgtEl>
+                                        <p:attrNameLst>
+                                          <p:attrName>style.visibility</p:attrName>
+                                        </p:attrNameLst>
+                                      </p:cBhvr>
+                                      <p:to>
+                                        <p:strVal val="visible"/>
+                                      </p:to>
+                                    </p:set>
+                                    <p:animEffect transition="in" filter="fade">
+                                      <p:cBhvr>
+                                        <p:cTn id="13" dur="500"/>
+                                        <p:tgtEl>
+                                          <p:spTgt spid="10"/>
+                                        </p:tgtEl>
+                                      </p:cBhvr>
+                                    </p:animEffect>
+                                  </p:childTnLst>
+                                </p:cTn>
+                              </p:par>
+                              <p:par>
+                                <p:cTn id="14" presetID="10" presetClass="entr" presetSubtype="0" fill="hold" grpId="0" nodeType="withEffect">
+                                  <p:stCondLst>
+                                    <p:cond delay="0"/>
+                                  </p:stCondLst>
+                                  <p:childTnLst>
+                                    <p:set>
+                                      <p:cBhvr>
+                                        <p:cTn id="15" dur="1" fill="hold">
+                                          <p:stCondLst>
+                                            <p:cond delay="0"/>
+                                          </p:stCondLst>
+                                        </p:cTn>
+                                        <p:tgtEl>
+                                          <p:spTgt spid="11"/>
+                                        </p:tgtEl>
+                                        <p:attrNameLst>
+                                          <p:attrName>style.visibility</p:attrName>
+                                        </p:attrNameLst>
+                                      </p:cBhvr>
+                                      <p:to>
+                                        <p:strVal val="visible"/>
+                                      </p:to>
+                                    </p:set>
+                                    <p:animEffect transition="in" filter="fade">
+                                      <p:cBhvr>
+                                        <p:cTn id="16" dur="500"/>
+                                        <p:tgtEl>
+                                          <p:spTgt spid="11"/>
+                                        </p:tgtEl>
+                                      </p:cBhvr>
+                                    </p:animEffect>
+                                  </p:childTnLst>
+                                </p:cTn>
+                              </p:par>
+                            </p:childTnLst>
+                          </p:cTn>
+                        </p:par>
+                      </p:childTnLst>
+                    </p:cTn>
+                  </p:par>
+                  <p:par>
+                    <p:cTn id="17" fill="hold">
+                      <p:stCondLst>
+                        <p:cond delay="indefinite"/>
+                      </p:stCondLst>
+                      <p:childTnLst>
+                        <p:par>
+                          <p:cTn id="18" fill="hold">
+                            <p:stCondLst>
+                              <p:cond delay="0"/>
+                            </p:stCondLst>
+                            <p:childTnLst>
+                              <p:par>
+                                <p:cTn id="19" presetID="10" presetClass="entr" presetSubtype="0" fill="hold" nodeType="clickEffect">
+                                  <p:stCondLst>
+                                    <p:cond delay="0"/>
+                                  </p:stCondLst>
+                                  <p:childTnLst>
+                                    <p:set>
+                                      <p:cBhvr>
+                                        <p:cTn id="20" dur="1" fill="hold">
+                                          <p:stCondLst>
+                                            <p:cond delay="0"/>
+                                          </p:stCondLst>
+                                        </p:cTn>
+                                        <p:tgtEl>
+                                          <p:spTgt spid="12"/>
+                                        </p:tgtEl>
+                                        <p:attrNameLst>
+                                          <p:attrName>style.visibility</p:attrName>
+                                        </p:attrNameLst>
+                                      </p:cBhvr>
+                                      <p:to>
+                                        <p:strVal val="visible"/>
+                                      </p:to>
+                                    </p:set>
+                                    <p:animEffect transition="in" filter="fade">
+                                      <p:cBhvr>
+                                        <p:cTn id="21" dur="500"/>
+                                        <p:tgtEl>
+                                          <p:spTgt spid="12"/>
+                                        </p:tgtEl>
+                                      </p:cBhvr>
+                                    </p:animEffect>
+                                  </p:childTnLst>
+                                </p:cTn>
+                              </p:par>
+                              <p:par>
+                                <p:cTn id="22" presetID="10" presetClass="entr" presetSubtype="0" fill="hold" grpId="0" nodeType="withEffect">
+                                  <p:stCondLst>
+                                    <p:cond delay="0"/>
+                                  </p:stCondLst>
+                                  <p:childTnLst>
+                                    <p:set>
+                                      <p:cBhvr>
+                                        <p:cTn id="23" dur="1" fill="hold">
+                                          <p:stCondLst>
+                                            <p:cond delay="0"/>
+                                          </p:stCondLst>
+                                        </p:cTn>
+                                        <p:tgtEl>
+                                          <p:spTgt spid="13"/>
+                                        </p:tgtEl>
+                                        <p:attrNameLst>
+                                          <p:attrName>style.visibility</p:attrName>
+                                        </p:attrNameLst>
+                                      </p:cBhvr>
+                                      <p:to>
+                                        <p:strVal val="visible"/>
+                                      </p:to>
+                                    </p:set>
+                                    <p:animEffect transition="in" filter="fade">
+                                      <p:cBhvr>
+                                        <p:cTn id="24" dur="500"/>
+                                        <p:tgtEl>
+                                          <p:spTgt spid="13"/>
+                                        </p:tgtEl>
+                                      </p:cBhvr>
+                                    </p:animEffect>
+                                  </p:childTnLst>
+                                </p:cTn>
+                              </p:par>
+                              <p:par>
+                                <p:cTn id="25" presetID="10" presetClass="entr" presetSubtype="0" fill="hold" grpId="0" nodeType="withEffect">
+                                  <p:stCondLst>
+                                    <p:cond delay="0"/>
+                                  </p:stCondLst>
+                                  <p:childTnLst>
+                                    <p:set>
+                                      <p:cBhvr>
+                                        <p:cTn id="26" dur="1" fill="hold">
+                                          <p:stCondLst>
+                                            <p:cond delay="0"/>
+                                          </p:stCondLst>
+                                        </p:cTn>
+                                        <p:tgtEl>
+                                          <p:spTgt spid="14"/>
+                                        </p:tgtEl>
+                                        <p:attrNameLst>
+                                          <p:attrName>style.visibility</p:attrName>
+                                        </p:attrNameLst>
+                                      </p:cBhvr>
+                                      <p:to>
+                                        <p:strVal val="visible"/>
+                                      </p:to>
+                                    </p:set>
+                                    <p:animEffect transition="in" filter="fade">
+                                      <p:cBhvr>
+                                        <p:cTn id="27" dur="500"/>
+                                        <p:tgtEl>
+                                          <p:spTgt spid="14"/>
+                                        </p:tgtEl>
+                                      </p:cBhvr>
+                                    </p:animEffect>
+                                  </p:childTnLst>
+                                </p:cTn>
+                              </p:par>
+                            </p:childTnLst>
+                          </p:cTn>
+                        </p:par>
+                      </p:childTnLst>
+                    </p:cTn>
+                  </p:par>
+                  <p:par>
+                    <p:cTn id="28" fill="hold">
+                      <p:stCondLst>
+                        <p:cond delay="indefinite"/>
+                      </p:stCondLst>
+                      <p:childTnLst>
+                        <p:par>
+                          <p:cTn id="29" fill="hold">
+                            <p:stCondLst>
+                              <p:cond delay="0"/>
+                            </p:stCondLst>
+                            <p:childTnLst>
+                              <p:par>
+                                <p:cTn id="30" presetID="10" presetClass="entr" presetSubtype="0" fill="hold" nodeType="clickEffect">
+                                  <p:stCondLst>
+                                    <p:cond delay="0"/>
+                                  </p:stCondLst>
+                                  <p:childTnLst>
+                                    <p:set>
+                                      <p:cBhvr>
+                                        <p:cTn id="31" dur="1" fill="hold">
+                                          <p:stCondLst>
+                                            <p:cond delay="0"/>
+                                          </p:stCondLst>
+                                        </p:cTn>
+                                        <p:tgtEl>
+                                          <p:spTgt spid="15"/>
+                                        </p:tgtEl>
+                                        <p:attrNameLst>
+                                          <p:attrName>style.visibility</p:attrName>
+                                        </p:attrNameLst>
+                                      </p:cBhvr>
+                                      <p:to>
+                                        <p:strVal val="visible"/>
+                                      </p:to>
+                                    </p:set>
+                                    <p:animEffect transition="in" filter="fade">
+                                      <p:cBhvr>
+                                        <p:cTn id="32" dur="500"/>
+                                        <p:tgtEl>
+                                          <p:spTgt spid="15"/>
+                                        </p:tgtEl>
+                                      </p:cBhvr>
+                                    </p:animEffect>
+                                  </p:childTnLst>
+                                </p:cTn>
+                              </p:par>
+                              <p:par>
+                                <p:cTn id="33" presetID="10" presetClass="entr" presetSubtype="0" fill="hold" nodeType="withEffect">
+                                  <p:stCondLst>
+                                    <p:cond delay="0"/>
+                                  </p:stCondLst>
+                                  <p:childTnLst>
+                                    <p:set>
+                                      <p:cBhvr>
+                                        <p:cTn id="34" dur="1" fill="hold">
+                                          <p:stCondLst>
+                                            <p:cond delay="0"/>
+                                          </p:stCondLst>
+                                        </p:cTn>
+                                        <p:tgtEl>
+                                          <p:spTgt spid="16"/>
+                                        </p:tgtEl>
+                                        <p:attrNameLst>
+                                          <p:attrName>style.visibility</p:attrName>
+                                        </p:attrNameLst>
+                                      </p:cBhvr>
+                                      <p:to>
+                                        <p:strVal val="visible"/>
+                                      </p:to>
+                                    </p:set>
+                                    <p:animEffect transition="in" filter="fade">
+                                      <p:cBhvr>
+                                        <p:cTn id="35" dur="500"/>
+                                        <p:tgtEl>
+                                          <p:spTgt spid="16"/>
+                                        </p:tgtEl>
+                                      </p:cBhvr>
+                                    </p:animEffect>
+                                  </p:childTnLst>
+                                </p:cTn>
+                              </p:par>
+                              <p:par>
+                                <p:cTn id="36" presetID="10" presetClass="entr" presetSubtype="0" fill="hold" grpId="0" nodeType="withEffect">
+                                  <p:stCondLst>
+                                    <p:cond delay="0"/>
+                                  </p:stCondLst>
+                                  <p:childTnLst>
+                                    <p:set>
+                                      <p:cBhvr>
+                                        <p:cTn id="37" dur="1" fill="hold">
+                                          <p:stCondLst>
+                                            <p:cond delay="0"/>
+                                          </p:stCondLst>
+                                        </p:cTn>
+                                        <p:tgtEl>
+                                          <p:spTgt spid="17"/>
+                                        </p:tgtEl>
+                                        <p:attrNameLst>
+                                          <p:attrName>style.visibility</p:attrName>
+                                        </p:attrNameLst>
+                                      </p:cBhvr>
+                                      <p:to>
+                                        <p:strVal val="visible"/>
+                                      </p:to>
+                                    </p:set>
+                                    <p:animEffect transition="in" filter="fade">
+                                      <p:cBhvr>
+                                        <p:cTn id="38" dur="500"/>
+                                        <p:tgtEl>
+                                          <p:spTgt spid="17"/>
+                                        </p:tgtEl>
+                                      </p:cBhvr>
+                                    </p:animEffect>
+                                  </p:childTnLst>
+                                </p:cTn>
+                              </p:par>
+                              <p:par>
+                                <p:cTn id="39" presetID="10" presetClass="entr" presetSubtype="0" fill="hold" grpId="0" nodeType="withEffect">
+                                  <p:stCondLst>
+                                    <p:cond delay="0"/>
+                                  </p:stCondLst>
+                                  <p:childTnLst>
+                                    <p:set>
+                                      <p:cBhvr>
+                                        <p:cTn id="40" dur="1" fill="hold">
+                                          <p:stCondLst>
+                                            <p:cond delay="0"/>
+                                          </p:stCondLst>
+                                        </p:cTn>
+                                        <p:tgtEl>
+                                          <p:spTgt spid="18"/>
+                                        </p:tgtEl>
+                                        <p:attrNameLst>
+                                          <p:attrName>style.visibility</p:attrName>
+                                        </p:attrNameLst>
+                                      </p:cBhvr>
+                                      <p:to>
+                                        <p:strVal val="visible"/>
+                                      </p:to>
+                                    </p:set>
+                                    <p:animEffect transition="in" filter="fade">
+                                      <p:cBhvr>
+                                        <p:cTn id="41" dur="500"/>
+                                        <p:tgtEl>
+                                          <p:spTgt spid="18"/>
+                                        </p:tgtEl>
+                                      </p:cBhvr>
+                                    </p:animEffect>
+                                  </p:childTnLst>
+                                </p:cTn>
+                              </p:par>
+                              <p:par>
+                                <p:cTn id="42" presetID="10" presetClass="entr" presetSubtype="0" fill="hold" grpId="0" nodeType="withEffect">
+                                  <p:stCondLst>
+                                    <p:cond delay="0"/>
+                                  </p:stCondLst>
+                                  <p:childTnLst>
+                                    <p:set>
+                                      <p:cBhvr>
+                                        <p:cTn id="43" dur="1" fill="hold">
+                                          <p:stCondLst>
+                                            <p:cond delay="0"/>
+                                          </p:stCondLst>
+                                        </p:cTn>
+                                        <p:tgtEl>
+                                          <p:spTgt spid="19"/>
+                                        </p:tgtEl>
+                                        <p:attrNameLst>
+                                          <p:attrName>style.visibility</p:attrName>
+                                        </p:attrNameLst>
+                                      </p:cBhvr>
+                                      <p:to>
+                                        <p:strVal val="visible"/>
+                                      </p:to>
+                                    </p:set>
+                                    <p:animEffect transition="in" filter="fade">
+                                      <p:cBhvr>
+                                        <p:cTn id="44" dur="500"/>
+                                        <p:tgtEl>
+                                          <p:spTgt spid="19"/>
+                                        </p:tgtEl>
+                                      </p:cBhvr>
+                                    </p:animEffect>
+                                  </p:childTnLst>
+                                </p:cTn>
+                              </p:par>
+                            </p:childTnLst>
+                          </p:cTn>
+                        </p:par>
+                      </p:childTnLst>
+                    </p:cTn>
+                  </p:par>
+                  <p:par>
+                    <p:cTn id="45" fill="hold">
+                      <p:stCondLst>
+                        <p:cond delay="indefinite"/>
+                      </p:stCondLst>
+                      <p:childTnLst>
+                        <p:par>
+                          <p:cTn id="46" fill="hold">
+                            <p:stCondLst>
+                              <p:cond delay="0"/>
+                            </p:stCondLst>
+                            <p:childTnLst>
+                              <p:par>
+                                <p:cTn id="47" presetID="10" presetClass="entr" presetSubtype="0" fill="hold" nodeType="clickEffect">
+                                  <p:stCondLst>
+                                    <p:cond delay="0"/>
+                                  </p:stCondLst>
+                                  <p:childTnLst>
+                                    <p:set>
+                                      <p:cBhvr>
+                                        <p:cTn id="48" dur="1" fill="hold">
+                                          <p:stCondLst>
+                                            <p:cond delay="0"/>
+                                          </p:stCondLst>
+                                        </p:cTn>
+                                        <p:tgtEl>
+                                          <p:spTgt spid="20"/>
+                                        </p:tgtEl>
+                                        <p:attrNameLst>
+                                          <p:attrName>style.visibility</p:attrName>
+                                        </p:attrNameLst>
+                                      </p:cBhvr>
+                                      <p:to>
+                                        <p:strVal val="visible"/>
+                                      </p:to>
+                                    </p:set>
+                                    <p:animEffect transition="in" filter="fade">
+                                      <p:cBhvr>
+                                        <p:cTn id="49" dur="500"/>
+                                        <p:tgtEl>
+                                          <p:spTgt spid="20"/>
+                                        </p:tgtEl>
+                                      </p:cBhvr>
+                                    </p:animEffect>
+                                  </p:childTnLst>
+                                </p:cTn>
+                              </p:par>
+                              <p:par>
+                                <p:cTn id="50" presetID="10" presetClass="entr" presetSubtype="0" fill="hold" nodeType="withEffect">
+                                  <p:stCondLst>
+                                    <p:cond delay="0"/>
+                                  </p:stCondLst>
+                                  <p:childTnLst>
+                                    <p:set>
+                                      <p:cBhvr>
+                                        <p:cTn id="51" dur="1" fill="hold">
+                                          <p:stCondLst>
+                                            <p:cond delay="0"/>
+                                          </p:stCondLst>
+                                        </p:cTn>
+                                        <p:tgtEl>
+                                          <p:spTgt spid="21"/>
+                                        </p:tgtEl>
+                                        <p:attrNameLst>
+                                          <p:attrName>style.visibility</p:attrName>
+                                        </p:attrNameLst>
+                                      </p:cBhvr>
+                                      <p:to>
+                                        <p:strVal val="visible"/>
+                                      </p:to>
+                                    </p:set>
+                                    <p:animEffect transition="in" filter="fade">
+                                      <p:cBhvr>
+                                        <p:cTn id="52" dur="500"/>
+                                        <p:tgtEl>
+                                          <p:spTgt spid="21"/>
+                                        </p:tgtEl>
+                                      </p:cBhvr>
+                                    </p:animEffect>
+                                  </p:childTnLst>
+                                </p:cTn>
+                              </p:par>
+                              <p:par>
+                                <p:cTn id="53" presetID="10" presetClass="entr" presetSubtype="0" fill="hold" grpId="0" nodeType="withEffect">
+                                  <p:stCondLst>
+                                    <p:cond delay="0"/>
+                                  </p:stCondLst>
+                                  <p:childTnLst>
+                                    <p:set>
+                                      <p:cBhvr>
+                                        <p:cTn id="54" dur="1" fill="hold">
+                                          <p:stCondLst>
+                                            <p:cond delay="0"/>
+                                          </p:stCondLst>
+                                        </p:cTn>
+                                        <p:tgtEl>
+                                          <p:spTgt spid="22"/>
+                                        </p:tgtEl>
+                                        <p:attrNameLst>
+                                          <p:attrName>style.visibility</p:attrName>
+                                        </p:attrNameLst>
+                                      </p:cBhvr>
+                                      <p:to>
+                                        <p:strVal val="visible"/>
+                                      </p:to>
+                                    </p:set>
+                                    <p:animEffect transition="in" filter="fade">
+                                      <p:cBhvr>
+                                        <p:cTn id="55" dur="500"/>
+                                        <p:tgtEl>
+                                          <p:spTgt spid="22"/>
+                                        </p:tgtEl>
+                                      </p:cBhvr>
+                                    </p:animEffect>
+                                  </p:childTnLst>
+                                </p:cTn>
+                              </p:par>
+                              <p:par>
+                                <p:cTn id="56" presetID="10" presetClass="entr" presetSubtype="0" fill="hold" grpId="0" nodeType="withEffect">
+                                  <p:stCondLst>
+                                    <p:cond delay="0"/>
+                                  </p:stCondLst>
+                                  <p:childTnLst>
+                                    <p:set>
+                                      <p:cBhvr>
+                                        <p:cTn id="57" dur="1" fill="hold">
+                                          <p:stCondLst>
+                                            <p:cond delay="0"/>
+                                          </p:stCondLst>
+                                        </p:cTn>
+                                        <p:tgtEl>
+                                          <p:spTgt spid="23"/>
+                                        </p:tgtEl>
+                                        <p:attrNameLst>
+                                          <p:attrName>style.visibility</p:attrName>
+                                        </p:attrNameLst>
+                                      </p:cBhvr>
+                                      <p:to>
+                                        <p:strVal val="visible"/>
+                                      </p:to>
+                                    </p:set>
+                                    <p:animEffect transition="in" filter="fade">
+                                      <p:cBhvr>
+                                        <p:cTn id="58" dur="500"/>
+                                        <p:tgtEl>
+                                          <p:spTgt spid="23"/>
+                                        </p:tgtEl>
+                                      </p:cBhvr>
+                                    </p:animEffect>
+                                  </p:childTnLst>
+                                </p:cTn>
+                              </p:par>
+                              <p:par>
+                                <p:cTn id="59" presetID="10" presetClass="entr" presetSubtype="0" fill="hold" grpId="0" nodeType="withEffect">
+                                  <p:stCondLst>
+                                    <p:cond delay="0"/>
+                                  </p:stCondLst>
+                                  <p:childTnLst>
+                                    <p:set>
+                                      <p:cBhvr>
+                                        <p:cTn id="60" dur="1" fill="hold">
+                                          <p:stCondLst>
+                                            <p:cond delay="0"/>
+                                          </p:stCondLst>
+                                        </p:cTn>
+                                        <p:tgtEl>
+                                          <p:spTgt spid="24"/>
+                                        </p:tgtEl>
+                                        <p:attrNameLst>
+                                          <p:attrName>style.visibility</p:attrName>
+                                        </p:attrNameLst>
+                                      </p:cBhvr>
+                                      <p:to>
+                                        <p:strVal val="visible"/>
+                                      </p:to>
+                                    </p:set>
+                                    <p:animEffect transition="in" filter="fade">
+                                      <p:cBhvr>
+                                        <p:cTn id="61" dur="500"/>
+                                        <p:tgtEl>
+                                          <p:spTgt spid="24"/>
+                                        </p:tgtEl>
+                                      </p:cBhvr>
+                                    </p:animEffect>
+                                  </p:childTnLst>
+                                </p:cTn>
+                              </p:par>
+                            </p:childTnLst>
+                          </p:cTn>
+                        </p:par>
+                      </p:childTnLst>
+                    </p:cTn>
+                  </p:par>
+                  <p:par>
+                    <p:cTn id="62" fill="hold">
+                      <p:stCondLst>
+                        <p:cond delay="indefinite"/>
+                      </p:stCondLst>
+                      <p:childTnLst>
+                        <p:par>
+                          <p:cTn id="63" fill="hold">
+                            <p:stCondLst>
+                              <p:cond delay="0"/>
+                            </p:stCondLst>
+                            <p:childTnLst>
+                              <p:par>
+                                <p:cTn id="64" presetID="10" presetClass="entr" presetSubtype="0" fill="hold" nodeType="clickEffect">
+                                  <p:stCondLst>
+                                    <p:cond delay="0"/>
+                                  </p:stCondLst>
+                                  <p:childTnLst>
+                                    <p:set>
+                                      <p:cBhvr>
+                                        <p:cTn id="65" dur="1" fill="hold">
+                                          <p:stCondLst>
+                                            <p:cond delay="0"/>
+                                          </p:stCondLst>
+                                        </p:cTn>
+                                        <p:tgtEl>
+                                          <p:spTgt spid="25"/>
+                                        </p:tgtEl>
+                                        <p:attrNameLst>
+                                          <p:attrName>style.visibility</p:attrName>
+                                        </p:attrNameLst>
+                                      </p:cBhvr>
+                                      <p:to>
+                                        <p:strVal val="visible"/>
+                                      </p:to>
+                                    </p:set>
+                                    <p:animEffect transition="in" filter="fade">
+                                      <p:cBhvr>
+                                        <p:cTn id="66" dur="500"/>
+                                        <p:tgtEl>
+                                          <p:spTgt spid="25"/>
+                                        </p:tgtEl>
+                                      </p:cBhvr>
+                                    </p:animEffect>
+                                  </p:childTnLst>
+                                </p:cTn>
+                              </p:par>
+                              <p:par>
+                                <p:cTn id="67" presetID="10" presetClass="entr" presetSubtype="0" fill="hold" grpId="0" nodeType="withEffect">
+                                  <p:stCondLst>
+                                    <p:cond delay="0"/>
+                                  </p:stCondLst>
+                                  <p:childTnLst>
+                                    <p:set>
+                                      <p:cBhvr>
+                                        <p:cTn id="68" dur="1" fill="hold">
+                                          <p:stCondLst>
+                                            <p:cond delay="0"/>
+                                          </p:stCondLst>
+                                        </p:cTn>
+                                        <p:tgtEl>
+                                          <p:spTgt spid="26"/>
+                                        </p:tgtEl>
+                                        <p:attrNameLst>
+                                          <p:attrName>style.visibility</p:attrName>
+                                        </p:attrNameLst>
+                                      </p:cBhvr>
+                                      <p:to>
+                                        <p:strVal val="visible"/>
+                                      </p:to>
+                                    </p:set>
+                                    <p:animEffect transition="in" filter="fade">
+                                      <p:cBhvr>
+                                        <p:cTn id="69" dur="500"/>
+                                        <p:tgtEl>
+                                          <p:spTgt spid="26"/>
+                                        </p:tgtEl>
+                                      </p:cBhvr>
+                                    </p:animEffect>
+                                  </p:childTnLst>
+                                </p:cTn>
+                              </p:par>
+                              <p:par>
+                                <p:cTn id="70" presetID="10" presetClass="entr" presetSubtype="0" fill="hold" grpId="0" nodeType="withEffect">
+                                  <p:stCondLst>
+                                    <p:cond delay="0"/>
+                                  </p:stCondLst>
+                                  <p:childTnLst>
+                                    <p:set>
+                                      <p:cBhvr>
+                                        <p:cTn id="71" dur="1" fill="hold">
+                                          <p:stCondLst>
+                                            <p:cond delay="0"/>
+                                          </p:stCondLst>
+                                        </p:cTn>
+                                        <p:tgtEl>
+                                          <p:spTgt spid="27"/>
+                                        </p:tgtEl>
+                                        <p:attrNameLst>
+                                          <p:attrName>style.visibility</p:attrName>
+                                        </p:attrNameLst>
+                                      </p:cBhvr>
+                                      <p:to>
+                                        <p:strVal val="visible"/>
+                                      </p:to>
+                                    </p:set>
+                                    <p:animEffect transition="in" filter="fade">
+                                      <p:cBhvr>
+                                        <p:cTn id="72" dur="500"/>
+                                        <p:tgtEl>
+                                          <p:spTgt spid="27"/>
+                                        </p:tgtEl>
+                                      </p:cBhvr>
+                                    </p:animEffect>
+                                  </p:childTnLst>
+                                </p:cTn>
+                              </p:par>
+                            </p:childTnLst>
+                          </p:cTn>
+                        </p:par>
+                      </p:childTnLst>
+                    </p:cTn>
+                  </p:par>
+                  <p:par>
+                    <p:cTn id="73" fill="hold">
+                      <p:stCondLst>
+                        <p:cond delay="indefinite"/>
+                      </p:stCondLst>
+                      <p:childTnLst>
+                        <p:par>
+                          <p:cTn id="74" fill="hold">
+                            <p:stCondLst>
+                              <p:cond delay="0"/>
+                            </p:stCondLst>
+                            <p:childTnLst>
+                              <p:par>
+                                <p:cTn id="75" presetID="10" presetClass="entr" presetSubtype="0" fill="hold" nodeType="clickEffect">
+                                  <p:stCondLst>
+                                    <p:cond delay="0"/>
+                                  </p:stCondLst>
+                                  <p:childTnLst>
+                                    <p:set>
+                                      <p:cBhvr>
+                                        <p:cTn id="76" dur="1" fill="hold">
+                                          <p:stCondLst>
+                                            <p:cond delay="0"/>
+                                          </p:stCondLst>
+                                        </p:cTn>
+                                        <p:tgtEl>
+                                          <p:spTgt spid="28"/>
+                                        </p:tgtEl>
+                                        <p:attrNameLst>
+                                          <p:attrName>style.visibility</p:attrName>
+                                        </p:attrNameLst>
+                                      </p:cBhvr>
+                                      <p:to>
+                                        <p:strVal val="visible"/>
+                                      </p:to>
+                                    </p:set>
+                                    <p:animEffect transition="in" filter="fade">
+                                      <p:cBhvr>
+                                        <p:cTn id="77" dur="500"/>
+                                        <p:tgtEl>
+                                          <p:spTgt spid="28"/>
+                                        </p:tgtEl>
+                                      </p:cBhvr>
+                                    </p:animEffect>
+                                  </p:childTnLst>
+                                </p:cTn>
+                              </p:par>
+                              <p:par>
+                                <p:cTn id="78" presetID="10" presetClass="entr" presetSubtype="0" fill="hold" nodeType="withEffect">
+                                  <p:stCondLst>
+                                    <p:cond delay="0"/>
+                                  </p:stCondLst>
+                                  <p:childTnLst>
+                                    <p:set>
+                                      <p:cBhvr>
+                                        <p:cTn id="79" dur="1" fill="hold">
+                                          <p:stCondLst>
+                                            <p:cond delay="0"/>
+                                          </p:stCondLst>
+                                        </p:cTn>
+                                        <p:tgtEl>
+                                          <p:spTgt spid="29"/>
+                                        </p:tgtEl>
+                                        <p:attrNameLst>
+                                          <p:attrName>style.visibility</p:attrName>
+                                        </p:attrNameLst>
+                                      </p:cBhvr>
+                                      <p:to>
+                                        <p:strVal val="visible"/>
+                                      </p:to>
+                                    </p:set>
+                                    <p:animEffect transition="in" filter="fade">
+                                      <p:cBhvr>
+                                        <p:cTn id="80" dur="500"/>
+                                        <p:tgtEl>
+                                          <p:spTgt spid="29"/>
+                                        </p:tgtEl>
+                                      </p:cBhvr>
+                                    </p:animEffect>
+                                  </p:childTnLst>
+                                </p:cTn>
+                              </p:par>
+                              <p:par>
+                                <p:cTn id="81" presetID="10" presetClass="entr" presetSubtype="0" fill="hold" grpId="0" nodeType="withEffect">
+                                  <p:stCondLst>
+                                    <p:cond delay="0"/>
+                                  </p:stCondLst>
+                                  <p:childTnLst>
+                                    <p:set>
+                                      <p:cBhvr>
+                                        <p:cTn id="82" dur="1" fill="hold">
+                                          <p:stCondLst>
+                                            <p:cond delay="0"/>
+                                          </p:stCondLst>
+                                        </p:cTn>
+                                        <p:tgtEl>
+                                          <p:spTgt spid="30"/>
+                                        </p:tgtEl>
+                                        <p:attrNameLst>
+                                          <p:attrName>style.visibility</p:attrName>
+                                        </p:attrNameLst>
+                                      </p:cBhvr>
+                                      <p:to>
+                                        <p:strVal val="visible"/>
+                                      </p:to>
+                                    </p:set>
+                                    <p:animEffect transition="in" filter="fade">
+                                      <p:cBhvr>
+                                        <p:cTn id="83" dur="500"/>
+                                        <p:tgtEl>
+                                          <p:spTgt spid="30"/>
+                                        </p:tgtEl>
+                                      </p:cBhvr>
+                                    </p:animEffect>
+                                  </p:childTnLst>
+                                </p:cTn>
+                              </p:par>
+                              <p:par>
+                                <p:cTn id="84" presetID="10" presetClass="entr" presetSubtype="0" fill="hold" grpId="0" nodeType="withEffect">
+                                  <p:stCondLst>
+                                    <p:cond delay="0"/>
+                                  </p:stCondLst>
+                                  <p:childTnLst>
+                                    <p:set>
+                                      <p:cBhvr>
+                                        <p:cTn id="85" dur="1" fill="hold">
+                                          <p:stCondLst>
+                                            <p:cond delay="0"/>
+                                          </p:stCondLst>
+                                        </p:cTn>
+                                        <p:tgtEl>
+                                          <p:spTgt spid="31"/>
+                                        </p:tgtEl>
+                                        <p:attrNameLst>
+                                          <p:attrName>style.visibility</p:attrName>
+                                        </p:attrNameLst>
+                                      </p:cBhvr>
+                                      <p:to>
+                                        <p:strVal val="visible"/>
+                                      </p:to>
+                                    </p:set>
+                                    <p:animEffect transition="in" filter="fade">
+                                      <p:cBhvr>
+                                        <p:cTn id="86" dur="500"/>
+                                        <p:tgtEl>
+                                          <p:spTgt spid="31"/>
+                                        </p:tgtEl>
+                                      </p:cBhvr>
+                                    </p:animEffect>
+                                  </p:childTnLst>
+                                </p:cTn>
+                              </p:par>
+                              <p:par>
+                                <p:cTn id="87" presetID="10" presetClass="entr" presetSubtype="0" fill="hold" grpId="0" nodeType="withEffect">
+                                  <p:stCondLst>
+                                    <p:cond delay="0"/>
+                                  </p:stCondLst>
+                                  <p:childTnLst>
+                                    <p:set>
+                                      <p:cBhvr>
+                                        <p:cTn id="88" dur="1" fill="hold">
+                                          <p:stCondLst>
+                                            <p:cond delay="0"/>
+                                          </p:stCondLst>
+                                        </p:cTn>
+                                        <p:tgtEl>
+                                          <p:spTgt spid="32"/>
+                                        </p:tgtEl>
+                                        <p:attrNameLst>
+                                          <p:attrName>style.visibility</p:attrName>
+                                        </p:attrNameLst>
+                                      </p:cBhvr>
+                                      <p:to>
+                                        <p:strVal val="visible"/>
+                                      </p:to>
+                                    </p:set>
+                                    <p:animEffect transition="in" filter="fade">
+                                      <p:cBhvr>
+                                        <p:cTn id="89" dur="500"/>
+                                        <p:tgtEl>
+                                          <p:spTgt spid="32"/>
+                                        </p:tgtEl>
+                                      </p:cBhvr>
+                                    </p:animEffect>
+                                  </p:childTnLst>
+                                </p:cTn>
+                              </p:par>
+                            </p:childTnLst>
+                          </p:cTn>
+                        </p:par>
+                      </p:childTnLst>
+                    </p:cTn>
+                  </p:par>
+                </p:childTnLst>
+              </p:cTn>
+              <p:prevCondLst>
+                <p:cond evt="onPrev" delay="0">
+                  <p:tgtEl>
+                    <p:sldTgt/>
+                  </p:tgtEl>
+                </p:cond>
+              </p:prevCondLst>
+              <p:nextCondLst>
+                <p:cond evt="onNext" delay="0">
+                  <p:tgtEl>
+                    <p:sldTgt/>
+                  </p:tgtEl>
+                </p:cond>
+              </p:nextCondLst>
+            </p:seq>
+          </p:childTnLst>
+        </p:cTn>
+      </p:par>
+    </p:tnLst>
+    <p:bldLst>
+      <p:bldP spid="9" grpId="0" animBg="1"/>
+      <p:bldP spid="10" grpId="0" animBg="1"/>
+      <p:bldP spid="11" grpId="0" animBg="1"/>
+      <p:bldP spid="13" grpId="0" animBg="1"/>
+      <p:bldP spid="14" grpId="0" animBg="1"/>
+      <p:bldP spid="17" grpId="0" animBg="1"/>
+      <p:bldP spid="18" grpId="0" animBg="1"/>
+      <p:bldP spid="19" grpId="0" animBg="1"/>
+      <p:bldP spid="22" grpId="0" animBg="1"/>
+      <p:bldP spid="23" grpId="0" animBg="1"/>
+      <p:bldP spid="24" grpId="0" animBg="1"/>
+      <p:bldP spid="26" grpId="0" animBg="1"/>
+      <p:bldP spid="27" grpId="0" animBg="1"/>
+      <p:bldP spid="30" grpId="0" animBg="1"/>
+      <p:bldP spid="31" grpId="0" animBg="1"/>
+      <p:bldP spid="32" grpId="0" animBg="1"/>
+    </p:bldLst>
+  </p:timing>
 </p:sld>
 </file>
 
@@ -38058,31 +39523,68 @@
       <p:sp>
         <p:nvSpPr>
           <p:cNvPr id="4" name="Text 1"/>
-          <p:cNvSpPr/>
-          <p:nvPr>
-            <p:ph idx="101" type="title" hasCustomPrompt="1"/>
-          </p:nvPr>
-        </p:nvSpPr>
-        <p:spPr>
-          <a:xfrm>
-            <a:off x="548640" y="411480"/>
-            <a:ext cx="9418320" cy="777240"/>
-          </a:xfrm>
-          <a:prstGeom prst="rect">
-            <a:avLst/>
-          </a:prstGeom>
-          <a:noFill/>
-          <a:ln/>
-        </p:spPr>
-        <p:txBody>
-          <a:bodyPr wrap="square" lIns="0" tIns="0" rIns="0" bIns="0" rtlCol="0" anchor="ctr"/>
-          <a:lstStyle/>
-          <a:p>
-            <a:pPr algn="l" indent="0" marL="0">
-              <a:buNone/>
-            </a:pPr>
-            <a:r>
-              <a:rPr lang="en-US" sz="3600" b="1" dirty="0">
+          <p:cNvSpPr txBox="1"/>
+          <p:nvPr/>
+        </p:nvSpPr>
+        <p:spPr>
+          <a:xfrm>
+            <a:off x="548640" y="548640"/>
+            <a:ext cx="5486400" cy="320040"/>
+          </a:xfrm>
+          <a:prstGeom prst="rect">
+            <a:avLst/>
+          </a:prstGeom>
+          <a:noFill/>
+          <a:ln/>
+        </p:spPr>
+        <p:txBody>
+          <a:bodyPr wrap="square" lIns="0" tIns="0" rIns="0" bIns="0" rtlCol="0" anchor="ctr"/>
+          <a:lstStyle/>
+          <a:p>
+            <a:pPr indent="0" marL="0">
+              <a:buNone/>
+            </a:pPr>
+            <a:r>
+              <a:rPr lang="en-US" sz="1400" b="1" spc="300" kern="0" dirty="0">
+                <a:solidFill>
+                  <a:srgbClr val="D8A73D"/>
+                </a:solidFill>
+                <a:latin typeface="Calibri" pitchFamily="34" charset="0"/>
+                <a:ea typeface="Calibri" pitchFamily="34" charset="-122"/>
+                <a:cs typeface="Calibri" pitchFamily="34" charset="-120"/>
+              </a:rPr>
+              <a:t>CHAPTER 2</a:t>
+            </a:r>
+            <a:endParaRPr lang="en-US" sz="1400" dirty="0"/>
+          </a:p>
+        </p:txBody>
+      </p:sp>
+      <p:sp>
+        <p:nvSpPr>
+          <p:cNvPr id="5" name="Text 2"/>
+          <p:cNvSpPr txBox="1"/>
+          <p:nvPr/>
+        </p:nvSpPr>
+        <p:spPr>
+          <a:xfrm>
+            <a:off x="548640" y="914400"/>
+            <a:ext cx="5486400" cy="914400"/>
+          </a:xfrm>
+          <a:prstGeom prst="rect">
+            <a:avLst/>
+          </a:prstGeom>
+          <a:noFill/>
+          <a:ln/>
+        </p:spPr>
+        <p:txBody>
+          <a:bodyPr wrap="square" lIns="0" tIns="0" rIns="0" bIns="0" rtlCol="0" anchor="ctr"/>
+          <a:lstStyle/>
+          <a:p>
+            <a:pPr indent="0" marL="0">
+              <a:buNone/>
+            </a:pPr>
+            <a:r>
+              <a:rPr lang="en-US" sz="4800" b="1" dirty="0">
                 <a:solidFill>
                   <a:srgbClr val="F5F5F3"/>
                 </a:solidFill>
@@ -38090,30 +39592,280 @@
                 <a:ea typeface="Cambria" pitchFamily="34" charset="-122"/>
                 <a:cs typeface="Cambria" pitchFamily="34" charset="-120"/>
               </a:rPr>
-              <a:t>input() gives text, so convert it</a:t>
-            </a:r>
-            <a:endParaRPr lang="en-US" sz="3600" dirty="0"/>
-          </a:p>
-        </p:txBody>
-      </p:sp>
-      <p:sp>
-        <p:nvSpPr>
-          <p:cNvPr id="5" name="code"/>
+              <a:t>Proximity</a:t>
+            </a:r>
+            <a:endParaRPr lang="en-US" sz="4800" dirty="0"/>
+          </a:p>
+        </p:txBody>
+      </p:sp>
+      <p:sp>
+        <p:nvSpPr>
+          <p:cNvPr id="6" name="terminal"/>
           <p:cNvSpPr/>
           <p:nvPr/>
         </p:nvSpPr>
         <p:spPr>
           <a:xfrm>
-            <a:off x="548640" y="1600200"/>
-            <a:ext cx="7498080" cy="1324356"/>
+            <a:off x="548640" y="2148840"/>
+            <a:ext cx="5212080" cy="2788920"/>
           </a:xfrm>
           <a:prstGeom prst="roundRect">
             <a:avLst>
-              <a:gd name="adj" fmla="val 5524"/>
+              <a:gd name="adj" fmla="val 2623"/>
             </a:avLst>
           </a:prstGeom>
           <a:solidFill>
-            <a:srgbClr val="111115"/>
+            <a:srgbClr val="0D1310"/>
+          </a:solidFill>
+          <a:ln w="15875">
+            <a:solidFill>
+              <a:srgbClr val="2C4434"/>
+            </a:solidFill>
+            <a:prstDash val="solid"/>
+          </a:ln>
+        </p:spPr>
+      </p:sp>
+      <p:sp>
+        <p:nvSpPr>
+          <p:cNvPr id="7" name="Text 4"/>
+          <p:cNvSpPr txBox="1"/>
+          <p:nvPr/>
+        </p:nvSpPr>
+        <p:spPr>
+          <a:xfrm>
+            <a:off x="777240" y="2331720"/>
+            <a:ext cx="4754880" cy="274320"/>
+          </a:xfrm>
+          <a:prstGeom prst="rect">
+            <a:avLst/>
+          </a:prstGeom>
+          <a:noFill/>
+          <a:ln/>
+        </p:spPr>
+        <p:txBody>
+          <a:bodyPr wrap="square" lIns="0" tIns="0" rIns="0" bIns="0" rtlCol="0" anchor="ctr"/>
+          <a:lstStyle/>
+          <a:p>
+            <a:pPr indent="0" marL="0">
+              <a:buNone/>
+            </a:pPr>
+            <a:r>
+              <a:rPr lang="en-US" sz="1200" b="1" spc="200" kern="0" dirty="0">
+                <a:solidFill>
+                  <a:srgbClr val="7FD99A"/>
+                </a:solidFill>
+                <a:latin typeface="Calibri" pitchFamily="34" charset="0"/>
+                <a:ea typeface="Calibri" pitchFamily="34" charset="-122"/>
+                <a:cs typeface="Calibri" pitchFamily="34" charset="-120"/>
+              </a:rPr>
+              <a:t>SENSOR OPS</a:t>
+            </a:r>
+            <a:endParaRPr lang="en-US" sz="1200" dirty="0"/>
+          </a:p>
+        </p:txBody>
+      </p:sp>
+      <p:sp>
+        <p:nvSpPr>
+          <p:cNvPr id="8" name="Text 5"/>
+          <p:cNvSpPr txBox="1"/>
+          <p:nvPr/>
+        </p:nvSpPr>
+        <p:spPr>
+          <a:xfrm>
+            <a:off x="777240" y="2697480"/>
+            <a:ext cx="4754880" cy="406400"/>
+          </a:xfrm>
+          <a:prstGeom prst="rect">
+            <a:avLst/>
+          </a:prstGeom>
+          <a:noFill/>
+          <a:ln/>
+        </p:spPr>
+        <p:txBody>
+          <a:bodyPr wrap="square" lIns="0" tIns="0" rIns="0" bIns="0" rtlCol="0" anchor="ctr"/>
+          <a:lstStyle/>
+          <a:p>
+            <a:pPr indent="0" marL="0">
+              <a:buNone/>
+            </a:pPr>
+            <a:r>
+              <a:rPr lang="en-US" sz="2000" dirty="0">
+                <a:solidFill>
+                  <a:srgbClr val="7FD99A"/>
+                </a:solidFill>
+                <a:latin typeface="Consolas" pitchFamily="34" charset="0"/>
+                <a:ea typeface="Consolas" pitchFamily="34" charset="-122"/>
+                <a:cs typeface="Consolas" pitchFamily="34" charset="-120"/>
+              </a:rPr>
+              <a:t>The room is empty.</a:t>
+            </a:r>
+            <a:endParaRPr lang="en-US" sz="2000" dirty="0"/>
+          </a:p>
+        </p:txBody>
+      </p:sp>
+      <p:sp>
+        <p:nvSpPr>
+          <p:cNvPr id="9" name="Text 6"/>
+          <p:cNvSpPr txBox="1"/>
+          <p:nvPr/>
+        </p:nvSpPr>
+        <p:spPr>
+          <a:xfrm>
+            <a:off x="777240" y="3103880"/>
+            <a:ext cx="4754880" cy="406400"/>
+          </a:xfrm>
+          <a:prstGeom prst="rect">
+            <a:avLst/>
+          </a:prstGeom>
+          <a:noFill/>
+          <a:ln/>
+        </p:spPr>
+        <p:txBody>
+          <a:bodyPr wrap="square" lIns="0" tIns="0" rIns="0" bIns="0" rtlCol="0" anchor="ctr"/>
+          <a:lstStyle/>
+          <a:p>
+            <a:pPr indent="0" marL="0">
+              <a:buNone/>
+            </a:pPr>
+            <a:endParaRPr lang="en-US" sz="2000" dirty="0"/>
+          </a:p>
+        </p:txBody>
+      </p:sp>
+      <p:sp>
+        <p:nvSpPr>
+          <p:cNvPr id="10" name="Text 7"/>
+          <p:cNvSpPr txBox="1"/>
+          <p:nvPr/>
+        </p:nvSpPr>
+        <p:spPr>
+          <a:xfrm>
+            <a:off x="777240" y="3510280"/>
+            <a:ext cx="4754880" cy="406400"/>
+          </a:xfrm>
+          <a:prstGeom prst="rect">
+            <a:avLst/>
+          </a:prstGeom>
+          <a:noFill/>
+          <a:ln/>
+        </p:spPr>
+        <p:txBody>
+          <a:bodyPr wrap="square" lIns="0" tIns="0" rIns="0" bIns="0" rtlCol="0" anchor="ctr"/>
+          <a:lstStyle/>
+          <a:p>
+            <a:pPr indent="0" marL="0">
+              <a:buNone/>
+            </a:pPr>
+            <a:r>
+              <a:rPr lang="en-US" sz="2000" dirty="0">
+                <a:solidFill>
+                  <a:srgbClr val="7FD99A"/>
+                </a:solidFill>
+                <a:latin typeface="Consolas" pitchFamily="34" charset="0"/>
+                <a:ea typeface="Consolas" pitchFamily="34" charset="-122"/>
+                <a:cs typeface="Consolas" pitchFamily="34" charset="-120"/>
+              </a:rPr>
+              <a:t>Frost on the floor.</a:t>
+            </a:r>
+            <a:endParaRPr lang="en-US" sz="2000" dirty="0"/>
+          </a:p>
+        </p:txBody>
+      </p:sp>
+      <p:sp>
+        <p:nvSpPr>
+          <p:cNvPr id="11" name="Text 8"/>
+          <p:cNvSpPr txBox="1"/>
+          <p:nvPr/>
+        </p:nvSpPr>
+        <p:spPr>
+          <a:xfrm>
+            <a:off x="777240" y="3916680"/>
+            <a:ext cx="4754880" cy="406400"/>
+          </a:xfrm>
+          <a:prstGeom prst="rect">
+            <a:avLst/>
+          </a:prstGeom>
+          <a:noFill/>
+          <a:ln/>
+        </p:spPr>
+        <p:txBody>
+          <a:bodyPr wrap="square" lIns="0" tIns="0" rIns="0" bIns="0" rtlCol="0" anchor="ctr"/>
+          <a:lstStyle/>
+          <a:p>
+            <a:pPr indent="0" marL="0">
+              <a:buNone/>
+            </a:pPr>
+            <a:r>
+              <a:rPr lang="en-US" sz="2000" dirty="0">
+                <a:solidFill>
+                  <a:srgbClr val="7FD99A"/>
+                </a:solidFill>
+                <a:latin typeface="Consolas" pitchFamily="34" charset="0"/>
+                <a:ea typeface="Consolas" pitchFamily="34" charset="-122"/>
+                <a:cs typeface="Consolas" pitchFamily="34" charset="-120"/>
+              </a:rPr>
+              <a:t>A vent cover hangs open</a:t>
+            </a:r>
+            <a:endParaRPr lang="en-US" sz="2000" dirty="0"/>
+          </a:p>
+        </p:txBody>
+      </p:sp>
+      <p:sp>
+        <p:nvSpPr>
+          <p:cNvPr id="12" name="Text 9"/>
+          <p:cNvSpPr txBox="1"/>
+          <p:nvPr/>
+        </p:nvSpPr>
+        <p:spPr>
+          <a:xfrm>
+            <a:off x="777240" y="4323080"/>
+            <a:ext cx="4754880" cy="406400"/>
+          </a:xfrm>
+          <a:prstGeom prst="rect">
+            <a:avLst/>
+          </a:prstGeom>
+          <a:noFill/>
+          <a:ln/>
+        </p:spPr>
+        <p:txBody>
+          <a:bodyPr wrap="square" lIns="0" tIns="0" rIns="0" bIns="0" rtlCol="0" anchor="ctr"/>
+          <a:lstStyle/>
+          <a:p>
+            <a:pPr indent="0" marL="0">
+              <a:buNone/>
+            </a:pPr>
+            <a:r>
+              <a:rPr lang="en-US" sz="2000" dirty="0">
+                <a:solidFill>
+                  <a:srgbClr val="7FD99A"/>
+                </a:solidFill>
+                <a:latin typeface="Consolas" pitchFamily="34" charset="0"/>
+                <a:ea typeface="Consolas" pitchFamily="34" charset="-122"/>
+                <a:cs typeface="Consolas" pitchFamily="34" charset="-120"/>
+              </a:rPr>
+              <a:t>above the console.</a:t>
+            </a:r>
+            <a:endParaRPr lang="en-US" sz="2000" dirty="0"/>
+          </a:p>
+        </p:txBody>
+      </p:sp>
+      <p:sp>
+        <p:nvSpPr>
+          <p:cNvPr id="13" name="Shape 10"/>
+          <p:cNvSpPr/>
+          <p:nvPr/>
+        </p:nvSpPr>
+        <p:spPr>
+          <a:xfrm>
+            <a:off x="6172200" y="1417320"/>
+            <a:ext cx="5468112" cy="4434840"/>
+          </a:xfrm>
+          <a:prstGeom prst="roundRect">
+            <a:avLst>
+              <a:gd name="adj" fmla="val 1649"/>
+            </a:avLst>
+          </a:prstGeom>
+          <a:solidFill>
+            <a:srgbClr val="2A2A32"/>
           </a:solidFill>
           <a:ln w="15875">
             <a:solidFill>
@@ -38125,681 +39877,130 @@
       </p:sp>
       <p:sp>
         <p:nvSpPr>
-          <p:cNvPr id="6" name="Text 3"/>
-          <p:cNvSpPr txBox="1"/>
-          <p:nvPr/>
-        </p:nvSpPr>
-        <p:spPr>
-          <a:xfrm>
-            <a:off x="658368" y="1801368"/>
-            <a:ext cx="274320" cy="461010"/>
-          </a:xfrm>
-          <a:prstGeom prst="rect">
-            <a:avLst/>
-          </a:prstGeom>
-          <a:noFill/>
-          <a:ln/>
-        </p:spPr>
-        <p:txBody>
-          <a:bodyPr wrap="square" lIns="0" tIns="0" rIns="0" bIns="0" rtlCol="0" anchor="ctr"/>
-          <a:lstStyle/>
-          <a:p>
-            <a:pPr algn="r" indent="0" marL="0">
-              <a:buNone/>
-            </a:pPr>
-            <a:r>
-              <a:rPr lang="en-US" sz="1800" dirty="0">
+          <p:cNvPr id="14" name="Text 11"/>
+          <p:cNvSpPr txBox="1"/>
+          <p:nvPr/>
+        </p:nvSpPr>
+        <p:spPr>
+          <a:xfrm>
+            <a:off x="6492240" y="1645920"/>
+            <a:ext cx="2743200" cy="274320"/>
+          </a:xfrm>
+          <a:prstGeom prst="rect">
+            <a:avLst/>
+          </a:prstGeom>
+          <a:noFill/>
+          <a:ln/>
+        </p:spPr>
+        <p:txBody>
+          <a:bodyPr wrap="square" lIns="0" tIns="0" rIns="0" bIns="0" rtlCol="0" anchor="ctr"/>
+          <a:lstStyle/>
+          <a:p>
+            <a:pPr indent="0" marL="0">
+              <a:buNone/>
+            </a:pPr>
+            <a:r>
+              <a:rPr lang="en-US" sz="1300" b="1" spc="200" kern="0" dirty="0">
                 <a:solidFill>
                   <a:srgbClr val="6E6E7A"/>
-                </a:solidFill>
-                <a:latin typeface="Consolas" pitchFamily="34" charset="0"/>
-                <a:ea typeface="Consolas" pitchFamily="34" charset="-122"/>
-                <a:cs typeface="Consolas" pitchFamily="34" charset="-120"/>
-              </a:rPr>
-              <a:t>1</a:t>
-            </a:r>
-            <a:endParaRPr lang="en-US" sz="1800" dirty="0"/>
-          </a:p>
-        </p:txBody>
-      </p:sp>
-      <p:sp>
-        <p:nvSpPr>
-          <p:cNvPr id="7" name="Text 4"/>
-          <p:cNvSpPr txBox="1"/>
-          <p:nvPr/>
-        </p:nvSpPr>
-        <p:spPr>
-          <a:xfrm>
-            <a:off x="1188720" y="1801368"/>
-            <a:ext cx="6766560" cy="461010"/>
-          </a:xfrm>
-          <a:prstGeom prst="rect">
-            <a:avLst/>
-          </a:prstGeom>
-          <a:noFill/>
-          <a:ln/>
-        </p:spPr>
-        <p:txBody>
-          <a:bodyPr wrap="square" lIns="0" tIns="0" rIns="0" bIns="0" rtlCol="0" anchor="ctr"/>
-          <a:lstStyle/>
-          <a:p>
-            <a:pPr indent="0" marL="0">
-              <a:buNone/>
-            </a:pPr>
-            <a:r>
-              <a:rPr lang="en-US" sz="2200" dirty="0">
-                <a:solidFill>
-                  <a:srgbClr val="F5F5F3"/>
-                </a:solidFill>
-                <a:latin typeface="Consolas" pitchFamily="34" charset="0"/>
-                <a:ea typeface="Consolas" pitchFamily="34" charset="-122"/>
-                <a:cs typeface="Consolas" pitchFamily="34" charset="-120"/>
-              </a:rPr>
-              <a:t>distance</a:t>
-            </a:r>
-            <a:pPr indent="0" marL="0">
-              <a:buNone/>
-            </a:pPr>
-            <a:r>
-              <a:rPr lang="en-US" sz="2200" dirty="0">
-                <a:solidFill>
-                  <a:srgbClr val="F5F5F3"/>
-                </a:solidFill>
-                <a:latin typeface="Consolas" pitchFamily="34" charset="0"/>
-                <a:ea typeface="Consolas" pitchFamily="34" charset="-122"/>
-                <a:cs typeface="Consolas" pitchFamily="34" charset="-120"/>
-              </a:rPr>
-              <a:t> </a:t>
-            </a:r>
-            <a:pPr indent="0" marL="0">
-              <a:buNone/>
-            </a:pPr>
-            <a:r>
-              <a:rPr lang="en-US" sz="2200" dirty="0">
-                <a:solidFill>
-                  <a:srgbClr val="A9A9B4"/>
-                </a:solidFill>
-                <a:latin typeface="Consolas" pitchFamily="34" charset="0"/>
-                <a:ea typeface="Consolas" pitchFamily="34" charset="-122"/>
-                <a:cs typeface="Consolas" pitchFamily="34" charset="-120"/>
-              </a:rPr>
-              <a:t>=</a:t>
-            </a:r>
-            <a:pPr indent="0" marL="0">
-              <a:buNone/>
-            </a:pPr>
-            <a:r>
-              <a:rPr lang="en-US" sz="2200" dirty="0">
-                <a:solidFill>
-                  <a:srgbClr val="F5F5F3"/>
-                </a:solidFill>
-                <a:latin typeface="Consolas" pitchFamily="34" charset="0"/>
-                <a:ea typeface="Consolas" pitchFamily="34" charset="-122"/>
-                <a:cs typeface="Consolas" pitchFamily="34" charset="-120"/>
-              </a:rPr>
-              <a:t> </a:t>
-            </a:r>
-            <a:pPr indent="0" marL="0">
-              <a:buNone/>
-            </a:pPr>
-            <a:r>
-              <a:rPr lang="en-US" sz="2200" dirty="0">
-                <a:solidFill>
-                  <a:srgbClr val="E8C878"/>
-                </a:solidFill>
-                <a:latin typeface="Consolas" pitchFamily="34" charset="0"/>
-                <a:ea typeface="Consolas" pitchFamily="34" charset="-122"/>
-                <a:cs typeface="Consolas" pitchFamily="34" charset="-120"/>
-              </a:rPr>
-              <a:t>input</a:t>
-            </a:r>
-            <a:pPr indent="0" marL="0">
-              <a:buNone/>
-            </a:pPr>
-            <a:r>
-              <a:rPr lang="en-US" sz="2200" dirty="0">
-                <a:solidFill>
-                  <a:srgbClr val="A9A9B4"/>
-                </a:solidFill>
-                <a:latin typeface="Consolas" pitchFamily="34" charset="0"/>
-                <a:ea typeface="Consolas" pitchFamily="34" charset="-122"/>
-                <a:cs typeface="Consolas" pitchFamily="34" charset="-120"/>
-              </a:rPr>
-              <a:t>(</a:t>
-            </a:r>
-            <a:pPr indent="0" marL="0">
-              <a:buNone/>
-            </a:pPr>
-            <a:r>
-              <a:rPr lang="en-US" sz="2200" dirty="0">
-                <a:solidFill>
-                  <a:srgbClr val="E69F00"/>
-                </a:solidFill>
-                <a:latin typeface="Consolas" pitchFamily="34" charset="0"/>
-                <a:ea typeface="Consolas" pitchFamily="34" charset="-122"/>
-                <a:cs typeface="Consolas" pitchFamily="34" charset="-120"/>
-              </a:rPr>
-              <a:t>"Distance: "</a:t>
-            </a:r>
-            <a:pPr indent="0" marL="0">
-              <a:buNone/>
-            </a:pPr>
-            <a:r>
-              <a:rPr lang="en-US" sz="2200" dirty="0">
-                <a:solidFill>
-                  <a:srgbClr val="A9A9B4"/>
-                </a:solidFill>
-                <a:latin typeface="Consolas" pitchFamily="34" charset="0"/>
-                <a:ea typeface="Consolas" pitchFamily="34" charset="-122"/>
-                <a:cs typeface="Consolas" pitchFamily="34" charset="-120"/>
-              </a:rPr>
-              <a:t>)</a:t>
-            </a:r>
-            <a:endParaRPr lang="en-US" sz="2200" dirty="0"/>
-          </a:p>
-        </p:txBody>
-      </p:sp>
-      <p:sp>
-        <p:nvSpPr>
-          <p:cNvPr id="8" name="Shape 5"/>
-          <p:cNvSpPr/>
-          <p:nvPr/>
-        </p:nvSpPr>
-        <p:spPr>
-          <a:xfrm>
-            <a:off x="603504" y="2262378"/>
-            <a:ext cx="7388352" cy="461010"/>
-          </a:xfrm>
-          <a:prstGeom prst="rect">
-            <a:avLst/>
-          </a:prstGeom>
-          <a:solidFill>
-            <a:srgbClr val="2B2618"/>
-          </a:solidFill>
-          <a:ln/>
-        </p:spPr>
-      </p:sp>
-      <p:sp>
-        <p:nvSpPr>
-          <p:cNvPr id="9" name="Text 6"/>
-          <p:cNvSpPr txBox="1"/>
-          <p:nvPr/>
-        </p:nvSpPr>
-        <p:spPr>
-          <a:xfrm>
-            <a:off x="658368" y="2262378"/>
-            <a:ext cx="274320" cy="461010"/>
-          </a:xfrm>
-          <a:prstGeom prst="rect">
-            <a:avLst/>
-          </a:prstGeom>
-          <a:noFill/>
-          <a:ln/>
-        </p:spPr>
-        <p:txBody>
-          <a:bodyPr wrap="square" lIns="0" tIns="0" rIns="0" bIns="0" rtlCol="0" anchor="ctr"/>
-          <a:lstStyle/>
-          <a:p>
-            <a:pPr algn="r" indent="0" marL="0">
-              <a:buNone/>
-            </a:pPr>
-            <a:r>
-              <a:rPr lang="en-US" sz="1800" dirty="0">
-                <a:solidFill>
-                  <a:srgbClr val="6E6E7A"/>
-                </a:solidFill>
-                <a:latin typeface="Consolas" pitchFamily="34" charset="0"/>
-                <a:ea typeface="Consolas" pitchFamily="34" charset="-122"/>
-                <a:cs typeface="Consolas" pitchFamily="34" charset="-120"/>
-              </a:rPr>
-              <a:t>2</a:t>
-            </a:r>
-            <a:endParaRPr lang="en-US" sz="1800" dirty="0"/>
-          </a:p>
-        </p:txBody>
-      </p:sp>
-      <p:sp>
-        <p:nvSpPr>
-          <p:cNvPr id="10" name="Text 7"/>
-          <p:cNvSpPr txBox="1"/>
-          <p:nvPr/>
-        </p:nvSpPr>
-        <p:spPr>
-          <a:xfrm>
-            <a:off x="1188720" y="2262378"/>
-            <a:ext cx="6766560" cy="461010"/>
-          </a:xfrm>
-          <a:prstGeom prst="rect">
-            <a:avLst/>
-          </a:prstGeom>
-          <a:noFill/>
-          <a:ln/>
-        </p:spPr>
-        <p:txBody>
-          <a:bodyPr wrap="square" lIns="0" tIns="0" rIns="0" bIns="0" rtlCol="0" anchor="ctr"/>
-          <a:lstStyle/>
-          <a:p>
-            <a:pPr indent="0" marL="0">
-              <a:buNone/>
-            </a:pPr>
-            <a:r>
-              <a:rPr lang="en-US" sz="2200" b="1" dirty="0">
-                <a:solidFill>
-                  <a:srgbClr val="F5F5F3"/>
-                </a:solidFill>
-                <a:latin typeface="Consolas" pitchFamily="34" charset="0"/>
-                <a:ea typeface="Consolas" pitchFamily="34" charset="-122"/>
-                <a:cs typeface="Consolas" pitchFamily="34" charset="-120"/>
-              </a:rPr>
-              <a:t>if</a:t>
-            </a:r>
-            <a:pPr indent="0" marL="0">
-              <a:buNone/>
-            </a:pPr>
-            <a:r>
-              <a:rPr lang="en-US" sz="2200" dirty="0">
-                <a:solidFill>
-                  <a:srgbClr val="F5F5F3"/>
-                </a:solidFill>
-                <a:latin typeface="Consolas" pitchFamily="34" charset="0"/>
-                <a:ea typeface="Consolas" pitchFamily="34" charset="-122"/>
-                <a:cs typeface="Consolas" pitchFamily="34" charset="-120"/>
-              </a:rPr>
-              <a:t> </a:t>
-            </a:r>
-            <a:pPr indent="0" marL="0">
-              <a:buNone/>
-            </a:pPr>
-            <a:r>
-              <a:rPr lang="en-US" sz="2200" dirty="0">
-                <a:solidFill>
-                  <a:srgbClr val="F5F5F3"/>
-                </a:solidFill>
-                <a:latin typeface="Consolas" pitchFamily="34" charset="0"/>
-                <a:ea typeface="Consolas" pitchFamily="34" charset="-122"/>
-                <a:cs typeface="Consolas" pitchFamily="34" charset="-120"/>
-              </a:rPr>
-              <a:t>distance</a:t>
-            </a:r>
-            <a:pPr indent="0" marL="0">
-              <a:buNone/>
-            </a:pPr>
-            <a:r>
-              <a:rPr lang="en-US" sz="2200" dirty="0">
-                <a:solidFill>
-                  <a:srgbClr val="F5F5F3"/>
-                </a:solidFill>
-                <a:latin typeface="Consolas" pitchFamily="34" charset="0"/>
-                <a:ea typeface="Consolas" pitchFamily="34" charset="-122"/>
-                <a:cs typeface="Consolas" pitchFamily="34" charset="-120"/>
-              </a:rPr>
-              <a:t> </a:t>
-            </a:r>
-            <a:pPr indent="0" marL="0">
-              <a:buNone/>
-            </a:pPr>
-            <a:r>
-              <a:rPr lang="en-US" sz="2200" b="1" dirty="0">
-                <a:solidFill>
-                  <a:srgbClr val="F5F5F3"/>
-                </a:solidFill>
-                <a:latin typeface="Consolas" pitchFamily="34" charset="0"/>
-                <a:ea typeface="Consolas" pitchFamily="34" charset="-122"/>
-                <a:cs typeface="Consolas" pitchFamily="34" charset="-120"/>
-              </a:rPr>
-              <a:t>&gt;=</a:t>
-            </a:r>
-            <a:pPr indent="0" marL="0">
-              <a:buNone/>
-            </a:pPr>
-            <a:r>
-              <a:rPr lang="en-US" sz="2200" dirty="0">
-                <a:solidFill>
-                  <a:srgbClr val="F5F5F3"/>
-                </a:solidFill>
-                <a:latin typeface="Consolas" pitchFamily="34" charset="0"/>
-                <a:ea typeface="Consolas" pitchFamily="34" charset="-122"/>
-                <a:cs typeface="Consolas" pitchFamily="34" charset="-120"/>
-              </a:rPr>
-              <a:t> </a:t>
-            </a:r>
-            <a:pPr indent="0" marL="0">
-              <a:buNone/>
-            </a:pPr>
-            <a:r>
-              <a:rPr lang="en-US" sz="2200" dirty="0">
-                <a:solidFill>
-                  <a:srgbClr val="56B4E9"/>
-                </a:solidFill>
-                <a:latin typeface="Consolas" pitchFamily="34" charset="0"/>
-                <a:ea typeface="Consolas" pitchFamily="34" charset="-122"/>
-                <a:cs typeface="Consolas" pitchFamily="34" charset="-120"/>
-              </a:rPr>
-              <a:t>50</a:t>
-            </a:r>
-            <a:pPr indent="0" marL="0">
-              <a:buNone/>
-            </a:pPr>
-            <a:r>
-              <a:rPr lang="en-US" sz="2200" dirty="0">
-                <a:solidFill>
-                  <a:srgbClr val="A9A9B4"/>
-                </a:solidFill>
-                <a:latin typeface="Consolas" pitchFamily="34" charset="0"/>
-                <a:ea typeface="Consolas" pitchFamily="34" charset="-122"/>
-                <a:cs typeface="Consolas" pitchFamily="34" charset="-120"/>
-              </a:rPr>
-              <a:t>:</a:t>
-            </a:r>
-            <a:endParaRPr lang="en-US" sz="2200" dirty="0"/>
-          </a:p>
-        </p:txBody>
-      </p:sp>
-      <p:sp>
-        <p:nvSpPr>
-          <p:cNvPr id="11" name="terminal"/>
-          <p:cNvSpPr/>
-          <p:nvPr/>
-        </p:nvSpPr>
-        <p:spPr>
-          <a:xfrm>
-            <a:off x="548640" y="3153156"/>
-            <a:ext cx="11091672" cy="1143000"/>
-          </a:xfrm>
-          <a:prstGeom prst="roundRect">
-            <a:avLst>
-              <a:gd name="adj" fmla="val 6400"/>
-            </a:avLst>
-          </a:prstGeom>
-          <a:solidFill>
-            <a:srgbClr val="0A0A0D"/>
-          </a:solidFill>
-          <a:ln w="15875">
-            <a:solidFill>
-              <a:srgbClr val="3A3A44"/>
-            </a:solidFill>
-            <a:prstDash val="solid"/>
-          </a:ln>
-        </p:spPr>
-      </p:sp>
-      <p:sp>
-        <p:nvSpPr>
-          <p:cNvPr id="12" name="Text 9"/>
-          <p:cNvSpPr txBox="1"/>
-          <p:nvPr/>
-        </p:nvSpPr>
-        <p:spPr>
-          <a:xfrm>
-            <a:off x="777240" y="3336036"/>
-            <a:ext cx="10634472" cy="274320"/>
-          </a:xfrm>
-          <a:prstGeom prst="rect">
-            <a:avLst/>
-          </a:prstGeom>
-          <a:noFill/>
-          <a:ln/>
-        </p:spPr>
-        <p:txBody>
-          <a:bodyPr wrap="square" lIns="0" tIns="0" rIns="0" bIns="0" rtlCol="0" anchor="ctr"/>
-          <a:lstStyle/>
-          <a:p>
-            <a:pPr indent="0" marL="0">
-              <a:buNone/>
-            </a:pPr>
-            <a:r>
-              <a:rPr lang="en-US" sz="1200" b="1" spc="200" kern="0" dirty="0">
-                <a:solidFill>
-                  <a:srgbClr val="A9A9B4"/>
                 </a:solidFill>
                 <a:latin typeface="Calibri" pitchFamily="34" charset="0"/>
                 <a:ea typeface="Calibri" pitchFamily="34" charset="-122"/>
                 <a:cs typeface="Calibri" pitchFamily="34" charset="-120"/>
               </a:rPr>
-              <a:t>ERROR — LAST LINE</a:t>
-            </a:r>
-            <a:endParaRPr lang="en-US" sz="1200" dirty="0"/>
-          </a:p>
-        </p:txBody>
-      </p:sp>
-      <p:sp>
-        <p:nvSpPr>
-          <p:cNvPr id="13" name="Text 10"/>
-          <p:cNvSpPr txBox="1"/>
-          <p:nvPr/>
-        </p:nvSpPr>
-        <p:spPr>
-          <a:xfrm>
-            <a:off x="777240" y="3701796"/>
-            <a:ext cx="10634472" cy="365760"/>
-          </a:xfrm>
-          <a:prstGeom prst="rect">
-            <a:avLst/>
-          </a:prstGeom>
-          <a:noFill/>
-          <a:ln/>
-        </p:spPr>
-        <p:txBody>
-          <a:bodyPr wrap="square" lIns="0" tIns="0" rIns="0" bIns="0" rtlCol="0" anchor="ctr"/>
-          <a:lstStyle/>
-          <a:p>
-            <a:pPr indent="0" marL="0">
-              <a:buNone/>
-            </a:pPr>
-            <a:r>
-              <a:rPr lang="en-US" sz="1800" b="1" dirty="0">
-                <a:solidFill>
-                  <a:srgbClr val="FF6B6B"/>
-                </a:solidFill>
-                <a:latin typeface="Consolas" pitchFamily="34" charset="0"/>
-                <a:ea typeface="Consolas" pitchFamily="34" charset="-122"/>
-                <a:cs typeface="Consolas" pitchFamily="34" charset="-120"/>
-              </a:rPr>
-              <a:t>TypeError: </a:t>
-            </a:r>
-            <a:pPr indent="0" marL="0">
-              <a:buNone/>
-            </a:pPr>
-            <a:r>
-              <a:rPr lang="en-US" sz="1800" dirty="0">
-                <a:solidFill>
-                  <a:srgbClr val="FF6B6B"/>
-                </a:solidFill>
-                <a:latin typeface="Consolas" pitchFamily="34" charset="0"/>
-                <a:ea typeface="Consolas" pitchFamily="34" charset="-122"/>
-                <a:cs typeface="Consolas" pitchFamily="34" charset="-120"/>
-              </a:rPr>
-              <a:t>'&gt;=' not supported between instances of 'str' and 'int'</a:t>
-            </a:r>
-            <a:endParaRPr lang="en-US" sz="1800" dirty="0"/>
-          </a:p>
-        </p:txBody>
-      </p:sp>
-      <p:sp>
-        <p:nvSpPr>
-          <p:cNvPr id="14" name="Text 11"/>
-          <p:cNvSpPr txBox="1"/>
-          <p:nvPr/>
-        </p:nvSpPr>
-        <p:spPr>
-          <a:xfrm>
-            <a:off x="8412480" y="1554480"/>
-            <a:ext cx="2743200" cy="274320"/>
-          </a:xfrm>
-          <a:prstGeom prst="rect">
-            <a:avLst/>
-          </a:prstGeom>
-          <a:noFill/>
-          <a:ln/>
-        </p:spPr>
-        <p:txBody>
-          <a:bodyPr wrap="square" lIns="0" tIns="0" rIns="0" bIns="0" rtlCol="0" anchor="ctr"/>
-          <a:lstStyle/>
-          <a:p>
-            <a:pPr indent="0" marL="0">
-              <a:buNone/>
-            </a:pPr>
-            <a:r>
-              <a:rPr lang="en-US" sz="1300" b="1" spc="200" kern="0" dirty="0">
-                <a:solidFill>
-                  <a:srgbClr val="6E6E7A"/>
+              <a:t>YOUR TASK</a:t>
+            </a:r>
+            <a:endParaRPr lang="en-US" sz="1300" dirty="0"/>
+          </a:p>
+        </p:txBody>
+      </p:sp>
+      <p:sp>
+        <p:nvSpPr>
+          <p:cNvPr id="15" name="Text 12"/>
+          <p:cNvSpPr txBox="1"/>
+          <p:nvPr/>
+        </p:nvSpPr>
+        <p:spPr>
+          <a:xfrm>
+            <a:off x="6492240" y="1965960"/>
+            <a:ext cx="4828032" cy="822960"/>
+          </a:xfrm>
+          <a:prstGeom prst="rect">
+            <a:avLst/>
+          </a:prstGeom>
+          <a:noFill/>
+          <a:ln/>
+        </p:spPr>
+        <p:txBody>
+          <a:bodyPr wrap="square" lIns="0" tIns="0" rIns="0" bIns="0" rtlCol="0" anchor="ctr"/>
+          <a:lstStyle/>
+          <a:p>
+            <a:pPr indent="0" marL="0">
+              <a:buNone/>
+            </a:pPr>
+            <a:r>
+              <a:rPr lang="en-US" sz="2600" dirty="0">
+                <a:solidFill>
+                  <a:srgbClr val="F5F5F3"/>
                 </a:solidFill>
                 <a:latin typeface="Calibri" pitchFamily="34" charset="0"/>
                 <a:ea typeface="Calibri" pitchFamily="34" charset="-122"/>
                 <a:cs typeface="Calibri" pitchFamily="34" charset="-120"/>
               </a:rPr>
-              <a:t>IN MEMORY</a:t>
-            </a:r>
-            <a:endParaRPr lang="en-US" sz="1300" dirty="0"/>
-          </a:p>
-        </p:txBody>
-      </p:sp>
-      <p:sp>
-        <p:nvSpPr>
-          <p:cNvPr id="15" name="Shape 12"/>
+              <a:t>Open </a:t>
+            </a:r>
+            <a:pPr indent="0" marL="0">
+              <a:buNone/>
+            </a:pPr>
+            <a:r>
+              <a:rPr lang="en-US" sz="2600" b="1" dirty="0">
+                <a:solidFill>
+                  <a:srgbClr val="D8A73D"/>
+                </a:solidFill>
+                <a:latin typeface="Calibri" pitchFamily="34" charset="0"/>
+                <a:ea typeface="Calibri" pitchFamily="34" charset="-122"/>
+                <a:cs typeface="Calibri" pitchFamily="34" charset="-120"/>
+              </a:rPr>
+              <a:t>Proximity</a:t>
+            </a:r>
+            <a:pPr indent="0" marL="0">
+              <a:buNone/>
+            </a:pPr>
+            <a:r>
+              <a:rPr lang="en-US" sz="2600" dirty="0">
+                <a:solidFill>
+                  <a:srgbClr val="F5F5F3"/>
+                </a:solidFill>
+                <a:latin typeface="Calibri" pitchFamily="34" charset="0"/>
+                <a:ea typeface="Calibri" pitchFamily="34" charset="-122"/>
+                <a:cs typeface="Calibri" pitchFamily="34" charset="-120"/>
+              </a:rPr>
+              <a:t> from Google Classroom</a:t>
+            </a:r>
+            <a:endParaRPr lang="en-US" sz="2600" dirty="0"/>
+          </a:p>
+        </p:txBody>
+      </p:sp>
+      <p:sp>
+        <p:nvSpPr>
+          <p:cNvPr id="16" name="Shape 13"/>
           <p:cNvSpPr/>
           <p:nvPr/>
         </p:nvSpPr>
         <p:spPr>
           <a:xfrm>
-            <a:off x="8412480" y="2103120"/>
-            <a:ext cx="2743200" cy="868680"/>
+            <a:off x="6492240" y="3063240"/>
+            <a:ext cx="914400" cy="685800"/>
           </a:xfrm>
           <a:prstGeom prst="roundRect">
             <a:avLst>
-              <a:gd name="adj" fmla="val 6316"/>
-            </a:avLst>
-          </a:prstGeom>
-          <a:solidFill>
-            <a:srgbClr val="111115"/>
-          </a:solidFill>
-          <a:ln w="25400">
-            <a:solidFill>
-              <a:srgbClr val="E69F00"/>
-            </a:solidFill>
-            <a:prstDash val="solid"/>
-          </a:ln>
-        </p:spPr>
-      </p:sp>
-      <p:sp>
-        <p:nvSpPr>
-          <p:cNvPr id="16" name="Shape 13"/>
-          <p:cNvSpPr/>
-          <p:nvPr/>
-        </p:nvSpPr>
-        <p:spPr>
-          <a:xfrm>
-            <a:off x="8549640" y="1920240"/>
-            <a:ext cx="1883664" cy="347472"/>
-          </a:xfrm>
-          <a:prstGeom prst="roundRect">
-            <a:avLst>
-              <a:gd name="adj" fmla="val 13158"/>
-            </a:avLst>
-          </a:prstGeom>
-          <a:solidFill>
-            <a:srgbClr val="E69F00"/>
-          </a:solidFill>
-          <a:ln/>
-        </p:spPr>
-      </p:sp>
-      <p:sp>
-        <p:nvSpPr>
-          <p:cNvPr id="17" name="Text 14"/>
-          <p:cNvSpPr txBox="1"/>
-          <p:nvPr/>
-        </p:nvSpPr>
-        <p:spPr>
-          <a:xfrm>
-            <a:off x="8549640" y="1920240"/>
-            <a:ext cx="1883664" cy="347472"/>
-          </a:xfrm>
-          <a:prstGeom prst="rect">
-            <a:avLst/>
-          </a:prstGeom>
-          <a:noFill/>
-          <a:ln/>
-        </p:spPr>
-        <p:txBody>
-          <a:bodyPr wrap="square" lIns="0" tIns="0" rIns="0" bIns="0" rtlCol="0" anchor="ctr"/>
-          <a:lstStyle/>
-          <a:p>
-            <a:pPr algn="ctr" indent="0" marL="0">
-              <a:buNone/>
-            </a:pPr>
-            <a:r>
-              <a:rPr lang="en-US" sz="1400" b="1" dirty="0">
-                <a:solidFill>
-                  <a:srgbClr val="111115"/>
-                </a:solidFill>
-                <a:latin typeface="Consolas" pitchFamily="34" charset="0"/>
-                <a:ea typeface="Consolas" pitchFamily="34" charset="-122"/>
-                <a:cs typeface="Consolas" pitchFamily="34" charset="-120"/>
-              </a:rPr>
-              <a:t>distance  ·  str</a:t>
-            </a:r>
-            <a:endParaRPr lang="en-US" sz="1400" dirty="0"/>
-          </a:p>
-        </p:txBody>
-      </p:sp>
-      <p:sp>
-        <p:nvSpPr>
-          <p:cNvPr id="18" name="Text 15"/>
-          <p:cNvSpPr txBox="1"/>
-          <p:nvPr/>
-        </p:nvSpPr>
-        <p:spPr>
-          <a:xfrm>
-            <a:off x="8503920" y="2286000"/>
-            <a:ext cx="2560320" cy="640080"/>
-          </a:xfrm>
-          <a:prstGeom prst="rect">
-            <a:avLst/>
-          </a:prstGeom>
-          <a:noFill/>
-          <a:ln/>
-        </p:spPr>
-        <p:txBody>
-          <a:bodyPr wrap="square" lIns="0" tIns="0" rIns="0" bIns="0" rtlCol="0" anchor="ctr"/>
-          <a:lstStyle/>
-          <a:p>
-            <a:pPr algn="ctr" indent="0" marL="0">
-              <a:buNone/>
-            </a:pPr>
-            <a:r>
-              <a:rPr lang="en-US" sz="2600" dirty="0">
-                <a:solidFill>
-                  <a:srgbClr val="F5F5F3"/>
-                </a:solidFill>
-                <a:latin typeface="Consolas" pitchFamily="34" charset="0"/>
-                <a:ea typeface="Consolas" pitchFamily="34" charset="-122"/>
-                <a:cs typeface="Consolas" pitchFamily="34" charset="-120"/>
-              </a:rPr>
-              <a:t>"30"</a:t>
-            </a:r>
-            <a:endParaRPr lang="en-US" sz="2600" dirty="0"/>
-          </a:p>
-        </p:txBody>
-      </p:sp>
-      <p:sp>
-        <p:nvSpPr>
-          <p:cNvPr id="19" name="Shape 16"/>
-          <p:cNvSpPr/>
-          <p:nvPr/>
-        </p:nvSpPr>
-        <p:spPr>
-          <a:xfrm>
-            <a:off x="548640" y="4572000"/>
-            <a:ext cx="11091672" cy="1188720"/>
-          </a:xfrm>
-          <a:prstGeom prst="roundRect">
-            <a:avLst>
-              <a:gd name="adj" fmla="val 6154"/>
+              <a:gd name="adj" fmla="val 8000"/>
             </a:avLst>
           </a:prstGeom>
           <a:solidFill>
             <a:srgbClr val="1E1E24"/>
           </a:solidFill>
-          <a:ln w="25400">
+          <a:ln w="15875">
             <a:solidFill>
               <a:srgbClr val="D8A73D"/>
             </a:solidFill>
@@ -38809,66 +40010,624 @@
       </p:sp>
       <p:sp>
         <p:nvSpPr>
-          <p:cNvPr id="20" name="Text 17"/>
-          <p:cNvSpPr txBox="1"/>
-          <p:nvPr/>
-        </p:nvSpPr>
-        <p:spPr>
-          <a:xfrm>
-            <a:off x="914400" y="4572000"/>
-            <a:ext cx="10332720" cy="1188720"/>
-          </a:xfrm>
-          <a:prstGeom prst="rect">
-            <a:avLst/>
-          </a:prstGeom>
-          <a:noFill/>
-          <a:ln/>
-        </p:spPr>
-        <p:txBody>
-          <a:bodyPr wrap="square" lIns="0" tIns="0" rIns="0" bIns="0" rtlCol="0" anchor="ctr"/>
-          <a:lstStyle/>
-          <a:p>
-            <a:pPr indent="0" marL="0">
-              <a:buNone/>
-            </a:pPr>
-            <a:r>
-              <a:rPr lang="en-US" sz="2400" b="1" dirty="0">
+          <p:cNvPr id="17" name="Text 14"/>
+          <p:cNvSpPr txBox="1"/>
+          <p:nvPr/>
+        </p:nvSpPr>
+        <p:spPr>
+          <a:xfrm>
+            <a:off x="6492240" y="3063240"/>
+            <a:ext cx="914400" cy="685800"/>
+          </a:xfrm>
+          <a:prstGeom prst="rect">
+            <a:avLst/>
+          </a:prstGeom>
+          <a:noFill/>
+          <a:ln/>
+        </p:spPr>
+        <p:txBody>
+          <a:bodyPr wrap="square" lIns="0" tIns="0" rIns="0" bIns="0" rtlCol="0" anchor="ctr"/>
+          <a:lstStyle/>
+          <a:p>
+            <a:pPr algn="ctr" indent="0" marL="0">
+              <a:buNone/>
+            </a:pPr>
+            <a:r>
+              <a:rPr lang="en-US" sz="2800" b="1" dirty="0">
                 <a:solidFill>
                   <a:srgbClr val="D8A73D"/>
+                </a:solidFill>
+                <a:latin typeface="Cambria" pitchFamily="34" charset="0"/>
+                <a:ea typeface="Cambria" pitchFamily="34" charset="-122"/>
+                <a:cs typeface="Cambria" pitchFamily="34" charset="-120"/>
+              </a:rPr>
+              <a:t>P</a:t>
+            </a:r>
+            <a:endParaRPr lang="en-US" sz="2800" dirty="0"/>
+          </a:p>
+        </p:txBody>
+      </p:sp>
+      <p:sp>
+        <p:nvSpPr>
+          <p:cNvPr id="18" name="Text 15"/>
+          <p:cNvSpPr txBox="1"/>
+          <p:nvPr/>
+        </p:nvSpPr>
+        <p:spPr>
+          <a:xfrm>
+            <a:off x="6400800" y="3794760"/>
+            <a:ext cx="1097280" cy="274320"/>
+          </a:xfrm>
+          <a:prstGeom prst="rect">
+            <a:avLst/>
+          </a:prstGeom>
+          <a:noFill/>
+          <a:ln/>
+        </p:spPr>
+        <p:txBody>
+          <a:bodyPr wrap="square" lIns="0" tIns="0" rIns="0" bIns="0" rtlCol="0" anchor="ctr"/>
+          <a:lstStyle/>
+          <a:p>
+            <a:pPr algn="ctr" indent="0" marL="0">
+              <a:buNone/>
+            </a:pPr>
+            <a:r>
+              <a:rPr lang="en-US" sz="1200" dirty="0">
+                <a:solidFill>
+                  <a:srgbClr val="A9A9B4"/>
                 </a:solidFill>
                 <a:latin typeface="Calibri" pitchFamily="34" charset="0"/>
                 <a:ea typeface="Calibri" pitchFamily="34" charset="-122"/>
                 <a:cs typeface="Calibri" pitchFamily="34" charset="-120"/>
               </a:rPr>
-              <a:t>Python points at line 2, but the fix is on line 1:</a:t>
-            </a:r>
-            <a:pPr indent="0" marL="0">
-              <a:buNone/>
-            </a:pPr>
-            <a:endParaRPr lang="en-US" sz="2400" dirty="0"/>
-          </a:p>
-          <a:p>
-            <a:pPr indent="0" marL="0">
-              <a:buNone/>
-            </a:pPr>
-            <a:r>
-              <a:rPr lang="en-US" sz="2400" dirty="0">
+              <a:t>Predict</a:t>
+            </a:r>
+            <a:endParaRPr lang="en-US" sz="1200" dirty="0"/>
+          </a:p>
+        </p:txBody>
+      </p:sp>
+      <p:sp>
+        <p:nvSpPr>
+          <p:cNvPr id="19" name="Shape 16"/>
+          <p:cNvSpPr/>
+          <p:nvPr/>
+        </p:nvSpPr>
+        <p:spPr>
+          <a:xfrm>
+            <a:off x="7470648" y="3063240"/>
+            <a:ext cx="914400" cy="685800"/>
+          </a:xfrm>
+          <a:prstGeom prst="roundRect">
+            <a:avLst>
+              <a:gd name="adj" fmla="val 8000"/>
+            </a:avLst>
+          </a:prstGeom>
+          <a:solidFill>
+            <a:srgbClr val="1E1E24"/>
+          </a:solidFill>
+          <a:ln w="15875">
+            <a:solidFill>
+              <a:srgbClr val="D8A73D"/>
+            </a:solidFill>
+            <a:prstDash val="solid"/>
+          </a:ln>
+        </p:spPr>
+      </p:sp>
+      <p:sp>
+        <p:nvSpPr>
+          <p:cNvPr id="20" name="Text 17"/>
+          <p:cNvSpPr txBox="1"/>
+          <p:nvPr/>
+        </p:nvSpPr>
+        <p:spPr>
+          <a:xfrm>
+            <a:off x="7470648" y="3063240"/>
+            <a:ext cx="914400" cy="685800"/>
+          </a:xfrm>
+          <a:prstGeom prst="rect">
+            <a:avLst/>
+          </a:prstGeom>
+          <a:noFill/>
+          <a:ln/>
+        </p:spPr>
+        <p:txBody>
+          <a:bodyPr wrap="square" lIns="0" tIns="0" rIns="0" bIns="0" rtlCol="0" anchor="ctr"/>
+          <a:lstStyle/>
+          <a:p>
+            <a:pPr algn="ctr" indent="0" marL="0">
+              <a:buNone/>
+            </a:pPr>
+            <a:r>
+              <a:rPr lang="en-US" sz="2800" b="1" dirty="0">
+                <a:solidFill>
+                  <a:srgbClr val="D8A73D"/>
+                </a:solidFill>
+                <a:latin typeface="Cambria" pitchFamily="34" charset="0"/>
+                <a:ea typeface="Cambria" pitchFamily="34" charset="-122"/>
+                <a:cs typeface="Cambria" pitchFamily="34" charset="-120"/>
+              </a:rPr>
+              <a:t>R</a:t>
+            </a:r>
+            <a:endParaRPr lang="en-US" sz="2800" dirty="0"/>
+          </a:p>
+        </p:txBody>
+      </p:sp>
+      <p:sp>
+        <p:nvSpPr>
+          <p:cNvPr id="21" name="Text 18"/>
+          <p:cNvSpPr txBox="1"/>
+          <p:nvPr/>
+        </p:nvSpPr>
+        <p:spPr>
+          <a:xfrm>
+            <a:off x="7379208" y="3794760"/>
+            <a:ext cx="1097280" cy="274320"/>
+          </a:xfrm>
+          <a:prstGeom prst="rect">
+            <a:avLst/>
+          </a:prstGeom>
+          <a:noFill/>
+          <a:ln/>
+        </p:spPr>
+        <p:txBody>
+          <a:bodyPr wrap="square" lIns="0" tIns="0" rIns="0" bIns="0" rtlCol="0" anchor="ctr"/>
+          <a:lstStyle/>
+          <a:p>
+            <a:pPr algn="ctr" indent="0" marL="0">
+              <a:buNone/>
+            </a:pPr>
+            <a:r>
+              <a:rPr lang="en-US" sz="1200" dirty="0">
+                <a:solidFill>
+                  <a:srgbClr val="A9A9B4"/>
+                </a:solidFill>
+                <a:latin typeface="Calibri" pitchFamily="34" charset="0"/>
+                <a:ea typeface="Calibri" pitchFamily="34" charset="-122"/>
+                <a:cs typeface="Calibri" pitchFamily="34" charset="-120"/>
+              </a:rPr>
+              <a:t>Run</a:t>
+            </a:r>
+            <a:endParaRPr lang="en-US" sz="1200" dirty="0"/>
+          </a:p>
+        </p:txBody>
+      </p:sp>
+      <p:sp>
+        <p:nvSpPr>
+          <p:cNvPr id="22" name="Shape 19"/>
+          <p:cNvSpPr/>
+          <p:nvPr/>
+        </p:nvSpPr>
+        <p:spPr>
+          <a:xfrm>
+            <a:off x="8449056" y="3063240"/>
+            <a:ext cx="914400" cy="685800"/>
+          </a:xfrm>
+          <a:prstGeom prst="roundRect">
+            <a:avLst>
+              <a:gd name="adj" fmla="val 8000"/>
+            </a:avLst>
+          </a:prstGeom>
+          <a:solidFill>
+            <a:srgbClr val="1E1E24"/>
+          </a:solidFill>
+          <a:ln w="15875">
+            <a:solidFill>
+              <a:srgbClr val="D8A73D"/>
+            </a:solidFill>
+            <a:prstDash val="solid"/>
+          </a:ln>
+        </p:spPr>
+      </p:sp>
+      <p:sp>
+        <p:nvSpPr>
+          <p:cNvPr id="23" name="Text 20"/>
+          <p:cNvSpPr txBox="1"/>
+          <p:nvPr/>
+        </p:nvSpPr>
+        <p:spPr>
+          <a:xfrm>
+            <a:off x="8449056" y="3063240"/>
+            <a:ext cx="914400" cy="685800"/>
+          </a:xfrm>
+          <a:prstGeom prst="rect">
+            <a:avLst/>
+          </a:prstGeom>
+          <a:noFill/>
+          <a:ln/>
+        </p:spPr>
+        <p:txBody>
+          <a:bodyPr wrap="square" lIns="0" tIns="0" rIns="0" bIns="0" rtlCol="0" anchor="ctr"/>
+          <a:lstStyle/>
+          <a:p>
+            <a:pPr algn="ctr" indent="0" marL="0">
+              <a:buNone/>
+            </a:pPr>
+            <a:r>
+              <a:rPr lang="en-US" sz="2800" b="1" dirty="0">
+                <a:solidFill>
+                  <a:srgbClr val="D8A73D"/>
+                </a:solidFill>
+                <a:latin typeface="Cambria" pitchFamily="34" charset="0"/>
+                <a:ea typeface="Cambria" pitchFamily="34" charset="-122"/>
+                <a:cs typeface="Cambria" pitchFamily="34" charset="-120"/>
+              </a:rPr>
+              <a:t>I</a:t>
+            </a:r>
+            <a:endParaRPr lang="en-US" sz="2800" dirty="0"/>
+          </a:p>
+        </p:txBody>
+      </p:sp>
+      <p:sp>
+        <p:nvSpPr>
+          <p:cNvPr id="24" name="Text 21"/>
+          <p:cNvSpPr txBox="1"/>
+          <p:nvPr/>
+        </p:nvSpPr>
+        <p:spPr>
+          <a:xfrm>
+            <a:off x="8357616" y="3794760"/>
+            <a:ext cx="1097280" cy="274320"/>
+          </a:xfrm>
+          <a:prstGeom prst="rect">
+            <a:avLst/>
+          </a:prstGeom>
+          <a:noFill/>
+          <a:ln/>
+        </p:spPr>
+        <p:txBody>
+          <a:bodyPr wrap="square" lIns="0" tIns="0" rIns="0" bIns="0" rtlCol="0" anchor="ctr"/>
+          <a:lstStyle/>
+          <a:p>
+            <a:pPr algn="ctr" indent="0" marL="0">
+              <a:buNone/>
+            </a:pPr>
+            <a:r>
+              <a:rPr lang="en-US" sz="1200" dirty="0">
+                <a:solidFill>
+                  <a:srgbClr val="A9A9B4"/>
+                </a:solidFill>
+                <a:latin typeface="Calibri" pitchFamily="34" charset="0"/>
+                <a:ea typeface="Calibri" pitchFamily="34" charset="-122"/>
+                <a:cs typeface="Calibri" pitchFamily="34" charset="-120"/>
+              </a:rPr>
+              <a:t>Investigate</a:t>
+            </a:r>
+            <a:endParaRPr lang="en-US" sz="1200" dirty="0"/>
+          </a:p>
+        </p:txBody>
+      </p:sp>
+      <p:sp>
+        <p:nvSpPr>
+          <p:cNvPr id="25" name="Shape 22"/>
+          <p:cNvSpPr/>
+          <p:nvPr/>
+        </p:nvSpPr>
+        <p:spPr>
+          <a:xfrm>
+            <a:off x="9427464" y="3063240"/>
+            <a:ext cx="914400" cy="685800"/>
+          </a:xfrm>
+          <a:prstGeom prst="roundRect">
+            <a:avLst>
+              <a:gd name="adj" fmla="val 8000"/>
+            </a:avLst>
+          </a:prstGeom>
+          <a:solidFill>
+            <a:srgbClr val="1E1E24"/>
+          </a:solidFill>
+          <a:ln w="15875">
+            <a:solidFill>
+              <a:srgbClr val="D8A73D"/>
+            </a:solidFill>
+            <a:prstDash val="solid"/>
+          </a:ln>
+        </p:spPr>
+      </p:sp>
+      <p:sp>
+        <p:nvSpPr>
+          <p:cNvPr id="26" name="Text 23"/>
+          <p:cNvSpPr txBox="1"/>
+          <p:nvPr/>
+        </p:nvSpPr>
+        <p:spPr>
+          <a:xfrm>
+            <a:off x="9427464" y="3063240"/>
+            <a:ext cx="914400" cy="685800"/>
+          </a:xfrm>
+          <a:prstGeom prst="rect">
+            <a:avLst/>
+          </a:prstGeom>
+          <a:noFill/>
+          <a:ln/>
+        </p:spPr>
+        <p:txBody>
+          <a:bodyPr wrap="square" lIns="0" tIns="0" rIns="0" bIns="0" rtlCol="0" anchor="ctr"/>
+          <a:lstStyle/>
+          <a:p>
+            <a:pPr algn="ctr" indent="0" marL="0">
+              <a:buNone/>
+            </a:pPr>
+            <a:r>
+              <a:rPr lang="en-US" sz="2800" b="1" dirty="0">
+                <a:solidFill>
+                  <a:srgbClr val="D8A73D"/>
+                </a:solidFill>
+                <a:latin typeface="Cambria" pitchFamily="34" charset="0"/>
+                <a:ea typeface="Cambria" pitchFamily="34" charset="-122"/>
+                <a:cs typeface="Cambria" pitchFamily="34" charset="-120"/>
+              </a:rPr>
+              <a:t>M</a:t>
+            </a:r>
+            <a:endParaRPr lang="en-US" sz="2800" dirty="0"/>
+          </a:p>
+        </p:txBody>
+      </p:sp>
+      <p:sp>
+        <p:nvSpPr>
+          <p:cNvPr id="27" name="Text 24"/>
+          <p:cNvSpPr txBox="1"/>
+          <p:nvPr/>
+        </p:nvSpPr>
+        <p:spPr>
+          <a:xfrm>
+            <a:off x="9336024" y="3794760"/>
+            <a:ext cx="1097280" cy="274320"/>
+          </a:xfrm>
+          <a:prstGeom prst="rect">
+            <a:avLst/>
+          </a:prstGeom>
+          <a:noFill/>
+          <a:ln/>
+        </p:spPr>
+        <p:txBody>
+          <a:bodyPr wrap="square" lIns="0" tIns="0" rIns="0" bIns="0" rtlCol="0" anchor="ctr"/>
+          <a:lstStyle/>
+          <a:p>
+            <a:pPr algn="ctr" indent="0" marL="0">
+              <a:buNone/>
+            </a:pPr>
+            <a:r>
+              <a:rPr lang="en-US" sz="1200" dirty="0">
+                <a:solidFill>
+                  <a:srgbClr val="A9A9B4"/>
+                </a:solidFill>
+                <a:latin typeface="Calibri" pitchFamily="34" charset="0"/>
+                <a:ea typeface="Calibri" pitchFamily="34" charset="-122"/>
+                <a:cs typeface="Calibri" pitchFamily="34" charset="-120"/>
+              </a:rPr>
+              <a:t>Modify</a:t>
+            </a:r>
+            <a:endParaRPr lang="en-US" sz="1200" dirty="0"/>
+          </a:p>
+        </p:txBody>
+      </p:sp>
+      <p:sp>
+        <p:nvSpPr>
+          <p:cNvPr id="28" name="Shape 25"/>
+          <p:cNvSpPr/>
+          <p:nvPr/>
+        </p:nvSpPr>
+        <p:spPr>
+          <a:xfrm>
+            <a:off x="10405872" y="3063240"/>
+            <a:ext cx="914400" cy="685800"/>
+          </a:xfrm>
+          <a:prstGeom prst="roundRect">
+            <a:avLst>
+              <a:gd name="adj" fmla="val 8000"/>
+            </a:avLst>
+          </a:prstGeom>
+          <a:solidFill>
+            <a:srgbClr val="1E1E24"/>
+          </a:solidFill>
+          <a:ln w="15875">
+            <a:solidFill>
+              <a:srgbClr val="D8A73D"/>
+            </a:solidFill>
+            <a:prstDash val="solid"/>
+          </a:ln>
+        </p:spPr>
+      </p:sp>
+      <p:sp>
+        <p:nvSpPr>
+          <p:cNvPr id="29" name="Text 26"/>
+          <p:cNvSpPr txBox="1"/>
+          <p:nvPr/>
+        </p:nvSpPr>
+        <p:spPr>
+          <a:xfrm>
+            <a:off x="10405872" y="3063240"/>
+            <a:ext cx="914400" cy="685800"/>
+          </a:xfrm>
+          <a:prstGeom prst="rect">
+            <a:avLst/>
+          </a:prstGeom>
+          <a:noFill/>
+          <a:ln/>
+        </p:spPr>
+        <p:txBody>
+          <a:bodyPr wrap="square" lIns="0" tIns="0" rIns="0" bIns="0" rtlCol="0" anchor="ctr"/>
+          <a:lstStyle/>
+          <a:p>
+            <a:pPr algn="ctr" indent="0" marL="0">
+              <a:buNone/>
+            </a:pPr>
+            <a:r>
+              <a:rPr lang="en-US" sz="2800" b="1" dirty="0">
+                <a:solidFill>
+                  <a:srgbClr val="D8A73D"/>
+                </a:solidFill>
+                <a:latin typeface="Cambria" pitchFamily="34" charset="0"/>
+                <a:ea typeface="Cambria" pitchFamily="34" charset="-122"/>
+                <a:cs typeface="Cambria" pitchFamily="34" charset="-120"/>
+              </a:rPr>
+              <a:t>M</a:t>
+            </a:r>
+            <a:endParaRPr lang="en-US" sz="2800" dirty="0"/>
+          </a:p>
+        </p:txBody>
+      </p:sp>
+      <p:sp>
+        <p:nvSpPr>
+          <p:cNvPr id="30" name="Text 27"/>
+          <p:cNvSpPr txBox="1"/>
+          <p:nvPr/>
+        </p:nvSpPr>
+        <p:spPr>
+          <a:xfrm>
+            <a:off x="10314432" y="3794760"/>
+            <a:ext cx="1097280" cy="274320"/>
+          </a:xfrm>
+          <a:prstGeom prst="rect">
+            <a:avLst/>
+          </a:prstGeom>
+          <a:noFill/>
+          <a:ln/>
+        </p:spPr>
+        <p:txBody>
+          <a:bodyPr wrap="square" lIns="0" tIns="0" rIns="0" bIns="0" rtlCol="0" anchor="ctr"/>
+          <a:lstStyle/>
+          <a:p>
+            <a:pPr algn="ctr" indent="0" marL="0">
+              <a:buNone/>
+            </a:pPr>
+            <a:r>
+              <a:rPr lang="en-US" sz="1200" dirty="0">
+                <a:solidFill>
+                  <a:srgbClr val="A9A9B4"/>
+                </a:solidFill>
+                <a:latin typeface="Calibri" pitchFamily="34" charset="0"/>
+                <a:ea typeface="Calibri" pitchFamily="34" charset="-122"/>
+                <a:cs typeface="Calibri" pitchFamily="34" charset="-120"/>
+              </a:rPr>
+              <a:t>Make</a:t>
+            </a:r>
+            <a:endParaRPr lang="en-US" sz="1200" dirty="0"/>
+          </a:p>
+        </p:txBody>
+      </p:sp>
+      <p:sp>
+        <p:nvSpPr>
+          <p:cNvPr id="31" name="Text 28"/>
+          <p:cNvSpPr txBox="1"/>
+          <p:nvPr/>
+        </p:nvSpPr>
+        <p:spPr>
+          <a:xfrm>
+            <a:off x="6492240" y="4343400"/>
+            <a:ext cx="4828032" cy="1280160"/>
+          </a:xfrm>
+          <a:prstGeom prst="rect">
+            <a:avLst/>
+          </a:prstGeom>
+          <a:noFill/>
+          <a:ln/>
+        </p:spPr>
+        <p:txBody>
+          <a:bodyPr wrap="square" lIns="0" tIns="0" rIns="0" bIns="0" rtlCol="0" anchor="ctr"/>
+          <a:lstStyle/>
+          <a:p>
+            <a:pPr indent="0" marL="0">
+              <a:buNone/>
+            </a:pPr>
+            <a:r>
+              <a:rPr lang="en-US" sz="1900" b="1" dirty="0">
+                <a:solidFill>
+                  <a:srgbClr val="D8A73D"/>
+                </a:solidFill>
+                <a:latin typeface="Calibri" pitchFamily="34" charset="0"/>
+                <a:ea typeface="Calibri" pitchFamily="34" charset="-122"/>
+                <a:cs typeface="Calibri" pitchFamily="34" charset="-120"/>
+              </a:rPr>
+              <a:t>Three calls this time: </a:t>
+            </a:r>
+            <a:pPr indent="0" marL="0">
+              <a:buNone/>
+            </a:pPr>
+            <a:r>
+              <a:rPr lang="en-US" sz="1900" dirty="0">
                 <a:solidFill>
                   <a:srgbClr val="F5F5F3"/>
                 </a:solidFill>
-                <a:latin typeface="Consolas" pitchFamily="34" charset="0"/>
-                <a:ea typeface="Consolas" pitchFamily="34" charset="-122"/>
-                <a:cs typeface="Consolas" pitchFamily="34" charset="-120"/>
-              </a:rPr>
-              <a:t>distance = int(input("Distance: "))</a:t>
-            </a:r>
-            <a:endParaRPr lang="en-US" sz="2400" dirty="0"/>
+                <a:latin typeface="Calibri" pitchFamily="34" charset="0"/>
+                <a:ea typeface="Calibri" pitchFamily="34" charset="-122"/>
+                <a:cs typeface="Calibri" pitchFamily="34" charset="-120"/>
+              </a:rPr>
+              <a:t>in Investigate, Modify and Make. They change the story, not your score.</a:t>
+            </a:r>
+            <a:endParaRPr lang="en-US" sz="1900" dirty="0"/>
+          </a:p>
+        </p:txBody>
+      </p:sp>
+      <p:sp>
+        <p:nvSpPr>
+          <p:cNvPr id="32" name="Shape 29"/>
+          <p:cNvSpPr/>
+          <p:nvPr/>
+        </p:nvSpPr>
+        <p:spPr>
+          <a:xfrm>
+            <a:off x="10131552" y="1627632"/>
+            <a:ext cx="1280160" cy="329184"/>
+          </a:xfrm>
+          <a:prstGeom prst="roundRect">
+            <a:avLst>
+              <a:gd name="adj" fmla="val 50000"/>
+            </a:avLst>
+          </a:prstGeom>
+          <a:solidFill>
+            <a:srgbClr val="1E1E24"/>
+          </a:solidFill>
+          <a:ln w="15875">
+            <a:solidFill>
+              <a:srgbClr val="D8A73D"/>
+            </a:solidFill>
+            <a:prstDash val="solid"/>
+          </a:ln>
+        </p:spPr>
+      </p:sp>
+      <p:sp>
+        <p:nvSpPr>
+          <p:cNvPr id="33" name="Text 30"/>
+          <p:cNvSpPr txBox="1"/>
+          <p:nvPr/>
+        </p:nvSpPr>
+        <p:spPr>
+          <a:xfrm>
+            <a:off x="10131552" y="1627632"/>
+            <a:ext cx="1280160" cy="329184"/>
+          </a:xfrm>
+          <a:prstGeom prst="rect">
+            <a:avLst/>
+          </a:prstGeom>
+          <a:noFill/>
+          <a:ln/>
+        </p:spPr>
+        <p:txBody>
+          <a:bodyPr wrap="square" lIns="0" tIns="0" rIns="0" bIns="0" rtlCol="0" anchor="ctr"/>
+          <a:lstStyle/>
+          <a:p>
+            <a:pPr algn="ctr" indent="0" marL="0">
+              <a:buNone/>
+            </a:pPr>
+            <a:r>
+              <a:rPr lang="en-US" sz="1400" b="1" spc="100" kern="0" dirty="0">
+                <a:solidFill>
+                  <a:srgbClr val="D8A73D"/>
+                </a:solidFill>
+                <a:latin typeface="Calibri" pitchFamily="34" charset="0"/>
+                <a:ea typeface="Calibri" pitchFamily="34" charset="-122"/>
+                <a:cs typeface="Calibri" pitchFamily="34" charset="-120"/>
+              </a:rPr>
+              <a:t>⏱  ≈30 MIN</a:t>
+            </a:r>
+            <a:endParaRPr lang="en-US" sz="1400" dirty="0"/>
           </a:p>
         </p:txBody>
       </p:sp>
       <p:pic>
         <p:nvPicPr>
-          <p:cNvPr id="21" name="Image 1" descr="Feedback">    </p:cNvPr>
+          <p:cNvPr id="34" name="Image 1" descr="Deliberate practice">    </p:cNvPr>
           <p:cNvPicPr>
             <a:picLocks noChangeAspect="1"/>
           </p:cNvPicPr>
@@ -38890,54 +40649,6 @@
           </a:prstGeom>
         </p:spPr>
       </p:pic>
-      <p:sp>
-        <p:nvSpPr>
-          <p:cNvPr id="25" name="Slide Number Placeholder 0"/>
-          <p:cNvSpPr>
-            <a:spLocks noGrp="1"/>
-          </p:cNvSpPr>
-          <p:nvPr>
-            <p:ph type="sldNum" sz="quarter" idx="4294967295"/>
-          </p:nvPr>
-        </p:nvSpPr>
-        <p:spPr>
-          <a:xfrm>
-            <a:off x="11155680" y="6382512"/>
-            <a:ext cx="502920" cy="274320"/>
-          </a:xfrm>
-          <a:prstGeom prst="rect">
-            <a:avLst/>
-          </a:prstGeom>
-          <a:extLst>
-            <a:ext uri="{C572A759-6A51-4108-AA02-DFA0A04FC94B}">
-              <ma14:wrappingTextBoxFlag xmlns:ma14="http://schemas.microsoft.com/office/mac/drawingml/2011/main" val="0"/>
-            </a:ext>
-          </a:extLst>
-        </p:spPr>
-        <p:txBody>
-          <a:bodyPr/>
-          <a:lstStyle>
-            <a:lvl1pPr>
-              <a:defRPr sz="1200">
-                <a:solidFill>
-                  <a:srgbClr val="6E6E7A"/>
-                </a:solidFill>
-                <a:latin typeface="Calibri"/>
-                <a:ea typeface="Calibri"/>
-                <a:cs typeface="Calibri"/>
-              </a:defRPr>
-            </a:lvl1pPr>
-          </a:lstStyle>
-          <a:p>
-            <a:pPr algn="r"/>
-            <a:fld id="{F7021451-1387-4CA6-816F-3879F97B5CBC}" type="slidenum">
-              <a:rPr b="0" lang="en-US"/>
-              <a:t>23</a:t>
-            </a:fld>
-            <a:endParaRPr lang="en-US"/>
-          </a:p>
-        </p:txBody>
-      </p:sp>
     </p:spTree>
   </p:cSld>
   <p:clrMapOvr>
@@ -38965,6 +40676,991 @@
       </p:grpSpPr>
       <p:pic>
         <p:nvPicPr>
+          <p:cNvPr id="2" name="station edge_amber" descr="C:\Users\n.houlton_grange.out\source\repos\interactive\_presentations\Y9_Python\station\edge_amber.png">    </p:cNvPr>
+          <p:cNvPicPr>
+            <a:picLocks noChangeAspect="1"/>
+          </p:cNvPicPr>
+          <p:nvPr/>
+        </p:nvPicPr>
+        <p:blipFill>
+          <a:blip r:embed="rId1"/>
+          <a:stretch>
+            <a:fillRect/>
+          </a:stretch>
+        </p:blipFill>
+        <p:spPr>
+          <a:xfrm>
+            <a:off x="0" y="0"/>
+            <a:ext cx="12191695" cy="6858000"/>
+          </a:xfrm>
+          <a:prstGeom prst="rect">
+            <a:avLst/>
+          </a:prstGeom>
+        </p:spPr>
+      </p:pic>
+      <p:sp>
+        <p:nvSpPr>
+          <p:cNvPr id="3" name="station status"/>
+          <p:cNvSpPr txBox="1"/>
+          <p:nvPr/>
+        </p:nvSpPr>
+        <p:spPr>
+          <a:xfrm>
+            <a:off x="548640" y="73152"/>
+            <a:ext cx="10241280" cy="237744"/>
+          </a:xfrm>
+          <a:prstGeom prst="rect">
+            <a:avLst/>
+          </a:prstGeom>
+          <a:noFill/>
+          <a:ln/>
+        </p:spPr>
+        <p:txBody>
+          <a:bodyPr wrap="square" lIns="0" tIns="0" rIns="0" bIns="0" rtlCol="0" anchor="ctr"/>
+          <a:lstStyle/>
+          <a:p>
+            <a:pPr indent="0" marL="0">
+              <a:buNone/>
+            </a:pPr>
+            <a:r>
+              <a:rPr lang="en-US" sz="1100" spc="100" kern="0" dirty="0">
+                <a:solidFill>
+                  <a:srgbClr val="E69F00"/>
+                </a:solidFill>
+                <a:latin typeface="Consolas" pitchFamily="34" charset="0"/>
+                <a:ea typeface="Consolas" pitchFamily="34" charset="-122"/>
+                <a:cs typeface="Consolas" pitchFamily="34" charset="-120"/>
+              </a:rPr>
+              <a:t>●  </a:t>
+            </a:r>
+            <a:pPr indent="0" marL="0">
+              <a:buNone/>
+            </a:pPr>
+            <a:r>
+              <a:rPr lang="en-US" sz="1100" spc="100" kern="0" dirty="0">
+                <a:solidFill>
+                  <a:srgbClr val="6E6E7A"/>
+                </a:solidFill>
+                <a:latin typeface="Consolas" pitchFamily="34" charset="0"/>
+                <a:ea typeface="Consolas" pitchFamily="34" charset="-122"/>
+                <a:cs typeface="Consolas" pitchFamily="34" charset="-120"/>
+              </a:rPr>
+              <a:t>SENSOR OPS   ·   MOTION DETECTED   ·   BIO-SCAN: NOT HUMAN</a:t>
+            </a:r>
+            <a:endParaRPr lang="en-US" sz="1100" dirty="0"/>
+          </a:p>
+        </p:txBody>
+      </p:sp>
+      <p:sp>
+        <p:nvSpPr>
+          <p:cNvPr id="4" name="Text 1"/>
+          <p:cNvSpPr/>
+          <p:nvPr>
+            <p:ph idx="101" type="title" hasCustomPrompt="1"/>
+          </p:nvPr>
+        </p:nvSpPr>
+        <p:spPr>
+          <a:xfrm>
+            <a:off x="548640" y="411480"/>
+            <a:ext cx="9418320" cy="777240"/>
+          </a:xfrm>
+          <a:prstGeom prst="rect">
+            <a:avLst/>
+          </a:prstGeom>
+          <a:noFill/>
+          <a:ln/>
+        </p:spPr>
+        <p:txBody>
+          <a:bodyPr wrap="square" lIns="0" tIns="0" rIns="0" bIns="0" rtlCol="0" anchor="ctr"/>
+          <a:lstStyle/>
+          <a:p>
+            <a:pPr algn="l" indent="0" marL="0">
+              <a:buNone/>
+            </a:pPr>
+            <a:r>
+              <a:rPr lang="en-US" sz="3600" b="1" dirty="0">
+                <a:solidFill>
+                  <a:srgbClr val="F5F5F3"/>
+                </a:solidFill>
+                <a:latin typeface="Cambria" pitchFamily="34" charset="0"/>
+                <a:ea typeface="Cambria" pitchFamily="34" charset="-122"/>
+                <a:cs typeface="Cambria" pitchFamily="34" charset="-120"/>
+              </a:rPr>
+              <a:t>input() gives text, so convert it</a:t>
+            </a:r>
+            <a:endParaRPr lang="en-US" sz="3600" dirty="0"/>
+          </a:p>
+        </p:txBody>
+      </p:sp>
+      <p:sp>
+        <p:nvSpPr>
+          <p:cNvPr id="5" name="code"/>
+          <p:cNvSpPr/>
+          <p:nvPr/>
+        </p:nvSpPr>
+        <p:spPr>
+          <a:xfrm>
+            <a:off x="548640" y="1600200"/>
+            <a:ext cx="7498080" cy="1324356"/>
+          </a:xfrm>
+          <a:prstGeom prst="roundRect">
+            <a:avLst>
+              <a:gd name="adj" fmla="val 5524"/>
+            </a:avLst>
+          </a:prstGeom>
+          <a:solidFill>
+            <a:srgbClr val="111115"/>
+          </a:solidFill>
+          <a:ln w="15875">
+            <a:solidFill>
+              <a:srgbClr val="3A3A44"/>
+            </a:solidFill>
+            <a:prstDash val="solid"/>
+          </a:ln>
+        </p:spPr>
+      </p:sp>
+      <p:sp>
+        <p:nvSpPr>
+          <p:cNvPr id="6" name="Text 3"/>
+          <p:cNvSpPr txBox="1"/>
+          <p:nvPr/>
+        </p:nvSpPr>
+        <p:spPr>
+          <a:xfrm>
+            <a:off x="658368" y="1801368"/>
+            <a:ext cx="274320" cy="461010"/>
+          </a:xfrm>
+          <a:prstGeom prst="rect">
+            <a:avLst/>
+          </a:prstGeom>
+          <a:noFill/>
+          <a:ln/>
+        </p:spPr>
+        <p:txBody>
+          <a:bodyPr wrap="square" lIns="0" tIns="0" rIns="0" bIns="0" rtlCol="0" anchor="ctr"/>
+          <a:lstStyle/>
+          <a:p>
+            <a:pPr algn="r" indent="0" marL="0">
+              <a:buNone/>
+            </a:pPr>
+            <a:r>
+              <a:rPr lang="en-US" sz="1800" dirty="0">
+                <a:solidFill>
+                  <a:srgbClr val="6E6E7A"/>
+                </a:solidFill>
+                <a:latin typeface="Consolas" pitchFamily="34" charset="0"/>
+                <a:ea typeface="Consolas" pitchFamily="34" charset="-122"/>
+                <a:cs typeface="Consolas" pitchFamily="34" charset="-120"/>
+              </a:rPr>
+              <a:t>1</a:t>
+            </a:r>
+            <a:endParaRPr lang="en-US" sz="1800" dirty="0"/>
+          </a:p>
+        </p:txBody>
+      </p:sp>
+      <p:sp>
+        <p:nvSpPr>
+          <p:cNvPr id="7" name="Text 4"/>
+          <p:cNvSpPr txBox="1"/>
+          <p:nvPr/>
+        </p:nvSpPr>
+        <p:spPr>
+          <a:xfrm>
+            <a:off x="1188720" y="1801368"/>
+            <a:ext cx="6766560" cy="461010"/>
+          </a:xfrm>
+          <a:prstGeom prst="rect">
+            <a:avLst/>
+          </a:prstGeom>
+          <a:noFill/>
+          <a:ln/>
+        </p:spPr>
+        <p:txBody>
+          <a:bodyPr wrap="square" lIns="0" tIns="0" rIns="0" bIns="0" rtlCol="0" anchor="ctr"/>
+          <a:lstStyle/>
+          <a:p>
+            <a:pPr indent="0" marL="0">
+              <a:buNone/>
+            </a:pPr>
+            <a:r>
+              <a:rPr lang="en-US" sz="2200" dirty="0">
+                <a:solidFill>
+                  <a:srgbClr val="F5F5F3"/>
+                </a:solidFill>
+                <a:latin typeface="Consolas" pitchFamily="34" charset="0"/>
+                <a:ea typeface="Consolas" pitchFamily="34" charset="-122"/>
+                <a:cs typeface="Consolas" pitchFamily="34" charset="-120"/>
+              </a:rPr>
+              <a:t>distance</a:t>
+            </a:r>
+            <a:pPr indent="0" marL="0">
+              <a:buNone/>
+            </a:pPr>
+            <a:r>
+              <a:rPr lang="en-US" sz="2200" dirty="0">
+                <a:solidFill>
+                  <a:srgbClr val="F5F5F3"/>
+                </a:solidFill>
+                <a:latin typeface="Consolas" pitchFamily="34" charset="0"/>
+                <a:ea typeface="Consolas" pitchFamily="34" charset="-122"/>
+                <a:cs typeface="Consolas" pitchFamily="34" charset="-120"/>
+              </a:rPr>
+              <a:t> </a:t>
+            </a:r>
+            <a:pPr indent="0" marL="0">
+              <a:buNone/>
+            </a:pPr>
+            <a:r>
+              <a:rPr lang="en-US" sz="2200" dirty="0">
+                <a:solidFill>
+                  <a:srgbClr val="A9A9B4"/>
+                </a:solidFill>
+                <a:latin typeface="Consolas" pitchFamily="34" charset="0"/>
+                <a:ea typeface="Consolas" pitchFamily="34" charset="-122"/>
+                <a:cs typeface="Consolas" pitchFamily="34" charset="-120"/>
+              </a:rPr>
+              <a:t>=</a:t>
+            </a:r>
+            <a:pPr indent="0" marL="0">
+              <a:buNone/>
+            </a:pPr>
+            <a:r>
+              <a:rPr lang="en-US" sz="2200" dirty="0">
+                <a:solidFill>
+                  <a:srgbClr val="F5F5F3"/>
+                </a:solidFill>
+                <a:latin typeface="Consolas" pitchFamily="34" charset="0"/>
+                <a:ea typeface="Consolas" pitchFamily="34" charset="-122"/>
+                <a:cs typeface="Consolas" pitchFamily="34" charset="-120"/>
+              </a:rPr>
+              <a:t> </a:t>
+            </a:r>
+            <a:pPr indent="0" marL="0">
+              <a:buNone/>
+            </a:pPr>
+            <a:r>
+              <a:rPr lang="en-US" sz="2200" dirty="0">
+                <a:solidFill>
+                  <a:srgbClr val="E8C878"/>
+                </a:solidFill>
+                <a:latin typeface="Consolas" pitchFamily="34" charset="0"/>
+                <a:ea typeface="Consolas" pitchFamily="34" charset="-122"/>
+                <a:cs typeface="Consolas" pitchFamily="34" charset="-120"/>
+              </a:rPr>
+              <a:t>input</a:t>
+            </a:r>
+            <a:pPr indent="0" marL="0">
+              <a:buNone/>
+            </a:pPr>
+            <a:r>
+              <a:rPr lang="en-US" sz="2200" dirty="0">
+                <a:solidFill>
+                  <a:srgbClr val="A9A9B4"/>
+                </a:solidFill>
+                <a:latin typeface="Consolas" pitchFamily="34" charset="0"/>
+                <a:ea typeface="Consolas" pitchFamily="34" charset="-122"/>
+                <a:cs typeface="Consolas" pitchFamily="34" charset="-120"/>
+              </a:rPr>
+              <a:t>(</a:t>
+            </a:r>
+            <a:pPr indent="0" marL="0">
+              <a:buNone/>
+            </a:pPr>
+            <a:r>
+              <a:rPr lang="en-US" sz="2200" dirty="0">
+                <a:solidFill>
+                  <a:srgbClr val="E69F00"/>
+                </a:solidFill>
+                <a:latin typeface="Consolas" pitchFamily="34" charset="0"/>
+                <a:ea typeface="Consolas" pitchFamily="34" charset="-122"/>
+                <a:cs typeface="Consolas" pitchFamily="34" charset="-120"/>
+              </a:rPr>
+              <a:t>"Distance: "</a:t>
+            </a:r>
+            <a:pPr indent="0" marL="0">
+              <a:buNone/>
+            </a:pPr>
+            <a:r>
+              <a:rPr lang="en-US" sz="2200" dirty="0">
+                <a:solidFill>
+                  <a:srgbClr val="A9A9B4"/>
+                </a:solidFill>
+                <a:latin typeface="Consolas" pitchFamily="34" charset="0"/>
+                <a:ea typeface="Consolas" pitchFamily="34" charset="-122"/>
+                <a:cs typeface="Consolas" pitchFamily="34" charset="-120"/>
+              </a:rPr>
+              <a:t>)</a:t>
+            </a:r>
+            <a:endParaRPr lang="en-US" sz="2200" dirty="0"/>
+          </a:p>
+        </p:txBody>
+      </p:sp>
+      <p:sp>
+        <p:nvSpPr>
+          <p:cNvPr id="8" name="Shape 5"/>
+          <p:cNvSpPr/>
+          <p:nvPr/>
+        </p:nvSpPr>
+        <p:spPr>
+          <a:xfrm>
+            <a:off x="603504" y="2262378"/>
+            <a:ext cx="7388352" cy="461010"/>
+          </a:xfrm>
+          <a:prstGeom prst="rect">
+            <a:avLst/>
+          </a:prstGeom>
+          <a:solidFill>
+            <a:srgbClr val="2B2618"/>
+          </a:solidFill>
+          <a:ln/>
+        </p:spPr>
+      </p:sp>
+      <p:sp>
+        <p:nvSpPr>
+          <p:cNvPr id="9" name="Text 6"/>
+          <p:cNvSpPr txBox="1"/>
+          <p:nvPr/>
+        </p:nvSpPr>
+        <p:spPr>
+          <a:xfrm>
+            <a:off x="658368" y="2262378"/>
+            <a:ext cx="274320" cy="461010"/>
+          </a:xfrm>
+          <a:prstGeom prst="rect">
+            <a:avLst/>
+          </a:prstGeom>
+          <a:noFill/>
+          <a:ln/>
+        </p:spPr>
+        <p:txBody>
+          <a:bodyPr wrap="square" lIns="0" tIns="0" rIns="0" bIns="0" rtlCol="0" anchor="ctr"/>
+          <a:lstStyle/>
+          <a:p>
+            <a:pPr algn="r" indent="0" marL="0">
+              <a:buNone/>
+            </a:pPr>
+            <a:r>
+              <a:rPr lang="en-US" sz="1800" dirty="0">
+                <a:solidFill>
+                  <a:srgbClr val="6E6E7A"/>
+                </a:solidFill>
+                <a:latin typeface="Consolas" pitchFamily="34" charset="0"/>
+                <a:ea typeface="Consolas" pitchFamily="34" charset="-122"/>
+                <a:cs typeface="Consolas" pitchFamily="34" charset="-120"/>
+              </a:rPr>
+              <a:t>2</a:t>
+            </a:r>
+            <a:endParaRPr lang="en-US" sz="1800" dirty="0"/>
+          </a:p>
+        </p:txBody>
+      </p:sp>
+      <p:sp>
+        <p:nvSpPr>
+          <p:cNvPr id="10" name="Text 7"/>
+          <p:cNvSpPr txBox="1"/>
+          <p:nvPr/>
+        </p:nvSpPr>
+        <p:spPr>
+          <a:xfrm>
+            <a:off x="1188720" y="2262378"/>
+            <a:ext cx="6766560" cy="461010"/>
+          </a:xfrm>
+          <a:prstGeom prst="rect">
+            <a:avLst/>
+          </a:prstGeom>
+          <a:noFill/>
+          <a:ln/>
+        </p:spPr>
+        <p:txBody>
+          <a:bodyPr wrap="square" lIns="0" tIns="0" rIns="0" bIns="0" rtlCol="0" anchor="ctr"/>
+          <a:lstStyle/>
+          <a:p>
+            <a:pPr indent="0" marL="0">
+              <a:buNone/>
+            </a:pPr>
+            <a:r>
+              <a:rPr lang="en-US" sz="2200" b="1" dirty="0">
+                <a:solidFill>
+                  <a:srgbClr val="F5F5F3"/>
+                </a:solidFill>
+                <a:latin typeface="Consolas" pitchFamily="34" charset="0"/>
+                <a:ea typeface="Consolas" pitchFamily="34" charset="-122"/>
+                <a:cs typeface="Consolas" pitchFamily="34" charset="-120"/>
+              </a:rPr>
+              <a:t>if</a:t>
+            </a:r>
+            <a:pPr indent="0" marL="0">
+              <a:buNone/>
+            </a:pPr>
+            <a:r>
+              <a:rPr lang="en-US" sz="2200" dirty="0">
+                <a:solidFill>
+                  <a:srgbClr val="F5F5F3"/>
+                </a:solidFill>
+                <a:latin typeface="Consolas" pitchFamily="34" charset="0"/>
+                <a:ea typeface="Consolas" pitchFamily="34" charset="-122"/>
+                <a:cs typeface="Consolas" pitchFamily="34" charset="-120"/>
+              </a:rPr>
+              <a:t> </a:t>
+            </a:r>
+            <a:pPr indent="0" marL="0">
+              <a:buNone/>
+            </a:pPr>
+            <a:r>
+              <a:rPr lang="en-US" sz="2200" dirty="0">
+                <a:solidFill>
+                  <a:srgbClr val="F5F5F3"/>
+                </a:solidFill>
+                <a:latin typeface="Consolas" pitchFamily="34" charset="0"/>
+                <a:ea typeface="Consolas" pitchFamily="34" charset="-122"/>
+                <a:cs typeface="Consolas" pitchFamily="34" charset="-120"/>
+              </a:rPr>
+              <a:t>distance</a:t>
+            </a:r>
+            <a:pPr indent="0" marL="0">
+              <a:buNone/>
+            </a:pPr>
+            <a:r>
+              <a:rPr lang="en-US" sz="2200" dirty="0">
+                <a:solidFill>
+                  <a:srgbClr val="F5F5F3"/>
+                </a:solidFill>
+                <a:latin typeface="Consolas" pitchFamily="34" charset="0"/>
+                <a:ea typeface="Consolas" pitchFamily="34" charset="-122"/>
+                <a:cs typeface="Consolas" pitchFamily="34" charset="-120"/>
+              </a:rPr>
+              <a:t> </a:t>
+            </a:r>
+            <a:pPr indent="0" marL="0">
+              <a:buNone/>
+            </a:pPr>
+            <a:r>
+              <a:rPr lang="en-US" sz="2200" b="1" dirty="0">
+                <a:solidFill>
+                  <a:srgbClr val="F5F5F3"/>
+                </a:solidFill>
+                <a:latin typeface="Consolas" pitchFamily="34" charset="0"/>
+                <a:ea typeface="Consolas" pitchFamily="34" charset="-122"/>
+                <a:cs typeface="Consolas" pitchFamily="34" charset="-120"/>
+              </a:rPr>
+              <a:t>&gt;=</a:t>
+            </a:r>
+            <a:pPr indent="0" marL="0">
+              <a:buNone/>
+            </a:pPr>
+            <a:r>
+              <a:rPr lang="en-US" sz="2200" dirty="0">
+                <a:solidFill>
+                  <a:srgbClr val="F5F5F3"/>
+                </a:solidFill>
+                <a:latin typeface="Consolas" pitchFamily="34" charset="0"/>
+                <a:ea typeface="Consolas" pitchFamily="34" charset="-122"/>
+                <a:cs typeface="Consolas" pitchFamily="34" charset="-120"/>
+              </a:rPr>
+              <a:t> </a:t>
+            </a:r>
+            <a:pPr indent="0" marL="0">
+              <a:buNone/>
+            </a:pPr>
+            <a:r>
+              <a:rPr lang="en-US" sz="2200" dirty="0">
+                <a:solidFill>
+                  <a:srgbClr val="56B4E9"/>
+                </a:solidFill>
+                <a:latin typeface="Consolas" pitchFamily="34" charset="0"/>
+                <a:ea typeface="Consolas" pitchFamily="34" charset="-122"/>
+                <a:cs typeface="Consolas" pitchFamily="34" charset="-120"/>
+              </a:rPr>
+              <a:t>50</a:t>
+            </a:r>
+            <a:pPr indent="0" marL="0">
+              <a:buNone/>
+            </a:pPr>
+            <a:r>
+              <a:rPr lang="en-US" sz="2200" dirty="0">
+                <a:solidFill>
+                  <a:srgbClr val="A9A9B4"/>
+                </a:solidFill>
+                <a:latin typeface="Consolas" pitchFamily="34" charset="0"/>
+                <a:ea typeface="Consolas" pitchFamily="34" charset="-122"/>
+                <a:cs typeface="Consolas" pitchFamily="34" charset="-120"/>
+              </a:rPr>
+              <a:t>:</a:t>
+            </a:r>
+            <a:endParaRPr lang="en-US" sz="2200" dirty="0"/>
+          </a:p>
+        </p:txBody>
+      </p:sp>
+      <p:sp>
+        <p:nvSpPr>
+          <p:cNvPr id="11" name="terminal"/>
+          <p:cNvSpPr/>
+          <p:nvPr/>
+        </p:nvSpPr>
+        <p:spPr>
+          <a:xfrm>
+            <a:off x="548640" y="3153156"/>
+            <a:ext cx="11091672" cy="1143000"/>
+          </a:xfrm>
+          <a:prstGeom prst="roundRect">
+            <a:avLst>
+              <a:gd name="adj" fmla="val 6400"/>
+            </a:avLst>
+          </a:prstGeom>
+          <a:solidFill>
+            <a:srgbClr val="0A0A0D"/>
+          </a:solidFill>
+          <a:ln w="15875">
+            <a:solidFill>
+              <a:srgbClr val="3A3A44"/>
+            </a:solidFill>
+            <a:prstDash val="solid"/>
+          </a:ln>
+        </p:spPr>
+      </p:sp>
+      <p:sp>
+        <p:nvSpPr>
+          <p:cNvPr id="12" name="Text 9"/>
+          <p:cNvSpPr txBox="1"/>
+          <p:nvPr/>
+        </p:nvSpPr>
+        <p:spPr>
+          <a:xfrm>
+            <a:off x="777240" y="3336036"/>
+            <a:ext cx="10634472" cy="274320"/>
+          </a:xfrm>
+          <a:prstGeom prst="rect">
+            <a:avLst/>
+          </a:prstGeom>
+          <a:noFill/>
+          <a:ln/>
+        </p:spPr>
+        <p:txBody>
+          <a:bodyPr wrap="square" lIns="0" tIns="0" rIns="0" bIns="0" rtlCol="0" anchor="ctr"/>
+          <a:lstStyle/>
+          <a:p>
+            <a:pPr indent="0" marL="0">
+              <a:buNone/>
+            </a:pPr>
+            <a:r>
+              <a:rPr lang="en-US" sz="1200" b="1" spc="200" kern="0" dirty="0">
+                <a:solidFill>
+                  <a:srgbClr val="A9A9B4"/>
+                </a:solidFill>
+                <a:latin typeface="Calibri" pitchFamily="34" charset="0"/>
+                <a:ea typeface="Calibri" pitchFamily="34" charset="-122"/>
+                <a:cs typeface="Calibri" pitchFamily="34" charset="-120"/>
+              </a:rPr>
+              <a:t>ERROR — LAST LINE</a:t>
+            </a:r>
+            <a:endParaRPr lang="en-US" sz="1200" dirty="0"/>
+          </a:p>
+        </p:txBody>
+      </p:sp>
+      <p:sp>
+        <p:nvSpPr>
+          <p:cNvPr id="13" name="Text 10"/>
+          <p:cNvSpPr txBox="1"/>
+          <p:nvPr/>
+        </p:nvSpPr>
+        <p:spPr>
+          <a:xfrm>
+            <a:off x="777240" y="3701796"/>
+            <a:ext cx="10634472" cy="365760"/>
+          </a:xfrm>
+          <a:prstGeom prst="rect">
+            <a:avLst/>
+          </a:prstGeom>
+          <a:noFill/>
+          <a:ln/>
+        </p:spPr>
+        <p:txBody>
+          <a:bodyPr wrap="square" lIns="0" tIns="0" rIns="0" bIns="0" rtlCol="0" anchor="ctr"/>
+          <a:lstStyle/>
+          <a:p>
+            <a:pPr indent="0" marL="0">
+              <a:buNone/>
+            </a:pPr>
+            <a:r>
+              <a:rPr lang="en-US" sz="1800" b="1" dirty="0">
+                <a:solidFill>
+                  <a:srgbClr val="FF6B6B"/>
+                </a:solidFill>
+                <a:latin typeface="Consolas" pitchFamily="34" charset="0"/>
+                <a:ea typeface="Consolas" pitchFamily="34" charset="-122"/>
+                <a:cs typeface="Consolas" pitchFamily="34" charset="-120"/>
+              </a:rPr>
+              <a:t>TypeError: </a:t>
+            </a:r>
+            <a:pPr indent="0" marL="0">
+              <a:buNone/>
+            </a:pPr>
+            <a:r>
+              <a:rPr lang="en-US" sz="1800" dirty="0">
+                <a:solidFill>
+                  <a:srgbClr val="FF6B6B"/>
+                </a:solidFill>
+                <a:latin typeface="Consolas" pitchFamily="34" charset="0"/>
+                <a:ea typeface="Consolas" pitchFamily="34" charset="-122"/>
+                <a:cs typeface="Consolas" pitchFamily="34" charset="-120"/>
+              </a:rPr>
+              <a:t>'&gt;=' not supported between instances of 'str' and 'int'</a:t>
+            </a:r>
+            <a:endParaRPr lang="en-US" sz="1800" dirty="0"/>
+          </a:p>
+        </p:txBody>
+      </p:sp>
+      <p:sp>
+        <p:nvSpPr>
+          <p:cNvPr id="14" name="Text 11"/>
+          <p:cNvSpPr txBox="1"/>
+          <p:nvPr/>
+        </p:nvSpPr>
+        <p:spPr>
+          <a:xfrm>
+            <a:off x="8412480" y="1554480"/>
+            <a:ext cx="2743200" cy="274320"/>
+          </a:xfrm>
+          <a:prstGeom prst="rect">
+            <a:avLst/>
+          </a:prstGeom>
+          <a:noFill/>
+          <a:ln/>
+        </p:spPr>
+        <p:txBody>
+          <a:bodyPr wrap="square" lIns="0" tIns="0" rIns="0" bIns="0" rtlCol="0" anchor="ctr"/>
+          <a:lstStyle/>
+          <a:p>
+            <a:pPr indent="0" marL="0">
+              <a:buNone/>
+            </a:pPr>
+            <a:r>
+              <a:rPr lang="en-US" sz="1300" b="1" spc="200" kern="0" dirty="0">
+                <a:solidFill>
+                  <a:srgbClr val="6E6E7A"/>
+                </a:solidFill>
+                <a:latin typeface="Calibri" pitchFamily="34" charset="0"/>
+                <a:ea typeface="Calibri" pitchFamily="34" charset="-122"/>
+                <a:cs typeface="Calibri" pitchFamily="34" charset="-120"/>
+              </a:rPr>
+              <a:t>IN MEMORY</a:t>
+            </a:r>
+            <a:endParaRPr lang="en-US" sz="1300" dirty="0"/>
+          </a:p>
+        </p:txBody>
+      </p:sp>
+      <p:sp>
+        <p:nvSpPr>
+          <p:cNvPr id="15" name="Shape 12"/>
+          <p:cNvSpPr/>
+          <p:nvPr/>
+        </p:nvSpPr>
+        <p:spPr>
+          <a:xfrm>
+            <a:off x="8412480" y="2103120"/>
+            <a:ext cx="2743200" cy="868680"/>
+          </a:xfrm>
+          <a:prstGeom prst="roundRect">
+            <a:avLst>
+              <a:gd name="adj" fmla="val 6316"/>
+            </a:avLst>
+          </a:prstGeom>
+          <a:solidFill>
+            <a:srgbClr val="111115"/>
+          </a:solidFill>
+          <a:ln w="25400">
+            <a:solidFill>
+              <a:srgbClr val="E69F00"/>
+            </a:solidFill>
+            <a:prstDash val="solid"/>
+          </a:ln>
+        </p:spPr>
+      </p:sp>
+      <p:sp>
+        <p:nvSpPr>
+          <p:cNvPr id="16" name="Shape 13"/>
+          <p:cNvSpPr/>
+          <p:nvPr/>
+        </p:nvSpPr>
+        <p:spPr>
+          <a:xfrm>
+            <a:off x="8549640" y="1920240"/>
+            <a:ext cx="1883664" cy="347472"/>
+          </a:xfrm>
+          <a:prstGeom prst="roundRect">
+            <a:avLst>
+              <a:gd name="adj" fmla="val 13158"/>
+            </a:avLst>
+          </a:prstGeom>
+          <a:solidFill>
+            <a:srgbClr val="E69F00"/>
+          </a:solidFill>
+          <a:ln/>
+        </p:spPr>
+      </p:sp>
+      <p:sp>
+        <p:nvSpPr>
+          <p:cNvPr id="17" name="Text 14"/>
+          <p:cNvSpPr txBox="1"/>
+          <p:nvPr/>
+        </p:nvSpPr>
+        <p:spPr>
+          <a:xfrm>
+            <a:off x="8549640" y="1920240"/>
+            <a:ext cx="1883664" cy="347472"/>
+          </a:xfrm>
+          <a:prstGeom prst="rect">
+            <a:avLst/>
+          </a:prstGeom>
+          <a:noFill/>
+          <a:ln/>
+        </p:spPr>
+        <p:txBody>
+          <a:bodyPr wrap="square" lIns="0" tIns="0" rIns="0" bIns="0" rtlCol="0" anchor="ctr"/>
+          <a:lstStyle/>
+          <a:p>
+            <a:pPr algn="ctr" indent="0" marL="0">
+              <a:buNone/>
+            </a:pPr>
+            <a:r>
+              <a:rPr lang="en-US" sz="1400" b="1" dirty="0">
+                <a:solidFill>
+                  <a:srgbClr val="111115"/>
+                </a:solidFill>
+                <a:latin typeface="Consolas" pitchFamily="34" charset="0"/>
+                <a:ea typeface="Consolas" pitchFamily="34" charset="-122"/>
+                <a:cs typeface="Consolas" pitchFamily="34" charset="-120"/>
+              </a:rPr>
+              <a:t>distance  ·  str</a:t>
+            </a:r>
+            <a:endParaRPr lang="en-US" sz="1400" dirty="0"/>
+          </a:p>
+        </p:txBody>
+      </p:sp>
+      <p:sp>
+        <p:nvSpPr>
+          <p:cNvPr id="18" name="Text 15"/>
+          <p:cNvSpPr txBox="1"/>
+          <p:nvPr/>
+        </p:nvSpPr>
+        <p:spPr>
+          <a:xfrm>
+            <a:off x="8503920" y="2286000"/>
+            <a:ext cx="2560320" cy="640080"/>
+          </a:xfrm>
+          <a:prstGeom prst="rect">
+            <a:avLst/>
+          </a:prstGeom>
+          <a:noFill/>
+          <a:ln/>
+        </p:spPr>
+        <p:txBody>
+          <a:bodyPr wrap="square" lIns="0" tIns="0" rIns="0" bIns="0" rtlCol="0" anchor="ctr"/>
+          <a:lstStyle/>
+          <a:p>
+            <a:pPr algn="ctr" indent="0" marL="0">
+              <a:buNone/>
+            </a:pPr>
+            <a:r>
+              <a:rPr lang="en-US" sz="2600" dirty="0">
+                <a:solidFill>
+                  <a:srgbClr val="F5F5F3"/>
+                </a:solidFill>
+                <a:latin typeface="Consolas" pitchFamily="34" charset="0"/>
+                <a:ea typeface="Consolas" pitchFamily="34" charset="-122"/>
+                <a:cs typeface="Consolas" pitchFamily="34" charset="-120"/>
+              </a:rPr>
+              <a:t>"30"</a:t>
+            </a:r>
+            <a:endParaRPr lang="en-US" sz="2600" dirty="0"/>
+          </a:p>
+        </p:txBody>
+      </p:sp>
+      <p:sp>
+        <p:nvSpPr>
+          <p:cNvPr id="19" name="Shape 16"/>
+          <p:cNvSpPr/>
+          <p:nvPr/>
+        </p:nvSpPr>
+        <p:spPr>
+          <a:xfrm>
+            <a:off x="548640" y="4572000"/>
+            <a:ext cx="11091672" cy="1188720"/>
+          </a:xfrm>
+          <a:prstGeom prst="roundRect">
+            <a:avLst>
+              <a:gd name="adj" fmla="val 6154"/>
+            </a:avLst>
+          </a:prstGeom>
+          <a:solidFill>
+            <a:srgbClr val="1E1E24"/>
+          </a:solidFill>
+          <a:ln w="25400">
+            <a:solidFill>
+              <a:srgbClr val="D8A73D"/>
+            </a:solidFill>
+            <a:prstDash val="solid"/>
+          </a:ln>
+        </p:spPr>
+      </p:sp>
+      <p:sp>
+        <p:nvSpPr>
+          <p:cNvPr id="20" name="Text 17"/>
+          <p:cNvSpPr txBox="1"/>
+          <p:nvPr/>
+        </p:nvSpPr>
+        <p:spPr>
+          <a:xfrm>
+            <a:off x="914400" y="4572000"/>
+            <a:ext cx="10332720" cy="1188720"/>
+          </a:xfrm>
+          <a:prstGeom prst="rect">
+            <a:avLst/>
+          </a:prstGeom>
+          <a:noFill/>
+          <a:ln/>
+        </p:spPr>
+        <p:txBody>
+          <a:bodyPr wrap="square" lIns="0" tIns="0" rIns="0" bIns="0" rtlCol="0" anchor="ctr"/>
+          <a:lstStyle/>
+          <a:p>
+            <a:pPr indent="0" marL="0">
+              <a:buNone/>
+            </a:pPr>
+            <a:r>
+              <a:rPr lang="en-US" sz="2400" b="1" dirty="0">
+                <a:solidFill>
+                  <a:srgbClr val="D8A73D"/>
+                </a:solidFill>
+                <a:latin typeface="Calibri" pitchFamily="34" charset="0"/>
+                <a:ea typeface="Calibri" pitchFamily="34" charset="-122"/>
+                <a:cs typeface="Calibri" pitchFamily="34" charset="-120"/>
+              </a:rPr>
+              <a:t>Python points at line 2, but the fix is on line 1:</a:t>
+            </a:r>
+            <a:pPr indent="0" marL="0">
+              <a:buNone/>
+            </a:pPr>
+            <a:endParaRPr lang="en-US" sz="2400" dirty="0"/>
+          </a:p>
+          <a:p>
+            <a:pPr indent="0" marL="0">
+              <a:buNone/>
+            </a:pPr>
+            <a:r>
+              <a:rPr lang="en-US" sz="2400" dirty="0">
+                <a:solidFill>
+                  <a:srgbClr val="F5F5F3"/>
+                </a:solidFill>
+                <a:latin typeface="Consolas" pitchFamily="34" charset="0"/>
+                <a:ea typeface="Consolas" pitchFamily="34" charset="-122"/>
+                <a:cs typeface="Consolas" pitchFamily="34" charset="-120"/>
+              </a:rPr>
+              <a:t>distance = int(input("Distance: "))</a:t>
+            </a:r>
+            <a:endParaRPr lang="en-US" sz="2400" dirty="0"/>
+          </a:p>
+        </p:txBody>
+      </p:sp>
+      <p:pic>
+        <p:nvPicPr>
+          <p:cNvPr id="21" name="Image 1" descr="Feedback">    </p:cNvPr>
+          <p:cNvPicPr>
+            <a:picLocks noChangeAspect="1"/>
+          </p:cNvPicPr>
+          <p:nvPr/>
+        </p:nvPicPr>
+        <p:blipFill>
+          <a:blip r:embed="rId2"/>
+          <a:stretch>
+            <a:fillRect/>
+          </a:stretch>
+        </p:blipFill>
+        <p:spPr>
+          <a:xfrm>
+            <a:off x="10972800" y="384048"/>
+            <a:ext cx="731520" cy="731520"/>
+          </a:xfrm>
+          <a:prstGeom prst="rect">
+            <a:avLst/>
+          </a:prstGeom>
+        </p:spPr>
+      </p:pic>
+      <p:sp>
+        <p:nvSpPr>
+          <p:cNvPr id="25" name="Slide Number Placeholder 0"/>
+          <p:cNvSpPr>
+            <a:spLocks noGrp="1"/>
+          </p:cNvSpPr>
+          <p:nvPr>
+            <p:ph type="sldNum" sz="quarter" idx="4294967295"/>
+          </p:nvPr>
+        </p:nvSpPr>
+        <p:spPr>
+          <a:xfrm>
+            <a:off x="11155680" y="6382512"/>
+            <a:ext cx="502920" cy="274320"/>
+          </a:xfrm>
+          <a:prstGeom prst="rect">
+            <a:avLst/>
+          </a:prstGeom>
+          <a:extLst>
+            <a:ext uri="{C572A759-6A51-4108-AA02-DFA0A04FC94B}">
+              <ma14:wrappingTextBoxFlag xmlns:ma14="http://schemas.microsoft.com/office/mac/drawingml/2011/main" val="0"/>
+            </a:ext>
+          </a:extLst>
+        </p:spPr>
+        <p:txBody>
+          <a:bodyPr/>
+          <a:lstStyle>
+            <a:lvl1pPr>
+              <a:defRPr sz="1200">
+                <a:solidFill>
+                  <a:srgbClr val="6E6E7A"/>
+                </a:solidFill>
+                <a:latin typeface="Calibri"/>
+                <a:ea typeface="Calibri"/>
+                <a:cs typeface="Calibri"/>
+              </a:defRPr>
+            </a:lvl1pPr>
+          </a:lstStyle>
+          <a:p>
+            <a:pPr algn="r"/>
+            <a:fld id="{F7021451-1387-4CA6-816F-3879F97B5CBC}" type="slidenum">
+              <a:rPr b="0" lang="en-US"/>
+              <a:t>24</a:t>
+            </a:fld>
+            <a:endParaRPr lang="en-US"/>
+          </a:p>
+        </p:txBody>
+      </p:sp>
+    </p:spTree>
+  </p:cSld>
+  <p:clrMapOvr>
+    <a:masterClrMapping/>
+  </p:clrMapOvr>
+</p:sld>
+</file>
+
+<file path=ppt/slides/slide25.xml><?xml version="1.0" encoding="utf-8"?>
+<p:sld xmlns:a="http://schemas.openxmlformats.org/drawingml/2006/main" xmlns:r="http://schemas.openxmlformats.org/officeDocument/2006/relationships" xmlns:p="http://schemas.openxmlformats.org/presentationml/2006/main">
+  <p:cSld name="Slide 25">
+    <p:spTree>
+      <p:nvGrpSpPr>
+        <p:cNvPr id="1" name=""/>
+        <p:cNvGrpSpPr/>
+        <p:nvPr/>
+      </p:nvGrpSpPr>
+      <p:grpSpPr>
+        <a:xfrm>
+          <a:off x="0" y="0"/>
+          <a:ext cx="0" cy="0"/>
+          <a:chOff x="0" y="0"/>
+          <a:chExt cx="0" cy="0"/>
+        </a:xfrm>
+      </p:grpSpPr>
+      <p:pic>
+        <p:nvPicPr>
           <p:cNvPr id="2" name="auto · station edge_red" descr="C:\Users\n.houlton_grange.out\source\repos\interactive\_presentations\Y9_Python\station\edge_red.png">    </p:cNvPr>
           <p:cNvPicPr>
             <a:picLocks noChangeAspect="1"/>
@@ -39689,7 +42385,7 @@
             <a:pPr algn="r"/>
             <a:fld id="{F7021451-1387-4CA6-816F-3879F97B5CBC}" type="slidenum">
               <a:rPr b="0" lang="en-US"/>
-              <a:t>24</a:t>
+              <a:t>25</a:t>
             </a:fld>
             <a:endParaRPr lang="en-US"/>
           </a:p>
